--- a/lecons/LSA/Climatology/02_LSA_CLIM_FS01_Tropical_Weather_Disturbances.pptx
+++ b/lecons/LSA/Climatology/02_LSA_CLIM_FS01_Tropical_Weather_Disturbances.pptx
@@ -63,9 +63,13 @@
     <p:sldId id="311" r:id="rId57"/>
     <p:sldId id="312" r:id="rId58"/>
     <p:sldId id="313" r:id="rId59"/>
+    <p:sldId id="314" r:id="rId60"/>
+    <p:sldId id="315" r:id="rId61"/>
+    <p:sldId id="316" r:id="rId62"/>
+    <p:sldId id="317" r:id="rId63"/>
   </p:sldIdLst>
   <p:notesMasterIdLst>
-    <p:notesMasterId r:id="rId60"/>
+    <p:notesMasterId r:id="rId64"/>
   </p:notesMasterIdLst>
   <p:sldSz cx="12192000" cy="6858000"/>
   <p:notesSz cx="6858000" cy="12192000"/>
@@ -647,7 +651,7 @@
           <a:p>
             <a:r>
               <a:rPr lang="en-US" dirty="0"/>
-              <a:t>Listen carefully to this situation from real life. At the start of the rainy season in Ngaoundéré, a violent storm with strong winds tears off roofs and lightning kills cattle. Learners want to know how such storms form and how to stay safe. Think about it, because I am going to ask you some questions.</a:t>
+              <a:t>Take your time to copy this part; we will continue together.</a:t>
             </a:r>
             <a:endParaRPr lang="en-US" dirty="0"/>
           </a:p>
@@ -735,7 +739,7 @@
           <a:p>
             <a:r>
               <a:rPr lang="en-US" dirty="0"/>
-              <a:t>Question 1: What is the problem in the situation? Think for a moment, then raise your hand to answer.</a:t>
+              <a:t>Listen carefully to this situation from real life. One July afternoon in Garoua, the sky suddenly turns dark grey. A strong wind bends the trees and raises dust, then an extremely heavy rain falls so loudly on the metal roof that you hear nothing else. A flash of lightning is followed by a deafening crash of thunder. After about an hour, the storm passes, leaving flooded streets and broken branches. You ask: "What causes such storms, and are there even more dangerous storms elsewhere in the world?" Think about it, because I am going to ask you some questions.</a:t>
             </a:r>
             <a:endParaRPr lang="en-US" dirty="0"/>
           </a:p>
@@ -823,7 +827,7 @@
           <a:p>
             <a:r>
               <a:rPr lang="en-US" dirty="0"/>
-              <a:t>Good. Violent storms destroy property and kill people and animals.</a:t>
+              <a:t>Question 1: What is the problem in the situation? Think for a moment, then raise your hand to answer.</a:t>
             </a:r>
             <a:endParaRPr lang="en-US" dirty="0"/>
           </a:p>
@@ -911,7 +915,7 @@
           <a:p>
             <a:r>
               <a:rPr lang="en-US" dirty="0"/>
-              <a:t>Question 2: What type of cloud gives such storms? Think for a moment, then raise your hand to answer.</a:t>
+              <a:t>Good. The learner does not know the types, causes and dangers of tropical weather disturbances.</a:t>
             </a:r>
             <a:endParaRPr lang="en-US" dirty="0"/>
           </a:p>
@@ -999,7 +1003,7 @@
           <a:p>
             <a:r>
               <a:rPr lang="en-US" dirty="0"/>
-              <a:t>Good. Cumulonimbus.</a:t>
+              <a:t>Question 2: What kind of storm hit Garoua? Think for a moment, then raise your hand to answer.</a:t>
             </a:r>
             <a:endParaRPr lang="en-US" dirty="0"/>
           </a:p>
@@ -1087,7 +1091,7 @@
           <a:p>
             <a:r>
               <a:rPr lang="en-US" dirty="0"/>
-              <a:t>Question 3: Name two stronger tropical storms. Think for a moment, then raise your hand to answer.</a:t>
+              <a:t>Good. A thunderstorm.</a:t>
             </a:r>
             <a:endParaRPr lang="en-US" dirty="0"/>
           </a:p>
@@ -1175,7 +1179,7 @@
           <a:p>
             <a:r>
               <a:rPr lang="en-US" dirty="0"/>
-              <a:t>Good. Tornadoes and tropical cyclones (hurricanes).</a:t>
+              <a:t>Question 3: Name a larger storm that forms over warm oceans. Think for a moment, then raise your hand to answer.</a:t>
             </a:r>
             <a:endParaRPr lang="en-US" dirty="0"/>
           </a:p>
@@ -1263,7 +1267,7 @@
           <a:p>
             <a:r>
               <a:rPr lang="en-US" dirty="0"/>
-              <a:t>From this situation, the action we are working towards in this lesson is the following: protect lives and property from storms through warnings and safe behaviour.</a:t>
+              <a:t>Good. A tropical cyclone (hurricane).</a:t>
             </a:r>
             <a:endParaRPr lang="en-US" dirty="0"/>
           </a:p>
@@ -1351,7 +1355,7 @@
           <a:p>
             <a:r>
               <a:rPr lang="en-US" dirty="0"/>
-              <a:t>Why is this lesson important for you? This lesson helps us to understand violent storms and how to protect lives and property.</a:t>
+              <a:t>From this situation, the action we are working towards in this lesson is the following: during a thunderstorm, shelter inside a building and keep away from trees, water and metal objects.</a:t>
             </a:r>
             <a:endParaRPr lang="en-US" dirty="0"/>
           </a:p>
@@ -1439,7 +1443,7 @@
           <a:p>
             <a:r>
               <a:rPr lang="en-US" dirty="0"/>
-              <a:t>Activity 1. Look carefully at this diagram: the three stages of a thunderstorm. Observe every detail before I ask the question.</a:t>
+              <a:t>Why is this lesson important for you? This lesson helps us to understand and prepare for dangerous storms, from the thunderstorms of Garoua to the cyclones of other tropical coasts.</a:t>
             </a:r>
             <a:endParaRPr lang="en-US" dirty="0"/>
           </a:p>
@@ -1615,7 +1619,7 @@
           <a:p>
             <a:r>
               <a:rPr lang="en-US" dirty="0"/>
-              <a:t>Here is the question for Activity 1: Name the three stages of a thunderstorm. Take one minute to think and write your answer in your rough notebook.</a:t>
+              <a:t>Activity 1. Look carefully at this diagram: the life of a thunderstorm. Observe every detail before I ask the question.</a:t>
             </a:r>
             <a:endParaRPr lang="en-US" dirty="0"/>
           </a:p>
@@ -1703,7 +1707,7 @@
           <a:p>
             <a:r>
               <a:rPr lang="en-US" dirty="0"/>
-              <a:t>Let us check the answer together. Cumulus (growing), mature (rain, lightning, hail), dissipating (dying).</a:t>
+              <a:t>Here is the question for Activity 1: What are the three stages of a thunderstorm? Take one minute to think and write your answer in your rough notebook.</a:t>
             </a:r>
             <a:endParaRPr lang="en-US" dirty="0"/>
           </a:p>
@@ -1791,7 +1795,7 @@
           <a:p>
             <a:r>
               <a:rPr lang="en-US" dirty="0"/>
-              <a:t>Activity 2. Look carefully at this picture: a cumulonimbus storm cloud. Observe every detail before I ask the question.</a:t>
+              <a:t>Let us check the answer together. Cumulus (growing), mature and dissipating.</a:t>
             </a:r>
             <a:endParaRPr lang="en-US" dirty="0"/>
           </a:p>
@@ -1879,7 +1883,7 @@
           <a:p>
             <a:r>
               <a:rPr lang="en-US" dirty="0"/>
-              <a:t>Here is the question for Activity 2: Give two dangers of thunderstorms. Take one minute to think and write your answer in your rough notebook.</a:t>
+              <a:t>Activity 2. Look carefully at this picture: a cumulonimbus cloud. Observe every detail before I ask the question.</a:t>
             </a:r>
             <a:endParaRPr lang="en-US" dirty="0"/>
           </a:p>
@@ -1967,7 +1971,7 @@
           <a:p>
             <a:r>
               <a:rPr lang="en-US" dirty="0"/>
-              <a:t>Let us check the answer together. Lightning, strong winds, hail and floods.</a:t>
+              <a:t>Here is the question for Activity 2: Give two dangers of a thunderstorm. Take one minute to think and write your answer in your rough notebook.</a:t>
             </a:r>
             <a:endParaRPr lang="en-US" dirty="0"/>
           </a:p>
@@ -2055,7 +2059,7 @@
           <a:p>
             <a:r>
               <a:rPr lang="en-US" dirty="0"/>
-              <a:t>Activity 3. Look carefully at this picture: a hurricane seen from space. Observe every detail before I ask the question.</a:t>
+              <a:t>Let us check the answer together. Lightning, flash floods, strong winds and hail (any two).</a:t>
             </a:r>
             <a:endParaRPr lang="en-US" dirty="0"/>
           </a:p>
@@ -2143,7 +2147,7 @@
           <a:p>
             <a:r>
               <a:rPr lang="en-US" dirty="0"/>
-              <a:t>Here is the question for Activity 3: Over what surface do tropical cyclones form? Take one minute to think and write your answer in your rough notebook.</a:t>
+              <a:t>Activity 3. Look carefully at this picture: three storms compared. Observe every detail before I ask the question.</a:t>
             </a:r>
             <a:endParaRPr lang="en-US" dirty="0"/>
           </a:p>
@@ -2231,7 +2235,7 @@
           <a:p>
             <a:r>
               <a:rPr lang="en-US" dirty="0"/>
-              <a:t>Let us check the answer together. Over warm seas above 27 °C, between 5° and 20° of latitude.</a:t>
+              <a:t>Here is the question for Activity 3: Where are tornadoes most frequent? Take one minute to think and write your answer in your rough notebook.</a:t>
             </a:r>
             <a:endParaRPr lang="en-US" dirty="0"/>
           </a:p>
@@ -2319,7 +2323,7 @@
           <a:p>
             <a:r>
               <a:rPr lang="en-US" dirty="0"/>
-              <a:t>Activity 4. Look carefully at this diagram: the structure of a tropical cyclone. Observe every detail before I ask the question.</a:t>
+              <a:t>Let us check the answer together. In the central USA ("Tornado Alley").</a:t>
             </a:r>
             <a:endParaRPr lang="en-US" dirty="0"/>
           </a:p>
@@ -2407,7 +2411,7 @@
           <a:p>
             <a:r>
               <a:rPr lang="en-US" dirty="0"/>
-              <a:t>Here is the question for Activity 4: Where are the winds strongest? Where is it calm? Take one minute to think and write your answer in your rough notebook.</a:t>
+              <a:t>Activity 4. Look carefully at this diagram: a tropical cyclone. Observe every detail before I ask the question.</a:t>
             </a:r>
             <a:endParaRPr lang="en-US" dirty="0"/>
           </a:p>
@@ -2495,7 +2499,7 @@
           <a:p>
             <a:r>
               <a:rPr lang="en-US" dirty="0"/>
-              <a:t>Our topic is Climates, and the sub-topic is Air Mass Interactions at Fronts and Convergence Zones. The key notions we shall use today are: thunderstorm, tornado, tropical cyclone, eye, storm surge, early warning. At the end, you should be able to do this: learners are able to explain tropical weather disturbances and suggest measures to reduce their dangers.</a:t>
+              <a:t>Our topic is Climates, and the sub-topic is Air Mass Interactions at Fronts and Convergence Zones. The key notions we shall use today are: weather disturbance, thunderstorm, lightning, supercell, tornado, wind shear, tropical cyclone, hurricane, typhoon, storm surge, early warning. At the end, you should be able to do this: learners are able to explain the formation and dangers of tropical weather disturbances and the measures to reduce their effects.</a:t>
             </a:r>
             <a:endParaRPr lang="en-US" dirty="0"/>
           </a:p>
@@ -2583,7 +2587,7 @@
           <a:p>
             <a:r>
               <a:rPr lang="en-US" dirty="0"/>
-              <a:t>Let us check the answer together. Strongest in the eye wall; calm in the eye.</a:t>
+              <a:t>Here is the question for Activity 4: What are tropical cyclones called in the Atlantic? Take one minute to think and write your answer in your rough notebook.</a:t>
             </a:r>
             <a:endParaRPr lang="en-US" dirty="0"/>
           </a:p>
@@ -2671,7 +2675,7 @@
           <a:p>
             <a:r>
               <a:rPr lang="en-US" dirty="0"/>
-              <a:t>Activity 5. Look carefully at this picture: a damaged home in Bangladesh, a country often hit by cyclones. Observe every detail before I ask the question.</a:t>
+              <a:t>Let us check the answer together. Hurricanes.</a:t>
             </a:r>
             <a:endParaRPr lang="en-US" dirty="0"/>
           </a:p>
@@ -2759,7 +2763,7 @@
           <a:p>
             <a:r>
               <a:rPr lang="en-US" dirty="0"/>
-              <a:t>Here is the question for Activity 5: How can people reduce the damage of cyclones? Take one minute to think and write your answer in your rough notebook.</a:t>
+              <a:t>Activity 5. Look carefully at this picture: reducing storm hazards. Observe every detail before I ask the question.</a:t>
             </a:r>
             <a:endParaRPr lang="en-US" dirty="0"/>
           </a:p>
@@ -2847,7 +2851,7 @@
           <a:p>
             <a:r>
               <a:rPr lang="en-US" dirty="0"/>
-              <a:t>Let us check the answer together. Early warning, evacuation, cyclone shelters and strong buildings.</a:t>
+              <a:t>Here is the question for Activity 5: How can a building be protected from lightning? Take one minute to think and write your answer in your rough notebook.</a:t>
             </a:r>
             <a:endParaRPr lang="en-US" dirty="0"/>
           </a:p>
@@ -2935,7 +2939,7 @@
           <a:p>
             <a:r>
               <a:rPr lang="en-US" dirty="0"/>
-              <a:t>Now we are going to copy the board summary. Write the title and the headings neatly in your notebooks. I will give you enough time for each slide, so do not rush.</a:t>
+              <a:t>Let us check the answer together. With a lightning rod (conductor).</a:t>
             </a:r>
             <a:endParaRPr lang="en-US" dirty="0"/>
           </a:p>
@@ -3023,7 +3027,7 @@
           <a:p>
             <a:r>
               <a:rPr lang="en-US" dirty="0"/>
-              <a:t>Let us copy the definitions. The key terms of this lesson are defined as follows. On this slide we have Thunderstorm. Write each point on a new line, with the key term first, and explain it in your own words when we revise. When you finish, we go to the next slide.</a:t>
+              <a:t>Now we are going to copy the board summary. Write the title and the headings neatly in your notebooks. I will give you enough time for each slide, so do not rush.</a:t>
             </a:r>
             <a:endParaRPr lang="en-US" dirty="0"/>
           </a:p>
@@ -3111,7 +3115,7 @@
           <a:p>
             <a:r>
               <a:rPr lang="en-US" dirty="0"/>
-              <a:t>We continue with the definitions. On this slide we have Tropical cyclone. Write each point on a new line, with the key term first, and explain it in your own words when we revise.</a:t>
+              <a:t>Let us copy the definitions. The key terms of this lesson are defined as follows. On this slide we have Thunderstorm. Write each point on a new line, with the key term first, and explain it in your own words when we revise. When you finish, we go to the next slide.</a:t>
             </a:r>
             <a:endParaRPr lang="en-US" dirty="0"/>
           </a:p>
@@ -3199,7 +3203,7 @@
           <a:p>
             <a:r>
               <a:rPr lang="en-US" dirty="0"/>
-              <a:t>Let us copy Thunderstorms. Thunderstorms can be studied under the following points. On this slide we have Formation. Write each point on a new line, with the key term first, and explain it in your own words when we revise. When you finish, we go to the next slide.</a:t>
+              <a:t>We continue with the definitions. On this slide we have Tornado and Tropical cyclone. Write each point on a new line, with the key term first, and explain it in your own words when we revise. When you finish, we go to the next slide.</a:t>
             </a:r>
             <a:endParaRPr lang="en-US" dirty="0"/>
           </a:p>
@@ -3287,7 +3291,7 @@
           <a:p>
             <a:r>
               <a:rPr lang="en-US" dirty="0"/>
-              <a:t>We continue with Thunderstorms. On this slide we have Stages. Write each point on a new line, with the key term first, and explain it in your own words when we revise. When you finish, we go to the next slide.</a:t>
+              <a:t>We continue with the definitions. On this slide we have Storm surge. Write each point on a new line, with the key term first, and explain it in your own words when we revise.</a:t>
             </a:r>
             <a:endParaRPr lang="en-US" dirty="0"/>
           </a:p>
@@ -3375,7 +3379,7 @@
           <a:p>
             <a:r>
               <a:rPr lang="en-US" dirty="0"/>
-              <a:t>We continue with Thunderstorms. On this slide we have Effects. Write each point on a new line, with the key term first, and explain it in your own words when we revise.</a:t>
+              <a:t>Let us copy Thunderstorms. Thunderstorms are presented as follows. Copy the point on Distribution on the left, then draw the diagram on the right: a cumulonimbus. Give it a title and label it clearly.</a:t>
             </a:r>
             <a:endParaRPr lang="en-US" dirty="0"/>
           </a:p>
@@ -3463,7 +3467,7 @@
           <a:p>
             <a:r>
               <a:rPr lang="en-US" dirty="0"/>
-              <a:t>Before we start the new lesson, let us correct the homework I gave you at the end of Lesson 19: Meaning of Climate and Köppen's Classification. The question was: Find the Köppen code of Douala, Maroua and Paris. Take out your exercise books.</a:t>
+              <a:t>Before we start the new lesson, let us correct the homework I gave you at the end of Lesson 19: Meaning of Climate and Köppen's Classification. The question was: Name the cloud that produces thunderstorms. Take out your exercise books.</a:t>
             </a:r>
             <a:endParaRPr lang="en-US" dirty="0"/>
           </a:p>
@@ -3551,7 +3555,7 @@
           <a:p>
             <a:r>
               <a:rPr lang="en-US" dirty="0"/>
-              <a:t>Now draw this illustration in your notebook: stages of a thunderstorm. Give it a title and label it clearly.</a:t>
+              <a:t>Copy the point on Causes on the left, then draw the diagram on the right: the life of a thunderstorm. Give it a title and label it clearly.</a:t>
             </a:r>
             <a:endParaRPr lang="en-US" dirty="0"/>
           </a:p>
@@ -3639,7 +3643,7 @@
           <a:p>
             <a:r>
               <a:rPr lang="en-US" dirty="0"/>
-              <a:t>Let us copy Tropical Cyclones. Tropical cyclones can be studied as follows. On this slide we have Conditions of formation. Write each point on a new line, with the key term first, and explain it in your own words when we revise. When you finish, we go to the next slide.</a:t>
+              <a:t>We continue with Thunderstorms. On this slide we have Consequences. Write each point on a new line, with the key term first, and explain it in your own words when we revise.</a:t>
             </a:r>
             <a:endParaRPr lang="en-US" dirty="0"/>
           </a:p>
@@ -3727,7 +3731,7 @@
           <a:p>
             <a:r>
               <a:rPr lang="en-US" dirty="0"/>
-              <a:t>We continue with Tropical Cyclones. On this slide we have Structure. Write each point on a new line, with the key term first, and explain it in your own words when we revise. When you finish, we go to the next slide.</a:t>
+              <a:t>Let us copy Tornadoes. Tornadoes are presented as follows. Copy the point on Distribution on the left, then draw the diagram on the right: three storms compared. Give it a title and label it clearly.</a:t>
             </a:r>
             <a:endParaRPr lang="en-US" dirty="0"/>
           </a:p>
@@ -3815,7 +3819,7 @@
           <a:p>
             <a:r>
               <a:rPr lang="en-US" dirty="0"/>
-              <a:t>We continue with Tropical Cyclones. On this slide we have Names and areas. Write each point on a new line, with the key term first, and explain it in your own words when we revise.</a:t>
+              <a:t>We continue with Tornadoes. On this slide we have Causes and Consequences. Write each point on a new line, with the key term first, and explain it in your own words when we revise.</a:t>
             </a:r>
             <a:endParaRPr lang="en-US" dirty="0"/>
           </a:p>
@@ -3903,7 +3907,7 @@
           <a:p>
             <a:r>
               <a:rPr lang="en-US" dirty="0"/>
-              <a:t>Now draw this illustration in your notebook: structure of a tropical cyclone. Give it a title and label it clearly.</a:t>
+              <a:t>Let us copy Tropical Cyclones. Tropical cyclones are presented as follows. Copy the point on Names on the left, then draw the diagram on the right: a tropical cyclone. Give it a title and label it clearly.</a:t>
             </a:r>
             <a:endParaRPr lang="en-US" dirty="0"/>
           </a:p>
@@ -3991,7 +3995,7 @@
           <a:p>
             <a:r>
               <a:rPr lang="en-US" dirty="0"/>
-              <a:t>Let us copy Effects and Control. The effects and control of tropical disturbances are. On this slide we have Effects. Write each point on a new line, with the key term first, and explain it in your own words when we revise. When you finish, we go to the next slide.</a:t>
+              <a:t>We continue with Tropical Cyclones. On this slide we have Distribution. Write each point on a new line, with the key term first, and explain it in your own words when we revise.</a:t>
             </a:r>
             <a:endParaRPr lang="en-US" dirty="0"/>
           </a:p>
@@ -4079,7 +4083,7 @@
           <a:p>
             <a:r>
               <a:rPr lang="en-US" dirty="0"/>
-              <a:t>We continue with Effects and Control. On this slide we have Control and prevention. Write each point on a new line, with the key term first, and explain it in your own words when we revise.</a:t>
+              <a:t>Copy the point on Causes on the left, then draw the diagram on the right: a hurricane from space. Give it a title and label it clearly.</a:t>
             </a:r>
             <a:endParaRPr lang="en-US" dirty="0"/>
           </a:p>
@@ -4167,7 +4171,7 @@
           <a:p>
             <a:r>
               <a:rPr lang="en-US" dirty="0"/>
-              <a:t>Now let us check what you have understood. Question 1: Give two conditions for a tropical cyclone to form. Answer in your exercise book.</a:t>
+              <a:t>We continue with Tropical Cyclones. On this slide we have Consequences. Write each point on a new line, with the key term first, and explain it in your own words when we revise.</a:t>
             </a:r>
             <a:endParaRPr lang="en-US" dirty="0"/>
           </a:p>
@@ -4255,7 +4259,7 @@
           <a:p>
             <a:r>
               <a:rPr lang="en-US" dirty="0"/>
-              <a:t>The expected answer is: a sea warmer than 27 °C and a latitude away from the Equator (5°–20°). If you got it right, well done.</a:t>
+              <a:t>Let us copy Hazards and Control Measures. The hazards of storms are reduced by the following measures. Copy the point on Early warning on the left, then draw the diagram on the right: reducing storm hazards. Give it a title and label it clearly.</a:t>
             </a:r>
             <a:endParaRPr lang="en-US" dirty="0"/>
           </a:p>
@@ -4343,7 +4347,7 @@
           <a:p>
             <a:r>
               <a:rPr lang="en-US" dirty="0"/>
-              <a:t>Now let us check what you have understood. Question 2: Give two measures against cyclone damage. Answer in your exercise book.</a:t>
+              <a:t>We continue with Hazards and Control Measures. On this slide we have Public education and Protection of buildings. Write each point on a new line, with the key term first, and explain it in your own words when we revise. When you finish, we go to the next slide.</a:t>
             </a:r>
             <a:endParaRPr lang="en-US" dirty="0"/>
           </a:p>
@@ -4431,7 +4435,7 @@
           <a:p>
             <a:r>
               <a:rPr lang="en-US" dirty="0"/>
-              <a:t>Here is a good answer. Douala: Am/Af (hot and very wet, short dry season). Maroua: BSh/Aw (hot, long dry season). Paris: Cfb (mild, rain all year). Compare it with your own answer and correct your work in red.</a:t>
+              <a:t>Here is a good answer. The cumulonimbus. Compare it with your own answer and correct your work in red.</a:t>
             </a:r>
             <a:endParaRPr lang="en-US" dirty="0"/>
           </a:p>
@@ -4519,7 +4523,7 @@
           <a:p>
             <a:r>
               <a:rPr lang="en-US" dirty="0"/>
-              <a:t>The expected answer is: early warning and evacuation (also shelters, strong buildings). If you got it right, well done.</a:t>
+              <a:t>We continue with Hazards and Control Measures. On this slide we have Emergency preparedness. Write each point on a new line, with the key term first, and explain it in your own words when we revise.</a:t>
             </a:r>
             <a:endParaRPr lang="en-US" dirty="0"/>
           </a:p>
@@ -4607,7 +4611,7 @@
           <a:p>
             <a:r>
               <a:rPr lang="en-US" dirty="0"/>
-              <a:t>For those who need more practice, fill in the blanks in your exercise book. The answers are: number 1, cumulonimbus; number 2, eye; number 3, hurricanes.</a:t>
+              <a:t>Now let us check what you have understood. Question 1: Compare a thunderstorm and a tropical cyclone by size and place of formation. Answer in your exercise book.</a:t>
             </a:r>
             <a:endParaRPr lang="en-US" dirty="0"/>
           </a:p>
@@ -4695,7 +4699,7 @@
           <a:p>
             <a:r>
               <a:rPr lang="en-US" dirty="0"/>
-              <a:t>For your homework: Write five safety rules for a thunderstorm in your area. We shall correct it at the beginning of our next lesson.</a:t>
+              <a:t>The expected answer is: a thunderstorm is small (a few km) and forms over land or sea; a cyclone is hundreds of km wide and forms over warm tropical oceans. If you got it right, well done.</a:t>
             </a:r>
             <a:endParaRPr lang="en-US" dirty="0"/>
           </a:p>
@@ -4783,7 +4787,7 @@
           <a:p>
             <a:r>
               <a:rPr lang="en-US" dirty="0"/>
-              <a:t>Our next lesson will be on Lesson 20: Micro-climates. Thank you for your attention, and see you next time.</a:t>
+              <a:t>Now let us check what you have understood. Question 2: Give two measures to reduce the hazards of thunderstorms. Answer in your exercise book.</a:t>
             </a:r>
             <a:endParaRPr lang="en-US" dirty="0"/>
           </a:p>
@@ -4871,7 +4875,7 @@
           <a:p>
             <a:r>
               <a:rPr lang="en-US" dirty="0"/>
-              <a:t>Let us play the bilingual game. I say a word in English, and you give me the French word. Then we do the reverse.</a:t>
+              <a:t>The expected answer is: early warnings, lightning rods, staying indoors, good drainage (any two). If you got it right, well done.</a:t>
             </a:r>
             <a:endParaRPr lang="en-US" dirty="0"/>
           </a:p>
@@ -4959,7 +4963,7 @@
           <a:p>
             <a:r>
               <a:rPr lang="en-US" dirty="0"/>
-              <a:t>I record this information in the official logbook of the class after the lesson.</a:t>
+              <a:t>For those who need more practice, fill in the blanks in your exercise book. The answers are: number 1, cumulonimbus; number 2, hurricanes; number 3, surge.</a:t>
             </a:r>
             <a:endParaRPr lang="en-US" dirty="0"/>
           </a:p>
@@ -5047,7 +5051,7 @@
           <a:p>
             <a:r>
               <a:rPr lang="en-US" dirty="0"/>
-              <a:t>I complete the second page of the logbook: the matter taught, the evaluation, the homework and the attendance.</a:t>
+              <a:t>For your homework: Define a micro-climate. We shall correct it at the beginning of our next lesson.</a:t>
             </a:r>
             <a:endParaRPr lang="en-US" dirty="0"/>
           </a:p>
@@ -5135,7 +5139,7 @@
           <a:p>
             <a:r>
               <a:rPr lang="en-US" dirty="0"/>
-              <a:t>This slide is for me, the teacher: it gives the timing of the lesson and what to do if the projector is not available.</a:t>
+              <a:t>Our next lesson will be on Lesson 20: Micro-climates. Thank you for your attention, and see you next time.</a:t>
             </a:r>
             <a:endParaRPr lang="en-US" dirty="0"/>
           </a:p>
@@ -5223,7 +5227,7 @@
           <a:p>
             <a:r>
               <a:rPr lang="en-US" dirty="0"/>
-              <a:t>These are the references and picture credits used to prepare this lesson.</a:t>
+              <a:t>Let us play the bilingual game. I say a word in English, and you give me the French word. Then we do the reverse.</a:t>
             </a:r>
             <a:endParaRPr lang="en-US" dirty="0"/>
           </a:p>
@@ -5247,6 +5251,94 @@
             <a:fld id="{F7021451-1387-4CA6-816F-3879F97B5CBC}" type="slidenum">
               <a:rPr lang="en-US"/>
               <a:t>58</a:t>
+            </a:fld>
+            <a:endParaRPr lang="en-US"/>
+          </a:p>
+        </p:txBody>
+      </p:sp>
+    </p:spTree>
+    <p:extLst>
+      <p:ext uri="{BB962C8B-B14F-4D97-AF65-F5344CB8AC3E}">
+        <p14:creationId xmlns:p14="http://schemas.microsoft.com/office/powerpoint/2010/main" val="1024086991"/>
+      </p:ext>
+    </p:extLst>
+  </p:cSld>
+  <p:clrMapOvr>
+    <a:masterClrMapping/>
+  </p:clrMapOvr>
+</p:notes>
+</file>
+
+<file path=ppt/notesSlides/notesSlide59.xml><?xml version="1.0" encoding="utf-8"?>
+<p:notes xmlns:a="http://schemas.openxmlformats.org/drawingml/2006/main" xmlns:r="http://schemas.openxmlformats.org/officeDocument/2006/relationships" xmlns:p="http://schemas.openxmlformats.org/presentationml/2006/main">
+  <p:cSld>
+    <p:spTree>
+      <p:nvGrpSpPr>
+        <p:cNvPr id="1" name=""/>
+        <p:cNvGrpSpPr/>
+        <p:nvPr/>
+      </p:nvGrpSpPr>
+      <p:grpSpPr>
+        <a:xfrm>
+          <a:off x="0" y="0"/>
+          <a:ext cx="0" cy="0"/>
+          <a:chOff x="0" y="0"/>
+          <a:chExt cx="0" cy="0"/>
+        </a:xfrm>
+      </p:grpSpPr>
+      <p:sp>
+        <p:nvSpPr>
+          <p:cNvPr id="2" name="Slide Image Placeholder 1"/>
+          <p:cNvSpPr>
+            <a:spLocks noGrp="1" noRot="1" noChangeAspect="1"/>
+          </p:cNvSpPr>
+          <p:nvPr>
+            <p:ph type="sldImg"/>
+          </p:nvPr>
+        </p:nvSpPr>
+        <p:spPr/>
+      </p:sp>
+      <p:sp>
+        <p:nvSpPr>
+          <p:cNvPr id="3" name="Notes Placeholder 2"/>
+          <p:cNvSpPr>
+            <a:spLocks noGrp="1"/>
+          </p:cNvSpPr>
+          <p:nvPr>
+            <p:ph type="body" idx="1"/>
+          </p:nvPr>
+        </p:nvSpPr>
+        <p:spPr/>
+        <p:txBody>
+          <a:bodyPr/>
+          <a:lstStyle/>
+          <a:p>
+            <a:r>
+              <a:rPr lang="en-US" dirty="0"/>
+              <a:t>I record this information in the official logbook of the class after the lesson.</a:t>
+            </a:r>
+            <a:endParaRPr lang="en-US" dirty="0"/>
+          </a:p>
+        </p:txBody>
+      </p:sp>
+      <p:sp>
+        <p:nvSpPr>
+          <p:cNvPr id="4" name="Slide Number Placeholder 3"/>
+          <p:cNvSpPr>
+            <a:spLocks noGrp="1"/>
+          </p:cNvSpPr>
+          <p:nvPr>
+            <p:ph type="sldNum" sz="quarter" idx="10"/>
+          </p:nvPr>
+        </p:nvSpPr>
+        <p:spPr/>
+        <p:txBody>
+          <a:bodyPr/>
+          <a:lstStyle/>
+          <a:p>
+            <a:fld id="{F7021451-1387-4CA6-816F-3879F97B5CBC}" type="slidenum">
+              <a:rPr lang="en-US"/>
+              <a:t>59</a:t>
             </a:fld>
             <a:endParaRPr lang="en-US"/>
           </a:p>
@@ -5353,6 +5445,270 @@
 </p:notes>
 </file>
 
+<file path=ppt/notesSlides/notesSlide60.xml><?xml version="1.0" encoding="utf-8"?>
+<p:notes xmlns:a="http://schemas.openxmlformats.org/drawingml/2006/main" xmlns:r="http://schemas.openxmlformats.org/officeDocument/2006/relationships" xmlns:p="http://schemas.openxmlformats.org/presentationml/2006/main">
+  <p:cSld>
+    <p:spTree>
+      <p:nvGrpSpPr>
+        <p:cNvPr id="1" name=""/>
+        <p:cNvGrpSpPr/>
+        <p:nvPr/>
+      </p:nvGrpSpPr>
+      <p:grpSpPr>
+        <a:xfrm>
+          <a:off x="0" y="0"/>
+          <a:ext cx="0" cy="0"/>
+          <a:chOff x="0" y="0"/>
+          <a:chExt cx="0" cy="0"/>
+        </a:xfrm>
+      </p:grpSpPr>
+      <p:sp>
+        <p:nvSpPr>
+          <p:cNvPr id="2" name="Slide Image Placeholder 1"/>
+          <p:cNvSpPr>
+            <a:spLocks noGrp="1" noRot="1" noChangeAspect="1"/>
+          </p:cNvSpPr>
+          <p:nvPr>
+            <p:ph type="sldImg"/>
+          </p:nvPr>
+        </p:nvSpPr>
+        <p:spPr/>
+      </p:sp>
+      <p:sp>
+        <p:nvSpPr>
+          <p:cNvPr id="3" name="Notes Placeholder 2"/>
+          <p:cNvSpPr>
+            <a:spLocks noGrp="1"/>
+          </p:cNvSpPr>
+          <p:nvPr>
+            <p:ph type="body" idx="1"/>
+          </p:nvPr>
+        </p:nvSpPr>
+        <p:spPr/>
+        <p:txBody>
+          <a:bodyPr/>
+          <a:lstStyle/>
+          <a:p>
+            <a:r>
+              <a:rPr lang="en-US" dirty="0"/>
+              <a:t>I complete the second page of the logbook: the matter taught, the evaluation, the homework and the attendance.</a:t>
+            </a:r>
+            <a:endParaRPr lang="en-US" dirty="0"/>
+          </a:p>
+        </p:txBody>
+      </p:sp>
+      <p:sp>
+        <p:nvSpPr>
+          <p:cNvPr id="4" name="Slide Number Placeholder 3"/>
+          <p:cNvSpPr>
+            <a:spLocks noGrp="1"/>
+          </p:cNvSpPr>
+          <p:nvPr>
+            <p:ph type="sldNum" sz="quarter" idx="10"/>
+          </p:nvPr>
+        </p:nvSpPr>
+        <p:spPr/>
+        <p:txBody>
+          <a:bodyPr/>
+          <a:lstStyle/>
+          <a:p>
+            <a:fld id="{F7021451-1387-4CA6-816F-3879F97B5CBC}" type="slidenum">
+              <a:rPr lang="en-US"/>
+              <a:t>60</a:t>
+            </a:fld>
+            <a:endParaRPr lang="en-US"/>
+          </a:p>
+        </p:txBody>
+      </p:sp>
+    </p:spTree>
+    <p:extLst>
+      <p:ext uri="{BB962C8B-B14F-4D97-AF65-F5344CB8AC3E}">
+        <p14:creationId xmlns:p14="http://schemas.microsoft.com/office/powerpoint/2010/main" val="1024086991"/>
+      </p:ext>
+    </p:extLst>
+  </p:cSld>
+  <p:clrMapOvr>
+    <a:masterClrMapping/>
+  </p:clrMapOvr>
+</p:notes>
+</file>
+
+<file path=ppt/notesSlides/notesSlide61.xml><?xml version="1.0" encoding="utf-8"?>
+<p:notes xmlns:a="http://schemas.openxmlformats.org/drawingml/2006/main" xmlns:r="http://schemas.openxmlformats.org/officeDocument/2006/relationships" xmlns:p="http://schemas.openxmlformats.org/presentationml/2006/main">
+  <p:cSld>
+    <p:spTree>
+      <p:nvGrpSpPr>
+        <p:cNvPr id="1" name=""/>
+        <p:cNvGrpSpPr/>
+        <p:nvPr/>
+      </p:nvGrpSpPr>
+      <p:grpSpPr>
+        <a:xfrm>
+          <a:off x="0" y="0"/>
+          <a:ext cx="0" cy="0"/>
+          <a:chOff x="0" y="0"/>
+          <a:chExt cx="0" cy="0"/>
+        </a:xfrm>
+      </p:grpSpPr>
+      <p:sp>
+        <p:nvSpPr>
+          <p:cNvPr id="2" name="Slide Image Placeholder 1"/>
+          <p:cNvSpPr>
+            <a:spLocks noGrp="1" noRot="1" noChangeAspect="1"/>
+          </p:cNvSpPr>
+          <p:nvPr>
+            <p:ph type="sldImg"/>
+          </p:nvPr>
+        </p:nvSpPr>
+        <p:spPr/>
+      </p:sp>
+      <p:sp>
+        <p:nvSpPr>
+          <p:cNvPr id="3" name="Notes Placeholder 2"/>
+          <p:cNvSpPr>
+            <a:spLocks noGrp="1"/>
+          </p:cNvSpPr>
+          <p:nvPr>
+            <p:ph type="body" idx="1"/>
+          </p:nvPr>
+        </p:nvSpPr>
+        <p:spPr/>
+        <p:txBody>
+          <a:bodyPr/>
+          <a:lstStyle/>
+          <a:p>
+            <a:r>
+              <a:rPr lang="en-US" dirty="0"/>
+              <a:t>This slide is for me, the teacher: it gives the timing of the lesson and what to do if the projector is not available.</a:t>
+            </a:r>
+            <a:endParaRPr lang="en-US" dirty="0"/>
+          </a:p>
+        </p:txBody>
+      </p:sp>
+      <p:sp>
+        <p:nvSpPr>
+          <p:cNvPr id="4" name="Slide Number Placeholder 3"/>
+          <p:cNvSpPr>
+            <a:spLocks noGrp="1"/>
+          </p:cNvSpPr>
+          <p:nvPr>
+            <p:ph type="sldNum" sz="quarter" idx="10"/>
+          </p:nvPr>
+        </p:nvSpPr>
+        <p:spPr/>
+        <p:txBody>
+          <a:bodyPr/>
+          <a:lstStyle/>
+          <a:p>
+            <a:fld id="{F7021451-1387-4CA6-816F-3879F97B5CBC}" type="slidenum">
+              <a:rPr lang="en-US"/>
+              <a:t>61</a:t>
+            </a:fld>
+            <a:endParaRPr lang="en-US"/>
+          </a:p>
+        </p:txBody>
+      </p:sp>
+    </p:spTree>
+    <p:extLst>
+      <p:ext uri="{BB962C8B-B14F-4D97-AF65-F5344CB8AC3E}">
+        <p14:creationId xmlns:p14="http://schemas.microsoft.com/office/powerpoint/2010/main" val="1024086991"/>
+      </p:ext>
+    </p:extLst>
+  </p:cSld>
+  <p:clrMapOvr>
+    <a:masterClrMapping/>
+  </p:clrMapOvr>
+</p:notes>
+</file>
+
+<file path=ppt/notesSlides/notesSlide62.xml><?xml version="1.0" encoding="utf-8"?>
+<p:notes xmlns:a="http://schemas.openxmlformats.org/drawingml/2006/main" xmlns:r="http://schemas.openxmlformats.org/officeDocument/2006/relationships" xmlns:p="http://schemas.openxmlformats.org/presentationml/2006/main">
+  <p:cSld>
+    <p:spTree>
+      <p:nvGrpSpPr>
+        <p:cNvPr id="1" name=""/>
+        <p:cNvGrpSpPr/>
+        <p:nvPr/>
+      </p:nvGrpSpPr>
+      <p:grpSpPr>
+        <a:xfrm>
+          <a:off x="0" y="0"/>
+          <a:ext cx="0" cy="0"/>
+          <a:chOff x="0" y="0"/>
+          <a:chExt cx="0" cy="0"/>
+        </a:xfrm>
+      </p:grpSpPr>
+      <p:sp>
+        <p:nvSpPr>
+          <p:cNvPr id="2" name="Slide Image Placeholder 1"/>
+          <p:cNvSpPr>
+            <a:spLocks noGrp="1" noRot="1" noChangeAspect="1"/>
+          </p:cNvSpPr>
+          <p:nvPr>
+            <p:ph type="sldImg"/>
+          </p:nvPr>
+        </p:nvSpPr>
+        <p:spPr/>
+      </p:sp>
+      <p:sp>
+        <p:nvSpPr>
+          <p:cNvPr id="3" name="Notes Placeholder 2"/>
+          <p:cNvSpPr>
+            <a:spLocks noGrp="1"/>
+          </p:cNvSpPr>
+          <p:nvPr>
+            <p:ph type="body" idx="1"/>
+          </p:nvPr>
+        </p:nvSpPr>
+        <p:spPr/>
+        <p:txBody>
+          <a:bodyPr/>
+          <a:lstStyle/>
+          <a:p>
+            <a:r>
+              <a:rPr lang="en-US" dirty="0"/>
+              <a:t>These are the references and picture credits used to prepare this lesson.</a:t>
+            </a:r>
+            <a:endParaRPr lang="en-US" dirty="0"/>
+          </a:p>
+        </p:txBody>
+      </p:sp>
+      <p:sp>
+        <p:nvSpPr>
+          <p:cNvPr id="4" name="Slide Number Placeholder 3"/>
+          <p:cNvSpPr>
+            <a:spLocks noGrp="1"/>
+          </p:cNvSpPr>
+          <p:nvPr>
+            <p:ph type="sldNum" sz="quarter" idx="10"/>
+          </p:nvPr>
+        </p:nvSpPr>
+        <p:spPr/>
+        <p:txBody>
+          <a:bodyPr/>
+          <a:lstStyle/>
+          <a:p>
+            <a:fld id="{F7021451-1387-4CA6-816F-3879F97B5CBC}" type="slidenum">
+              <a:rPr lang="en-US"/>
+              <a:t>62</a:t>
+            </a:fld>
+            <a:endParaRPr lang="en-US"/>
+          </a:p>
+        </p:txBody>
+      </p:sp>
+    </p:spTree>
+    <p:extLst>
+      <p:ext uri="{BB962C8B-B14F-4D97-AF65-F5344CB8AC3E}">
+        <p14:creationId xmlns:p14="http://schemas.microsoft.com/office/powerpoint/2010/main" val="1024086991"/>
+      </p:ext>
+    </p:extLst>
+  </p:cSld>
+  <p:clrMapOvr>
+    <a:masterClrMapping/>
+  </p:clrMapOvr>
+</p:notes>
+</file>
+
 <file path=ppt/notesSlides/notesSlide7.xml><?xml version="1.0" encoding="utf-8"?>
 <p:notes xmlns:a="http://schemas.openxmlformats.org/drawingml/2006/main" xmlns:r="http://schemas.openxmlformats.org/officeDocument/2006/relationships" xmlns:p="http://schemas.openxmlformats.org/presentationml/2006/main">
   <p:cSld>
@@ -5487,7 +5843,7 @@
           <a:p>
             <a:r>
               <a:rPr lang="en-US" dirty="0"/>
-              <a:t>By the end of this lesson, you should be able to do three things. Number 1: explain the formation and effects of thunderstorms. Number 2: explain tornadoes. Number 3: explain tropical cyclones and measures against them.</a:t>
+              <a:t>By the end of this lesson, you should be able to do four things. Number 1: define thunderstorms, tornadoes and tropical cyclones. Number 2: describe their distribution and causes. Number 3: explain their consequences. Number 4: propose measures to reduce their hazards.</a:t>
             </a:r>
             <a:endParaRPr lang="en-US" dirty="0"/>
           </a:p>
@@ -5575,7 +5931,7 @@
           <a:p>
             <a:r>
               <a:rPr lang="en-US" dirty="0"/>
-              <a:t>Let us first remember what you already know. Unstable air gives cumulonimbus clouds. Warm seas give much water vapour. Keep this in mind, because we shall build on it today.</a:t>
+              <a:t>Let us first remember what you already know. Unstable air forms cumulonimbus clouds. The Coriolis effect deflects winds. The ITCZ is a zone of rising air. Keep this in mind, because we shall build on it today.</a:t>
             </a:r>
             <a:endParaRPr lang="en-US" dirty="0"/>
           </a:p>
@@ -7039,7 +7395,27 @@
                 <a:ea typeface="Times New Roman" pitchFamily="34" charset="-122"/>
                 <a:cs typeface="Times New Roman" pitchFamily="34" charset="-120"/>
               </a:rPr>
-              <a:t>At the start of the rainy season in Ngaoundéré, a violent storm with strong winds tears off roofs and lightning kills cattle. Learners want to know how such storms form and how to stay safe.</a:t>
+              <a:t>One July afternoon in Garoua, the sky suddenly turns dark grey.</a:t>
+            </a:r>
+            <a:endParaRPr lang="en-US" sz="4000" dirty="0"/>
+          </a:p>
+          <a:p>
+            <a:pPr algn="l" indent="0" marL="0">
+              <a:spcAft>
+                <a:spcPts val="800"/>
+              </a:spcAft>
+              <a:buNone/>
+            </a:pPr>
+            <a:r>
+              <a:rPr lang="en-US" sz="4000" dirty="0">
+                <a:solidFill>
+                  <a:srgbClr val="111111"/>
+                </a:solidFill>
+                <a:latin typeface="Times New Roman" pitchFamily="34" charset="0"/>
+                <a:ea typeface="Times New Roman" pitchFamily="34" charset="-122"/>
+                <a:cs typeface="Times New Roman" pitchFamily="34" charset="-120"/>
+              </a:rPr>
+              <a:t>A strong wind bends the trees and raises dust, then an extremely heavy rain falls so loudly on the metal roof that you hear nothing else.</a:t>
             </a:r>
             <a:endParaRPr lang="en-US" sz="4000" dirty="0"/>
           </a:p>
@@ -7174,7 +7550,7 @@
         <p:spPr>
           <a:xfrm>
             <a:off x="0" y="658368"/>
-            <a:ext cx="5120640" cy="5833872"/>
+            <a:ext cx="1463040" cy="5833872"/>
           </a:xfrm>
           <a:prstGeom prst="rect">
             <a:avLst/>
@@ -7189,8 +7565,8 @@
         </p:nvSpPr>
         <p:spPr>
           <a:xfrm>
-            <a:off x="5349240" y="1005840"/>
-            <a:ext cx="6522415" cy="731520"/>
+            <a:off x="1691640" y="1005840"/>
+            <a:ext cx="10180015" cy="731520"/>
           </a:xfrm>
           <a:prstGeom prst="rect">
             <a:avLst/>
@@ -7216,7 +7592,7 @@
                 <a:ea typeface="Times New Roman" pitchFamily="34" charset="-122"/>
                 <a:cs typeface="Times New Roman" pitchFamily="34" charset="-120"/>
               </a:rPr>
-              <a:t>Situation: Question 1</a:t>
+              <a:t>Situation in Real Life (continued)</a:t>
             </a:r>
             <a:endParaRPr lang="en-US" sz="3600" dirty="0"/>
           </a:p>
@@ -7230,8 +7606,8 @@
         </p:nvSpPr>
         <p:spPr>
           <a:xfrm>
-            <a:off x="5349240" y="1783080"/>
-            <a:ext cx="6522415" cy="4663440"/>
+            <a:off x="1691640" y="1783080"/>
+            <a:ext cx="10180015" cy="4663440"/>
           </a:xfrm>
           <a:prstGeom prst="rect">
             <a:avLst/>
@@ -7258,7 +7634,47 @@
                 <a:ea typeface="Times New Roman" pitchFamily="34" charset="-122"/>
                 <a:cs typeface="Times New Roman" pitchFamily="34" charset="-120"/>
               </a:rPr>
-              <a:t>What is the problem in the situation?</a:t>
+              <a:t>A flash of lightning is followed by a deafening crash of thunder.</a:t>
+            </a:r>
+            <a:endParaRPr lang="en-US" sz="4000" dirty="0"/>
+          </a:p>
+          <a:p>
+            <a:pPr algn="l" indent="0" marL="0">
+              <a:spcAft>
+                <a:spcPts val="800"/>
+              </a:spcAft>
+              <a:buNone/>
+            </a:pPr>
+            <a:r>
+              <a:rPr lang="en-US" sz="4000" dirty="0">
+                <a:solidFill>
+                  <a:srgbClr val="111111"/>
+                </a:solidFill>
+                <a:latin typeface="Times New Roman" pitchFamily="34" charset="0"/>
+                <a:ea typeface="Times New Roman" pitchFamily="34" charset="-122"/>
+                <a:cs typeface="Times New Roman" pitchFamily="34" charset="-120"/>
+              </a:rPr>
+              <a:t>After about an hour, the storm passes, leaving flooded streets and broken branches.</a:t>
+            </a:r>
+            <a:endParaRPr lang="en-US" sz="4000" dirty="0"/>
+          </a:p>
+          <a:p>
+            <a:pPr algn="l" indent="0" marL="0">
+              <a:spcAft>
+                <a:spcPts val="800"/>
+              </a:spcAft>
+              <a:buNone/>
+            </a:pPr>
+            <a:r>
+              <a:rPr lang="en-US" sz="4000" dirty="0">
+                <a:solidFill>
+                  <a:srgbClr val="111111"/>
+                </a:solidFill>
+                <a:latin typeface="Times New Roman" pitchFamily="34" charset="0"/>
+                <a:ea typeface="Times New Roman" pitchFamily="34" charset="-122"/>
+                <a:cs typeface="Times New Roman" pitchFamily="34" charset="-120"/>
+              </a:rPr>
+              <a:t>You ask: "What causes such storms, and are there even more dangerous storms elsewhere in the world?"</a:t>
             </a:r>
             <a:endParaRPr lang="en-US" sz="4000" dirty="0"/>
           </a:p>
@@ -7435,7 +7851,7 @@
                 <a:ea typeface="Times New Roman" pitchFamily="34" charset="-122"/>
                 <a:cs typeface="Times New Roman" pitchFamily="34" charset="-120"/>
               </a:rPr>
-              <a:t>Answer</a:t>
+              <a:t>Situation: Question 1</a:t>
             </a:r>
             <a:endParaRPr lang="en-US" sz="3600" dirty="0"/>
           </a:p>
@@ -7477,7 +7893,7 @@
                 <a:ea typeface="Times New Roman" pitchFamily="34" charset="-122"/>
                 <a:cs typeface="Times New Roman" pitchFamily="34" charset="-120"/>
               </a:rPr>
-              <a:t>Violent storms destroy property and kill people and animals.</a:t>
+              <a:t>What is the problem in the situation?</a:t>
             </a:r>
             <a:endParaRPr lang="en-US" sz="4000" dirty="0"/>
           </a:p>
@@ -7654,7 +8070,7 @@
                 <a:ea typeface="Times New Roman" pitchFamily="34" charset="-122"/>
                 <a:cs typeface="Times New Roman" pitchFamily="34" charset="-120"/>
               </a:rPr>
-              <a:t>Situation: Question 2</a:t>
+              <a:t>Answer</a:t>
             </a:r>
             <a:endParaRPr lang="en-US" sz="3600" dirty="0"/>
           </a:p>
@@ -7696,7 +8112,7 @@
                 <a:ea typeface="Times New Roman" pitchFamily="34" charset="-122"/>
                 <a:cs typeface="Times New Roman" pitchFamily="34" charset="-120"/>
               </a:rPr>
-              <a:t>What type of cloud gives such storms?</a:t>
+              <a:t>The learner does not know the types, causes and dangers of tropical weather disturbances.</a:t>
             </a:r>
             <a:endParaRPr lang="en-US" sz="4000" dirty="0"/>
           </a:p>
@@ -7873,7 +8289,7 @@
                 <a:ea typeface="Times New Roman" pitchFamily="34" charset="-122"/>
                 <a:cs typeface="Times New Roman" pitchFamily="34" charset="-120"/>
               </a:rPr>
-              <a:t>Answer</a:t>
+              <a:t>Situation: Question 2</a:t>
             </a:r>
             <a:endParaRPr lang="en-US" sz="3600" dirty="0"/>
           </a:p>
@@ -7915,7 +8331,7 @@
                 <a:ea typeface="Times New Roman" pitchFamily="34" charset="-122"/>
                 <a:cs typeface="Times New Roman" pitchFamily="34" charset="-120"/>
               </a:rPr>
-              <a:t>Cumulonimbus.</a:t>
+              <a:t>What kind of storm hit Garoua?</a:t>
             </a:r>
             <a:endParaRPr lang="en-US" sz="4000" dirty="0"/>
           </a:p>
@@ -8092,7 +8508,7 @@
                 <a:ea typeface="Times New Roman" pitchFamily="34" charset="-122"/>
                 <a:cs typeface="Times New Roman" pitchFamily="34" charset="-120"/>
               </a:rPr>
-              <a:t>Situation: Question 3</a:t>
+              <a:t>Answer</a:t>
             </a:r>
             <a:endParaRPr lang="en-US" sz="3600" dirty="0"/>
           </a:p>
@@ -8134,7 +8550,7 @@
                 <a:ea typeface="Times New Roman" pitchFamily="34" charset="-122"/>
                 <a:cs typeface="Times New Roman" pitchFamily="34" charset="-120"/>
               </a:rPr>
-              <a:t>Name two stronger tropical storms.</a:t>
+              <a:t>A thunderstorm.</a:t>
             </a:r>
             <a:endParaRPr lang="en-US" sz="4000" dirty="0"/>
           </a:p>
@@ -8311,7 +8727,7 @@
                 <a:ea typeface="Times New Roman" pitchFamily="34" charset="-122"/>
                 <a:cs typeface="Times New Roman" pitchFamily="34" charset="-120"/>
               </a:rPr>
-              <a:t>Possible Answer</a:t>
+              <a:t>Situation: Question 3</a:t>
             </a:r>
             <a:endParaRPr lang="en-US" sz="3600" dirty="0"/>
           </a:p>
@@ -8353,7 +8769,7 @@
                 <a:ea typeface="Times New Roman" pitchFamily="34" charset="-122"/>
                 <a:cs typeface="Times New Roman" pitchFamily="34" charset="-120"/>
               </a:rPr>
-              <a:t>Tornadoes and tropical cyclones (hurricanes).</a:t>
+              <a:t>Name a larger storm that forms over warm oceans.</a:t>
             </a:r>
             <a:endParaRPr lang="en-US" sz="4000" dirty="0"/>
           </a:p>
@@ -8465,7 +8881,7 @@
                 <a:ea typeface="Calibri" pitchFamily="34" charset="-122"/>
                 <a:cs typeface="Calibri" pitchFamily="34" charset="-120"/>
               </a:rPr>
-              <a:t>ACTION TO TAKE</a:t>
+              <a:t>REAL-LIFE SITUATION</a:t>
             </a:r>
             <a:endParaRPr lang="en-US" sz="1400" dirty="0"/>
           </a:p>
@@ -8530,7 +8946,7 @@
                 <a:ea typeface="Times New Roman" pitchFamily="34" charset="-122"/>
                 <a:cs typeface="Times New Roman" pitchFamily="34" charset="-120"/>
               </a:rPr>
-              <a:t>Action to Take</a:t>
+              <a:t>Possible Answer</a:t>
             </a:r>
             <a:endParaRPr lang="en-US" sz="3600" dirty="0"/>
           </a:p>
@@ -8572,7 +8988,7 @@
                 <a:ea typeface="Times New Roman" pitchFamily="34" charset="-122"/>
                 <a:cs typeface="Times New Roman" pitchFamily="34" charset="-120"/>
               </a:rPr>
-              <a:t>Protect lives and property from storms through warnings and safe behaviour.</a:t>
+              <a:t>A tropical cyclone (hurricane).</a:t>
             </a:r>
             <a:endParaRPr lang="en-US" sz="4000" dirty="0"/>
           </a:p>
@@ -8684,7 +9100,7 @@
                 <a:ea typeface="Calibri" pitchFamily="34" charset="-122"/>
                 <a:cs typeface="Calibri" pitchFamily="34" charset="-120"/>
               </a:rPr>
-              <a:t>JUSTIFICATION</a:t>
+              <a:t>ACTION TO TAKE</a:t>
             </a:r>
             <a:endParaRPr lang="en-US" sz="1400" dirty="0"/>
           </a:p>
@@ -8749,7 +9165,7 @@
                 <a:ea typeface="Times New Roman" pitchFamily="34" charset="-122"/>
                 <a:cs typeface="Times New Roman" pitchFamily="34" charset="-120"/>
               </a:rPr>
-              <a:t>Justification of the Lesson</a:t>
+              <a:t>Action to Take</a:t>
             </a:r>
             <a:endParaRPr lang="en-US" sz="3600" dirty="0"/>
           </a:p>
@@ -8791,7 +9207,7 @@
                 <a:ea typeface="Times New Roman" pitchFamily="34" charset="-122"/>
                 <a:cs typeface="Times New Roman" pitchFamily="34" charset="-120"/>
               </a:rPr>
-              <a:t>This lesson helps us to understand violent storms and how to protect lives and property.</a:t>
+              <a:t>During a thunderstorm, shelter inside a building and keep away from trees, water and metal objects.</a:t>
             </a:r>
             <a:endParaRPr lang="en-US" sz="4000" dirty="0"/>
           </a:p>
@@ -8903,54 +9319,15 @@
                 <a:ea typeface="Calibri" pitchFamily="34" charset="-122"/>
                 <a:cs typeface="Calibri" pitchFamily="34" charset="-120"/>
               </a:rPr>
-              <a:t>1. THUNDERSTORMS: FORMATION</a:t>
+              <a:t>JUSTIFICATION</a:t>
             </a:r>
             <a:endParaRPr lang="en-US" sz="1400" dirty="0"/>
-          </a:p>
-        </p:txBody>
-      </p:sp>
-      <p:sp>
-        <p:nvSpPr>
-          <p:cNvPr id="3" name="Text 1"/>
-          <p:cNvSpPr/>
-          <p:nvPr/>
-        </p:nvSpPr>
-        <p:spPr>
-          <a:xfrm>
-            <a:off x="457200" y="1005840"/>
-            <a:ext cx="11277295" cy="731520"/>
-          </a:xfrm>
-          <a:prstGeom prst="rect">
-            <a:avLst/>
-          </a:prstGeom>
-          <a:noFill/>
-          <a:ln/>
-        </p:spPr>
-        <p:txBody>
-          <a:bodyPr wrap="square" lIns="0" tIns="0" rIns="0" bIns="0" rtlCol="0" anchor="ctr"/>
-          <a:lstStyle/>
-          <a:p>
-            <a:pPr algn="ctr" indent="0" marL="0">
-              <a:buNone/>
-            </a:pPr>
-            <a:r>
-              <a:rPr lang="en-US" sz="3600" b="1" dirty="0">
-                <a:solidFill>
-                  <a:srgbClr val="990011"/>
-                </a:solidFill>
-                <a:latin typeface="Times New Roman" pitchFamily="34" charset="0"/>
-                <a:ea typeface="Times New Roman" pitchFamily="34" charset="-122"/>
-                <a:cs typeface="Times New Roman" pitchFamily="34" charset="-120"/>
-              </a:rPr>
-              <a:t>Activity 1</a:t>
-            </a:r>
-            <a:endParaRPr lang="en-US" sz="3600" dirty="0"/>
           </a:p>
         </p:txBody>
       </p:sp>
       <p:pic>
         <p:nvPicPr>
-          <p:cNvPr id="4" name="Image 0" descr="/home/claude/f4/img/v2/thunderstorm_big.png">    </p:cNvPr>
+          <p:cNvPr id="3" name="Image 0" descr="/home/claude/f4/img/minesec_sheet.png">    </p:cNvPr>
           <p:cNvPicPr>
             <a:picLocks noChangeAspect="1"/>
           </p:cNvPicPr>
@@ -8964,8 +9341,8 @@
         </p:blipFill>
         <p:spPr>
           <a:xfrm>
-            <a:off x="629930" y="1783080"/>
-            <a:ext cx="10931835" cy="4270248"/>
+            <a:off x="0" y="658368"/>
+            <a:ext cx="5120640" cy="5833872"/>
           </a:xfrm>
           <a:prstGeom prst="rect">
             <a:avLst/>
@@ -8974,14 +9351,14 @@
       </p:pic>
       <p:sp>
         <p:nvSpPr>
-          <p:cNvPr id="5" name="Text 2"/>
+          <p:cNvPr id="4" name="Text 1"/>
           <p:cNvSpPr/>
           <p:nvPr/>
         </p:nvSpPr>
         <p:spPr>
           <a:xfrm>
-            <a:off x="457200" y="6089904"/>
-            <a:ext cx="11277295" cy="347472"/>
+            <a:off x="5349240" y="1005840"/>
+            <a:ext cx="6522415" cy="731520"/>
           </a:xfrm>
           <a:prstGeom prst="rect">
             <a:avLst/>
@@ -8990,24 +9367,68 @@
           <a:ln/>
         </p:spPr>
         <p:txBody>
-          <a:bodyPr wrap="square" lIns="0" tIns="0" rIns="0" bIns="0" rtlCol="0" anchor="ctr"/>
+          <a:bodyPr wrap="square" lIns="0" tIns="0" rIns="0" bIns="0" rtlCol="0" anchor="ctr">
+            <a:normAutofit/>
+          </a:bodyPr>
           <a:lstStyle/>
           <a:p>
             <a:pPr algn="ctr" indent="0" marL="0">
               <a:buNone/>
             </a:pPr>
             <a:r>
-              <a:rPr lang="en-US" sz="1800" i="1" dirty="0">
-                <a:solidFill>
-                  <a:srgbClr val="555555"/>
+              <a:rPr lang="en-US" sz="3600" b="1" dirty="0">
+                <a:solidFill>
+                  <a:srgbClr val="990011"/>
                 </a:solidFill>
                 <a:latin typeface="Times New Roman" pitchFamily="34" charset="0"/>
                 <a:ea typeface="Times New Roman" pitchFamily="34" charset="-122"/>
                 <a:cs typeface="Times New Roman" pitchFamily="34" charset="-120"/>
               </a:rPr>
-              <a:t>The three stages of a thunderstorm.</a:t>
-            </a:r>
-            <a:endParaRPr lang="en-US" sz="1800" dirty="0"/>
+              <a:t>Justification of the Lesson</a:t>
+            </a:r>
+            <a:endParaRPr lang="en-US" sz="3600" dirty="0"/>
+          </a:p>
+        </p:txBody>
+      </p:sp>
+      <p:sp>
+        <p:nvSpPr>
+          <p:cNvPr id="5" name="Text 2"/>
+          <p:cNvSpPr/>
+          <p:nvPr/>
+        </p:nvSpPr>
+        <p:spPr>
+          <a:xfrm>
+            <a:off x="5349240" y="1783080"/>
+            <a:ext cx="6522415" cy="4663440"/>
+          </a:xfrm>
+          <a:prstGeom prst="rect">
+            <a:avLst/>
+          </a:prstGeom>
+          <a:noFill/>
+          <a:ln/>
+        </p:spPr>
+        <p:txBody>
+          <a:bodyPr wrap="square" lIns="0" tIns="0" rIns="0" bIns="0" rtlCol="0" anchor="t"/>
+          <a:lstStyle/>
+          <a:p>
+            <a:pPr algn="l" indent="0" marL="0">
+              <a:spcAft>
+                <a:spcPts val="800"/>
+              </a:spcAft>
+              <a:buNone/>
+            </a:pPr>
+            <a:r>
+              <a:rPr lang="en-US" sz="4000" dirty="0">
+                <a:solidFill>
+                  <a:srgbClr val="111111"/>
+                </a:solidFill>
+                <a:latin typeface="Times New Roman" pitchFamily="34" charset="0"/>
+                <a:ea typeface="Times New Roman" pitchFamily="34" charset="-122"/>
+                <a:cs typeface="Times New Roman" pitchFamily="34" charset="-120"/>
+              </a:rPr>
+              <a:t>This lesson helps us to understand and prepare for dangerous storms, from the thunderstorms of Garoua to the cyclones of other tropical coasts.</a:t>
+            </a:r>
+            <a:endParaRPr lang="en-US" sz="4000" dirty="0"/>
           </a:p>
         </p:txBody>
       </p:sp>
@@ -9712,15 +10133,54 @@
                 <a:ea typeface="Calibri" pitchFamily="34" charset="-122"/>
                 <a:cs typeface="Calibri" pitchFamily="34" charset="-120"/>
               </a:rPr>
-              <a:t>1. THUNDERSTORMS: FORMATION</a:t>
+              <a:t>1. THUNDERSTORMS</a:t>
             </a:r>
             <a:endParaRPr lang="en-US" sz="1400" dirty="0"/>
+          </a:p>
+        </p:txBody>
+      </p:sp>
+      <p:sp>
+        <p:nvSpPr>
+          <p:cNvPr id="3" name="Text 1"/>
+          <p:cNvSpPr/>
+          <p:nvPr/>
+        </p:nvSpPr>
+        <p:spPr>
+          <a:xfrm>
+            <a:off x="457200" y="1005840"/>
+            <a:ext cx="11277295" cy="731520"/>
+          </a:xfrm>
+          <a:prstGeom prst="rect">
+            <a:avLst/>
+          </a:prstGeom>
+          <a:noFill/>
+          <a:ln/>
+        </p:spPr>
+        <p:txBody>
+          <a:bodyPr wrap="square" lIns="0" tIns="0" rIns="0" bIns="0" rtlCol="0" anchor="ctr"/>
+          <a:lstStyle/>
+          <a:p>
+            <a:pPr algn="ctr" indent="0" marL="0">
+              <a:buNone/>
+            </a:pPr>
+            <a:r>
+              <a:rPr lang="en-US" sz="3600" b="1" dirty="0">
+                <a:solidFill>
+                  <a:srgbClr val="990011"/>
+                </a:solidFill>
+                <a:latin typeface="Times New Roman" pitchFamily="34" charset="0"/>
+                <a:ea typeface="Times New Roman" pitchFamily="34" charset="-122"/>
+                <a:cs typeface="Times New Roman" pitchFamily="34" charset="-120"/>
+              </a:rPr>
+              <a:t>Activity 1</a:t>
+            </a:r>
+            <a:endParaRPr lang="en-US" sz="3600" dirty="0"/>
           </a:p>
         </p:txBody>
       </p:sp>
       <p:pic>
         <p:nvPicPr>
-          <p:cNvPr id="3" name="Image 0" descr="/home/claude/f4/img/minesec_sheet.png">    </p:cNvPr>
+          <p:cNvPr id="4" name="Image 0" descr="/home/claude/f4/img/v2/thunderstorm_big.png">    </p:cNvPr>
           <p:cNvPicPr>
             <a:picLocks noChangeAspect="1"/>
           </p:cNvPicPr>
@@ -9734,8 +10194,8 @@
         </p:blipFill>
         <p:spPr>
           <a:xfrm>
-            <a:off x="0" y="658368"/>
-            <a:ext cx="5120640" cy="5833872"/>
+            <a:off x="629930" y="1783080"/>
+            <a:ext cx="10931835" cy="4270248"/>
           </a:xfrm>
           <a:prstGeom prst="rect">
             <a:avLst/>
@@ -9744,14 +10204,14 @@
       </p:pic>
       <p:sp>
         <p:nvSpPr>
-          <p:cNvPr id="4" name="Text 1"/>
+          <p:cNvPr id="5" name="Text 2"/>
           <p:cNvSpPr/>
           <p:nvPr/>
         </p:nvSpPr>
         <p:spPr>
           <a:xfrm>
-            <a:off x="5349240" y="1005840"/>
-            <a:ext cx="6522415" cy="731520"/>
+            <a:off x="457200" y="6089904"/>
+            <a:ext cx="11277295" cy="347472"/>
           </a:xfrm>
           <a:prstGeom prst="rect">
             <a:avLst/>
@@ -9760,68 +10220,24 @@
           <a:ln/>
         </p:spPr>
         <p:txBody>
-          <a:bodyPr wrap="square" lIns="0" tIns="0" rIns="0" bIns="0" rtlCol="0" anchor="ctr">
-            <a:normAutofit/>
-          </a:bodyPr>
+          <a:bodyPr wrap="square" lIns="0" tIns="0" rIns="0" bIns="0" rtlCol="0" anchor="ctr"/>
           <a:lstStyle/>
           <a:p>
             <a:pPr algn="ctr" indent="0" marL="0">
               <a:buNone/>
             </a:pPr>
             <a:r>
-              <a:rPr lang="en-US" sz="3600" b="1" dirty="0">
-                <a:solidFill>
-                  <a:srgbClr val="990011"/>
+              <a:rPr lang="en-US" sz="1800" i="1" dirty="0">
+                <a:solidFill>
+                  <a:srgbClr val="555555"/>
                 </a:solidFill>
                 <a:latin typeface="Times New Roman" pitchFamily="34" charset="0"/>
                 <a:ea typeface="Times New Roman" pitchFamily="34" charset="-122"/>
                 <a:cs typeface="Times New Roman" pitchFamily="34" charset="-120"/>
               </a:rPr>
-              <a:t>Activity 1: Question</a:t>
-            </a:r>
-            <a:endParaRPr lang="en-US" sz="3600" dirty="0"/>
-          </a:p>
-        </p:txBody>
-      </p:sp>
-      <p:sp>
-        <p:nvSpPr>
-          <p:cNvPr id="5" name="Text 2"/>
-          <p:cNvSpPr/>
-          <p:nvPr/>
-        </p:nvSpPr>
-        <p:spPr>
-          <a:xfrm>
-            <a:off x="5349240" y="1783080"/>
-            <a:ext cx="6522415" cy="4663440"/>
-          </a:xfrm>
-          <a:prstGeom prst="rect">
-            <a:avLst/>
-          </a:prstGeom>
-          <a:noFill/>
-          <a:ln/>
-        </p:spPr>
-        <p:txBody>
-          <a:bodyPr wrap="square" lIns="0" tIns="0" rIns="0" bIns="0" rtlCol="0" anchor="t"/>
-          <a:lstStyle/>
-          <a:p>
-            <a:pPr algn="l" indent="0" marL="0">
-              <a:spcAft>
-                <a:spcPts val="800"/>
-              </a:spcAft>
-              <a:buNone/>
-            </a:pPr>
-            <a:r>
-              <a:rPr lang="en-US" sz="4000" dirty="0">
-                <a:solidFill>
-                  <a:srgbClr val="111111"/>
-                </a:solidFill>
-                <a:latin typeface="Times New Roman" pitchFamily="34" charset="0"/>
-                <a:ea typeface="Times New Roman" pitchFamily="34" charset="-122"/>
-                <a:cs typeface="Times New Roman" pitchFamily="34" charset="-120"/>
-              </a:rPr>
-              <a:t>Name the three stages of a thunderstorm.</a:t>
-            </a:r>
-            <a:endParaRPr lang="en-US" sz="4000" dirty="0"/>
+              <a:t>The life of a thunderstorm.</a:t>
+            </a:r>
+            <a:endParaRPr lang="en-US" sz="1800" dirty="0"/>
           </a:p>
         </p:txBody>
       </p:sp>
@@ -9931,7 +10347,7 @@
                 <a:ea typeface="Calibri" pitchFamily="34" charset="-122"/>
                 <a:cs typeface="Calibri" pitchFamily="34" charset="-120"/>
               </a:rPr>
-              <a:t>1. THUNDERSTORMS: FORMATION</a:t>
+              <a:t>1. THUNDERSTORMS</a:t>
             </a:r>
             <a:endParaRPr lang="en-US" sz="1400" dirty="0"/>
           </a:p>
@@ -9996,7 +10412,7 @@
                 <a:ea typeface="Times New Roman" pitchFamily="34" charset="-122"/>
                 <a:cs typeface="Times New Roman" pitchFamily="34" charset="-120"/>
               </a:rPr>
-              <a:t>Activity 1: Answer</a:t>
+              <a:t>Activity 1: Question</a:t>
             </a:r>
             <a:endParaRPr lang="en-US" sz="3600" dirty="0"/>
           </a:p>
@@ -10038,7 +10454,7 @@
                 <a:ea typeface="Times New Roman" pitchFamily="34" charset="-122"/>
                 <a:cs typeface="Times New Roman" pitchFamily="34" charset="-120"/>
               </a:rPr>
-              <a:t>Cumulus (growing), mature (rain, lightning, hail), dissipating (dying).</a:t>
+              <a:t>What are the three stages of a thunderstorm?</a:t>
             </a:r>
             <a:endParaRPr lang="en-US" sz="4000" dirty="0"/>
           </a:p>
@@ -10150,54 +10566,15 @@
                 <a:ea typeface="Calibri" pitchFamily="34" charset="-122"/>
                 <a:cs typeface="Calibri" pitchFamily="34" charset="-120"/>
               </a:rPr>
-              <a:t>1. THUNDERSTORMS: EFFECTS</a:t>
+              <a:t>1. THUNDERSTORMS</a:t>
             </a:r>
             <a:endParaRPr lang="en-US" sz="1400" dirty="0"/>
-          </a:p>
-        </p:txBody>
-      </p:sp>
-      <p:sp>
-        <p:nvSpPr>
-          <p:cNvPr id="3" name="Text 1"/>
-          <p:cNvSpPr/>
-          <p:nvPr/>
-        </p:nvSpPr>
-        <p:spPr>
-          <a:xfrm>
-            <a:off x="457200" y="1005840"/>
-            <a:ext cx="11277295" cy="731520"/>
-          </a:xfrm>
-          <a:prstGeom prst="rect">
-            <a:avLst/>
-          </a:prstGeom>
-          <a:noFill/>
-          <a:ln/>
-        </p:spPr>
-        <p:txBody>
-          <a:bodyPr wrap="square" lIns="0" tIns="0" rIns="0" bIns="0" rtlCol="0" anchor="ctr"/>
-          <a:lstStyle/>
-          <a:p>
-            <a:pPr algn="ctr" indent="0" marL="0">
-              <a:buNone/>
-            </a:pPr>
-            <a:r>
-              <a:rPr lang="en-US" sz="3600" b="1" dirty="0">
-                <a:solidFill>
-                  <a:srgbClr val="990011"/>
-                </a:solidFill>
-                <a:latin typeface="Times New Roman" pitchFamily="34" charset="0"/>
-                <a:ea typeface="Times New Roman" pitchFamily="34" charset="-122"/>
-                <a:cs typeface="Times New Roman" pitchFamily="34" charset="-120"/>
-              </a:rPr>
-              <a:t>Activity 2</a:t>
-            </a:r>
-            <a:endParaRPr lang="en-US" sz="3600" dirty="0"/>
           </a:p>
         </p:txBody>
       </p:sp>
       <p:pic>
         <p:nvPicPr>
-          <p:cNvPr id="4" name="Image 0" descr="/home/claude/f4/img/v2/f4_cumulonimbus.jpg">    </p:cNvPr>
+          <p:cNvPr id="3" name="Image 0" descr="/home/claude/f4/img/minesec_sheet.png">    </p:cNvPr>
           <p:cNvPicPr>
             <a:picLocks noChangeAspect="1"/>
           </p:cNvPicPr>
@@ -10211,8 +10588,8 @@
         </p:blipFill>
         <p:spPr>
           <a:xfrm>
-            <a:off x="2248777" y="1783080"/>
-            <a:ext cx="7694141" cy="4270248"/>
+            <a:off x="0" y="658368"/>
+            <a:ext cx="5120640" cy="5833872"/>
           </a:xfrm>
           <a:prstGeom prst="rect">
             <a:avLst/>
@@ -10221,14 +10598,14 @@
       </p:pic>
       <p:sp>
         <p:nvSpPr>
-          <p:cNvPr id="5" name="Text 2"/>
+          <p:cNvPr id="4" name="Text 1"/>
           <p:cNvSpPr/>
           <p:nvPr/>
         </p:nvSpPr>
         <p:spPr>
           <a:xfrm>
-            <a:off x="457200" y="6089904"/>
-            <a:ext cx="11277295" cy="347472"/>
+            <a:off x="5349240" y="1005840"/>
+            <a:ext cx="6522415" cy="731520"/>
           </a:xfrm>
           <a:prstGeom prst="rect">
             <a:avLst/>
@@ -10237,24 +10614,68 @@
           <a:ln/>
         </p:spPr>
         <p:txBody>
-          <a:bodyPr wrap="square" lIns="0" tIns="0" rIns="0" bIns="0" rtlCol="0" anchor="ctr"/>
+          <a:bodyPr wrap="square" lIns="0" tIns="0" rIns="0" bIns="0" rtlCol="0" anchor="ctr">
+            <a:normAutofit/>
+          </a:bodyPr>
           <a:lstStyle/>
           <a:p>
             <a:pPr algn="ctr" indent="0" marL="0">
               <a:buNone/>
             </a:pPr>
             <a:r>
-              <a:rPr lang="en-US" sz="1800" i="1" dirty="0">
-                <a:solidFill>
-                  <a:srgbClr val="555555"/>
+              <a:rPr lang="en-US" sz="3600" b="1" dirty="0">
+                <a:solidFill>
+                  <a:srgbClr val="990011"/>
                 </a:solidFill>
                 <a:latin typeface="Times New Roman" pitchFamily="34" charset="0"/>
                 <a:ea typeface="Times New Roman" pitchFamily="34" charset="-122"/>
                 <a:cs typeface="Times New Roman" pitchFamily="34" charset="-120"/>
               </a:rPr>
-              <a:t>A cumulonimbus storm cloud.</a:t>
-            </a:r>
-            <a:endParaRPr lang="en-US" sz="1800" dirty="0"/>
+              <a:t>Activity 1: Answer</a:t>
+            </a:r>
+            <a:endParaRPr lang="en-US" sz="3600" dirty="0"/>
+          </a:p>
+        </p:txBody>
+      </p:sp>
+      <p:sp>
+        <p:nvSpPr>
+          <p:cNvPr id="5" name="Text 2"/>
+          <p:cNvSpPr/>
+          <p:nvPr/>
+        </p:nvSpPr>
+        <p:spPr>
+          <a:xfrm>
+            <a:off x="5349240" y="1783080"/>
+            <a:ext cx="6522415" cy="4663440"/>
+          </a:xfrm>
+          <a:prstGeom prst="rect">
+            <a:avLst/>
+          </a:prstGeom>
+          <a:noFill/>
+          <a:ln/>
+        </p:spPr>
+        <p:txBody>
+          <a:bodyPr wrap="square" lIns="0" tIns="0" rIns="0" bIns="0" rtlCol="0" anchor="t"/>
+          <a:lstStyle/>
+          <a:p>
+            <a:pPr algn="l" indent="0" marL="0">
+              <a:spcAft>
+                <a:spcPts val="800"/>
+              </a:spcAft>
+              <a:buNone/>
+            </a:pPr>
+            <a:r>
+              <a:rPr lang="en-US" sz="4000" dirty="0">
+                <a:solidFill>
+                  <a:srgbClr val="111111"/>
+                </a:solidFill>
+                <a:latin typeface="Times New Roman" pitchFamily="34" charset="0"/>
+                <a:ea typeface="Times New Roman" pitchFamily="34" charset="-122"/>
+                <a:cs typeface="Times New Roman" pitchFamily="34" charset="-120"/>
+              </a:rPr>
+              <a:t>Cumulus (growing), mature and dissipating.</a:t>
+            </a:r>
+            <a:endParaRPr lang="en-US" sz="4000" dirty="0"/>
           </a:p>
         </p:txBody>
       </p:sp>
@@ -10364,15 +10785,54 @@
                 <a:ea typeface="Calibri" pitchFamily="34" charset="-122"/>
                 <a:cs typeface="Calibri" pitchFamily="34" charset="-120"/>
               </a:rPr>
-              <a:t>1. THUNDERSTORMS: EFFECTS</a:t>
+              <a:t>1. THUNDERSTORMS</a:t>
             </a:r>
             <a:endParaRPr lang="en-US" sz="1400" dirty="0"/>
+          </a:p>
+        </p:txBody>
+      </p:sp>
+      <p:sp>
+        <p:nvSpPr>
+          <p:cNvPr id="3" name="Text 1"/>
+          <p:cNvSpPr/>
+          <p:nvPr/>
+        </p:nvSpPr>
+        <p:spPr>
+          <a:xfrm>
+            <a:off x="457200" y="1005840"/>
+            <a:ext cx="11277295" cy="731520"/>
+          </a:xfrm>
+          <a:prstGeom prst="rect">
+            <a:avLst/>
+          </a:prstGeom>
+          <a:noFill/>
+          <a:ln/>
+        </p:spPr>
+        <p:txBody>
+          <a:bodyPr wrap="square" lIns="0" tIns="0" rIns="0" bIns="0" rtlCol="0" anchor="ctr"/>
+          <a:lstStyle/>
+          <a:p>
+            <a:pPr algn="ctr" indent="0" marL="0">
+              <a:buNone/>
+            </a:pPr>
+            <a:r>
+              <a:rPr lang="en-US" sz="3600" b="1" dirty="0">
+                <a:solidFill>
+                  <a:srgbClr val="990011"/>
+                </a:solidFill>
+                <a:latin typeface="Times New Roman" pitchFamily="34" charset="0"/>
+                <a:ea typeface="Times New Roman" pitchFamily="34" charset="-122"/>
+                <a:cs typeface="Times New Roman" pitchFamily="34" charset="-120"/>
+              </a:rPr>
+              <a:t>Activity 2</a:t>
+            </a:r>
+            <a:endParaRPr lang="en-US" sz="3600" dirty="0"/>
           </a:p>
         </p:txBody>
       </p:sp>
       <p:pic>
         <p:nvPicPr>
-          <p:cNvPr id="3" name="Image 0" descr="/home/claude/f4/img/minesec_sheet.png">    </p:cNvPr>
+          <p:cNvPr id="4" name="Image 0" descr="/home/claude/f4/img/v2/f4_cumulonimbus.jpg">    </p:cNvPr>
           <p:cNvPicPr>
             <a:picLocks noChangeAspect="1"/>
           </p:cNvPicPr>
@@ -10386,8 +10846,8 @@
         </p:blipFill>
         <p:spPr>
           <a:xfrm>
-            <a:off x="0" y="658368"/>
-            <a:ext cx="5120640" cy="5833872"/>
+            <a:off x="2248777" y="1783080"/>
+            <a:ext cx="7694141" cy="4270248"/>
           </a:xfrm>
           <a:prstGeom prst="rect">
             <a:avLst/>
@@ -10396,14 +10856,14 @@
       </p:pic>
       <p:sp>
         <p:nvSpPr>
-          <p:cNvPr id="4" name="Text 1"/>
+          <p:cNvPr id="5" name="Text 2"/>
           <p:cNvSpPr/>
           <p:nvPr/>
         </p:nvSpPr>
         <p:spPr>
           <a:xfrm>
-            <a:off x="5349240" y="1005840"/>
-            <a:ext cx="6522415" cy="731520"/>
+            <a:off x="457200" y="6089904"/>
+            <a:ext cx="11277295" cy="347472"/>
           </a:xfrm>
           <a:prstGeom prst="rect">
             <a:avLst/>
@@ -10412,68 +10872,24 @@
           <a:ln/>
         </p:spPr>
         <p:txBody>
-          <a:bodyPr wrap="square" lIns="0" tIns="0" rIns="0" bIns="0" rtlCol="0" anchor="ctr">
-            <a:normAutofit/>
-          </a:bodyPr>
+          <a:bodyPr wrap="square" lIns="0" tIns="0" rIns="0" bIns="0" rtlCol="0" anchor="ctr"/>
           <a:lstStyle/>
           <a:p>
             <a:pPr algn="ctr" indent="0" marL="0">
               <a:buNone/>
             </a:pPr>
             <a:r>
-              <a:rPr lang="en-US" sz="3600" b="1" dirty="0">
-                <a:solidFill>
-                  <a:srgbClr val="990011"/>
+              <a:rPr lang="en-US" sz="1800" i="1" dirty="0">
+                <a:solidFill>
+                  <a:srgbClr val="555555"/>
                 </a:solidFill>
                 <a:latin typeface="Times New Roman" pitchFamily="34" charset="0"/>
                 <a:ea typeface="Times New Roman" pitchFamily="34" charset="-122"/>
                 <a:cs typeface="Times New Roman" pitchFamily="34" charset="-120"/>
               </a:rPr>
-              <a:t>Activity 2: Question</a:t>
-            </a:r>
-            <a:endParaRPr lang="en-US" sz="3600" dirty="0"/>
-          </a:p>
-        </p:txBody>
-      </p:sp>
-      <p:sp>
-        <p:nvSpPr>
-          <p:cNvPr id="5" name="Text 2"/>
-          <p:cNvSpPr/>
-          <p:nvPr/>
-        </p:nvSpPr>
-        <p:spPr>
-          <a:xfrm>
-            <a:off x="5349240" y="1783080"/>
-            <a:ext cx="6522415" cy="4663440"/>
-          </a:xfrm>
-          <a:prstGeom prst="rect">
-            <a:avLst/>
-          </a:prstGeom>
-          <a:noFill/>
-          <a:ln/>
-        </p:spPr>
-        <p:txBody>
-          <a:bodyPr wrap="square" lIns="0" tIns="0" rIns="0" bIns="0" rtlCol="0" anchor="t"/>
-          <a:lstStyle/>
-          <a:p>
-            <a:pPr algn="l" indent="0" marL="0">
-              <a:spcAft>
-                <a:spcPts val="800"/>
-              </a:spcAft>
-              <a:buNone/>
-            </a:pPr>
-            <a:r>
-              <a:rPr lang="en-US" sz="4000" dirty="0">
-                <a:solidFill>
-                  <a:srgbClr val="111111"/>
-                </a:solidFill>
-                <a:latin typeface="Times New Roman" pitchFamily="34" charset="0"/>
-                <a:ea typeface="Times New Roman" pitchFamily="34" charset="-122"/>
-                <a:cs typeface="Times New Roman" pitchFamily="34" charset="-120"/>
-              </a:rPr>
-              <a:t>Give two dangers of thunderstorms.</a:t>
-            </a:r>
-            <a:endParaRPr lang="en-US" sz="4000" dirty="0"/>
+              <a:t>A cumulonimbus cloud.</a:t>
+            </a:r>
+            <a:endParaRPr lang="en-US" sz="1800" dirty="0"/>
           </a:p>
         </p:txBody>
       </p:sp>
@@ -10583,7 +10999,7 @@
                 <a:ea typeface="Calibri" pitchFamily="34" charset="-122"/>
                 <a:cs typeface="Calibri" pitchFamily="34" charset="-120"/>
               </a:rPr>
-              <a:t>1. THUNDERSTORMS: EFFECTS</a:t>
+              <a:t>1. THUNDERSTORMS</a:t>
             </a:r>
             <a:endParaRPr lang="en-US" sz="1400" dirty="0"/>
           </a:p>
@@ -10648,7 +11064,7 @@
                 <a:ea typeface="Times New Roman" pitchFamily="34" charset="-122"/>
                 <a:cs typeface="Times New Roman" pitchFamily="34" charset="-120"/>
               </a:rPr>
-              <a:t>Activity 2: Answer</a:t>
+              <a:t>Activity 2: Question</a:t>
             </a:r>
             <a:endParaRPr lang="en-US" sz="3600" dirty="0"/>
           </a:p>
@@ -10690,7 +11106,7 @@
                 <a:ea typeface="Times New Roman" pitchFamily="34" charset="-122"/>
                 <a:cs typeface="Times New Roman" pitchFamily="34" charset="-120"/>
               </a:rPr>
-              <a:t>Lightning, strong winds, hail and floods.</a:t>
+              <a:t>Give two dangers of a thunderstorm.</a:t>
             </a:r>
             <a:endParaRPr lang="en-US" sz="4000" dirty="0"/>
           </a:p>
@@ -10802,54 +11218,15 @@
                 <a:ea typeface="Calibri" pitchFamily="34" charset="-122"/>
                 <a:cs typeface="Calibri" pitchFamily="34" charset="-120"/>
               </a:rPr>
-              <a:t>2. TROPICAL CYCLONES: FORMATION</a:t>
+              <a:t>1. THUNDERSTORMS</a:t>
             </a:r>
             <a:endParaRPr lang="en-US" sz="1400" dirty="0"/>
-          </a:p>
-        </p:txBody>
-      </p:sp>
-      <p:sp>
-        <p:nvSpPr>
-          <p:cNvPr id="3" name="Text 1"/>
-          <p:cNvSpPr/>
-          <p:nvPr/>
-        </p:nvSpPr>
-        <p:spPr>
-          <a:xfrm>
-            <a:off x="457200" y="1005840"/>
-            <a:ext cx="11277295" cy="731520"/>
-          </a:xfrm>
-          <a:prstGeom prst="rect">
-            <a:avLst/>
-          </a:prstGeom>
-          <a:noFill/>
-          <a:ln/>
-        </p:spPr>
-        <p:txBody>
-          <a:bodyPr wrap="square" lIns="0" tIns="0" rIns="0" bIns="0" rtlCol="0" anchor="ctr"/>
-          <a:lstStyle/>
-          <a:p>
-            <a:pPr algn="ctr" indent="0" marL="0">
-              <a:buNone/>
-            </a:pPr>
-            <a:r>
-              <a:rPr lang="en-US" sz="3600" b="1" dirty="0">
-                <a:solidFill>
-                  <a:srgbClr val="990011"/>
-                </a:solidFill>
-                <a:latin typeface="Times New Roman" pitchFamily="34" charset="0"/>
-                <a:ea typeface="Times New Roman" pitchFamily="34" charset="-122"/>
-                <a:cs typeface="Times New Roman" pitchFamily="34" charset="-120"/>
-              </a:rPr>
-              <a:t>Activity 3</a:t>
-            </a:r>
-            <a:endParaRPr lang="en-US" sz="3600" dirty="0"/>
           </a:p>
         </p:txBody>
       </p:sp>
       <p:pic>
         <p:nvPicPr>
-          <p:cNvPr id="4" name="Image 0" descr="/home/claude/f4/img/v2/f4_hurricane.jpg">    </p:cNvPr>
+          <p:cNvPr id="3" name="Image 0" descr="/home/claude/f4/img/minesec_sheet.png">    </p:cNvPr>
           <p:cNvPicPr>
             <a:picLocks noChangeAspect="1"/>
           </p:cNvPicPr>
@@ -10863,8 +11240,8 @@
         </p:blipFill>
         <p:spPr>
           <a:xfrm>
-            <a:off x="2246610" y="1783080"/>
-            <a:ext cx="7698475" cy="4270248"/>
+            <a:off x="0" y="658368"/>
+            <a:ext cx="5120640" cy="5833872"/>
           </a:xfrm>
           <a:prstGeom prst="rect">
             <a:avLst/>
@@ -10873,14 +11250,14 @@
       </p:pic>
       <p:sp>
         <p:nvSpPr>
-          <p:cNvPr id="5" name="Text 2"/>
+          <p:cNvPr id="4" name="Text 1"/>
           <p:cNvSpPr/>
           <p:nvPr/>
         </p:nvSpPr>
         <p:spPr>
           <a:xfrm>
-            <a:off x="457200" y="6089904"/>
-            <a:ext cx="11277295" cy="347472"/>
+            <a:off x="5349240" y="1005840"/>
+            <a:ext cx="6522415" cy="731520"/>
           </a:xfrm>
           <a:prstGeom prst="rect">
             <a:avLst/>
@@ -10889,24 +11266,68 @@
           <a:ln/>
         </p:spPr>
         <p:txBody>
-          <a:bodyPr wrap="square" lIns="0" tIns="0" rIns="0" bIns="0" rtlCol="0" anchor="ctr"/>
+          <a:bodyPr wrap="square" lIns="0" tIns="0" rIns="0" bIns="0" rtlCol="0" anchor="ctr">
+            <a:normAutofit/>
+          </a:bodyPr>
           <a:lstStyle/>
           <a:p>
             <a:pPr algn="ctr" indent="0" marL="0">
               <a:buNone/>
             </a:pPr>
             <a:r>
-              <a:rPr lang="en-US" sz="1800" i="1" dirty="0">
-                <a:solidFill>
-                  <a:srgbClr val="555555"/>
+              <a:rPr lang="en-US" sz="3600" b="1" dirty="0">
+                <a:solidFill>
+                  <a:srgbClr val="990011"/>
                 </a:solidFill>
                 <a:latin typeface="Times New Roman" pitchFamily="34" charset="0"/>
                 <a:ea typeface="Times New Roman" pitchFamily="34" charset="-122"/>
                 <a:cs typeface="Times New Roman" pitchFamily="34" charset="-120"/>
               </a:rPr>
-              <a:t>A hurricane seen from space.</a:t>
-            </a:r>
-            <a:endParaRPr lang="en-US" sz="1800" dirty="0"/>
+              <a:t>Activity 2: Answer</a:t>
+            </a:r>
+            <a:endParaRPr lang="en-US" sz="3600" dirty="0"/>
+          </a:p>
+        </p:txBody>
+      </p:sp>
+      <p:sp>
+        <p:nvSpPr>
+          <p:cNvPr id="5" name="Text 2"/>
+          <p:cNvSpPr/>
+          <p:nvPr/>
+        </p:nvSpPr>
+        <p:spPr>
+          <a:xfrm>
+            <a:off x="5349240" y="1783080"/>
+            <a:ext cx="6522415" cy="4663440"/>
+          </a:xfrm>
+          <a:prstGeom prst="rect">
+            <a:avLst/>
+          </a:prstGeom>
+          <a:noFill/>
+          <a:ln/>
+        </p:spPr>
+        <p:txBody>
+          <a:bodyPr wrap="square" lIns="0" tIns="0" rIns="0" bIns="0" rtlCol="0" anchor="t"/>
+          <a:lstStyle/>
+          <a:p>
+            <a:pPr algn="l" indent="0" marL="0">
+              <a:spcAft>
+                <a:spcPts val="800"/>
+              </a:spcAft>
+              <a:buNone/>
+            </a:pPr>
+            <a:r>
+              <a:rPr lang="en-US" sz="4000" dirty="0">
+                <a:solidFill>
+                  <a:srgbClr val="111111"/>
+                </a:solidFill>
+                <a:latin typeface="Times New Roman" pitchFamily="34" charset="0"/>
+                <a:ea typeface="Times New Roman" pitchFamily="34" charset="-122"/>
+                <a:cs typeface="Times New Roman" pitchFamily="34" charset="-120"/>
+              </a:rPr>
+              <a:t>Lightning, flash floods, strong winds and hail (any two).</a:t>
+            </a:r>
+            <a:endParaRPr lang="en-US" sz="4000" dirty="0"/>
           </a:p>
         </p:txBody>
       </p:sp>
@@ -11016,15 +11437,54 @@
                 <a:ea typeface="Calibri" pitchFamily="34" charset="-122"/>
                 <a:cs typeface="Calibri" pitchFamily="34" charset="-120"/>
               </a:rPr>
-              <a:t>2. TROPICAL CYCLONES: FORMATION</a:t>
+              <a:t>2. TORNADOES</a:t>
             </a:r>
             <a:endParaRPr lang="en-US" sz="1400" dirty="0"/>
+          </a:p>
+        </p:txBody>
+      </p:sp>
+      <p:sp>
+        <p:nvSpPr>
+          <p:cNvPr id="3" name="Text 1"/>
+          <p:cNvSpPr/>
+          <p:nvPr/>
+        </p:nvSpPr>
+        <p:spPr>
+          <a:xfrm>
+            <a:off x="457200" y="1005840"/>
+            <a:ext cx="11277295" cy="731520"/>
+          </a:xfrm>
+          <a:prstGeom prst="rect">
+            <a:avLst/>
+          </a:prstGeom>
+          <a:noFill/>
+          <a:ln/>
+        </p:spPr>
+        <p:txBody>
+          <a:bodyPr wrap="square" lIns="0" tIns="0" rIns="0" bIns="0" rtlCol="0" anchor="ctr"/>
+          <a:lstStyle/>
+          <a:p>
+            <a:pPr algn="ctr" indent="0" marL="0">
+              <a:buNone/>
+            </a:pPr>
+            <a:r>
+              <a:rPr lang="en-US" sz="3600" b="1" dirty="0">
+                <a:solidFill>
+                  <a:srgbClr val="990011"/>
+                </a:solidFill>
+                <a:latin typeface="Times New Roman" pitchFamily="34" charset="0"/>
+                <a:ea typeface="Times New Roman" pitchFamily="34" charset="-122"/>
+                <a:cs typeface="Times New Roman" pitchFamily="34" charset="-120"/>
+              </a:rPr>
+              <a:t>Activity 3</a:t>
+            </a:r>
+            <a:endParaRPr lang="en-US" sz="3600" dirty="0"/>
           </a:p>
         </p:txBody>
       </p:sp>
       <p:pic>
         <p:nvPicPr>
-          <p:cNvPr id="3" name="Image 0" descr="/home/claude/f4/img/minesec_sheet.png">    </p:cNvPr>
+          <p:cNvPr id="4" name="Image 0" descr="/home/claude/f4/img/v2/clim2_storms.png">    </p:cNvPr>
           <p:cNvPicPr>
             <a:picLocks noChangeAspect="1"/>
           </p:cNvPicPr>
@@ -11038,8 +11498,8 @@
         </p:blipFill>
         <p:spPr>
           <a:xfrm>
-            <a:off x="0" y="658368"/>
-            <a:ext cx="5120640" cy="5833872"/>
+            <a:off x="629930" y="1783080"/>
+            <a:ext cx="10931835" cy="4270248"/>
           </a:xfrm>
           <a:prstGeom prst="rect">
             <a:avLst/>
@@ -11048,14 +11508,14 @@
       </p:pic>
       <p:sp>
         <p:nvSpPr>
-          <p:cNvPr id="4" name="Text 1"/>
+          <p:cNvPr id="5" name="Text 2"/>
           <p:cNvSpPr/>
           <p:nvPr/>
         </p:nvSpPr>
         <p:spPr>
           <a:xfrm>
-            <a:off x="5349240" y="1005840"/>
-            <a:ext cx="6522415" cy="731520"/>
+            <a:off x="457200" y="6089904"/>
+            <a:ext cx="11277295" cy="347472"/>
           </a:xfrm>
           <a:prstGeom prst="rect">
             <a:avLst/>
@@ -11064,68 +11524,24 @@
           <a:ln/>
         </p:spPr>
         <p:txBody>
-          <a:bodyPr wrap="square" lIns="0" tIns="0" rIns="0" bIns="0" rtlCol="0" anchor="ctr">
-            <a:normAutofit/>
-          </a:bodyPr>
+          <a:bodyPr wrap="square" lIns="0" tIns="0" rIns="0" bIns="0" rtlCol="0" anchor="ctr"/>
           <a:lstStyle/>
           <a:p>
             <a:pPr algn="ctr" indent="0" marL="0">
               <a:buNone/>
             </a:pPr>
             <a:r>
-              <a:rPr lang="en-US" sz="3600" b="1" dirty="0">
-                <a:solidFill>
-                  <a:srgbClr val="990011"/>
+              <a:rPr lang="en-US" sz="1800" i="1" dirty="0">
+                <a:solidFill>
+                  <a:srgbClr val="555555"/>
                 </a:solidFill>
                 <a:latin typeface="Times New Roman" pitchFamily="34" charset="0"/>
                 <a:ea typeface="Times New Roman" pitchFamily="34" charset="-122"/>
                 <a:cs typeface="Times New Roman" pitchFamily="34" charset="-120"/>
               </a:rPr>
-              <a:t>Activity 3: Question</a:t>
-            </a:r>
-            <a:endParaRPr lang="en-US" sz="3600" dirty="0"/>
-          </a:p>
-        </p:txBody>
-      </p:sp>
-      <p:sp>
-        <p:nvSpPr>
-          <p:cNvPr id="5" name="Text 2"/>
-          <p:cNvSpPr/>
-          <p:nvPr/>
-        </p:nvSpPr>
-        <p:spPr>
-          <a:xfrm>
-            <a:off x="5349240" y="1783080"/>
-            <a:ext cx="6522415" cy="4663440"/>
-          </a:xfrm>
-          <a:prstGeom prst="rect">
-            <a:avLst/>
-          </a:prstGeom>
-          <a:noFill/>
-          <a:ln/>
-        </p:spPr>
-        <p:txBody>
-          <a:bodyPr wrap="square" lIns="0" tIns="0" rIns="0" bIns="0" rtlCol="0" anchor="t"/>
-          <a:lstStyle/>
-          <a:p>
-            <a:pPr algn="l" indent="0" marL="0">
-              <a:spcAft>
-                <a:spcPts val="800"/>
-              </a:spcAft>
-              <a:buNone/>
-            </a:pPr>
-            <a:r>
-              <a:rPr lang="en-US" sz="4000" dirty="0">
-                <a:solidFill>
-                  <a:srgbClr val="111111"/>
-                </a:solidFill>
-                <a:latin typeface="Times New Roman" pitchFamily="34" charset="0"/>
-                <a:ea typeface="Times New Roman" pitchFamily="34" charset="-122"/>
-                <a:cs typeface="Times New Roman" pitchFamily="34" charset="-120"/>
-              </a:rPr>
-              <a:t>Over what surface do tropical cyclones form?</a:t>
-            </a:r>
-            <a:endParaRPr lang="en-US" sz="4000" dirty="0"/>
+              <a:t>Three storms compared.</a:t>
+            </a:r>
+            <a:endParaRPr lang="en-US" sz="1800" dirty="0"/>
           </a:p>
         </p:txBody>
       </p:sp>
@@ -11235,7 +11651,7 @@
                 <a:ea typeface="Calibri" pitchFamily="34" charset="-122"/>
                 <a:cs typeface="Calibri" pitchFamily="34" charset="-120"/>
               </a:rPr>
-              <a:t>2. TROPICAL CYCLONES: FORMATION</a:t>
+              <a:t>2. TORNADOES</a:t>
             </a:r>
             <a:endParaRPr lang="en-US" sz="1400" dirty="0"/>
           </a:p>
@@ -11300,7 +11716,7 @@
                 <a:ea typeface="Times New Roman" pitchFamily="34" charset="-122"/>
                 <a:cs typeface="Times New Roman" pitchFamily="34" charset="-120"/>
               </a:rPr>
-              <a:t>Activity 3: Answer</a:t>
+              <a:t>Activity 3: Question</a:t>
             </a:r>
             <a:endParaRPr lang="en-US" sz="3600" dirty="0"/>
           </a:p>
@@ -11342,7 +11758,7 @@
                 <a:ea typeface="Times New Roman" pitchFamily="34" charset="-122"/>
                 <a:cs typeface="Times New Roman" pitchFamily="34" charset="-120"/>
               </a:rPr>
-              <a:t>Over warm seas above 27 °C, between 5° and 20° of latitude.</a:t>
+              <a:t>Where are tornadoes most frequent?</a:t>
             </a:r>
             <a:endParaRPr lang="en-US" sz="4000" dirty="0"/>
           </a:p>
@@ -11454,54 +11870,15 @@
                 <a:ea typeface="Calibri" pitchFamily="34" charset="-122"/>
                 <a:cs typeface="Calibri" pitchFamily="34" charset="-120"/>
               </a:rPr>
-              <a:t>2. TROPICAL CYCLONES: STRUCTURE</a:t>
+              <a:t>2. TORNADOES</a:t>
             </a:r>
             <a:endParaRPr lang="en-US" sz="1400" dirty="0"/>
-          </a:p>
-        </p:txBody>
-      </p:sp>
-      <p:sp>
-        <p:nvSpPr>
-          <p:cNvPr id="3" name="Text 1"/>
-          <p:cNvSpPr/>
-          <p:nvPr/>
-        </p:nvSpPr>
-        <p:spPr>
-          <a:xfrm>
-            <a:off x="457200" y="1005840"/>
-            <a:ext cx="11277295" cy="731520"/>
-          </a:xfrm>
-          <a:prstGeom prst="rect">
-            <a:avLst/>
-          </a:prstGeom>
-          <a:noFill/>
-          <a:ln/>
-        </p:spPr>
-        <p:txBody>
-          <a:bodyPr wrap="square" lIns="0" tIns="0" rIns="0" bIns="0" rtlCol="0" anchor="ctr"/>
-          <a:lstStyle/>
-          <a:p>
-            <a:pPr algn="ctr" indent="0" marL="0">
-              <a:buNone/>
-            </a:pPr>
-            <a:r>
-              <a:rPr lang="en-US" sz="3600" b="1" dirty="0">
-                <a:solidFill>
-                  <a:srgbClr val="990011"/>
-                </a:solidFill>
-                <a:latin typeface="Times New Roman" pitchFamily="34" charset="0"/>
-                <a:ea typeface="Times New Roman" pitchFamily="34" charset="-122"/>
-                <a:cs typeface="Times New Roman" pitchFamily="34" charset="-120"/>
-              </a:rPr>
-              <a:t>Activity 4</a:t>
-            </a:r>
-            <a:endParaRPr lang="en-US" sz="3600" dirty="0"/>
           </a:p>
         </p:txBody>
       </p:sp>
       <p:pic>
         <p:nvPicPr>
-          <p:cNvPr id="4" name="Image 0" descr="/home/claude/f4/img/v2/cyclone_big.png">    </p:cNvPr>
+          <p:cNvPr id="3" name="Image 0" descr="/home/claude/f4/img/minesec_sheet.png">    </p:cNvPr>
           <p:cNvPicPr>
             <a:picLocks noChangeAspect="1"/>
           </p:cNvPicPr>
@@ -11515,8 +11892,8 @@
         </p:blipFill>
         <p:spPr>
           <a:xfrm>
-            <a:off x="629930" y="1783080"/>
-            <a:ext cx="10931835" cy="4270248"/>
+            <a:off x="0" y="658368"/>
+            <a:ext cx="5120640" cy="5833872"/>
           </a:xfrm>
           <a:prstGeom prst="rect">
             <a:avLst/>
@@ -11525,14 +11902,14 @@
       </p:pic>
       <p:sp>
         <p:nvSpPr>
-          <p:cNvPr id="5" name="Text 2"/>
+          <p:cNvPr id="4" name="Text 1"/>
           <p:cNvSpPr/>
           <p:nvPr/>
         </p:nvSpPr>
         <p:spPr>
           <a:xfrm>
-            <a:off x="457200" y="6089904"/>
-            <a:ext cx="11277295" cy="347472"/>
+            <a:off x="5349240" y="1005840"/>
+            <a:ext cx="6522415" cy="731520"/>
           </a:xfrm>
           <a:prstGeom prst="rect">
             <a:avLst/>
@@ -11541,24 +11918,68 @@
           <a:ln/>
         </p:spPr>
         <p:txBody>
-          <a:bodyPr wrap="square" lIns="0" tIns="0" rIns="0" bIns="0" rtlCol="0" anchor="ctr"/>
+          <a:bodyPr wrap="square" lIns="0" tIns="0" rIns="0" bIns="0" rtlCol="0" anchor="ctr">
+            <a:normAutofit/>
+          </a:bodyPr>
           <a:lstStyle/>
           <a:p>
             <a:pPr algn="ctr" indent="0" marL="0">
               <a:buNone/>
             </a:pPr>
             <a:r>
-              <a:rPr lang="en-US" sz="1800" i="1" dirty="0">
-                <a:solidFill>
-                  <a:srgbClr val="555555"/>
+              <a:rPr lang="en-US" sz="3600" b="1" dirty="0">
+                <a:solidFill>
+                  <a:srgbClr val="990011"/>
                 </a:solidFill>
                 <a:latin typeface="Times New Roman" pitchFamily="34" charset="0"/>
                 <a:ea typeface="Times New Roman" pitchFamily="34" charset="-122"/>
                 <a:cs typeface="Times New Roman" pitchFamily="34" charset="-120"/>
               </a:rPr>
-              <a:t>The structure of a tropical cyclone.</a:t>
-            </a:r>
-            <a:endParaRPr lang="en-US" sz="1800" dirty="0"/>
+              <a:t>Activity 3: Answer</a:t>
+            </a:r>
+            <a:endParaRPr lang="en-US" sz="3600" dirty="0"/>
+          </a:p>
+        </p:txBody>
+      </p:sp>
+      <p:sp>
+        <p:nvSpPr>
+          <p:cNvPr id="5" name="Text 2"/>
+          <p:cNvSpPr/>
+          <p:nvPr/>
+        </p:nvSpPr>
+        <p:spPr>
+          <a:xfrm>
+            <a:off x="5349240" y="1783080"/>
+            <a:ext cx="6522415" cy="4663440"/>
+          </a:xfrm>
+          <a:prstGeom prst="rect">
+            <a:avLst/>
+          </a:prstGeom>
+          <a:noFill/>
+          <a:ln/>
+        </p:spPr>
+        <p:txBody>
+          <a:bodyPr wrap="square" lIns="0" tIns="0" rIns="0" bIns="0" rtlCol="0" anchor="t"/>
+          <a:lstStyle/>
+          <a:p>
+            <a:pPr algn="l" indent="0" marL="0">
+              <a:spcAft>
+                <a:spcPts val="800"/>
+              </a:spcAft>
+              <a:buNone/>
+            </a:pPr>
+            <a:r>
+              <a:rPr lang="en-US" sz="4000" dirty="0">
+                <a:solidFill>
+                  <a:srgbClr val="111111"/>
+                </a:solidFill>
+                <a:latin typeface="Times New Roman" pitchFamily="34" charset="0"/>
+                <a:ea typeface="Times New Roman" pitchFamily="34" charset="-122"/>
+                <a:cs typeface="Times New Roman" pitchFamily="34" charset="-120"/>
+              </a:rPr>
+              <a:t>In the central USA ("Tornado Alley").</a:t>
+            </a:r>
+            <a:endParaRPr lang="en-US" sz="4000" dirty="0"/>
           </a:p>
         </p:txBody>
       </p:sp>
@@ -11668,15 +12089,54 @@
                 <a:ea typeface="Calibri" pitchFamily="34" charset="-122"/>
                 <a:cs typeface="Calibri" pitchFamily="34" charset="-120"/>
               </a:rPr>
-              <a:t>2. TROPICAL CYCLONES: STRUCTURE</a:t>
+              <a:t>3. TROPICAL CYCLONES</a:t>
             </a:r>
             <a:endParaRPr lang="en-US" sz="1400" dirty="0"/>
+          </a:p>
+        </p:txBody>
+      </p:sp>
+      <p:sp>
+        <p:nvSpPr>
+          <p:cNvPr id="3" name="Text 1"/>
+          <p:cNvSpPr/>
+          <p:nvPr/>
+        </p:nvSpPr>
+        <p:spPr>
+          <a:xfrm>
+            <a:off x="457200" y="1005840"/>
+            <a:ext cx="11277295" cy="731520"/>
+          </a:xfrm>
+          <a:prstGeom prst="rect">
+            <a:avLst/>
+          </a:prstGeom>
+          <a:noFill/>
+          <a:ln/>
+        </p:spPr>
+        <p:txBody>
+          <a:bodyPr wrap="square" lIns="0" tIns="0" rIns="0" bIns="0" rtlCol="0" anchor="ctr"/>
+          <a:lstStyle/>
+          <a:p>
+            <a:pPr algn="ctr" indent="0" marL="0">
+              <a:buNone/>
+            </a:pPr>
+            <a:r>
+              <a:rPr lang="en-US" sz="3600" b="1" dirty="0">
+                <a:solidFill>
+                  <a:srgbClr val="990011"/>
+                </a:solidFill>
+                <a:latin typeface="Times New Roman" pitchFamily="34" charset="0"/>
+                <a:ea typeface="Times New Roman" pitchFamily="34" charset="-122"/>
+                <a:cs typeface="Times New Roman" pitchFamily="34" charset="-120"/>
+              </a:rPr>
+              <a:t>Activity 4</a:t>
+            </a:r>
+            <a:endParaRPr lang="en-US" sz="3600" dirty="0"/>
           </a:p>
         </p:txBody>
       </p:sp>
       <p:pic>
         <p:nvPicPr>
-          <p:cNvPr id="3" name="Image 0" descr="/home/claude/f4/img/minesec_sheet.png">    </p:cNvPr>
+          <p:cNvPr id="4" name="Image 0" descr="/home/claude/f4/img/v2/cyclone_big.png">    </p:cNvPr>
           <p:cNvPicPr>
             <a:picLocks noChangeAspect="1"/>
           </p:cNvPicPr>
@@ -11690,8 +12150,8 @@
         </p:blipFill>
         <p:spPr>
           <a:xfrm>
-            <a:off x="0" y="658368"/>
-            <a:ext cx="5120640" cy="5833872"/>
+            <a:off x="629930" y="1783080"/>
+            <a:ext cx="10931835" cy="4270248"/>
           </a:xfrm>
           <a:prstGeom prst="rect">
             <a:avLst/>
@@ -11700,14 +12160,14 @@
       </p:pic>
       <p:sp>
         <p:nvSpPr>
-          <p:cNvPr id="4" name="Text 1"/>
+          <p:cNvPr id="5" name="Text 2"/>
           <p:cNvSpPr/>
           <p:nvPr/>
         </p:nvSpPr>
         <p:spPr>
           <a:xfrm>
-            <a:off x="5349240" y="1005840"/>
-            <a:ext cx="6522415" cy="731520"/>
+            <a:off x="457200" y="6089904"/>
+            <a:ext cx="11277295" cy="347472"/>
           </a:xfrm>
           <a:prstGeom prst="rect">
             <a:avLst/>
@@ -11716,68 +12176,24 @@
           <a:ln/>
         </p:spPr>
         <p:txBody>
-          <a:bodyPr wrap="square" lIns="0" tIns="0" rIns="0" bIns="0" rtlCol="0" anchor="ctr">
-            <a:normAutofit/>
-          </a:bodyPr>
+          <a:bodyPr wrap="square" lIns="0" tIns="0" rIns="0" bIns="0" rtlCol="0" anchor="ctr"/>
           <a:lstStyle/>
           <a:p>
             <a:pPr algn="ctr" indent="0" marL="0">
               <a:buNone/>
             </a:pPr>
             <a:r>
-              <a:rPr lang="en-US" sz="3600" b="1" dirty="0">
-                <a:solidFill>
-                  <a:srgbClr val="990011"/>
+              <a:rPr lang="en-US" sz="1800" i="1" dirty="0">
+                <a:solidFill>
+                  <a:srgbClr val="555555"/>
                 </a:solidFill>
                 <a:latin typeface="Times New Roman" pitchFamily="34" charset="0"/>
                 <a:ea typeface="Times New Roman" pitchFamily="34" charset="-122"/>
                 <a:cs typeface="Times New Roman" pitchFamily="34" charset="-120"/>
               </a:rPr>
-              <a:t>Activity 4: Question</a:t>
-            </a:r>
-            <a:endParaRPr lang="en-US" sz="3600" dirty="0"/>
-          </a:p>
-        </p:txBody>
-      </p:sp>
-      <p:sp>
-        <p:nvSpPr>
-          <p:cNvPr id="5" name="Text 2"/>
-          <p:cNvSpPr/>
-          <p:nvPr/>
-        </p:nvSpPr>
-        <p:spPr>
-          <a:xfrm>
-            <a:off x="5349240" y="1783080"/>
-            <a:ext cx="6522415" cy="4663440"/>
-          </a:xfrm>
-          <a:prstGeom prst="rect">
-            <a:avLst/>
-          </a:prstGeom>
-          <a:noFill/>
-          <a:ln/>
-        </p:spPr>
-        <p:txBody>
-          <a:bodyPr wrap="square" lIns="0" tIns="0" rIns="0" bIns="0" rtlCol="0" anchor="t"/>
-          <a:lstStyle/>
-          <a:p>
-            <a:pPr algn="l" indent="0" marL="0">
-              <a:spcAft>
-                <a:spcPts val="800"/>
-              </a:spcAft>
-              <a:buNone/>
-            </a:pPr>
-            <a:r>
-              <a:rPr lang="en-US" sz="4000" dirty="0">
-                <a:solidFill>
-                  <a:srgbClr val="111111"/>
-                </a:solidFill>
-                <a:latin typeface="Times New Roman" pitchFamily="34" charset="0"/>
-                <a:ea typeface="Times New Roman" pitchFamily="34" charset="-122"/>
-                <a:cs typeface="Times New Roman" pitchFamily="34" charset="-120"/>
-              </a:rPr>
-              <a:t>Where are the winds strongest? Where is it calm?</a:t>
-            </a:r>
-            <a:endParaRPr lang="en-US" sz="4000" dirty="0"/>
+              <a:t>A tropical cyclone.</a:t>
+            </a:r>
+            <a:endParaRPr lang="en-US" sz="1800" dirty="0"/>
           </a:p>
         </p:txBody>
       </p:sp>
@@ -12458,7 +12874,7 @@
                           <a:ea typeface="Calibri" pitchFamily="34" charset="-122"/>
                           <a:cs typeface="Calibri" pitchFamily="34" charset="-120"/>
                         </a:rPr>
-                        <a:t>Thunderstorm, tornado, tropical cyclone, eye, storm surge, early warning.</a:t>
+                        <a:t>Weather disturbance, thunderstorm, lightning, supercell, tornado, wind shear, tropical cyclone, hurricane, typhoon, storm surge, early warning.</a:t>
                       </a:r>
                       <a:endParaRPr lang="en-US" sz="1700" dirty="0">
                         <a:latin typeface="Calibri" charset="0"/>
@@ -12596,7 +13012,7 @@
                           <a:ea typeface="Calibri" pitchFamily="34" charset="-122"/>
                           <a:cs typeface="Calibri" pitchFamily="34" charset="-120"/>
                         </a:rPr>
-                        <a:t>Thunderstorms, tornadoes and tropical cyclones: meaning, distribution, causes, consequences and control measures.</a:t>
+                        <a:t>Thunderstorms, tornadoes and tropical cyclones: meaning, distribution, causes, consequences; associated hazards and control measures.</a:t>
                       </a:r>
                       <a:endParaRPr lang="en-US" sz="1700" dirty="0">
                         <a:latin typeface="Calibri" charset="0"/>
@@ -12734,7 +13150,7 @@
                           <a:ea typeface="Calibri" pitchFamily="34" charset="-122"/>
                           <a:cs typeface="Calibri" pitchFamily="34" charset="-120"/>
                         </a:rPr>
-                        <a:t>Learners are able to explain tropical weather disturbances and suggest measures to reduce their dangers.</a:t>
+                        <a:t>Learners are able to explain the formation and dangers of tropical weather disturbances and the measures to reduce their effects.</a:t>
                       </a:r>
                       <a:endParaRPr lang="en-US" sz="1700" dirty="0">
                         <a:latin typeface="Calibri" charset="0"/>
@@ -12896,7 +13312,7 @@
                 <a:ea typeface="Calibri" pitchFamily="34" charset="-122"/>
                 <a:cs typeface="Calibri" pitchFamily="34" charset="-120"/>
               </a:rPr>
-              <a:t>2. TROPICAL CYCLONES: STRUCTURE</a:t>
+              <a:t>3. TROPICAL CYCLONES</a:t>
             </a:r>
             <a:endParaRPr lang="en-US" sz="1400" dirty="0"/>
           </a:p>
@@ -12961,7 +13377,7 @@
                 <a:ea typeface="Times New Roman" pitchFamily="34" charset="-122"/>
                 <a:cs typeface="Times New Roman" pitchFamily="34" charset="-120"/>
               </a:rPr>
-              <a:t>Activity 4: Answer</a:t>
+              <a:t>Activity 4: Question</a:t>
             </a:r>
             <a:endParaRPr lang="en-US" sz="3600" dirty="0"/>
           </a:p>
@@ -13003,7 +13419,7 @@
                 <a:ea typeface="Times New Roman" pitchFamily="34" charset="-122"/>
                 <a:cs typeface="Times New Roman" pitchFamily="34" charset="-120"/>
               </a:rPr>
-              <a:t>Strongest in the eye wall; calm in the eye.</a:t>
+              <a:t>What are tropical cyclones called in the Atlantic?</a:t>
             </a:r>
             <a:endParaRPr lang="en-US" sz="4000" dirty="0"/>
           </a:p>
@@ -13115,54 +13531,15 @@
                 <a:ea typeface="Calibri" pitchFamily="34" charset="-122"/>
                 <a:cs typeface="Calibri" pitchFamily="34" charset="-120"/>
               </a:rPr>
-              <a:t>3. EFFECTS AND CONTROL</a:t>
+              <a:t>3. TROPICAL CYCLONES</a:t>
             </a:r>
             <a:endParaRPr lang="en-US" sz="1400" dirty="0"/>
-          </a:p>
-        </p:txBody>
-      </p:sp>
-      <p:sp>
-        <p:nvSpPr>
-          <p:cNvPr id="3" name="Text 1"/>
-          <p:cNvSpPr/>
-          <p:nvPr/>
-        </p:nvSpPr>
-        <p:spPr>
-          <a:xfrm>
-            <a:off x="457200" y="1005840"/>
-            <a:ext cx="11277295" cy="731520"/>
-          </a:xfrm>
-          <a:prstGeom prst="rect">
-            <a:avLst/>
-          </a:prstGeom>
-          <a:noFill/>
-          <a:ln/>
-        </p:spPr>
-        <p:txBody>
-          <a:bodyPr wrap="square" lIns="0" tIns="0" rIns="0" bIns="0" rtlCol="0" anchor="ctr"/>
-          <a:lstStyle/>
-          <a:p>
-            <a:pPr algn="ctr" indent="0" marL="0">
-              <a:buNone/>
-            </a:pPr>
-            <a:r>
-              <a:rPr lang="en-US" sz="3600" b="1" dirty="0">
-                <a:solidFill>
-                  <a:srgbClr val="990011"/>
-                </a:solidFill>
-                <a:latin typeface="Times New Roman" pitchFamily="34" charset="0"/>
-                <a:ea typeface="Times New Roman" pitchFamily="34" charset="-122"/>
-                <a:cs typeface="Times New Roman" pitchFamily="34" charset="-120"/>
-              </a:rPr>
-              <a:t>Activity 5</a:t>
-            </a:r>
-            <a:endParaRPr lang="en-US" sz="3600" dirty="0"/>
           </a:p>
         </p:txBody>
       </p:sp>
       <p:pic>
         <p:nvPicPr>
-          <p:cNvPr id="4" name="Image 0" descr="/home/claude/f4/img/v2/lsa_cyclone.jpg">    </p:cNvPr>
+          <p:cNvPr id="3" name="Image 0" descr="/home/claude/f4/img/minesec_sheet.png">    </p:cNvPr>
           <p:cNvPicPr>
             <a:picLocks noChangeAspect="1"/>
           </p:cNvPicPr>
@@ -13176,8 +13553,8 @@
         </p:blipFill>
         <p:spPr>
           <a:xfrm>
-            <a:off x="2246610" y="1783080"/>
-            <a:ext cx="7698475" cy="4270248"/>
+            <a:off x="0" y="658368"/>
+            <a:ext cx="5120640" cy="5833872"/>
           </a:xfrm>
           <a:prstGeom prst="rect">
             <a:avLst/>
@@ -13186,14 +13563,14 @@
       </p:pic>
       <p:sp>
         <p:nvSpPr>
-          <p:cNvPr id="5" name="Text 2"/>
+          <p:cNvPr id="4" name="Text 1"/>
           <p:cNvSpPr/>
           <p:nvPr/>
         </p:nvSpPr>
         <p:spPr>
           <a:xfrm>
-            <a:off x="457200" y="6089904"/>
-            <a:ext cx="11277295" cy="347472"/>
+            <a:off x="5349240" y="1005840"/>
+            <a:ext cx="6522415" cy="731520"/>
           </a:xfrm>
           <a:prstGeom prst="rect">
             <a:avLst/>
@@ -13202,24 +13579,68 @@
           <a:ln/>
         </p:spPr>
         <p:txBody>
-          <a:bodyPr wrap="square" lIns="0" tIns="0" rIns="0" bIns="0" rtlCol="0" anchor="ctr"/>
+          <a:bodyPr wrap="square" lIns="0" tIns="0" rIns="0" bIns="0" rtlCol="0" anchor="ctr">
+            <a:normAutofit/>
+          </a:bodyPr>
           <a:lstStyle/>
           <a:p>
             <a:pPr algn="ctr" indent="0" marL="0">
               <a:buNone/>
             </a:pPr>
             <a:r>
-              <a:rPr lang="en-US" sz="1800" i="1" dirty="0">
-                <a:solidFill>
-                  <a:srgbClr val="555555"/>
+              <a:rPr lang="en-US" sz="3600" b="1" dirty="0">
+                <a:solidFill>
+                  <a:srgbClr val="990011"/>
                 </a:solidFill>
                 <a:latin typeface="Times New Roman" pitchFamily="34" charset="0"/>
                 <a:ea typeface="Times New Roman" pitchFamily="34" charset="-122"/>
                 <a:cs typeface="Times New Roman" pitchFamily="34" charset="-120"/>
               </a:rPr>
-              <a:t>A damaged home in Bangladesh, a country often hit by cyclones.</a:t>
-            </a:r>
-            <a:endParaRPr lang="en-US" sz="1800" dirty="0"/>
+              <a:t>Activity 4: Answer</a:t>
+            </a:r>
+            <a:endParaRPr lang="en-US" sz="3600" dirty="0"/>
+          </a:p>
+        </p:txBody>
+      </p:sp>
+      <p:sp>
+        <p:nvSpPr>
+          <p:cNvPr id="5" name="Text 2"/>
+          <p:cNvSpPr/>
+          <p:nvPr/>
+        </p:nvSpPr>
+        <p:spPr>
+          <a:xfrm>
+            <a:off x="5349240" y="1783080"/>
+            <a:ext cx="6522415" cy="4663440"/>
+          </a:xfrm>
+          <a:prstGeom prst="rect">
+            <a:avLst/>
+          </a:prstGeom>
+          <a:noFill/>
+          <a:ln/>
+        </p:spPr>
+        <p:txBody>
+          <a:bodyPr wrap="square" lIns="0" tIns="0" rIns="0" bIns="0" rtlCol="0" anchor="t"/>
+          <a:lstStyle/>
+          <a:p>
+            <a:pPr algn="l" indent="0" marL="0">
+              <a:spcAft>
+                <a:spcPts val="800"/>
+              </a:spcAft>
+              <a:buNone/>
+            </a:pPr>
+            <a:r>
+              <a:rPr lang="en-US" sz="4000" dirty="0">
+                <a:solidFill>
+                  <a:srgbClr val="111111"/>
+                </a:solidFill>
+                <a:latin typeface="Times New Roman" pitchFamily="34" charset="0"/>
+                <a:ea typeface="Times New Roman" pitchFamily="34" charset="-122"/>
+                <a:cs typeface="Times New Roman" pitchFamily="34" charset="-120"/>
+              </a:rPr>
+              <a:t>Hurricanes.</a:t>
+            </a:r>
+            <a:endParaRPr lang="en-US" sz="4000" dirty="0"/>
           </a:p>
         </p:txBody>
       </p:sp>
@@ -13329,15 +13750,54 @@
                 <a:ea typeface="Calibri" pitchFamily="34" charset="-122"/>
                 <a:cs typeface="Calibri" pitchFamily="34" charset="-120"/>
               </a:rPr>
-              <a:t>3. EFFECTS AND CONTROL</a:t>
+              <a:t>4. CONTROL MEASURES</a:t>
             </a:r>
             <a:endParaRPr lang="en-US" sz="1400" dirty="0"/>
+          </a:p>
+        </p:txBody>
+      </p:sp>
+      <p:sp>
+        <p:nvSpPr>
+          <p:cNvPr id="3" name="Text 1"/>
+          <p:cNvSpPr/>
+          <p:nvPr/>
+        </p:nvSpPr>
+        <p:spPr>
+          <a:xfrm>
+            <a:off x="457200" y="1005840"/>
+            <a:ext cx="11277295" cy="731520"/>
+          </a:xfrm>
+          <a:prstGeom prst="rect">
+            <a:avLst/>
+          </a:prstGeom>
+          <a:noFill/>
+          <a:ln/>
+        </p:spPr>
+        <p:txBody>
+          <a:bodyPr wrap="square" lIns="0" tIns="0" rIns="0" bIns="0" rtlCol="0" anchor="ctr"/>
+          <a:lstStyle/>
+          <a:p>
+            <a:pPr algn="ctr" indent="0" marL="0">
+              <a:buNone/>
+            </a:pPr>
+            <a:r>
+              <a:rPr lang="en-US" sz="3600" b="1" dirty="0">
+                <a:solidFill>
+                  <a:srgbClr val="990011"/>
+                </a:solidFill>
+                <a:latin typeface="Times New Roman" pitchFamily="34" charset="0"/>
+                <a:ea typeface="Times New Roman" pitchFamily="34" charset="-122"/>
+                <a:cs typeface="Times New Roman" pitchFamily="34" charset="-120"/>
+              </a:rPr>
+              <a:t>Activity 5</a:t>
+            </a:r>
+            <a:endParaRPr lang="en-US" sz="3600" dirty="0"/>
           </a:p>
         </p:txBody>
       </p:sp>
       <p:pic>
         <p:nvPicPr>
-          <p:cNvPr id="3" name="Image 0" descr="/home/claude/f4/img/minesec_sheet.png">    </p:cNvPr>
+          <p:cNvPr id="4" name="Image 0" descr="/home/claude/f4/img/v2/clim2_storm_measures.png">    </p:cNvPr>
           <p:cNvPicPr>
             <a:picLocks noChangeAspect="1"/>
           </p:cNvPicPr>
@@ -13351,8 +13811,8 @@
         </p:blipFill>
         <p:spPr>
           <a:xfrm>
-            <a:off x="0" y="658368"/>
-            <a:ext cx="5120640" cy="5833872"/>
+            <a:off x="629930" y="1783080"/>
+            <a:ext cx="10931835" cy="4270248"/>
           </a:xfrm>
           <a:prstGeom prst="rect">
             <a:avLst/>
@@ -13361,14 +13821,14 @@
       </p:pic>
       <p:sp>
         <p:nvSpPr>
-          <p:cNvPr id="4" name="Text 1"/>
+          <p:cNvPr id="5" name="Text 2"/>
           <p:cNvSpPr/>
           <p:nvPr/>
         </p:nvSpPr>
         <p:spPr>
           <a:xfrm>
-            <a:off x="5349240" y="1005840"/>
-            <a:ext cx="6522415" cy="731520"/>
+            <a:off x="457200" y="6089904"/>
+            <a:ext cx="11277295" cy="347472"/>
           </a:xfrm>
           <a:prstGeom prst="rect">
             <a:avLst/>
@@ -13377,68 +13837,24 @@
           <a:ln/>
         </p:spPr>
         <p:txBody>
-          <a:bodyPr wrap="square" lIns="0" tIns="0" rIns="0" bIns="0" rtlCol="0" anchor="ctr">
-            <a:normAutofit/>
-          </a:bodyPr>
+          <a:bodyPr wrap="square" lIns="0" tIns="0" rIns="0" bIns="0" rtlCol="0" anchor="ctr"/>
           <a:lstStyle/>
           <a:p>
             <a:pPr algn="ctr" indent="0" marL="0">
               <a:buNone/>
             </a:pPr>
             <a:r>
-              <a:rPr lang="en-US" sz="3600" b="1" dirty="0">
-                <a:solidFill>
-                  <a:srgbClr val="990011"/>
+              <a:rPr lang="en-US" sz="1800" i="1" dirty="0">
+                <a:solidFill>
+                  <a:srgbClr val="555555"/>
                 </a:solidFill>
                 <a:latin typeface="Times New Roman" pitchFamily="34" charset="0"/>
                 <a:ea typeface="Times New Roman" pitchFamily="34" charset="-122"/>
                 <a:cs typeface="Times New Roman" pitchFamily="34" charset="-120"/>
               </a:rPr>
-              <a:t>Activity 5: Question</a:t>
-            </a:r>
-            <a:endParaRPr lang="en-US" sz="3600" dirty="0"/>
-          </a:p>
-        </p:txBody>
-      </p:sp>
-      <p:sp>
-        <p:nvSpPr>
-          <p:cNvPr id="5" name="Text 2"/>
-          <p:cNvSpPr/>
-          <p:nvPr/>
-        </p:nvSpPr>
-        <p:spPr>
-          <a:xfrm>
-            <a:off x="5349240" y="1783080"/>
-            <a:ext cx="6522415" cy="4663440"/>
-          </a:xfrm>
-          <a:prstGeom prst="rect">
-            <a:avLst/>
-          </a:prstGeom>
-          <a:noFill/>
-          <a:ln/>
-        </p:spPr>
-        <p:txBody>
-          <a:bodyPr wrap="square" lIns="0" tIns="0" rIns="0" bIns="0" rtlCol="0" anchor="t"/>
-          <a:lstStyle/>
-          <a:p>
-            <a:pPr algn="l" indent="0" marL="0">
-              <a:spcAft>
-                <a:spcPts val="800"/>
-              </a:spcAft>
-              <a:buNone/>
-            </a:pPr>
-            <a:r>
-              <a:rPr lang="en-US" sz="4000" dirty="0">
-                <a:solidFill>
-                  <a:srgbClr val="111111"/>
-                </a:solidFill>
-                <a:latin typeface="Times New Roman" pitchFamily="34" charset="0"/>
-                <a:ea typeface="Times New Roman" pitchFamily="34" charset="-122"/>
-                <a:cs typeface="Times New Roman" pitchFamily="34" charset="-120"/>
-              </a:rPr>
-              <a:t>How can people reduce the damage of cyclones?</a:t>
-            </a:r>
-            <a:endParaRPr lang="en-US" sz="4000" dirty="0"/>
+              <a:t>Reducing storm hazards.</a:t>
+            </a:r>
+            <a:endParaRPr lang="en-US" sz="1800" dirty="0"/>
           </a:p>
         </p:txBody>
       </p:sp>
@@ -13548,7 +13964,7 @@
                 <a:ea typeface="Calibri" pitchFamily="34" charset="-122"/>
                 <a:cs typeface="Calibri" pitchFamily="34" charset="-120"/>
               </a:rPr>
-              <a:t>3. EFFECTS AND CONTROL</a:t>
+              <a:t>4. CONTROL MEASURES</a:t>
             </a:r>
             <a:endParaRPr lang="en-US" sz="1400" dirty="0"/>
           </a:p>
@@ -13613,7 +14029,7 @@
                 <a:ea typeface="Times New Roman" pitchFamily="34" charset="-122"/>
                 <a:cs typeface="Times New Roman" pitchFamily="34" charset="-120"/>
               </a:rPr>
-              <a:t>Activity 5: Answer</a:t>
+              <a:t>Activity 5: Question</a:t>
             </a:r>
             <a:endParaRPr lang="en-US" sz="3600" dirty="0"/>
           </a:p>
@@ -13655,7 +14071,7 @@
                 <a:ea typeface="Times New Roman" pitchFamily="34" charset="-122"/>
                 <a:cs typeface="Times New Roman" pitchFamily="34" charset="-120"/>
               </a:rPr>
-              <a:t>Early warning, evacuation, cyclone shelters and strong buildings.</a:t>
+              <a:t>How can a building be protected from lightning?</a:t>
             </a:r>
             <a:endParaRPr lang="en-US" sz="4000" dirty="0"/>
           </a:p>
@@ -13767,7 +14183,7 @@
                 <a:ea typeface="Calibri" pitchFamily="34" charset="-122"/>
                 <a:cs typeface="Calibri" pitchFamily="34" charset="-120"/>
               </a:rPr>
-              <a:t>BOARD SUMMARY</a:t>
+              <a:t>4. CONTROL MEASURES</a:t>
             </a:r>
             <a:endParaRPr lang="en-US" sz="1400" dirty="0"/>
           </a:p>
@@ -13832,7 +14248,7 @@
                 <a:ea typeface="Times New Roman" pitchFamily="34" charset="-122"/>
                 <a:cs typeface="Times New Roman" pitchFamily="34" charset="-120"/>
               </a:rPr>
-              <a:t>Board Summary</a:t>
+              <a:t>Activity 5: Answer</a:t>
             </a:r>
             <a:endParaRPr lang="en-US" sz="3600" dirty="0"/>
           </a:p>
@@ -13866,7 +14282,7 @@
               <a:buNone/>
             </a:pPr>
             <a:r>
-              <a:rPr lang="en-US" sz="4000" b="1" dirty="0">
+              <a:rPr lang="en-US" sz="4000" dirty="0">
                 <a:solidFill>
                   <a:srgbClr val="111111"/>
                 </a:solidFill>
@@ -13874,47 +14290,7 @@
                 <a:ea typeface="Times New Roman" pitchFamily="34" charset="-122"/>
                 <a:cs typeface="Times New Roman" pitchFamily="34" charset="-120"/>
               </a:rPr>
-              <a:t>Topic: Climates</a:t>
-            </a:r>
-            <a:endParaRPr lang="en-US" sz="4000" dirty="0"/>
-          </a:p>
-          <a:p>
-            <a:pPr algn="l" indent="0" marL="0">
-              <a:spcAft>
-                <a:spcPts val="800"/>
-              </a:spcAft>
-              <a:buNone/>
-            </a:pPr>
-            <a:r>
-              <a:rPr lang="en-US" sz="4000" b="1" dirty="0">
-                <a:solidFill>
-                  <a:srgbClr val="111111"/>
-                </a:solidFill>
-                <a:latin typeface="Times New Roman" pitchFamily="34" charset="0"/>
-                <a:ea typeface="Times New Roman" pitchFamily="34" charset="-122"/>
-                <a:cs typeface="Times New Roman" pitchFamily="34" charset="-120"/>
-              </a:rPr>
-              <a:t>Sub-topic: Air Mass Interactions at Fronts and Convergence Zones</a:t>
-            </a:r>
-            <a:endParaRPr lang="en-US" sz="4000" dirty="0"/>
-          </a:p>
-          <a:p>
-            <a:pPr algn="l" indent="0" marL="0">
-              <a:spcAft>
-                <a:spcPts val="800"/>
-              </a:spcAft>
-              <a:buNone/>
-            </a:pPr>
-            <a:r>
-              <a:rPr lang="en-US" sz="4000" b="1" dirty="0">
-                <a:solidFill>
-                  <a:srgbClr val="990011"/>
-                </a:solidFill>
-                <a:latin typeface="Times New Roman" pitchFamily="34" charset="0"/>
-                <a:ea typeface="Times New Roman" pitchFamily="34" charset="-122"/>
-                <a:cs typeface="Times New Roman" pitchFamily="34" charset="-120"/>
-              </a:rPr>
-              <a:t>Further Study 1: Tropical Weather Disturbances</a:t>
+              <a:t>With a lightning rod (conductor).</a:t>
             </a:r>
             <a:endParaRPr lang="en-US" sz="4000" dirty="0"/>
           </a:p>
@@ -14091,7 +14467,7 @@
                 <a:ea typeface="Times New Roman" pitchFamily="34" charset="-122"/>
                 <a:cs typeface="Times New Roman" pitchFamily="34" charset="-120"/>
               </a:rPr>
-              <a:t>DEFINITIONS</a:t>
+              <a:t>Board Summary</a:t>
             </a:r>
             <a:endParaRPr lang="en-US" sz="3600" dirty="0"/>
           </a:p>
@@ -14125,7 +14501,7 @@
               <a:buNone/>
             </a:pPr>
             <a:r>
-              <a:rPr lang="en-US" sz="4000" i="1" dirty="0">
+              <a:rPr lang="en-US" sz="4000" b="1" dirty="0">
                 <a:solidFill>
                   <a:srgbClr val="111111"/>
                 </a:solidFill>
@@ -14133,7 +14509,7 @@
                 <a:ea typeface="Times New Roman" pitchFamily="34" charset="-122"/>
                 <a:cs typeface="Times New Roman" pitchFamily="34" charset="-120"/>
               </a:rPr>
-              <a:t>The key terms of this lesson are defined as follows:</a:t>
+              <a:t>Topic: Climates</a:t>
             </a:r>
             <a:endParaRPr lang="en-US" sz="4000" dirty="0"/>
           </a:p>
@@ -14153,8 +14529,11 @@
                 <a:ea typeface="Times New Roman" pitchFamily="34" charset="-122"/>
                 <a:cs typeface="Times New Roman" pitchFamily="34" charset="-120"/>
               </a:rPr>
-              <a:t>Thunderstorm: </a:t>
-            </a:r>
+              <a:t>Sub-topic: Air Mass Interactions at Fronts and Convergence Zones</a:t>
+            </a:r>
+            <a:endParaRPr lang="en-US" sz="4000" dirty="0"/>
+          </a:p>
+          <a:p>
             <a:pPr algn="l" indent="0" marL="0">
               <a:spcAft>
                 <a:spcPts val="800"/>
@@ -14162,15 +14541,15 @@
               <a:buNone/>
             </a:pPr>
             <a:r>
-              <a:rPr lang="en-US" sz="4000" dirty="0">
-                <a:solidFill>
-                  <a:srgbClr val="111111"/>
+              <a:rPr lang="en-US" sz="4000" b="1" dirty="0">
+                <a:solidFill>
+                  <a:srgbClr val="990011"/>
                 </a:solidFill>
                 <a:latin typeface="Times New Roman" pitchFamily="34" charset="0"/>
                 <a:ea typeface="Times New Roman" pitchFamily="34" charset="-122"/>
                 <a:cs typeface="Times New Roman" pitchFamily="34" charset="-120"/>
               </a:rPr>
-              <a:t>It is a storm with a cumulonimbus cloud, heavy rain, thunder and lightning.</a:t>
+              <a:t>Further Study 1: Tropical Weather Disturbances</a:t>
             </a:r>
             <a:endParaRPr lang="en-US" sz="4000" dirty="0"/>
           </a:p>
@@ -14347,7 +14726,7 @@
                 <a:ea typeface="Times New Roman" pitchFamily="34" charset="-122"/>
                 <a:cs typeface="Times New Roman" pitchFamily="34" charset="-120"/>
               </a:rPr>
-              <a:t>DEFINITIONS (continued)</a:t>
+              <a:t>DEFINITIONS</a:t>
             </a:r>
             <a:endParaRPr lang="en-US" sz="3600" dirty="0"/>
           </a:p>
@@ -14381,7 +14760,7 @@
               <a:buNone/>
             </a:pPr>
             <a:r>
-              <a:rPr lang="en-US" sz="4000" b="1" dirty="0">
+              <a:rPr lang="en-US" sz="4000" i="1" dirty="0">
                 <a:solidFill>
                   <a:srgbClr val="111111"/>
                 </a:solidFill>
@@ -14389,8 +14768,11 @@
                 <a:ea typeface="Times New Roman" pitchFamily="34" charset="-122"/>
                 <a:cs typeface="Times New Roman" pitchFamily="34" charset="-120"/>
               </a:rPr>
-              <a:t>Tropical cyclone: </a:t>
-            </a:r>
+              <a:t>The key terms of this lesson are defined as follows:</a:t>
+            </a:r>
+            <a:endParaRPr lang="en-US" sz="4000" dirty="0"/>
+          </a:p>
+          <a:p>
             <a:pPr algn="l" indent="0" marL="0">
               <a:spcAft>
                 <a:spcPts val="800"/>
@@ -14398,7 +14780,7 @@
               <a:buNone/>
             </a:pPr>
             <a:r>
-              <a:rPr lang="en-US" sz="4000" dirty="0">
+              <a:rPr lang="en-US" sz="4000" b="1" dirty="0">
                 <a:solidFill>
                   <a:srgbClr val="111111"/>
                 </a:solidFill>
@@ -14406,7 +14788,24 @@
                 <a:ea typeface="Times New Roman" pitchFamily="34" charset="-122"/>
                 <a:cs typeface="Times New Roman" pitchFamily="34" charset="-120"/>
               </a:rPr>
-              <a:t>It is a violent low-pressure storm that forms over warm tropical oceans, with winds above 119 km/h.</a:t>
+              <a:t>Thunderstorm: </a:t>
+            </a:r>
+            <a:pPr algn="l" indent="0" marL="0">
+              <a:spcAft>
+                <a:spcPts val="800"/>
+              </a:spcAft>
+              <a:buNone/>
+            </a:pPr>
+            <a:r>
+              <a:rPr lang="en-US" sz="4000" dirty="0">
+                <a:solidFill>
+                  <a:srgbClr val="111111"/>
+                </a:solidFill>
+                <a:latin typeface="Times New Roman" pitchFamily="34" charset="0"/>
+                <a:ea typeface="Times New Roman" pitchFamily="34" charset="-122"/>
+                <a:cs typeface="Times New Roman" pitchFamily="34" charset="-120"/>
+              </a:rPr>
+              <a:t>It is a local storm from a cumulonimbus cloud, with lightning, thunder, strong winds and heavy rain or hail.</a:t>
             </a:r>
             <a:endParaRPr lang="en-US" sz="4000" dirty="0"/>
           </a:p>
@@ -14541,7 +14940,7 @@
         <p:spPr>
           <a:xfrm>
             <a:off x="0" y="658368"/>
-            <a:ext cx="2468880" cy="5833872"/>
+            <a:ext cx="1463040" cy="5833872"/>
           </a:xfrm>
           <a:prstGeom prst="rect">
             <a:avLst/>
@@ -14556,8 +14955,8 @@
         </p:nvSpPr>
         <p:spPr>
           <a:xfrm>
-            <a:off x="2697480" y="1005840"/>
-            <a:ext cx="9174175" cy="731520"/>
+            <a:off x="1691640" y="1005840"/>
+            <a:ext cx="10180015" cy="731520"/>
           </a:xfrm>
           <a:prstGeom prst="rect">
             <a:avLst/>
@@ -14583,7 +14982,7 @@
                 <a:ea typeface="Times New Roman" pitchFamily="34" charset="-122"/>
                 <a:cs typeface="Times New Roman" pitchFamily="34" charset="-120"/>
               </a:rPr>
-              <a:t>1. Thunderstorms</a:t>
+              <a:t>DEFINITIONS (continued)</a:t>
             </a:r>
             <a:endParaRPr lang="en-US" sz="3600" dirty="0"/>
           </a:p>
@@ -14597,8 +14996,8 @@
         </p:nvSpPr>
         <p:spPr>
           <a:xfrm>
-            <a:off x="2697480" y="1783080"/>
-            <a:ext cx="9174175" cy="4663440"/>
+            <a:off x="1691640" y="1783080"/>
+            <a:ext cx="10180015" cy="4663440"/>
           </a:xfrm>
           <a:prstGeom prst="rect">
             <a:avLst/>
@@ -14617,7 +15016,7 @@
               <a:buNone/>
             </a:pPr>
             <a:r>
-              <a:rPr lang="en-US" sz="4000" i="1" dirty="0">
+              <a:rPr lang="en-US" sz="4000" b="1" dirty="0">
                 <a:solidFill>
                   <a:srgbClr val="111111"/>
                 </a:solidFill>
@@ -14625,11 +15024,8 @@
                 <a:ea typeface="Times New Roman" pitchFamily="34" charset="-122"/>
                 <a:cs typeface="Times New Roman" pitchFamily="34" charset="-120"/>
               </a:rPr>
-              <a:t>Thunderstorms can be studied under the following points:</a:t>
-            </a:r>
-            <a:endParaRPr lang="en-US" sz="4000" dirty="0"/>
-          </a:p>
-          <a:p>
+              <a:t>Tornado: </a:t>
+            </a:r>
             <a:pPr algn="l" indent="0" marL="0">
               <a:spcAft>
                 <a:spcPts val="800"/>
@@ -14637,7 +15033,7 @@
               <a:buNone/>
             </a:pPr>
             <a:r>
-              <a:rPr lang="en-US" sz="4000" b="1" dirty="0">
+              <a:rPr lang="en-US" sz="4000" dirty="0">
                 <a:solidFill>
                   <a:srgbClr val="111111"/>
                 </a:solidFill>
@@ -14645,8 +15041,11 @@
                 <a:ea typeface="Times New Roman" pitchFamily="34" charset="-122"/>
                 <a:cs typeface="Times New Roman" pitchFamily="34" charset="-120"/>
               </a:rPr>
-              <a:t>Formation: </a:t>
-            </a:r>
+              <a:t>It is a violently rotating narrow column of air extending from a thunderstorm to the ground.</a:t>
+            </a:r>
+            <a:endParaRPr lang="en-US" sz="4000" dirty="0"/>
+          </a:p>
+          <a:p>
             <a:pPr algn="l" indent="0" marL="0">
               <a:spcAft>
                 <a:spcPts val="800"/>
@@ -14654,7 +15053,7 @@
               <a:buNone/>
             </a:pPr>
             <a:r>
-              <a:rPr lang="en-US" sz="4000" dirty="0">
+              <a:rPr lang="en-US" sz="4000" b="1" dirty="0">
                 <a:solidFill>
                   <a:srgbClr val="111111"/>
                 </a:solidFill>
@@ -14662,7 +15061,24 @@
                 <a:ea typeface="Times New Roman" pitchFamily="34" charset="-122"/>
                 <a:cs typeface="Times New Roman" pitchFamily="34" charset="-120"/>
               </a:rPr>
-              <a:t>They form in hot, humid and unstable air, when strong up-currents build a cumulonimbus cloud. They are very common in Cameroon at the start and end of the rainy season.</a:t>
+              <a:t>Tropical cyclone: </a:t>
+            </a:r>
+            <a:pPr algn="l" indent="0" marL="0">
+              <a:spcAft>
+                <a:spcPts val="800"/>
+              </a:spcAft>
+              <a:buNone/>
+            </a:pPr>
+            <a:r>
+              <a:rPr lang="en-US" sz="4000" dirty="0">
+                <a:solidFill>
+                  <a:srgbClr val="111111"/>
+                </a:solidFill>
+                <a:latin typeface="Times New Roman" pitchFamily="34" charset="0"/>
+                <a:ea typeface="Times New Roman" pitchFamily="34" charset="-122"/>
+                <a:cs typeface="Times New Roman" pitchFamily="34" charset="-120"/>
+              </a:rPr>
+              <a:t>It is a very large rotating storm system with a low-pressure centre, strong winds and heavy rain, formed over warm tropical seas.</a:t>
             </a:r>
             <a:endParaRPr lang="en-US" sz="4000" dirty="0"/>
           </a:p>
@@ -14839,7 +15255,7 @@
                 <a:ea typeface="Times New Roman" pitchFamily="34" charset="-122"/>
                 <a:cs typeface="Times New Roman" pitchFamily="34" charset="-120"/>
               </a:rPr>
-              <a:t>1. Thunderstorms (continued)</a:t>
+              <a:t>DEFINITIONS (continued)</a:t>
             </a:r>
             <a:endParaRPr lang="en-US" sz="3600" dirty="0"/>
           </a:p>
@@ -14881,7 +15297,7 @@
                 <a:ea typeface="Times New Roman" pitchFamily="34" charset="-122"/>
                 <a:cs typeface="Times New Roman" pitchFamily="34" charset="-120"/>
               </a:rPr>
-              <a:t>Stages: </a:t>
+              <a:t>Storm surge: </a:t>
             </a:r>
             <a:pPr algn="l" indent="0" marL="0">
               <a:spcAft>
@@ -14898,7 +15314,7 @@
                 <a:ea typeface="Times New Roman" pitchFamily="34" charset="-122"/>
                 <a:cs typeface="Times New Roman" pitchFamily="34" charset="-120"/>
               </a:rPr>
-              <a:t>In the cumulus stage, the cloud grows upwards. In the mature stage, there is heavy rain, thunder, lightning and hail; in the dissipating stage, down-currents weaken it.</a:t>
+              <a:t>It is an abnormal rise of the sea level caused by a storm.</a:t>
             </a:r>
             <a:endParaRPr lang="en-US" sz="4000" dirty="0"/>
           </a:p>
@@ -15016,9 +15432,129 @@
           </a:p>
         </p:txBody>
       </p:sp>
+      <p:sp>
+        <p:nvSpPr>
+          <p:cNvPr id="3" name="Text 1"/>
+          <p:cNvSpPr/>
+          <p:nvPr/>
+        </p:nvSpPr>
+        <p:spPr>
+          <a:xfrm>
+            <a:off x="365760" y="1005840"/>
+            <a:ext cx="11460175" cy="731520"/>
+          </a:xfrm>
+          <a:prstGeom prst="rect">
+            <a:avLst/>
+          </a:prstGeom>
+          <a:noFill/>
+          <a:ln/>
+        </p:spPr>
+        <p:txBody>
+          <a:bodyPr wrap="square" lIns="0" tIns="0" rIns="0" bIns="0" rtlCol="0" anchor="ctr">
+            <a:normAutofit/>
+          </a:bodyPr>
+          <a:lstStyle/>
+          <a:p>
+            <a:pPr algn="ctr" indent="0" marL="0">
+              <a:buNone/>
+            </a:pPr>
+            <a:r>
+              <a:rPr lang="en-US" sz="3600" b="1" dirty="0">
+                <a:solidFill>
+                  <a:srgbClr val="990011"/>
+                </a:solidFill>
+                <a:latin typeface="Times New Roman" pitchFamily="34" charset="0"/>
+                <a:ea typeface="Times New Roman" pitchFamily="34" charset="-122"/>
+                <a:cs typeface="Times New Roman" pitchFamily="34" charset="-120"/>
+              </a:rPr>
+              <a:t>1. Thunderstorms</a:t>
+            </a:r>
+            <a:endParaRPr lang="en-US" sz="3600" dirty="0"/>
+          </a:p>
+        </p:txBody>
+      </p:sp>
+      <p:sp>
+        <p:nvSpPr>
+          <p:cNvPr id="4" name="Text 2"/>
+          <p:cNvSpPr/>
+          <p:nvPr/>
+        </p:nvSpPr>
+        <p:spPr>
+          <a:xfrm>
+            <a:off x="365760" y="1783080"/>
+            <a:ext cx="4846320" cy="4617720"/>
+          </a:xfrm>
+          <a:prstGeom prst="rect">
+            <a:avLst/>
+          </a:prstGeom>
+          <a:noFill/>
+          <a:ln/>
+        </p:spPr>
+        <p:txBody>
+          <a:bodyPr wrap="square" lIns="0" tIns="0" rIns="0" bIns="0" rtlCol="0" anchor="t"/>
+          <a:lstStyle/>
+          <a:p>
+            <a:pPr algn="l" indent="0" marL="0">
+              <a:spcAft>
+                <a:spcPts val="800"/>
+              </a:spcAft>
+              <a:buNone/>
+            </a:pPr>
+            <a:r>
+              <a:rPr lang="en-US" sz="3600" i="1" dirty="0">
+                <a:solidFill>
+                  <a:srgbClr val="111111"/>
+                </a:solidFill>
+                <a:latin typeface="Times New Roman" pitchFamily="34" charset="0"/>
+                <a:ea typeface="Times New Roman" pitchFamily="34" charset="-122"/>
+                <a:cs typeface="Times New Roman" pitchFamily="34" charset="-120"/>
+              </a:rPr>
+              <a:t>Thunderstorms are presented as follows:</a:t>
+            </a:r>
+            <a:endParaRPr lang="en-US" sz="3600" dirty="0"/>
+          </a:p>
+          <a:p>
+            <a:pPr algn="l" indent="0" marL="0">
+              <a:spcAft>
+                <a:spcPts val="800"/>
+              </a:spcAft>
+              <a:buNone/>
+            </a:pPr>
+            <a:r>
+              <a:rPr lang="en-US" sz="3600" b="1" dirty="0">
+                <a:solidFill>
+                  <a:srgbClr val="111111"/>
+                </a:solidFill>
+                <a:latin typeface="Times New Roman" pitchFamily="34" charset="0"/>
+                <a:ea typeface="Times New Roman" pitchFamily="34" charset="-122"/>
+                <a:cs typeface="Times New Roman" pitchFamily="34" charset="-120"/>
+              </a:rPr>
+              <a:t>Distribution: </a:t>
+            </a:r>
+            <a:pPr algn="l" indent="0" marL="0">
+              <a:spcAft>
+                <a:spcPts val="800"/>
+              </a:spcAft>
+              <a:buNone/>
+            </a:pPr>
+            <a:r>
+              <a:rPr lang="en-US" sz="3600" dirty="0">
+                <a:solidFill>
+                  <a:srgbClr val="111111"/>
+                </a:solidFill>
+                <a:latin typeface="Times New Roman" pitchFamily="34" charset="0"/>
+                <a:ea typeface="Times New Roman" pitchFamily="34" charset="-122"/>
+                <a:cs typeface="Times New Roman" pitchFamily="34" charset="-120"/>
+              </a:rPr>
+              <a:t>They are very common in hot, humid regions, such as Central Africa and Garoua in the rainy season.</a:t>
+            </a:r>
+            <a:endParaRPr lang="en-US" sz="3600" dirty="0"/>
+          </a:p>
+        </p:txBody>
+      </p:sp>
       <p:pic>
         <p:nvPicPr>
-          <p:cNvPr id="3" name="Image 0" descr="/home/claude/f4/img/minesec_sheet.png">    </p:cNvPr>
+          <p:cNvPr id="5" name="Image 0" descr="/home/claude/f4/img/v2/f4_cumulonimbus.jpg">    </p:cNvPr>
           <p:cNvPicPr>
             <a:picLocks noChangeAspect="1"/>
           </p:cNvPicPr>
@@ -15032,8 +15568,8 @@
         </p:blipFill>
         <p:spPr>
           <a:xfrm>
-            <a:off x="0" y="658368"/>
-            <a:ext cx="5120640" cy="5833872"/>
+            <a:off x="5349240" y="2070172"/>
+            <a:ext cx="6659575" cy="3696064"/>
           </a:xfrm>
           <a:prstGeom prst="rect">
             <a:avLst/>
@@ -15042,14 +15578,14 @@
       </p:pic>
       <p:sp>
         <p:nvSpPr>
-          <p:cNvPr id="4" name="Text 1"/>
+          <p:cNvPr id="6" name="Text 3"/>
           <p:cNvSpPr/>
           <p:nvPr/>
         </p:nvSpPr>
         <p:spPr>
           <a:xfrm>
-            <a:off x="5349240" y="1005840"/>
-            <a:ext cx="6522415" cy="731520"/>
+            <a:off x="5349240" y="6089904"/>
+            <a:ext cx="6659575" cy="347472"/>
           </a:xfrm>
           <a:prstGeom prst="rect">
             <a:avLst/>
@@ -15058,85 +15594,24 @@
           <a:ln/>
         </p:spPr>
         <p:txBody>
-          <a:bodyPr wrap="square" lIns="0" tIns="0" rIns="0" bIns="0" rtlCol="0" anchor="ctr">
-            <a:normAutofit/>
-          </a:bodyPr>
+          <a:bodyPr wrap="square" lIns="0" tIns="0" rIns="0" bIns="0" rtlCol="0" anchor="ctr"/>
           <a:lstStyle/>
           <a:p>
             <a:pPr algn="ctr" indent="0" marL="0">
               <a:buNone/>
             </a:pPr>
             <a:r>
-              <a:rPr lang="en-US" sz="3600" b="1" dirty="0">
-                <a:solidFill>
-                  <a:srgbClr val="990011"/>
+              <a:rPr lang="en-US" sz="1600" i="1" dirty="0">
+                <a:solidFill>
+                  <a:srgbClr val="555555"/>
                 </a:solidFill>
                 <a:latin typeface="Times New Roman" pitchFamily="34" charset="0"/>
                 <a:ea typeface="Times New Roman" pitchFamily="34" charset="-122"/>
                 <a:cs typeface="Times New Roman" pitchFamily="34" charset="-120"/>
               </a:rPr>
-              <a:t>1. Thunderstorms (continued)</a:t>
-            </a:r>
-            <a:endParaRPr lang="en-US" sz="3600" dirty="0"/>
-          </a:p>
-        </p:txBody>
-      </p:sp>
-      <p:sp>
-        <p:nvSpPr>
-          <p:cNvPr id="5" name="Text 2"/>
-          <p:cNvSpPr/>
-          <p:nvPr/>
-        </p:nvSpPr>
-        <p:spPr>
-          <a:xfrm>
-            <a:off x="5349240" y="1783080"/>
-            <a:ext cx="6522415" cy="4663440"/>
-          </a:xfrm>
-          <a:prstGeom prst="rect">
-            <a:avLst/>
-          </a:prstGeom>
-          <a:noFill/>
-          <a:ln/>
-        </p:spPr>
-        <p:txBody>
-          <a:bodyPr wrap="square" lIns="0" tIns="0" rIns="0" bIns="0" rtlCol="0" anchor="t"/>
-          <a:lstStyle/>
-          <a:p>
-            <a:pPr algn="l" indent="0" marL="0">
-              <a:spcAft>
-                <a:spcPts val="800"/>
-              </a:spcAft>
-              <a:buNone/>
-            </a:pPr>
-            <a:r>
-              <a:rPr lang="en-US" sz="4000" b="1" dirty="0">
-                <a:solidFill>
-                  <a:srgbClr val="111111"/>
-                </a:solidFill>
-                <a:latin typeface="Times New Roman" pitchFamily="34" charset="0"/>
-                <a:ea typeface="Times New Roman" pitchFamily="34" charset="-122"/>
-                <a:cs typeface="Times New Roman" pitchFamily="34" charset="-120"/>
-              </a:rPr>
-              <a:t>Effects: </a:t>
-            </a:r>
-            <a:pPr algn="l" indent="0" marL="0">
-              <a:spcAft>
-                <a:spcPts val="800"/>
-              </a:spcAft>
-              <a:buNone/>
-            </a:pPr>
-            <a:r>
-              <a:rPr lang="en-US" sz="4000" dirty="0">
-                <a:solidFill>
-                  <a:srgbClr val="111111"/>
-                </a:solidFill>
-                <a:latin typeface="Times New Roman" pitchFamily="34" charset="0"/>
-                <a:ea typeface="Times New Roman" pitchFamily="34" charset="-122"/>
-                <a:cs typeface="Times New Roman" pitchFamily="34" charset="-120"/>
-              </a:rPr>
-              <a:t>Lightning kills people and animals and starts fires. Heavy rain and strong winds cause floods and destroy roofs and crops.</a:t>
-            </a:r>
-            <a:endParaRPr lang="en-US" sz="4000" dirty="0"/>
+              <a:t>Illustration: a cumulonimbus</a:t>
+            </a:r>
+            <a:endParaRPr lang="en-US" sz="1600" dirty="0"/>
           </a:p>
         </p:txBody>
       </p:sp>
@@ -15373,7 +15848,7 @@
                 <a:ea typeface="Times New Roman" pitchFamily="34" charset="-122"/>
                 <a:cs typeface="Times New Roman" pitchFamily="34" charset="-120"/>
               </a:rPr>
-              <a:t>Find the Köppen code of Douala, Maroua and Paris.</a:t>
+              <a:t>Name the cloud that produces thunderstorms.</a:t>
             </a:r>
             <a:endParaRPr lang="en-US" sz="4000" dirty="0"/>
           </a:p>
@@ -15499,8 +15974,8 @@
         </p:nvSpPr>
         <p:spPr>
           <a:xfrm>
-            <a:off x="457200" y="1005840"/>
-            <a:ext cx="11277295" cy="731520"/>
+            <a:off x="365760" y="1005840"/>
+            <a:ext cx="11460175" cy="731520"/>
           </a:xfrm>
           <a:prstGeom prst="rect">
             <a:avLst/>
@@ -15509,7 +15984,9 @@
           <a:ln/>
         </p:spPr>
         <p:txBody>
-          <a:bodyPr wrap="square" lIns="0" tIns="0" rIns="0" bIns="0" rtlCol="0" anchor="ctr"/>
+          <a:bodyPr wrap="square" lIns="0" tIns="0" rIns="0" bIns="0" rtlCol="0" anchor="ctr">
+            <a:normAutofit/>
+          </a:bodyPr>
           <a:lstStyle/>
           <a:p>
             <a:pPr algn="ctr" indent="0" marL="0">
@@ -15530,9 +16007,68 @@
           </a:p>
         </p:txBody>
       </p:sp>
+      <p:sp>
+        <p:nvSpPr>
+          <p:cNvPr id="4" name="Text 2"/>
+          <p:cNvSpPr/>
+          <p:nvPr/>
+        </p:nvSpPr>
+        <p:spPr>
+          <a:xfrm>
+            <a:off x="365760" y="1783080"/>
+            <a:ext cx="4846320" cy="4617720"/>
+          </a:xfrm>
+          <a:prstGeom prst="rect">
+            <a:avLst/>
+          </a:prstGeom>
+          <a:noFill/>
+          <a:ln/>
+        </p:spPr>
+        <p:txBody>
+          <a:bodyPr wrap="square" lIns="0" tIns="0" rIns="0" bIns="0" rtlCol="0" anchor="t"/>
+          <a:lstStyle/>
+          <a:p>
+            <a:pPr algn="l" indent="0" marL="0">
+              <a:spcAft>
+                <a:spcPts val="800"/>
+              </a:spcAft>
+              <a:buNone/>
+            </a:pPr>
+            <a:r>
+              <a:rPr lang="en-US" sz="3600" b="1" dirty="0">
+                <a:solidFill>
+                  <a:srgbClr val="111111"/>
+                </a:solidFill>
+                <a:latin typeface="Times New Roman" pitchFamily="34" charset="0"/>
+                <a:ea typeface="Times New Roman" pitchFamily="34" charset="-122"/>
+                <a:cs typeface="Times New Roman" pitchFamily="34" charset="-120"/>
+              </a:rPr>
+              <a:t>Causes: </a:t>
+            </a:r>
+            <a:pPr algn="l" indent="0" marL="0">
+              <a:spcAft>
+                <a:spcPts val="800"/>
+              </a:spcAft>
+              <a:buNone/>
+            </a:pPr>
+            <a:r>
+              <a:rPr lang="en-US" sz="3600" dirty="0">
+                <a:solidFill>
+                  <a:srgbClr val="111111"/>
+                </a:solidFill>
+                <a:latin typeface="Times New Roman" pitchFamily="34" charset="0"/>
+                <a:ea typeface="Times New Roman" pitchFamily="34" charset="-122"/>
+                <a:cs typeface="Times New Roman" pitchFamily="34" charset="-120"/>
+              </a:rPr>
+              <a:t>Strong heating makes moist air rise quickly (convection) in unstable air; condensation releases latent heat and builds a tall cumulonimbus with electric charges.</a:t>
+            </a:r>
+            <a:endParaRPr lang="en-US" sz="3600" dirty="0"/>
+          </a:p>
+        </p:txBody>
+      </p:sp>
       <p:pic>
         <p:nvPicPr>
-          <p:cNvPr id="4" name="Image 0" descr="/home/claude/f4/img/v2/thunderstorm_big.png">    </p:cNvPr>
+          <p:cNvPr id="5" name="Image 0" descr="/home/claude/f4/img/v2/thunderstorm_big.png">    </p:cNvPr>
           <p:cNvPicPr>
             <a:picLocks noChangeAspect="1"/>
           </p:cNvPicPr>
@@ -15546,8 +16082,8 @@
         </p:blipFill>
         <p:spPr>
           <a:xfrm>
-            <a:off x="629930" y="1783080"/>
-            <a:ext cx="10931835" cy="4270248"/>
+            <a:off x="5349240" y="2617506"/>
+            <a:ext cx="6659575" cy="2601397"/>
           </a:xfrm>
           <a:prstGeom prst="rect">
             <a:avLst/>
@@ -15556,14 +16092,14 @@
       </p:pic>
       <p:sp>
         <p:nvSpPr>
-          <p:cNvPr id="5" name="Text 2"/>
+          <p:cNvPr id="6" name="Text 3"/>
           <p:cNvSpPr/>
           <p:nvPr/>
         </p:nvSpPr>
         <p:spPr>
           <a:xfrm>
-            <a:off x="457200" y="6089904"/>
-            <a:ext cx="11277295" cy="347472"/>
+            <a:off x="5349240" y="6089904"/>
+            <a:ext cx="6659575" cy="347472"/>
           </a:xfrm>
           <a:prstGeom prst="rect">
             <a:avLst/>
@@ -15579,7 +16115,7 @@
               <a:buNone/>
             </a:pPr>
             <a:r>
-              <a:rPr lang="en-US" sz="1800" i="1" dirty="0">
+              <a:rPr lang="en-US" sz="1600" i="1" dirty="0">
                 <a:solidFill>
                   <a:srgbClr val="555555"/>
                 </a:solidFill>
@@ -15587,9 +16123,9 @@
                 <a:ea typeface="Times New Roman" pitchFamily="34" charset="-122"/>
                 <a:cs typeface="Times New Roman" pitchFamily="34" charset="-120"/>
               </a:rPr>
-              <a:t>Illustration: stages of a thunderstorm</a:t>
-            </a:r>
-            <a:endParaRPr lang="en-US" sz="1800" dirty="0"/>
+              <a:t>Illustration: the life of a thunderstorm</a:t>
+            </a:r>
+            <a:endParaRPr lang="en-US" sz="1600" dirty="0"/>
           </a:p>
         </p:txBody>
       </p:sp>
@@ -15722,7 +16258,7 @@
         <p:spPr>
           <a:xfrm>
             <a:off x="0" y="658368"/>
-            <a:ext cx="2468880" cy="5833872"/>
+            <a:ext cx="1463040" cy="5833872"/>
           </a:xfrm>
           <a:prstGeom prst="rect">
             <a:avLst/>
@@ -15737,8 +16273,8 @@
         </p:nvSpPr>
         <p:spPr>
           <a:xfrm>
-            <a:off x="2697480" y="1005840"/>
-            <a:ext cx="9174175" cy="731520"/>
+            <a:off x="1691640" y="1005840"/>
+            <a:ext cx="10180015" cy="731520"/>
           </a:xfrm>
           <a:prstGeom prst="rect">
             <a:avLst/>
@@ -15764,7 +16300,7 @@
                 <a:ea typeface="Times New Roman" pitchFamily="34" charset="-122"/>
                 <a:cs typeface="Times New Roman" pitchFamily="34" charset="-120"/>
               </a:rPr>
-              <a:t>2. Tropical Cyclones</a:t>
+              <a:t>1. Thunderstorms</a:t>
             </a:r>
             <a:endParaRPr lang="en-US" sz="3600" dirty="0"/>
           </a:p>
@@ -15778,8 +16314,8 @@
         </p:nvSpPr>
         <p:spPr>
           <a:xfrm>
-            <a:off x="2697480" y="1783080"/>
-            <a:ext cx="9174175" cy="4663440"/>
+            <a:off x="1691640" y="1783080"/>
+            <a:ext cx="10180015" cy="4663440"/>
           </a:xfrm>
           <a:prstGeom prst="rect">
             <a:avLst/>
@@ -15798,7 +16334,7 @@
               <a:buNone/>
             </a:pPr>
             <a:r>
-              <a:rPr lang="en-US" sz="4000" i="1" dirty="0">
+              <a:rPr lang="en-US" sz="4000" b="1" dirty="0">
                 <a:solidFill>
                   <a:srgbClr val="111111"/>
                 </a:solidFill>
@@ -15806,19 +16342,20 @@
                 <a:ea typeface="Times New Roman" pitchFamily="34" charset="-122"/>
                 <a:cs typeface="Times New Roman" pitchFamily="34" charset="-120"/>
               </a:rPr>
-              <a:t>Tropical cyclones can be studied as follows:</a:t>
+              <a:t>Consequences:</a:t>
             </a:r>
             <a:endParaRPr lang="en-US" sz="4000" dirty="0"/>
           </a:p>
           <a:p>
-            <a:pPr algn="l" indent="0" marL="0">
+            <a:pPr algn="l" marL="342900" indent="-342900">
               <a:spcAft>
                 <a:spcPts val="800"/>
               </a:spcAft>
-              <a:buNone/>
-            </a:pPr>
-            <a:r>
-              <a:rPr lang="en-US" sz="4000" b="1" dirty="0">
+              <a:buSzPct val="100000"/>
+              <a:buChar char="•"/>
+            </a:pPr>
+            <a:r>
+              <a:rPr lang="en-US" sz="4000" dirty="0">
                 <a:solidFill>
                   <a:srgbClr val="111111"/>
                 </a:solidFill>
@@ -15826,13 +16363,17 @@
                 <a:ea typeface="Times New Roman" pitchFamily="34" charset="-122"/>
                 <a:cs typeface="Times New Roman" pitchFamily="34" charset="-120"/>
               </a:rPr>
-              <a:t>Conditions of formation: </a:t>
-            </a:r>
-            <a:pPr algn="l" indent="0" marL="0">
+              <a:t>Flash floods from intense rain.</a:t>
+            </a:r>
+            <a:endParaRPr lang="en-US" sz="4000" dirty="0"/>
+          </a:p>
+          <a:p>
+            <a:pPr algn="l" marL="342900" indent="-342900">
               <a:spcAft>
                 <a:spcPts val="800"/>
               </a:spcAft>
-              <a:buNone/>
+              <a:buSzPct val="100000"/>
+              <a:buChar char="•"/>
             </a:pPr>
             <a:r>
               <a:rPr lang="en-US" sz="4000" dirty="0">
@@ -15843,7 +16384,49 @@
                 <a:ea typeface="Times New Roman" pitchFamily="34" charset="-122"/>
                 <a:cs typeface="Times New Roman" pitchFamily="34" charset="-120"/>
               </a:rPr>
-              <a:t>They form over oceans warmer than 26.5 °C, between 5° and 20° of latitude, where the Coriolis force can make the air spin. They lose strength over land.</a:t>
+              <a:t>Lightning that kills people and animals and starts fires.</a:t>
+            </a:r>
+            <a:endParaRPr lang="en-US" sz="4000" dirty="0"/>
+          </a:p>
+          <a:p>
+            <a:pPr algn="l" marL="342900" indent="-342900">
+              <a:spcAft>
+                <a:spcPts val="800"/>
+              </a:spcAft>
+              <a:buSzPct val="100000"/>
+              <a:buChar char="•"/>
+            </a:pPr>
+            <a:r>
+              <a:rPr lang="en-US" sz="4000" dirty="0">
+                <a:solidFill>
+                  <a:srgbClr val="111111"/>
+                </a:solidFill>
+                <a:latin typeface="Times New Roman" pitchFamily="34" charset="0"/>
+                <a:ea typeface="Times New Roman" pitchFamily="34" charset="-122"/>
+                <a:cs typeface="Times New Roman" pitchFamily="34" charset="-120"/>
+              </a:rPr>
+              <a:t>Strong winds that damage roofs and trees.</a:t>
+            </a:r>
+            <a:endParaRPr lang="en-US" sz="4000" dirty="0"/>
+          </a:p>
+          <a:p>
+            <a:pPr algn="l" marL="342900" indent="-342900">
+              <a:spcAft>
+                <a:spcPts val="800"/>
+              </a:spcAft>
+              <a:buSzPct val="100000"/>
+              <a:buChar char="•"/>
+            </a:pPr>
+            <a:r>
+              <a:rPr lang="en-US" sz="4000" dirty="0">
+                <a:solidFill>
+                  <a:srgbClr val="111111"/>
+                </a:solidFill>
+                <a:latin typeface="Times New Roman" pitchFamily="34" charset="0"/>
+                <a:ea typeface="Times New Roman" pitchFamily="34" charset="-122"/>
+                <a:cs typeface="Times New Roman" pitchFamily="34" charset="-120"/>
+              </a:rPr>
+              <a:t>Hail that destroys crops.</a:t>
             </a:r>
             <a:endParaRPr lang="en-US" sz="4000" dirty="0"/>
           </a:p>
@@ -15961,9 +16544,129 @@
           </a:p>
         </p:txBody>
       </p:sp>
+      <p:sp>
+        <p:nvSpPr>
+          <p:cNvPr id="3" name="Text 1"/>
+          <p:cNvSpPr/>
+          <p:nvPr/>
+        </p:nvSpPr>
+        <p:spPr>
+          <a:xfrm>
+            <a:off x="365760" y="1005840"/>
+            <a:ext cx="11460175" cy="731520"/>
+          </a:xfrm>
+          <a:prstGeom prst="rect">
+            <a:avLst/>
+          </a:prstGeom>
+          <a:noFill/>
+          <a:ln/>
+        </p:spPr>
+        <p:txBody>
+          <a:bodyPr wrap="square" lIns="0" tIns="0" rIns="0" bIns="0" rtlCol="0" anchor="ctr">
+            <a:normAutofit/>
+          </a:bodyPr>
+          <a:lstStyle/>
+          <a:p>
+            <a:pPr algn="ctr" indent="0" marL="0">
+              <a:buNone/>
+            </a:pPr>
+            <a:r>
+              <a:rPr lang="en-US" sz="3600" b="1" dirty="0">
+                <a:solidFill>
+                  <a:srgbClr val="990011"/>
+                </a:solidFill>
+                <a:latin typeface="Times New Roman" pitchFamily="34" charset="0"/>
+                <a:ea typeface="Times New Roman" pitchFamily="34" charset="-122"/>
+                <a:cs typeface="Times New Roman" pitchFamily="34" charset="-120"/>
+              </a:rPr>
+              <a:t>2. Tornadoes</a:t>
+            </a:r>
+            <a:endParaRPr lang="en-US" sz="3600" dirty="0"/>
+          </a:p>
+        </p:txBody>
+      </p:sp>
+      <p:sp>
+        <p:nvSpPr>
+          <p:cNvPr id="4" name="Text 2"/>
+          <p:cNvSpPr/>
+          <p:nvPr/>
+        </p:nvSpPr>
+        <p:spPr>
+          <a:xfrm>
+            <a:off x="365760" y="1783080"/>
+            <a:ext cx="4846320" cy="4617720"/>
+          </a:xfrm>
+          <a:prstGeom prst="rect">
+            <a:avLst/>
+          </a:prstGeom>
+          <a:noFill/>
+          <a:ln/>
+        </p:spPr>
+        <p:txBody>
+          <a:bodyPr wrap="square" lIns="0" tIns="0" rIns="0" bIns="0" rtlCol="0" anchor="t"/>
+          <a:lstStyle/>
+          <a:p>
+            <a:pPr algn="l" indent="0" marL="0">
+              <a:spcAft>
+                <a:spcPts val="800"/>
+              </a:spcAft>
+              <a:buNone/>
+            </a:pPr>
+            <a:r>
+              <a:rPr lang="en-US" sz="3600" i="1" dirty="0">
+                <a:solidFill>
+                  <a:srgbClr val="111111"/>
+                </a:solidFill>
+                <a:latin typeface="Times New Roman" pitchFamily="34" charset="0"/>
+                <a:ea typeface="Times New Roman" pitchFamily="34" charset="-122"/>
+                <a:cs typeface="Times New Roman" pitchFamily="34" charset="-120"/>
+              </a:rPr>
+              <a:t>Tornadoes are presented as follows:</a:t>
+            </a:r>
+            <a:endParaRPr lang="en-US" sz="3600" dirty="0"/>
+          </a:p>
+          <a:p>
+            <a:pPr algn="l" indent="0" marL="0">
+              <a:spcAft>
+                <a:spcPts val="800"/>
+              </a:spcAft>
+              <a:buNone/>
+            </a:pPr>
+            <a:r>
+              <a:rPr lang="en-US" sz="3600" b="1" dirty="0">
+                <a:solidFill>
+                  <a:srgbClr val="111111"/>
+                </a:solidFill>
+                <a:latin typeface="Times New Roman" pitchFamily="34" charset="0"/>
+                <a:ea typeface="Times New Roman" pitchFamily="34" charset="-122"/>
+                <a:cs typeface="Times New Roman" pitchFamily="34" charset="-120"/>
+              </a:rPr>
+              <a:t>Distribution: </a:t>
+            </a:r>
+            <a:pPr algn="l" indent="0" marL="0">
+              <a:spcAft>
+                <a:spcPts val="800"/>
+              </a:spcAft>
+              <a:buNone/>
+            </a:pPr>
+            <a:r>
+              <a:rPr lang="en-US" sz="3600" dirty="0">
+                <a:solidFill>
+                  <a:srgbClr val="111111"/>
+                </a:solidFill>
+                <a:latin typeface="Times New Roman" pitchFamily="34" charset="0"/>
+                <a:ea typeface="Times New Roman" pitchFamily="34" charset="-122"/>
+                <a:cs typeface="Times New Roman" pitchFamily="34" charset="-120"/>
+              </a:rPr>
+              <a:t>They occur in many regions but are most frequent and violent in the central USA ("Tornado Alley").</a:t>
+            </a:r>
+            <a:endParaRPr lang="en-US" sz="3600" dirty="0"/>
+          </a:p>
+        </p:txBody>
+      </p:sp>
       <p:pic>
         <p:nvPicPr>
-          <p:cNvPr id="3" name="Image 0" descr="/home/claude/f4/img/minesec_sheet.png">    </p:cNvPr>
+          <p:cNvPr id="5" name="Image 0" descr="/home/claude/f4/img/v2/clim2_storms.png">    </p:cNvPr>
           <p:cNvPicPr>
             <a:picLocks noChangeAspect="1"/>
           </p:cNvPicPr>
@@ -15977,8 +16680,8 @@
         </p:blipFill>
         <p:spPr>
           <a:xfrm>
-            <a:off x="0" y="658368"/>
-            <a:ext cx="5120640" cy="5833872"/>
+            <a:off x="5349240" y="2617506"/>
+            <a:ext cx="6659575" cy="2601397"/>
           </a:xfrm>
           <a:prstGeom prst="rect">
             <a:avLst/>
@@ -15987,14 +16690,14 @@
       </p:pic>
       <p:sp>
         <p:nvSpPr>
-          <p:cNvPr id="4" name="Text 1"/>
+          <p:cNvPr id="6" name="Text 3"/>
           <p:cNvSpPr/>
           <p:nvPr/>
         </p:nvSpPr>
         <p:spPr>
           <a:xfrm>
-            <a:off x="5349240" y="1005840"/>
-            <a:ext cx="6522415" cy="731520"/>
+            <a:off x="5349240" y="6089904"/>
+            <a:ext cx="6659575" cy="347472"/>
           </a:xfrm>
           <a:prstGeom prst="rect">
             <a:avLst/>
@@ -16003,85 +16706,24 @@
           <a:ln/>
         </p:spPr>
         <p:txBody>
-          <a:bodyPr wrap="square" lIns="0" tIns="0" rIns="0" bIns="0" rtlCol="0" anchor="ctr">
-            <a:normAutofit/>
-          </a:bodyPr>
+          <a:bodyPr wrap="square" lIns="0" tIns="0" rIns="0" bIns="0" rtlCol="0" anchor="ctr"/>
           <a:lstStyle/>
           <a:p>
             <a:pPr algn="ctr" indent="0" marL="0">
               <a:buNone/>
             </a:pPr>
             <a:r>
-              <a:rPr lang="en-US" sz="3600" b="1" dirty="0">
-                <a:solidFill>
-                  <a:srgbClr val="990011"/>
+              <a:rPr lang="en-US" sz="1600" i="1" dirty="0">
+                <a:solidFill>
+                  <a:srgbClr val="555555"/>
                 </a:solidFill>
                 <a:latin typeface="Times New Roman" pitchFamily="34" charset="0"/>
                 <a:ea typeface="Times New Roman" pitchFamily="34" charset="-122"/>
                 <a:cs typeface="Times New Roman" pitchFamily="34" charset="-120"/>
               </a:rPr>
-              <a:t>2. Tropical Cyclones (continued)</a:t>
-            </a:r>
-            <a:endParaRPr lang="en-US" sz="3600" dirty="0"/>
-          </a:p>
-        </p:txBody>
-      </p:sp>
-      <p:sp>
-        <p:nvSpPr>
-          <p:cNvPr id="5" name="Text 2"/>
-          <p:cNvSpPr/>
-          <p:nvPr/>
-        </p:nvSpPr>
-        <p:spPr>
-          <a:xfrm>
-            <a:off x="5349240" y="1783080"/>
-            <a:ext cx="6522415" cy="4663440"/>
-          </a:xfrm>
-          <a:prstGeom prst="rect">
-            <a:avLst/>
-          </a:prstGeom>
-          <a:noFill/>
-          <a:ln/>
-        </p:spPr>
-        <p:txBody>
-          <a:bodyPr wrap="square" lIns="0" tIns="0" rIns="0" bIns="0" rtlCol="0" anchor="t"/>
-          <a:lstStyle/>
-          <a:p>
-            <a:pPr algn="l" indent="0" marL="0">
-              <a:spcAft>
-                <a:spcPts val="800"/>
-              </a:spcAft>
-              <a:buNone/>
-            </a:pPr>
-            <a:r>
-              <a:rPr lang="en-US" sz="4000" b="1" dirty="0">
-                <a:solidFill>
-                  <a:srgbClr val="111111"/>
-                </a:solidFill>
-                <a:latin typeface="Times New Roman" pitchFamily="34" charset="0"/>
-                <a:ea typeface="Times New Roman" pitchFamily="34" charset="-122"/>
-                <a:cs typeface="Times New Roman" pitchFamily="34" charset="-120"/>
-              </a:rPr>
-              <a:t>Structure: </a:t>
-            </a:r>
-            <a:pPr algn="l" indent="0" marL="0">
-              <a:spcAft>
-                <a:spcPts val="800"/>
-              </a:spcAft>
-              <a:buNone/>
-            </a:pPr>
-            <a:r>
-              <a:rPr lang="en-US" sz="4000" dirty="0">
-                <a:solidFill>
-                  <a:srgbClr val="111111"/>
-                </a:solidFill>
-                <a:latin typeface="Times New Roman" pitchFamily="34" charset="0"/>
-                <a:ea typeface="Times New Roman" pitchFamily="34" charset="-122"/>
-                <a:cs typeface="Times New Roman" pitchFamily="34" charset="-120"/>
-              </a:rPr>
-              <a:t>The calm, clear eye is surrounded by the eye wall with the strongest winds and rain. Spiral rain bands turn around the centre.</a:t>
-            </a:r>
-            <a:endParaRPr lang="en-US" sz="4000" dirty="0"/>
+              <a:t>Illustration: three storms compared</a:t>
+            </a:r>
+            <a:endParaRPr lang="en-US" sz="1600" dirty="0"/>
           </a:p>
         </p:txBody>
       </p:sp>
@@ -16214,7 +16856,7 @@
         <p:spPr>
           <a:xfrm>
             <a:off x="0" y="658368"/>
-            <a:ext cx="5120640" cy="5833872"/>
+            <a:ext cx="1463040" cy="5833872"/>
           </a:xfrm>
           <a:prstGeom prst="rect">
             <a:avLst/>
@@ -16229,8 +16871,8 @@
         </p:nvSpPr>
         <p:spPr>
           <a:xfrm>
-            <a:off x="5349240" y="1005840"/>
-            <a:ext cx="6522415" cy="731520"/>
+            <a:off x="1691640" y="1005840"/>
+            <a:ext cx="10180015" cy="731520"/>
           </a:xfrm>
           <a:prstGeom prst="rect">
             <a:avLst/>
@@ -16256,7 +16898,7 @@
                 <a:ea typeface="Times New Roman" pitchFamily="34" charset="-122"/>
                 <a:cs typeface="Times New Roman" pitchFamily="34" charset="-120"/>
               </a:rPr>
-              <a:t>2. Tropical Cyclones (continued)</a:t>
+              <a:t>2. Tornadoes</a:t>
             </a:r>
             <a:endParaRPr lang="en-US" sz="3600" dirty="0"/>
           </a:p>
@@ -16270,8 +16912,8 @@
         </p:nvSpPr>
         <p:spPr>
           <a:xfrm>
-            <a:off x="5349240" y="1783080"/>
-            <a:ext cx="6522415" cy="4663440"/>
+            <a:off x="1691640" y="1783080"/>
+            <a:ext cx="10180015" cy="4663440"/>
           </a:xfrm>
           <a:prstGeom prst="rect">
             <a:avLst/>
@@ -16298,7 +16940,7 @@
                 <a:ea typeface="Times New Roman" pitchFamily="34" charset="-122"/>
                 <a:cs typeface="Times New Roman" pitchFamily="34" charset="-120"/>
               </a:rPr>
-              <a:t>Names and areas: </a:t>
+              <a:t>Causes: </a:t>
             </a:r>
             <a:pPr algn="l" indent="0" marL="0">
               <a:spcAft>
@@ -16315,7 +16957,44 @@
                 <a:ea typeface="Times New Roman" pitchFamily="34" charset="-122"/>
                 <a:cs typeface="Times New Roman" pitchFamily="34" charset="-120"/>
               </a:rPr>
-              <a:t>They are called hurricanes in the Caribbean, typhoons in East Asia and cyclones in the Indian Ocean. They are rare in the Gulf of Guinea.</a:t>
+              <a:t>They form in the most severe thunderstorms (supercells), where changes of wind speed and direction with height (wind shear) make the air rotate.</a:t>
+            </a:r>
+            <a:endParaRPr lang="en-US" sz="4000" dirty="0"/>
+          </a:p>
+          <a:p>
+            <a:pPr algn="l" indent="0" marL="0">
+              <a:spcAft>
+                <a:spcPts val="800"/>
+              </a:spcAft>
+              <a:buNone/>
+            </a:pPr>
+            <a:r>
+              <a:rPr lang="en-US" sz="4000" b="1" dirty="0">
+                <a:solidFill>
+                  <a:srgbClr val="111111"/>
+                </a:solidFill>
+                <a:latin typeface="Times New Roman" pitchFamily="34" charset="0"/>
+                <a:ea typeface="Times New Roman" pitchFamily="34" charset="-122"/>
+                <a:cs typeface="Times New Roman" pitchFamily="34" charset="-120"/>
+              </a:rPr>
+              <a:t>Consequences: </a:t>
+            </a:r>
+            <a:pPr algn="l" indent="0" marL="0">
+              <a:spcAft>
+                <a:spcPts val="800"/>
+              </a:spcAft>
+              <a:buNone/>
+            </a:pPr>
+            <a:r>
+              <a:rPr lang="en-US" sz="4000" dirty="0">
+                <a:solidFill>
+                  <a:srgbClr val="111111"/>
+                </a:solidFill>
+                <a:latin typeface="Times New Roman" pitchFamily="34" charset="0"/>
+                <a:ea typeface="Times New Roman" pitchFamily="34" charset="-122"/>
+                <a:cs typeface="Times New Roman" pitchFamily="34" charset="-120"/>
+              </a:rPr>
+              <a:t>Winds can exceed 400 km/h and turn debris into missiles, but the path is narrow (usually less than 1–2 km).</a:t>
             </a:r>
             <a:endParaRPr lang="en-US" sz="4000" dirty="0"/>
           </a:p>
@@ -16441,8 +17120,8 @@
         </p:nvSpPr>
         <p:spPr>
           <a:xfrm>
-            <a:off x="457200" y="1005840"/>
-            <a:ext cx="11277295" cy="731520"/>
+            <a:off x="365760" y="1005840"/>
+            <a:ext cx="11460175" cy="731520"/>
           </a:xfrm>
           <a:prstGeom prst="rect">
             <a:avLst/>
@@ -16451,7 +17130,9 @@
           <a:ln/>
         </p:spPr>
         <p:txBody>
-          <a:bodyPr wrap="square" lIns="0" tIns="0" rIns="0" bIns="0" rtlCol="0" anchor="ctr"/>
+          <a:bodyPr wrap="square" lIns="0" tIns="0" rIns="0" bIns="0" rtlCol="0" anchor="ctr">
+            <a:normAutofit/>
+          </a:bodyPr>
           <a:lstStyle/>
           <a:p>
             <a:pPr algn="ctr" indent="0" marL="0">
@@ -16466,7 +17147,86 @@
                 <a:ea typeface="Times New Roman" pitchFamily="34" charset="-122"/>
                 <a:cs typeface="Times New Roman" pitchFamily="34" charset="-120"/>
               </a:rPr>
-              <a:t>2. Tropical Cyclones</a:t>
+              <a:t>3. Tropical Cyclones</a:t>
+            </a:r>
+            <a:endParaRPr lang="en-US" sz="3600" dirty="0"/>
+          </a:p>
+        </p:txBody>
+      </p:sp>
+      <p:sp>
+        <p:nvSpPr>
+          <p:cNvPr id="4" name="Text 2"/>
+          <p:cNvSpPr/>
+          <p:nvPr/>
+        </p:nvSpPr>
+        <p:spPr>
+          <a:xfrm>
+            <a:off x="365760" y="1783080"/>
+            <a:ext cx="4846320" cy="4617720"/>
+          </a:xfrm>
+          <a:prstGeom prst="rect">
+            <a:avLst/>
+          </a:prstGeom>
+          <a:noFill/>
+          <a:ln/>
+        </p:spPr>
+        <p:txBody>
+          <a:bodyPr wrap="square" lIns="0" tIns="0" rIns="0" bIns="0" rtlCol="0" anchor="t"/>
+          <a:lstStyle/>
+          <a:p>
+            <a:pPr algn="l" indent="0" marL="0">
+              <a:spcAft>
+                <a:spcPts val="800"/>
+              </a:spcAft>
+              <a:buNone/>
+            </a:pPr>
+            <a:r>
+              <a:rPr lang="en-US" sz="3600" i="1" dirty="0">
+                <a:solidFill>
+                  <a:srgbClr val="111111"/>
+                </a:solidFill>
+                <a:latin typeface="Times New Roman" pitchFamily="34" charset="0"/>
+                <a:ea typeface="Times New Roman" pitchFamily="34" charset="-122"/>
+                <a:cs typeface="Times New Roman" pitchFamily="34" charset="-120"/>
+              </a:rPr>
+              <a:t>Tropical cyclones are presented as follows:</a:t>
+            </a:r>
+            <a:endParaRPr lang="en-US" sz="3600" dirty="0"/>
+          </a:p>
+          <a:p>
+            <a:pPr algn="l" indent="0" marL="0">
+              <a:spcAft>
+                <a:spcPts val="800"/>
+              </a:spcAft>
+              <a:buNone/>
+            </a:pPr>
+            <a:r>
+              <a:rPr lang="en-US" sz="3600" b="1" dirty="0">
+                <a:solidFill>
+                  <a:srgbClr val="111111"/>
+                </a:solidFill>
+                <a:latin typeface="Times New Roman" pitchFamily="34" charset="0"/>
+                <a:ea typeface="Times New Roman" pitchFamily="34" charset="-122"/>
+                <a:cs typeface="Times New Roman" pitchFamily="34" charset="-120"/>
+              </a:rPr>
+              <a:t>Names: </a:t>
+            </a:r>
+            <a:pPr algn="l" indent="0" marL="0">
+              <a:spcAft>
+                <a:spcPts val="800"/>
+              </a:spcAft>
+              <a:buNone/>
+            </a:pPr>
+            <a:r>
+              <a:rPr lang="en-US" sz="3600" dirty="0">
+                <a:solidFill>
+                  <a:srgbClr val="111111"/>
+                </a:solidFill>
+                <a:latin typeface="Times New Roman" pitchFamily="34" charset="0"/>
+                <a:ea typeface="Times New Roman" pitchFamily="34" charset="-122"/>
+                <a:cs typeface="Times New Roman" pitchFamily="34" charset="-120"/>
+              </a:rPr>
+              <a:t>They are hurricanes in the Atlantic, typhoons in the north-west Pacific and cyclones in the Indian Ocean.</a:t>
             </a:r>
             <a:endParaRPr lang="en-US" sz="3600" dirty="0"/>
           </a:p>
@@ -16474,7 +17234,7 @@
       </p:sp>
       <p:pic>
         <p:nvPicPr>
-          <p:cNvPr id="4" name="Image 0" descr="/home/claude/f4/img/v2/cyclone_big.png">    </p:cNvPr>
+          <p:cNvPr id="5" name="Image 0" descr="/home/claude/f4/img/v2/cyclone_big.png">    </p:cNvPr>
           <p:cNvPicPr>
             <a:picLocks noChangeAspect="1"/>
           </p:cNvPicPr>
@@ -16488,8 +17248,8 @@
         </p:blipFill>
         <p:spPr>
           <a:xfrm>
-            <a:off x="629930" y="1783080"/>
-            <a:ext cx="10931835" cy="4270248"/>
+            <a:off x="5349240" y="2617506"/>
+            <a:ext cx="6659575" cy="2601397"/>
           </a:xfrm>
           <a:prstGeom prst="rect">
             <a:avLst/>
@@ -16498,14 +17258,14 @@
       </p:pic>
       <p:sp>
         <p:nvSpPr>
-          <p:cNvPr id="5" name="Text 2"/>
+          <p:cNvPr id="6" name="Text 3"/>
           <p:cNvSpPr/>
           <p:nvPr/>
         </p:nvSpPr>
         <p:spPr>
           <a:xfrm>
-            <a:off x="457200" y="6089904"/>
-            <a:ext cx="11277295" cy="347472"/>
+            <a:off x="5349240" y="6089904"/>
+            <a:ext cx="6659575" cy="347472"/>
           </a:xfrm>
           <a:prstGeom prst="rect">
             <a:avLst/>
@@ -16521,7 +17281,7 @@
               <a:buNone/>
             </a:pPr>
             <a:r>
-              <a:rPr lang="en-US" sz="1800" i="1" dirty="0">
+              <a:rPr lang="en-US" sz="1600" i="1" dirty="0">
                 <a:solidFill>
                   <a:srgbClr val="555555"/>
                 </a:solidFill>
@@ -16529,9 +17289,9 @@
                 <a:ea typeface="Times New Roman" pitchFamily="34" charset="-122"/>
                 <a:cs typeface="Times New Roman" pitchFamily="34" charset="-120"/>
               </a:rPr>
-              <a:t>Illustration: structure of a tropical cyclone</a:t>
-            </a:r>
-            <a:endParaRPr lang="en-US" sz="1800" dirty="0"/>
+              <a:t>Illustration: a tropical cyclone</a:t>
+            </a:r>
+            <a:endParaRPr lang="en-US" sz="1600" dirty="0"/>
           </a:p>
         </p:txBody>
       </p:sp>
@@ -16664,7 +17424,7 @@
         <p:spPr>
           <a:xfrm>
             <a:off x="0" y="658368"/>
-            <a:ext cx="3840480" cy="5833872"/>
+            <a:ext cx="5120640" cy="5833872"/>
           </a:xfrm>
           <a:prstGeom prst="rect">
             <a:avLst/>
@@ -16679,8 +17439,8 @@
         </p:nvSpPr>
         <p:spPr>
           <a:xfrm>
-            <a:off x="4069080" y="1005840"/>
-            <a:ext cx="7802575" cy="731520"/>
+            <a:off x="5349240" y="1005840"/>
+            <a:ext cx="6522415" cy="731520"/>
           </a:xfrm>
           <a:prstGeom prst="rect">
             <a:avLst/>
@@ -16706,7 +17466,7 @@
                 <a:ea typeface="Times New Roman" pitchFamily="34" charset="-122"/>
                 <a:cs typeface="Times New Roman" pitchFamily="34" charset="-120"/>
               </a:rPr>
-              <a:t>3. Effects and Control</a:t>
+              <a:t>3. Tropical Cyclones</a:t>
             </a:r>
             <a:endParaRPr lang="en-US" sz="3600" dirty="0"/>
           </a:p>
@@ -16720,8 +17480,8 @@
         </p:nvSpPr>
         <p:spPr>
           <a:xfrm>
-            <a:off x="4069080" y="1783080"/>
-            <a:ext cx="7802575" cy="4663440"/>
+            <a:off x="5349240" y="1783080"/>
+            <a:ext cx="6522415" cy="4663440"/>
           </a:xfrm>
           <a:prstGeom prst="rect">
             <a:avLst/>
@@ -16740,7 +17500,7 @@
               <a:buNone/>
             </a:pPr>
             <a:r>
-              <a:rPr lang="en-US" sz="4000" i="1" dirty="0">
+              <a:rPr lang="en-US" sz="4000" b="1" dirty="0">
                 <a:solidFill>
                   <a:srgbClr val="111111"/>
                 </a:solidFill>
@@ -16748,11 +17508,8 @@
                 <a:ea typeface="Times New Roman" pitchFamily="34" charset="-122"/>
                 <a:cs typeface="Times New Roman" pitchFamily="34" charset="-120"/>
               </a:rPr>
-              <a:t>The effects and control of tropical disturbances are:</a:t>
-            </a:r>
-            <a:endParaRPr lang="en-US" sz="4000" dirty="0"/>
-          </a:p>
-          <a:p>
+              <a:t>Distribution: </a:t>
+            </a:r>
             <a:pPr algn="l" indent="0" marL="0">
               <a:spcAft>
                 <a:spcPts val="800"/>
@@ -16760,7 +17517,7 @@
               <a:buNone/>
             </a:pPr>
             <a:r>
-              <a:rPr lang="en-US" sz="4000" b="1" dirty="0">
+              <a:rPr lang="en-US" sz="4000" dirty="0">
                 <a:solidFill>
                   <a:srgbClr val="111111"/>
                 </a:solidFill>
@@ -16768,24 +17525,7 @@
                 <a:ea typeface="Times New Roman" pitchFamily="34" charset="-122"/>
                 <a:cs typeface="Times New Roman" pitchFamily="34" charset="-120"/>
               </a:rPr>
-              <a:t>Effects: </a:t>
-            </a:r>
-            <a:pPr algn="l" indent="0" marL="0">
-              <a:spcAft>
-                <a:spcPts val="800"/>
-              </a:spcAft>
-              <a:buNone/>
-            </a:pPr>
-            <a:r>
-              <a:rPr lang="en-US" sz="4000" dirty="0">
-                <a:solidFill>
-                  <a:srgbClr val="111111"/>
-                </a:solidFill>
-                <a:latin typeface="Times New Roman" pitchFamily="34" charset="0"/>
-                <a:ea typeface="Times New Roman" pitchFamily="34" charset="-122"/>
-                <a:cs typeface="Times New Roman" pitchFamily="34" charset="-120"/>
-              </a:rPr>
-              <a:t>Cyclones cause destructive winds, storm surges and floods that kill thousands of people. They destroy houses, crops, roads and power lines.</a:t>
+              <a:t>They form over warm oceans between about 5° and 20° N and S; they are almost absent from the South Atlantic, so the coast of Cameroon is rarely hit.</a:t>
             </a:r>
             <a:endParaRPr lang="en-US" sz="4000" dirty="0"/>
           </a:p>
@@ -16903,9 +17643,109 @@
           </a:p>
         </p:txBody>
       </p:sp>
+      <p:sp>
+        <p:nvSpPr>
+          <p:cNvPr id="3" name="Text 1"/>
+          <p:cNvSpPr/>
+          <p:nvPr/>
+        </p:nvSpPr>
+        <p:spPr>
+          <a:xfrm>
+            <a:off x="365760" y="1005840"/>
+            <a:ext cx="11460175" cy="731520"/>
+          </a:xfrm>
+          <a:prstGeom prst="rect">
+            <a:avLst/>
+          </a:prstGeom>
+          <a:noFill/>
+          <a:ln/>
+        </p:spPr>
+        <p:txBody>
+          <a:bodyPr wrap="square" lIns="0" tIns="0" rIns="0" bIns="0" rtlCol="0" anchor="ctr">
+            <a:normAutofit/>
+          </a:bodyPr>
+          <a:lstStyle/>
+          <a:p>
+            <a:pPr algn="ctr" indent="0" marL="0">
+              <a:buNone/>
+            </a:pPr>
+            <a:r>
+              <a:rPr lang="en-US" sz="3600" b="1" dirty="0">
+                <a:solidFill>
+                  <a:srgbClr val="990011"/>
+                </a:solidFill>
+                <a:latin typeface="Times New Roman" pitchFamily="34" charset="0"/>
+                <a:ea typeface="Times New Roman" pitchFamily="34" charset="-122"/>
+                <a:cs typeface="Times New Roman" pitchFamily="34" charset="-120"/>
+              </a:rPr>
+              <a:t>3. Tropical Cyclones</a:t>
+            </a:r>
+            <a:endParaRPr lang="en-US" sz="3600" dirty="0"/>
+          </a:p>
+        </p:txBody>
+      </p:sp>
+      <p:sp>
+        <p:nvSpPr>
+          <p:cNvPr id="4" name="Text 2"/>
+          <p:cNvSpPr/>
+          <p:nvPr/>
+        </p:nvSpPr>
+        <p:spPr>
+          <a:xfrm>
+            <a:off x="365760" y="1783080"/>
+            <a:ext cx="4846320" cy="4617720"/>
+          </a:xfrm>
+          <a:prstGeom prst="rect">
+            <a:avLst/>
+          </a:prstGeom>
+          <a:noFill/>
+          <a:ln/>
+        </p:spPr>
+        <p:txBody>
+          <a:bodyPr wrap="square" lIns="0" tIns="0" rIns="0" bIns="0" rtlCol="0" anchor="t"/>
+          <a:lstStyle/>
+          <a:p>
+            <a:pPr algn="l" indent="0" marL="0">
+              <a:spcAft>
+                <a:spcPts val="800"/>
+              </a:spcAft>
+              <a:buNone/>
+            </a:pPr>
+            <a:r>
+              <a:rPr lang="en-US" sz="3600" b="1" dirty="0">
+                <a:solidFill>
+                  <a:srgbClr val="111111"/>
+                </a:solidFill>
+                <a:latin typeface="Times New Roman" pitchFamily="34" charset="0"/>
+                <a:ea typeface="Times New Roman" pitchFamily="34" charset="-122"/>
+                <a:cs typeface="Times New Roman" pitchFamily="34" charset="-120"/>
+              </a:rPr>
+              <a:t>Causes: </a:t>
+            </a:r>
+            <a:pPr algn="l" indent="0" marL="0">
+              <a:spcAft>
+                <a:spcPts val="800"/>
+              </a:spcAft>
+              <a:buNone/>
+            </a:pPr>
+            <a:r>
+              <a:rPr lang="en-US" sz="3600" dirty="0">
+                <a:solidFill>
+                  <a:srgbClr val="111111"/>
+                </a:solidFill>
+                <a:latin typeface="Times New Roman" pitchFamily="34" charset="0"/>
+                <a:ea typeface="Times New Roman" pitchFamily="34" charset="-122"/>
+                <a:cs typeface="Times New Roman" pitchFamily="34" charset="-120"/>
+              </a:rPr>
+              <a:t>Sea water above 26.5 °C supplies heat and moisture, rising air forms deep low pressure, and the Coriolis effect makes it spin.</a:t>
+            </a:r>
+            <a:endParaRPr lang="en-US" sz="3600" dirty="0"/>
+          </a:p>
+        </p:txBody>
+      </p:sp>
       <p:pic>
         <p:nvPicPr>
-          <p:cNvPr id="3" name="Image 0" descr="/home/claude/f4/img/minesec_sheet.png">    </p:cNvPr>
+          <p:cNvPr id="5" name="Image 0" descr="/home/claude/f4/img/v2/f4_hurricane.jpg">    </p:cNvPr>
           <p:cNvPicPr>
             <a:picLocks noChangeAspect="1"/>
           </p:cNvPicPr>
@@ -16919,8 +17759,8 @@
         </p:blipFill>
         <p:spPr>
           <a:xfrm>
-            <a:off x="0" y="658368"/>
-            <a:ext cx="5120640" cy="5833872"/>
+            <a:off x="5349240" y="2071212"/>
+            <a:ext cx="6659575" cy="3693983"/>
           </a:xfrm>
           <a:prstGeom prst="rect">
             <a:avLst/>
@@ -16929,14 +17769,14 @@
       </p:pic>
       <p:sp>
         <p:nvSpPr>
-          <p:cNvPr id="4" name="Text 1"/>
+          <p:cNvPr id="6" name="Text 3"/>
           <p:cNvSpPr/>
           <p:nvPr/>
         </p:nvSpPr>
         <p:spPr>
           <a:xfrm>
-            <a:off x="5349240" y="1005840"/>
-            <a:ext cx="6522415" cy="731520"/>
+            <a:off x="5349240" y="6089904"/>
+            <a:ext cx="6659575" cy="347472"/>
           </a:xfrm>
           <a:prstGeom prst="rect">
             <a:avLst/>
@@ -16945,85 +17785,24 @@
           <a:ln/>
         </p:spPr>
         <p:txBody>
-          <a:bodyPr wrap="square" lIns="0" tIns="0" rIns="0" bIns="0" rtlCol="0" anchor="ctr">
-            <a:normAutofit/>
-          </a:bodyPr>
+          <a:bodyPr wrap="square" lIns="0" tIns="0" rIns="0" bIns="0" rtlCol="0" anchor="ctr"/>
           <a:lstStyle/>
           <a:p>
             <a:pPr algn="ctr" indent="0" marL="0">
               <a:buNone/>
             </a:pPr>
             <a:r>
-              <a:rPr lang="en-US" sz="3600" b="1" dirty="0">
-                <a:solidFill>
-                  <a:srgbClr val="990011"/>
+              <a:rPr lang="en-US" sz="1600" i="1" dirty="0">
+                <a:solidFill>
+                  <a:srgbClr val="555555"/>
                 </a:solidFill>
                 <a:latin typeface="Times New Roman" pitchFamily="34" charset="0"/>
                 <a:ea typeface="Times New Roman" pitchFamily="34" charset="-122"/>
                 <a:cs typeface="Times New Roman" pitchFamily="34" charset="-120"/>
               </a:rPr>
-              <a:t>3. Effects and Control (continued)</a:t>
-            </a:r>
-            <a:endParaRPr lang="en-US" sz="3600" dirty="0"/>
-          </a:p>
-        </p:txBody>
-      </p:sp>
-      <p:sp>
-        <p:nvSpPr>
-          <p:cNvPr id="5" name="Text 2"/>
-          <p:cNvSpPr/>
-          <p:nvPr/>
-        </p:nvSpPr>
-        <p:spPr>
-          <a:xfrm>
-            <a:off x="5349240" y="1783080"/>
-            <a:ext cx="6522415" cy="4663440"/>
-          </a:xfrm>
-          <a:prstGeom prst="rect">
-            <a:avLst/>
-          </a:prstGeom>
-          <a:noFill/>
-          <a:ln/>
-        </p:spPr>
-        <p:txBody>
-          <a:bodyPr wrap="square" lIns="0" tIns="0" rIns="0" bIns="0" rtlCol="0" anchor="t"/>
-          <a:lstStyle/>
-          <a:p>
-            <a:pPr algn="l" indent="0" marL="0">
-              <a:spcAft>
-                <a:spcPts val="800"/>
-              </a:spcAft>
-              <a:buNone/>
-            </a:pPr>
-            <a:r>
-              <a:rPr lang="en-US" sz="4000" b="1" dirty="0">
-                <a:solidFill>
-                  <a:srgbClr val="111111"/>
-                </a:solidFill>
-                <a:latin typeface="Times New Roman" pitchFamily="34" charset="0"/>
-                <a:ea typeface="Times New Roman" pitchFamily="34" charset="-122"/>
-                <a:cs typeface="Times New Roman" pitchFamily="34" charset="-120"/>
-              </a:rPr>
-              <a:t>Control and prevention: </a:t>
-            </a:r>
-            <a:pPr algn="l" indent="0" marL="0">
-              <a:spcAft>
-                <a:spcPts val="800"/>
-              </a:spcAft>
-              <a:buNone/>
-            </a:pPr>
-            <a:r>
-              <a:rPr lang="en-US" sz="4000" dirty="0">
-                <a:solidFill>
-                  <a:srgbClr val="111111"/>
-                </a:solidFill>
-                <a:latin typeface="Times New Roman" pitchFamily="34" charset="0"/>
-                <a:ea typeface="Times New Roman" pitchFamily="34" charset="-122"/>
-                <a:cs typeface="Times New Roman" pitchFamily="34" charset="-120"/>
-              </a:rPr>
-              <a:t>Satellites and radar give early warnings, and people are evacuated to shelters. Strong buildings, lightning conductors and mangrove protection reduce damage.</a:t>
-            </a:r>
-            <a:endParaRPr lang="en-US" sz="4000" dirty="0"/>
+              <a:t>Illustration: a hurricane from space</a:t>
+            </a:r>
+            <a:endParaRPr lang="en-US" sz="1600" dirty="0"/>
           </a:p>
         </p:txBody>
       </p:sp>
@@ -17133,7 +17912,7 @@
                 <a:ea typeface="Calibri" pitchFamily="34" charset="-122"/>
                 <a:cs typeface="Calibri" pitchFamily="34" charset="-120"/>
               </a:rPr>
-              <a:t>FORMATIVE EVALUATION</a:t>
+              <a:t>BOARD SUMMARY</a:t>
             </a:r>
             <a:endParaRPr lang="en-US" sz="1400" dirty="0"/>
           </a:p>
@@ -17156,7 +17935,7 @@
         <p:spPr>
           <a:xfrm>
             <a:off x="0" y="658368"/>
-            <a:ext cx="5120640" cy="5833872"/>
+            <a:ext cx="2468880" cy="5833872"/>
           </a:xfrm>
           <a:prstGeom prst="rect">
             <a:avLst/>
@@ -17171,8 +17950,8 @@
         </p:nvSpPr>
         <p:spPr>
           <a:xfrm>
-            <a:off x="5349240" y="1005840"/>
-            <a:ext cx="6522415" cy="731520"/>
+            <a:off x="2697480" y="1005840"/>
+            <a:ext cx="9174175" cy="731520"/>
           </a:xfrm>
           <a:prstGeom prst="rect">
             <a:avLst/>
@@ -17198,7 +17977,7 @@
                 <a:ea typeface="Times New Roman" pitchFamily="34" charset="-122"/>
                 <a:cs typeface="Times New Roman" pitchFamily="34" charset="-120"/>
               </a:rPr>
-              <a:t>Evaluation 1</a:t>
+              <a:t>3. Tropical Cyclones</a:t>
             </a:r>
             <a:endParaRPr lang="en-US" sz="3600" dirty="0"/>
           </a:p>
@@ -17212,8 +17991,8 @@
         </p:nvSpPr>
         <p:spPr>
           <a:xfrm>
-            <a:off x="5349240" y="1783080"/>
-            <a:ext cx="6522415" cy="4663440"/>
+            <a:off x="2697480" y="1783080"/>
+            <a:ext cx="9174175" cy="4663440"/>
           </a:xfrm>
           <a:prstGeom prst="rect">
             <a:avLst/>
@@ -17232,7 +18011,7 @@
               <a:buNone/>
             </a:pPr>
             <a:r>
-              <a:rPr lang="en-US" sz="4000" dirty="0">
+              <a:rPr lang="en-US" sz="4000" b="1" dirty="0">
                 <a:solidFill>
                   <a:srgbClr val="111111"/>
                 </a:solidFill>
@@ -17240,7 +18019,70 @@
                 <a:ea typeface="Times New Roman" pitchFamily="34" charset="-122"/>
                 <a:cs typeface="Times New Roman" pitchFamily="34" charset="-120"/>
               </a:rPr>
-              <a:t>Give two conditions for a tropical cyclone to form.</a:t>
+              <a:t>Consequences:</a:t>
+            </a:r>
+            <a:endParaRPr lang="en-US" sz="4000" dirty="0"/>
+          </a:p>
+          <a:p>
+            <a:pPr algn="l" marL="342900" indent="-342900">
+              <a:spcAft>
+                <a:spcPts val="800"/>
+              </a:spcAft>
+              <a:buSzPct val="100000"/>
+              <a:buChar char="•"/>
+            </a:pPr>
+            <a:r>
+              <a:rPr lang="en-US" sz="4000" dirty="0">
+                <a:solidFill>
+                  <a:srgbClr val="111111"/>
+                </a:solidFill>
+                <a:latin typeface="Times New Roman" pitchFamily="34" charset="0"/>
+                <a:ea typeface="Times New Roman" pitchFamily="34" charset="-122"/>
+                <a:cs typeface="Times New Roman" pitchFamily="34" charset="-120"/>
+              </a:rPr>
+              <a:t>Violent winds over hundreds of kilometres.</a:t>
+            </a:r>
+            <a:endParaRPr lang="en-US" sz="4000" dirty="0"/>
+          </a:p>
+          <a:p>
+            <a:pPr algn="l" marL="342900" indent="-342900">
+              <a:spcAft>
+                <a:spcPts val="800"/>
+              </a:spcAft>
+              <a:buSzPct val="100000"/>
+              <a:buChar char="•"/>
+            </a:pPr>
+            <a:r>
+              <a:rPr lang="en-US" sz="4000" dirty="0">
+                <a:solidFill>
+                  <a:srgbClr val="111111"/>
+                </a:solidFill>
+                <a:latin typeface="Times New Roman" pitchFamily="34" charset="0"/>
+                <a:ea typeface="Times New Roman" pitchFamily="34" charset="-122"/>
+                <a:cs typeface="Times New Roman" pitchFamily="34" charset="-120"/>
+              </a:rPr>
+              <a:t>Storm surges that flood coasts and cause most deaths.</a:t>
+            </a:r>
+            <a:endParaRPr lang="en-US" sz="4000" dirty="0"/>
+          </a:p>
+          <a:p>
+            <a:pPr algn="l" marL="342900" indent="-342900">
+              <a:spcAft>
+                <a:spcPts val="800"/>
+              </a:spcAft>
+              <a:buSzPct val="100000"/>
+              <a:buChar char="•"/>
+            </a:pPr>
+            <a:r>
+              <a:rPr lang="en-US" sz="4000" dirty="0">
+                <a:solidFill>
+                  <a:srgbClr val="111111"/>
+                </a:solidFill>
+                <a:latin typeface="Times New Roman" pitchFamily="34" charset="0"/>
+                <a:ea typeface="Times New Roman" pitchFamily="34" charset="-122"/>
+                <a:cs typeface="Times New Roman" pitchFamily="34" charset="-120"/>
+              </a:rPr>
+              <a:t>Days of torrential rain and floods.</a:t>
             </a:r>
             <a:endParaRPr lang="en-US" sz="4000" dirty="0"/>
           </a:p>
@@ -17352,15 +18194,135 @@
                 <a:ea typeface="Calibri" pitchFamily="34" charset="-122"/>
                 <a:cs typeface="Calibri" pitchFamily="34" charset="-120"/>
               </a:rPr>
-              <a:t>FORMATIVE EVALUATION</a:t>
+              <a:t>BOARD SUMMARY</a:t>
             </a:r>
             <a:endParaRPr lang="en-US" sz="1400" dirty="0"/>
+          </a:p>
+        </p:txBody>
+      </p:sp>
+      <p:sp>
+        <p:nvSpPr>
+          <p:cNvPr id="3" name="Text 1"/>
+          <p:cNvSpPr/>
+          <p:nvPr/>
+        </p:nvSpPr>
+        <p:spPr>
+          <a:xfrm>
+            <a:off x="365760" y="1005840"/>
+            <a:ext cx="11460175" cy="731520"/>
+          </a:xfrm>
+          <a:prstGeom prst="rect">
+            <a:avLst/>
+          </a:prstGeom>
+          <a:noFill/>
+          <a:ln/>
+        </p:spPr>
+        <p:txBody>
+          <a:bodyPr wrap="square" lIns="0" tIns="0" rIns="0" bIns="0" rtlCol="0" anchor="ctr">
+            <a:normAutofit/>
+          </a:bodyPr>
+          <a:lstStyle/>
+          <a:p>
+            <a:pPr algn="ctr" indent="0" marL="0">
+              <a:buNone/>
+            </a:pPr>
+            <a:r>
+              <a:rPr lang="en-US" sz="3600" b="1" dirty="0">
+                <a:solidFill>
+                  <a:srgbClr val="990011"/>
+                </a:solidFill>
+                <a:latin typeface="Times New Roman" pitchFamily="34" charset="0"/>
+                <a:ea typeface="Times New Roman" pitchFamily="34" charset="-122"/>
+                <a:cs typeface="Times New Roman" pitchFamily="34" charset="-120"/>
+              </a:rPr>
+              <a:t>4. Hazards and Control Measures</a:t>
+            </a:r>
+            <a:endParaRPr lang="en-US" sz="3600" dirty="0"/>
+          </a:p>
+        </p:txBody>
+      </p:sp>
+      <p:sp>
+        <p:nvSpPr>
+          <p:cNvPr id="4" name="Text 2"/>
+          <p:cNvSpPr/>
+          <p:nvPr/>
+        </p:nvSpPr>
+        <p:spPr>
+          <a:xfrm>
+            <a:off x="365760" y="1783080"/>
+            <a:ext cx="4846320" cy="4617720"/>
+          </a:xfrm>
+          <a:prstGeom prst="rect">
+            <a:avLst/>
+          </a:prstGeom>
+          <a:noFill/>
+          <a:ln/>
+        </p:spPr>
+        <p:txBody>
+          <a:bodyPr wrap="square" lIns="0" tIns="0" rIns="0" bIns="0" rtlCol="0" anchor="t"/>
+          <a:lstStyle/>
+          <a:p>
+            <a:pPr algn="l" indent="0" marL="0">
+              <a:spcAft>
+                <a:spcPts val="800"/>
+              </a:spcAft>
+              <a:buNone/>
+            </a:pPr>
+            <a:r>
+              <a:rPr lang="en-US" sz="3600" i="1" dirty="0">
+                <a:solidFill>
+                  <a:srgbClr val="111111"/>
+                </a:solidFill>
+                <a:latin typeface="Times New Roman" pitchFamily="34" charset="0"/>
+                <a:ea typeface="Times New Roman" pitchFamily="34" charset="-122"/>
+                <a:cs typeface="Times New Roman" pitchFamily="34" charset="-120"/>
+              </a:rPr>
+              <a:t>The hazards of storms are reduced by the following measures:</a:t>
+            </a:r>
+            <a:endParaRPr lang="en-US" sz="3600" dirty="0"/>
+          </a:p>
+          <a:p>
+            <a:pPr algn="l" indent="0" marL="0">
+              <a:spcAft>
+                <a:spcPts val="800"/>
+              </a:spcAft>
+              <a:buNone/>
+            </a:pPr>
+            <a:r>
+              <a:rPr lang="en-US" sz="3600" b="1" dirty="0">
+                <a:solidFill>
+                  <a:srgbClr val="111111"/>
+                </a:solidFill>
+                <a:latin typeface="Times New Roman" pitchFamily="34" charset="0"/>
+                <a:ea typeface="Times New Roman" pitchFamily="34" charset="-122"/>
+                <a:cs typeface="Times New Roman" pitchFamily="34" charset="-120"/>
+              </a:rPr>
+              <a:t>Early warning: </a:t>
+            </a:r>
+            <a:pPr algn="l" indent="0" marL="0">
+              <a:spcAft>
+                <a:spcPts val="800"/>
+              </a:spcAft>
+              <a:buNone/>
+            </a:pPr>
+            <a:r>
+              <a:rPr lang="en-US" sz="3600" dirty="0">
+                <a:solidFill>
+                  <a:srgbClr val="111111"/>
+                </a:solidFill>
+                <a:latin typeface="Times New Roman" pitchFamily="34" charset="0"/>
+                <a:ea typeface="Times New Roman" pitchFamily="34" charset="-122"/>
+                <a:cs typeface="Times New Roman" pitchFamily="34" charset="-120"/>
+              </a:rPr>
+              <a:t>Radars, satellites and weather services give alerts by radio and telephone.</a:t>
+            </a:r>
+            <a:endParaRPr lang="en-US" sz="3600" dirty="0"/>
           </a:p>
         </p:txBody>
       </p:sp>
       <p:pic>
         <p:nvPicPr>
-          <p:cNvPr id="3" name="Image 0" descr="/home/claude/f4/img/minesec_sheet.png">    </p:cNvPr>
+          <p:cNvPr id="5" name="Image 0" descr="/home/claude/f4/img/v2/clim2_storm_measures.png">    </p:cNvPr>
           <p:cNvPicPr>
             <a:picLocks noChangeAspect="1"/>
           </p:cNvPicPr>
@@ -17374,8 +18336,8 @@
         </p:blipFill>
         <p:spPr>
           <a:xfrm>
-            <a:off x="0" y="658368"/>
-            <a:ext cx="5120640" cy="5833872"/>
+            <a:off x="5349240" y="2617506"/>
+            <a:ext cx="6659575" cy="2601397"/>
           </a:xfrm>
           <a:prstGeom prst="rect">
             <a:avLst/>
@@ -17384,14 +18346,14 @@
       </p:pic>
       <p:sp>
         <p:nvSpPr>
-          <p:cNvPr id="4" name="Text 1"/>
+          <p:cNvPr id="6" name="Text 3"/>
           <p:cNvSpPr/>
           <p:nvPr/>
         </p:nvSpPr>
         <p:spPr>
           <a:xfrm>
-            <a:off x="5349240" y="1005840"/>
-            <a:ext cx="6522415" cy="731520"/>
+            <a:off x="5349240" y="6089904"/>
+            <a:ext cx="6659575" cy="347472"/>
           </a:xfrm>
           <a:prstGeom prst="rect">
             <a:avLst/>
@@ -17400,68 +18362,24 @@
           <a:ln/>
         </p:spPr>
         <p:txBody>
-          <a:bodyPr wrap="square" lIns="0" tIns="0" rIns="0" bIns="0" rtlCol="0" anchor="ctr">
-            <a:normAutofit/>
-          </a:bodyPr>
+          <a:bodyPr wrap="square" lIns="0" tIns="0" rIns="0" bIns="0" rtlCol="0" anchor="ctr"/>
           <a:lstStyle/>
           <a:p>
             <a:pPr algn="ctr" indent="0" marL="0">
               <a:buNone/>
             </a:pPr>
             <a:r>
-              <a:rPr lang="en-US" sz="3600" b="1" dirty="0">
-                <a:solidFill>
-                  <a:srgbClr val="990011"/>
+              <a:rPr lang="en-US" sz="1600" i="1" dirty="0">
+                <a:solidFill>
+                  <a:srgbClr val="555555"/>
                 </a:solidFill>
                 <a:latin typeface="Times New Roman" pitchFamily="34" charset="0"/>
                 <a:ea typeface="Times New Roman" pitchFamily="34" charset="-122"/>
                 <a:cs typeface="Times New Roman" pitchFamily="34" charset="-120"/>
               </a:rPr>
-              <a:t>Expected Answer</a:t>
-            </a:r>
-            <a:endParaRPr lang="en-US" sz="3600" dirty="0"/>
-          </a:p>
-        </p:txBody>
-      </p:sp>
-      <p:sp>
-        <p:nvSpPr>
-          <p:cNvPr id="5" name="Text 2"/>
-          <p:cNvSpPr/>
-          <p:nvPr/>
-        </p:nvSpPr>
-        <p:spPr>
-          <a:xfrm>
-            <a:off x="5349240" y="1783080"/>
-            <a:ext cx="6522415" cy="4663440"/>
-          </a:xfrm>
-          <a:prstGeom prst="rect">
-            <a:avLst/>
-          </a:prstGeom>
-          <a:noFill/>
-          <a:ln/>
-        </p:spPr>
-        <p:txBody>
-          <a:bodyPr wrap="square" lIns="0" tIns="0" rIns="0" bIns="0" rtlCol="0" anchor="t"/>
-          <a:lstStyle/>
-          <a:p>
-            <a:pPr algn="l" indent="0" marL="0">
-              <a:spcAft>
-                <a:spcPts val="800"/>
-              </a:spcAft>
-              <a:buNone/>
-            </a:pPr>
-            <a:r>
-              <a:rPr lang="en-US" sz="4000" dirty="0">
-                <a:solidFill>
-                  <a:srgbClr val="111111"/>
-                </a:solidFill>
-                <a:latin typeface="Times New Roman" pitchFamily="34" charset="0"/>
-                <a:ea typeface="Times New Roman" pitchFamily="34" charset="-122"/>
-                <a:cs typeface="Times New Roman" pitchFamily="34" charset="-120"/>
-              </a:rPr>
-              <a:t>A sea warmer than 27 °C and a latitude away from the Equator (5°–20°).</a:t>
-            </a:r>
-            <a:endParaRPr lang="en-US" sz="4000" dirty="0"/>
+              <a:t>Illustration: reducing storm hazards</a:t>
+            </a:r>
+            <a:endParaRPr lang="en-US" sz="1600" dirty="0"/>
           </a:p>
         </p:txBody>
       </p:sp>
@@ -17571,7 +18489,7 @@
                 <a:ea typeface="Calibri" pitchFamily="34" charset="-122"/>
                 <a:cs typeface="Calibri" pitchFamily="34" charset="-120"/>
               </a:rPr>
-              <a:t>FORMATIVE EVALUATION</a:t>
+              <a:t>BOARD SUMMARY</a:t>
             </a:r>
             <a:endParaRPr lang="en-US" sz="1400" dirty="0"/>
           </a:p>
@@ -17594,7 +18512,7 @@
         <p:spPr>
           <a:xfrm>
             <a:off x="0" y="658368"/>
-            <a:ext cx="5120640" cy="5833872"/>
+            <a:ext cx="2468880" cy="5833872"/>
           </a:xfrm>
           <a:prstGeom prst="rect">
             <a:avLst/>
@@ -17609,8 +18527,8 @@
         </p:nvSpPr>
         <p:spPr>
           <a:xfrm>
-            <a:off x="5349240" y="1005840"/>
-            <a:ext cx="6522415" cy="731520"/>
+            <a:off x="2697480" y="1005840"/>
+            <a:ext cx="9174175" cy="731520"/>
           </a:xfrm>
           <a:prstGeom prst="rect">
             <a:avLst/>
@@ -17636,7 +18554,7 @@
                 <a:ea typeface="Times New Roman" pitchFamily="34" charset="-122"/>
                 <a:cs typeface="Times New Roman" pitchFamily="34" charset="-120"/>
               </a:rPr>
-              <a:t>Evaluation 2</a:t>
+              <a:t>4. Hazards and Control Measures</a:t>
             </a:r>
             <a:endParaRPr lang="en-US" sz="3600" dirty="0"/>
           </a:p>
@@ -17650,8 +18568,8 @@
         </p:nvSpPr>
         <p:spPr>
           <a:xfrm>
-            <a:off x="5349240" y="1783080"/>
-            <a:ext cx="6522415" cy="4663440"/>
+            <a:off x="2697480" y="1783080"/>
+            <a:ext cx="9174175" cy="4663440"/>
           </a:xfrm>
           <a:prstGeom prst="rect">
             <a:avLst/>
@@ -17670,7 +18588,7 @@
               <a:buNone/>
             </a:pPr>
             <a:r>
-              <a:rPr lang="en-US" sz="4000" dirty="0">
+              <a:rPr lang="en-US" sz="4000" b="1" dirty="0">
                 <a:solidFill>
                   <a:srgbClr val="111111"/>
                 </a:solidFill>
@@ -17678,7 +18596,61 @@
                 <a:ea typeface="Times New Roman" pitchFamily="34" charset="-122"/>
                 <a:cs typeface="Times New Roman" pitchFamily="34" charset="-120"/>
               </a:rPr>
-              <a:t>Give two measures against cyclone damage.</a:t>
+              <a:t>Public education: </a:t>
+            </a:r>
+            <a:pPr algn="l" indent="0" marL="0">
+              <a:spcAft>
+                <a:spcPts val="800"/>
+              </a:spcAft>
+              <a:buNone/>
+            </a:pPr>
+            <a:r>
+              <a:rPr lang="en-US" sz="4000" dirty="0">
+                <a:solidFill>
+                  <a:srgbClr val="111111"/>
+                </a:solidFill>
+                <a:latin typeface="Times New Roman" pitchFamily="34" charset="0"/>
+                <a:ea typeface="Times New Roman" pitchFamily="34" charset="-122"/>
+                <a:cs typeface="Times New Roman" pitchFamily="34" charset="-120"/>
+              </a:rPr>
+              <a:t>People learn to shelter indoors and to avoid trees, water and metal during storms.</a:t>
+            </a:r>
+            <a:endParaRPr lang="en-US" sz="4000" dirty="0"/>
+          </a:p>
+          <a:p>
+            <a:pPr algn="l" indent="0" marL="0">
+              <a:spcAft>
+                <a:spcPts val="800"/>
+              </a:spcAft>
+              <a:buNone/>
+            </a:pPr>
+            <a:r>
+              <a:rPr lang="en-US" sz="4000" b="1" dirty="0">
+                <a:solidFill>
+                  <a:srgbClr val="111111"/>
+                </a:solidFill>
+                <a:latin typeface="Times New Roman" pitchFamily="34" charset="0"/>
+                <a:ea typeface="Times New Roman" pitchFamily="34" charset="-122"/>
+                <a:cs typeface="Times New Roman" pitchFamily="34" charset="-120"/>
+              </a:rPr>
+              <a:t>Protection of buildings: </a:t>
+            </a:r>
+            <a:pPr algn="l" indent="0" marL="0">
+              <a:spcAft>
+                <a:spcPts val="800"/>
+              </a:spcAft>
+              <a:buNone/>
+            </a:pPr>
+            <a:r>
+              <a:rPr lang="en-US" sz="4000" dirty="0">
+                <a:solidFill>
+                  <a:srgbClr val="111111"/>
+                </a:solidFill>
+                <a:latin typeface="Times New Roman" pitchFamily="34" charset="0"/>
+                <a:ea typeface="Times New Roman" pitchFamily="34" charset="-122"/>
+                <a:cs typeface="Times New Roman" pitchFamily="34" charset="-120"/>
+              </a:rPr>
+              <a:t>Lightning rods, strong roofs, wind-resistant building codes and good drains reduce damage.</a:t>
             </a:r>
             <a:endParaRPr lang="en-US" sz="4000" dirty="0"/>
           </a:p>
@@ -17897,7 +18869,7 @@
                 <a:ea typeface="Times New Roman" pitchFamily="34" charset="-122"/>
                 <a:cs typeface="Times New Roman" pitchFamily="34" charset="-120"/>
               </a:rPr>
-              <a:t>Douala: Am/Af (hot and very wet, short dry season). Maroua: BSh/Aw (hot, long dry season). Paris: Cfb (mild, rain all year).</a:t>
+              <a:t>The cumulonimbus.</a:t>
             </a:r>
             <a:endParaRPr lang="en-US" sz="4000" dirty="0"/>
           </a:p>
@@ -18009,7 +18981,7 @@
                 <a:ea typeface="Calibri" pitchFamily="34" charset="-122"/>
                 <a:cs typeface="Calibri" pitchFamily="34" charset="-120"/>
               </a:rPr>
-              <a:t>FORMATIVE EVALUATION</a:t>
+              <a:t>BOARD SUMMARY</a:t>
             </a:r>
             <a:endParaRPr lang="en-US" sz="1400" dirty="0"/>
           </a:p>
@@ -18074,7 +19046,7 @@
                 <a:ea typeface="Times New Roman" pitchFamily="34" charset="-122"/>
                 <a:cs typeface="Times New Roman" pitchFamily="34" charset="-120"/>
               </a:rPr>
-              <a:t>Expected Answer</a:t>
+              <a:t>4. Hazards and Control Measures (continued)</a:t>
             </a:r>
             <a:endParaRPr lang="en-US" sz="3600" dirty="0"/>
           </a:p>
@@ -18108,7 +19080,7 @@
               <a:buNone/>
             </a:pPr>
             <a:r>
-              <a:rPr lang="en-US" sz="4000" dirty="0">
+              <a:rPr lang="en-US" sz="4000" b="1" dirty="0">
                 <a:solidFill>
                   <a:srgbClr val="111111"/>
                 </a:solidFill>
@@ -18116,7 +19088,24 @@
                 <a:ea typeface="Times New Roman" pitchFamily="34" charset="-122"/>
                 <a:cs typeface="Times New Roman" pitchFamily="34" charset="-120"/>
               </a:rPr>
-              <a:t>Early warning and evacuation (also shelters, strong buildings).</a:t>
+              <a:t>Emergency preparedness: </a:t>
+            </a:r>
+            <a:pPr algn="l" indent="0" marL="0">
+              <a:spcAft>
+                <a:spcPts val="800"/>
+              </a:spcAft>
+              <a:buNone/>
+            </a:pPr>
+            <a:r>
+              <a:rPr lang="en-US" sz="4000" dirty="0">
+                <a:solidFill>
+                  <a:srgbClr val="111111"/>
+                </a:solidFill>
+                <a:latin typeface="Times New Roman" pitchFamily="34" charset="0"/>
+                <a:ea typeface="Times New Roman" pitchFamily="34" charset="-122"/>
+                <a:cs typeface="Times New Roman" pitchFamily="34" charset="-120"/>
+              </a:rPr>
+              <a:t>Shelters, drills and rescue services save lives.</a:t>
             </a:r>
             <a:endParaRPr lang="en-US" sz="4000" dirty="0"/>
           </a:p>
@@ -18228,7 +19217,7 @@
                 <a:ea typeface="Calibri" pitchFamily="34" charset="-122"/>
                 <a:cs typeface="Calibri" pitchFamily="34" charset="-120"/>
               </a:rPr>
-              <a:t>REMEDIATION</a:t>
+              <a:t>FORMATIVE EVALUATION</a:t>
             </a:r>
             <a:endParaRPr lang="en-US" sz="1400" dirty="0"/>
           </a:p>
@@ -18251,7 +19240,7 @@
         <p:spPr>
           <a:xfrm>
             <a:off x="0" y="658368"/>
-            <a:ext cx="2468880" cy="5833872"/>
+            <a:ext cx="5120640" cy="5833872"/>
           </a:xfrm>
           <a:prstGeom prst="rect">
             <a:avLst/>
@@ -18266,8 +19255,8 @@
         </p:nvSpPr>
         <p:spPr>
           <a:xfrm>
-            <a:off x="2697480" y="1005840"/>
-            <a:ext cx="9174175" cy="731520"/>
+            <a:off x="5349240" y="1005840"/>
+            <a:ext cx="6522415" cy="731520"/>
           </a:xfrm>
           <a:prstGeom prst="rect">
             <a:avLst/>
@@ -18293,7 +19282,7 @@
                 <a:ea typeface="Times New Roman" pitchFamily="34" charset="-122"/>
                 <a:cs typeface="Times New Roman" pitchFamily="34" charset="-120"/>
               </a:rPr>
-              <a:t>Remediation</a:t>
+              <a:t>Evaluation 1</a:t>
             </a:r>
             <a:endParaRPr lang="en-US" sz="3600" dirty="0"/>
           </a:p>
@@ -18307,8 +19296,8 @@
         </p:nvSpPr>
         <p:spPr>
           <a:xfrm>
-            <a:off x="2697480" y="1783080"/>
-            <a:ext cx="9174175" cy="4663440"/>
+            <a:off x="5349240" y="1783080"/>
+            <a:ext cx="6522415" cy="4663440"/>
           </a:xfrm>
           <a:prstGeom prst="rect">
             <a:avLst/>
@@ -18327,7 +19316,7 @@
               <a:buNone/>
             </a:pPr>
             <a:r>
-              <a:rPr lang="en-US" sz="4000" b="1" dirty="0">
+              <a:rPr lang="en-US" sz="4000" dirty="0">
                 <a:solidFill>
                   <a:srgbClr val="111111"/>
                 </a:solidFill>
@@ -18335,73 +19324,7 @@
                 <a:ea typeface="Times New Roman" pitchFamily="34" charset="-122"/>
                 <a:cs typeface="Times New Roman" pitchFamily="34" charset="-120"/>
               </a:rPr>
-              <a:t>Fill in the blanks:</a:t>
-            </a:r>
-            <a:endParaRPr lang="en-US" sz="4000" dirty="0"/>
-          </a:p>
-          <a:p>
-            <a:pPr algn="l" marL="342900" indent="-342900">
-              <a:spcAft>
-                <a:spcPts val="800"/>
-              </a:spcAft>
-              <a:buSzPct val="100000"/>
-              <a:buFont typeface="+mj-lt"/>
-              <a:buAutoNum type="arabicPeriod" startAt="1"/>
-            </a:pPr>
-            <a:r>
-              <a:rPr lang="en-US" sz="4000" dirty="0">
-                <a:solidFill>
-                  <a:srgbClr val="111111"/>
-                </a:solidFill>
-                <a:latin typeface="Times New Roman" pitchFamily="34" charset="0"/>
-                <a:ea typeface="Times New Roman" pitchFamily="34" charset="-122"/>
-                <a:cs typeface="Times New Roman" pitchFamily="34" charset="-120"/>
-              </a:rPr>
-              <a:t>Thunderstorms come from ______ clouds.</a:t>
-            </a:r>
-            <a:endParaRPr lang="en-US" sz="4000" dirty="0"/>
-          </a:p>
-          <a:p>
-            <a:pPr algn="l" marL="342900" indent="-342900">
-              <a:spcAft>
-                <a:spcPts val="800"/>
-              </a:spcAft>
-              <a:buSzPct val="100000"/>
-              <a:buFont typeface="+mj-lt"/>
-              <a:buAutoNum type="arabicPeriod" startAt="1"/>
-            </a:pPr>
-            <a:r>
-              <a:rPr lang="en-US" sz="4000" dirty="0">
-                <a:solidFill>
-                  <a:srgbClr val="111111"/>
-                </a:solidFill>
-                <a:latin typeface="Times New Roman" pitchFamily="34" charset="0"/>
-                <a:ea typeface="Times New Roman" pitchFamily="34" charset="-122"/>
-                <a:cs typeface="Times New Roman" pitchFamily="34" charset="-120"/>
-              </a:rPr>
-              <a:t>The calm centre of a cyclone is the ______.</a:t>
-            </a:r>
-            <a:endParaRPr lang="en-US" sz="4000" dirty="0"/>
-          </a:p>
-          <a:p>
-            <a:pPr algn="l" marL="342900" indent="-342900">
-              <a:spcAft>
-                <a:spcPts val="800"/>
-              </a:spcAft>
-              <a:buSzPct val="100000"/>
-              <a:buFont typeface="+mj-lt"/>
-              <a:buAutoNum type="arabicPeriod" startAt="1"/>
-            </a:pPr>
-            <a:r>
-              <a:rPr lang="en-US" sz="4000" dirty="0">
-                <a:solidFill>
-                  <a:srgbClr val="111111"/>
-                </a:solidFill>
-                <a:latin typeface="Times New Roman" pitchFamily="34" charset="0"/>
-                <a:ea typeface="Times New Roman" pitchFamily="34" charset="-122"/>
-                <a:cs typeface="Times New Roman" pitchFamily="34" charset="-120"/>
-              </a:rPr>
-              <a:t>In the Caribbean, cyclones are called ______.</a:t>
+              <a:t>Compare a thunderstorm and a tropical cyclone by size and place of formation.</a:t>
             </a:r>
             <a:endParaRPr lang="en-US" sz="4000" dirty="0"/>
           </a:p>
@@ -18513,7 +19436,7 @@
                 <a:ea typeface="Calibri" pitchFamily="34" charset="-122"/>
                 <a:cs typeface="Calibri" pitchFamily="34" charset="-120"/>
               </a:rPr>
-              <a:t>HOMEWORK</a:t>
+              <a:t>FORMATIVE EVALUATION</a:t>
             </a:r>
             <a:endParaRPr lang="en-US" sz="1400" dirty="0"/>
           </a:p>
@@ -18578,7 +19501,7 @@
                 <a:ea typeface="Times New Roman" pitchFamily="34" charset="-122"/>
                 <a:cs typeface="Times New Roman" pitchFamily="34" charset="-120"/>
               </a:rPr>
-              <a:t>Homework</a:t>
+              <a:t>Expected Answer</a:t>
             </a:r>
             <a:endParaRPr lang="en-US" sz="3600" dirty="0"/>
           </a:p>
@@ -18620,7 +19543,7 @@
                 <a:ea typeface="Times New Roman" pitchFamily="34" charset="-122"/>
                 <a:cs typeface="Times New Roman" pitchFamily="34" charset="-120"/>
               </a:rPr>
-              <a:t>Write five safety rules for a thunderstorm in your area.</a:t>
+              <a:t>A thunderstorm is small (a few km) and forms over land or sea; a cyclone is hundreds of km wide and forms over warm tropical oceans.</a:t>
             </a:r>
             <a:endParaRPr lang="en-US" sz="4000" dirty="0"/>
           </a:p>
@@ -18732,7 +19655,7 @@
                 <a:ea typeface="Calibri" pitchFamily="34" charset="-122"/>
                 <a:cs typeface="Calibri" pitchFamily="34" charset="-120"/>
               </a:rPr>
-              <a:t>NEXT LESSON</a:t>
+              <a:t>FORMATIVE EVALUATION</a:t>
             </a:r>
             <a:endParaRPr lang="en-US" sz="1400" dirty="0"/>
           </a:p>
@@ -18797,7 +19720,7 @@
                 <a:ea typeface="Times New Roman" pitchFamily="34" charset="-122"/>
                 <a:cs typeface="Times New Roman" pitchFamily="34" charset="-120"/>
               </a:rPr>
-              <a:t>Next Lesson</a:t>
+              <a:t>Evaluation 2</a:t>
             </a:r>
             <a:endParaRPr lang="en-US" sz="3600" dirty="0"/>
           </a:p>
@@ -18821,17 +19744,17 @@
           <a:ln/>
         </p:spPr>
         <p:txBody>
-          <a:bodyPr wrap="square" lIns="0" tIns="0" rIns="0" bIns="0" rtlCol="0" anchor="ctr"/>
-          <a:lstStyle/>
-          <a:p>
-            <a:pPr algn="ctr" indent="0" marL="0">
+          <a:bodyPr wrap="square" lIns="0" tIns="0" rIns="0" bIns="0" rtlCol="0" anchor="t"/>
+          <a:lstStyle/>
+          <a:p>
+            <a:pPr algn="l" indent="0" marL="0">
               <a:spcAft>
                 <a:spcPts val="800"/>
               </a:spcAft>
               <a:buNone/>
             </a:pPr>
             <a:r>
-              <a:rPr lang="en-US" sz="4000" b="1" dirty="0">
+              <a:rPr lang="en-US" sz="4000" dirty="0">
                 <a:solidFill>
                   <a:srgbClr val="111111"/>
                 </a:solidFill>
@@ -18839,27 +19762,7 @@
                 <a:ea typeface="Times New Roman" pitchFamily="34" charset="-122"/>
                 <a:cs typeface="Times New Roman" pitchFamily="34" charset="-120"/>
               </a:rPr>
-              <a:t>Our next lesson will be on:</a:t>
-            </a:r>
-            <a:endParaRPr lang="en-US" sz="4000" dirty="0"/>
-          </a:p>
-          <a:p>
-            <a:pPr algn="ctr" indent="0" marL="0">
-              <a:spcAft>
-                <a:spcPts val="800"/>
-              </a:spcAft>
-              <a:buNone/>
-            </a:pPr>
-            <a:r>
-              <a:rPr lang="en-US" sz="4000" b="1" dirty="0">
-                <a:solidFill>
-                  <a:srgbClr val="990011"/>
-                </a:solidFill>
-                <a:latin typeface="Times New Roman" pitchFamily="34" charset="0"/>
-                <a:ea typeface="Times New Roman" pitchFamily="34" charset="-122"/>
-                <a:cs typeface="Times New Roman" pitchFamily="34" charset="-120"/>
-              </a:rPr>
-              <a:t>Lesson 20: Micro-climates</a:t>
+              <a:t>Give two measures to reduce the hazards of thunderstorms.</a:t>
             </a:r>
             <a:endParaRPr lang="en-US" sz="4000" dirty="0"/>
           </a:p>
@@ -18971,22 +19874,46 @@
                 <a:ea typeface="Calibri" pitchFamily="34" charset="-122"/>
                 <a:cs typeface="Calibri" pitchFamily="34" charset="-120"/>
               </a:rPr>
-              <a:t>BILINGUAL GAME</a:t>
+              <a:t>FORMATIVE EVALUATION</a:t>
             </a:r>
             <a:endParaRPr lang="en-US" sz="1400" dirty="0"/>
           </a:p>
         </p:txBody>
       </p:sp>
-      <p:sp>
-        <p:nvSpPr>
-          <p:cNvPr id="3" name="Text 1"/>
+      <p:pic>
+        <p:nvPicPr>
+          <p:cNvPr id="3" name="Image 0" descr="/home/claude/f4/img/minesec_sheet.png">    </p:cNvPr>
+          <p:cNvPicPr>
+            <a:picLocks noChangeAspect="1"/>
+          </p:cNvPicPr>
+          <p:nvPr/>
+        </p:nvPicPr>
+        <p:blipFill>
+          <a:blip r:embed="rId1"/>
+          <a:stretch>
+            <a:fillRect/>
+          </a:stretch>
+        </p:blipFill>
+        <p:spPr>
+          <a:xfrm>
+            <a:off x="0" y="658368"/>
+            <a:ext cx="5120640" cy="5833872"/>
+          </a:xfrm>
+          <a:prstGeom prst="rect">
+            <a:avLst/>
+          </a:prstGeom>
+        </p:spPr>
+      </p:pic>
+      <p:sp>
+        <p:nvSpPr>
+          <p:cNvPr id="4" name="Text 1"/>
           <p:cNvSpPr/>
           <p:nvPr/>
         </p:nvSpPr>
         <p:spPr>
           <a:xfrm>
-            <a:off x="457200" y="1005840"/>
-            <a:ext cx="11277295" cy="731520"/>
+            <a:off x="5349240" y="1005840"/>
+            <a:ext cx="6522415" cy="731520"/>
           </a:xfrm>
           <a:prstGeom prst="rect">
             <a:avLst/>
@@ -18995,7 +19922,9 @@
           <a:ln/>
         </p:spPr>
         <p:txBody>
-          <a:bodyPr wrap="square" lIns="0" tIns="0" rIns="0" bIns="0" rtlCol="0" anchor="ctr"/>
+          <a:bodyPr wrap="square" lIns="0" tIns="0" rIns="0" bIns="0" rtlCol="0" anchor="ctr">
+            <a:normAutofit/>
+          </a:bodyPr>
           <a:lstStyle/>
           <a:p>
             <a:pPr algn="ctr" indent="0" marL="0">
@@ -19010,6 +19939,942 @@
                 <a:ea typeface="Times New Roman" pitchFamily="34" charset="-122"/>
                 <a:cs typeface="Times New Roman" pitchFamily="34" charset="-120"/>
               </a:rPr>
+              <a:t>Expected Answer</a:t>
+            </a:r>
+            <a:endParaRPr lang="en-US" sz="3600" dirty="0"/>
+          </a:p>
+        </p:txBody>
+      </p:sp>
+      <p:sp>
+        <p:nvSpPr>
+          <p:cNvPr id="5" name="Text 2"/>
+          <p:cNvSpPr/>
+          <p:nvPr/>
+        </p:nvSpPr>
+        <p:spPr>
+          <a:xfrm>
+            <a:off x="5349240" y="1783080"/>
+            <a:ext cx="6522415" cy="4663440"/>
+          </a:xfrm>
+          <a:prstGeom prst="rect">
+            <a:avLst/>
+          </a:prstGeom>
+          <a:noFill/>
+          <a:ln/>
+        </p:spPr>
+        <p:txBody>
+          <a:bodyPr wrap="square" lIns="0" tIns="0" rIns="0" bIns="0" rtlCol="0" anchor="t"/>
+          <a:lstStyle/>
+          <a:p>
+            <a:pPr algn="l" indent="0" marL="0">
+              <a:spcAft>
+                <a:spcPts val="800"/>
+              </a:spcAft>
+              <a:buNone/>
+            </a:pPr>
+            <a:r>
+              <a:rPr lang="en-US" sz="4000" dirty="0">
+                <a:solidFill>
+                  <a:srgbClr val="111111"/>
+                </a:solidFill>
+                <a:latin typeface="Times New Roman" pitchFamily="34" charset="0"/>
+                <a:ea typeface="Times New Roman" pitchFamily="34" charset="-122"/>
+                <a:cs typeface="Times New Roman" pitchFamily="34" charset="-120"/>
+              </a:rPr>
+              <a:t>Early warnings, lightning rods, staying indoors, good drainage (any two).</a:t>
+            </a:r>
+            <a:endParaRPr lang="en-US" sz="4000" dirty="0"/>
+          </a:p>
+        </p:txBody>
+      </p:sp>
+      <p:sp>
+        <p:nvSpPr>
+          <p:cNvPr id="25" name="Slide Number Placeholder 0"/>
+          <p:cNvSpPr>
+            <a:spLocks noGrp="1"/>
+          </p:cNvSpPr>
+          <p:nvPr>
+            <p:ph type="sldNum" sz="quarter" idx="4294967295"/>
+          </p:nvPr>
+        </p:nvSpPr>
+        <p:spPr>
+          <a:xfrm>
+            <a:off x="27432" y="91440"/>
+            <a:ext cx="585216" cy="475488"/>
+          </a:xfrm>
+          <a:prstGeom prst="rect">
+            <a:avLst/>
+          </a:prstGeom>
+          <a:extLst>
+            <a:ext uri="{C572A759-6A51-4108-AA02-DFA0A04FC94B}">
+              <ma14:wrappingTextBoxFlag xmlns:ma14="http://schemas.microsoft.com/office/mac/drawingml/2011/main" val="0"/>
+            </a:ext>
+          </a:extLst>
+        </p:spPr>
+        <p:txBody>
+          <a:bodyPr/>
+          <a:lstStyle>
+            <a:lvl1pPr>
+              <a:defRPr sz="2000">
+                <a:solidFill>
+                  <a:srgbClr val="FFFFFF"/>
+                </a:solidFill>
+                <a:latin typeface="Calibri"/>
+                <a:ea typeface="Calibri"/>
+                <a:cs typeface="Calibri"/>
+              </a:defRPr>
+            </a:lvl1pPr>
+          </a:lstStyle>
+          <a:p>
+            <a:pPr algn="ctr"/>
+            <a:fld id="{F7021451-1387-4CA6-816F-3879F97B5CBC}" type="slidenum">
+              <a:rPr b="1" lang="en-US"/>
+              <a:t>54</a:t>
+            </a:fld>
+            <a:endParaRPr lang="en-US"/>
+          </a:p>
+        </p:txBody>
+      </p:sp>
+    </p:spTree>
+  </p:cSld>
+  <p:clrMapOvr>
+    <a:masterClrMapping/>
+  </p:clrMapOvr>
+</p:sld>
+</file>
+
+<file path=ppt/slides/slide55.xml><?xml version="1.0" encoding="utf-8"?>
+<p:sld xmlns:a="http://schemas.openxmlformats.org/drawingml/2006/main" xmlns:r="http://schemas.openxmlformats.org/officeDocument/2006/relationships" xmlns:p="http://schemas.openxmlformats.org/presentationml/2006/main">
+  <p:cSld name="Slide 55">
+    <p:spTree>
+      <p:nvGrpSpPr>
+        <p:cNvPr id="1" name=""/>
+        <p:cNvGrpSpPr/>
+        <p:nvPr/>
+      </p:nvGrpSpPr>
+      <p:grpSpPr>
+        <a:xfrm>
+          <a:off x="0" y="0"/>
+          <a:ext cx="0" cy="0"/>
+          <a:chOff x="0" y="0"/>
+          <a:chExt cx="0" cy="0"/>
+        </a:xfrm>
+      </p:grpSpPr>
+      <p:sp>
+        <p:nvSpPr>
+          <p:cNvPr id="2" name="Text 0"/>
+          <p:cNvSpPr/>
+          <p:nvPr/>
+        </p:nvSpPr>
+        <p:spPr>
+          <a:xfrm>
+            <a:off x="457200" y="713232"/>
+            <a:ext cx="11368735" cy="274320"/>
+          </a:xfrm>
+          <a:prstGeom prst="rect">
+            <a:avLst/>
+          </a:prstGeom>
+          <a:noFill/>
+          <a:ln/>
+        </p:spPr>
+        <p:txBody>
+          <a:bodyPr wrap="square" lIns="0" tIns="0" rIns="0" bIns="0" rtlCol="0" anchor="ctr"/>
+          <a:lstStyle/>
+          <a:p>
+            <a:pPr algn="r" indent="0" marL="0">
+              <a:buNone/>
+            </a:pPr>
+            <a:r>
+              <a:rPr lang="en-US" sz="1400" b="1" dirty="0">
+                <a:solidFill>
+                  <a:srgbClr val="1C3F6E"/>
+                </a:solidFill>
+                <a:latin typeface="Calibri" pitchFamily="34" charset="0"/>
+                <a:ea typeface="Calibri" pitchFamily="34" charset="-122"/>
+                <a:cs typeface="Calibri" pitchFamily="34" charset="-120"/>
+              </a:rPr>
+              <a:t>REMEDIATION</a:t>
+            </a:r>
+            <a:endParaRPr lang="en-US" sz="1400" dirty="0"/>
+          </a:p>
+        </p:txBody>
+      </p:sp>
+      <p:pic>
+        <p:nvPicPr>
+          <p:cNvPr id="3" name="Image 0" descr="/home/claude/f4/img/minesec_sheet.png">    </p:cNvPr>
+          <p:cNvPicPr>
+            <a:picLocks noChangeAspect="1"/>
+          </p:cNvPicPr>
+          <p:nvPr/>
+        </p:nvPicPr>
+        <p:blipFill>
+          <a:blip r:embed="rId1"/>
+          <a:stretch>
+            <a:fillRect/>
+          </a:stretch>
+        </p:blipFill>
+        <p:spPr>
+          <a:xfrm>
+            <a:off x="0" y="658368"/>
+            <a:ext cx="2468880" cy="5833872"/>
+          </a:xfrm>
+          <a:prstGeom prst="rect">
+            <a:avLst/>
+          </a:prstGeom>
+        </p:spPr>
+      </p:pic>
+      <p:sp>
+        <p:nvSpPr>
+          <p:cNvPr id="4" name="Text 1"/>
+          <p:cNvSpPr/>
+          <p:nvPr/>
+        </p:nvSpPr>
+        <p:spPr>
+          <a:xfrm>
+            <a:off x="2697480" y="1005840"/>
+            <a:ext cx="9174175" cy="731520"/>
+          </a:xfrm>
+          <a:prstGeom prst="rect">
+            <a:avLst/>
+          </a:prstGeom>
+          <a:noFill/>
+          <a:ln/>
+        </p:spPr>
+        <p:txBody>
+          <a:bodyPr wrap="square" lIns="0" tIns="0" rIns="0" bIns="0" rtlCol="0" anchor="ctr">
+            <a:normAutofit/>
+          </a:bodyPr>
+          <a:lstStyle/>
+          <a:p>
+            <a:pPr algn="ctr" indent="0" marL="0">
+              <a:buNone/>
+            </a:pPr>
+            <a:r>
+              <a:rPr lang="en-US" sz="3600" b="1" dirty="0">
+                <a:solidFill>
+                  <a:srgbClr val="990011"/>
+                </a:solidFill>
+                <a:latin typeface="Times New Roman" pitchFamily="34" charset="0"/>
+                <a:ea typeface="Times New Roman" pitchFamily="34" charset="-122"/>
+                <a:cs typeface="Times New Roman" pitchFamily="34" charset="-120"/>
+              </a:rPr>
+              <a:t>Remediation</a:t>
+            </a:r>
+            <a:endParaRPr lang="en-US" sz="3600" dirty="0"/>
+          </a:p>
+        </p:txBody>
+      </p:sp>
+      <p:sp>
+        <p:nvSpPr>
+          <p:cNvPr id="5" name="Text 2"/>
+          <p:cNvSpPr/>
+          <p:nvPr/>
+        </p:nvSpPr>
+        <p:spPr>
+          <a:xfrm>
+            <a:off x="2697480" y="1783080"/>
+            <a:ext cx="9174175" cy="4663440"/>
+          </a:xfrm>
+          <a:prstGeom prst="rect">
+            <a:avLst/>
+          </a:prstGeom>
+          <a:noFill/>
+          <a:ln/>
+        </p:spPr>
+        <p:txBody>
+          <a:bodyPr wrap="square" lIns="0" tIns="0" rIns="0" bIns="0" rtlCol="0" anchor="t"/>
+          <a:lstStyle/>
+          <a:p>
+            <a:pPr algn="l" indent="0" marL="0">
+              <a:spcAft>
+                <a:spcPts val="800"/>
+              </a:spcAft>
+              <a:buNone/>
+            </a:pPr>
+            <a:r>
+              <a:rPr lang="en-US" sz="4000" b="1" dirty="0">
+                <a:solidFill>
+                  <a:srgbClr val="111111"/>
+                </a:solidFill>
+                <a:latin typeface="Times New Roman" pitchFamily="34" charset="0"/>
+                <a:ea typeface="Times New Roman" pitchFamily="34" charset="-122"/>
+                <a:cs typeface="Times New Roman" pitchFamily="34" charset="-120"/>
+              </a:rPr>
+              <a:t>Fill in the blanks:</a:t>
+            </a:r>
+            <a:endParaRPr lang="en-US" sz="4000" dirty="0"/>
+          </a:p>
+          <a:p>
+            <a:pPr algn="l" marL="342900" indent="-342900">
+              <a:spcAft>
+                <a:spcPts val="800"/>
+              </a:spcAft>
+              <a:buSzPct val="100000"/>
+              <a:buFont typeface="+mj-lt"/>
+              <a:buAutoNum type="arabicPeriod" startAt="1"/>
+            </a:pPr>
+            <a:r>
+              <a:rPr lang="en-US" sz="4000" dirty="0">
+                <a:solidFill>
+                  <a:srgbClr val="111111"/>
+                </a:solidFill>
+                <a:latin typeface="Times New Roman" pitchFamily="34" charset="0"/>
+                <a:ea typeface="Times New Roman" pitchFamily="34" charset="-122"/>
+                <a:cs typeface="Times New Roman" pitchFamily="34" charset="-120"/>
+              </a:rPr>
+              <a:t>Thunderstorms form from ______ clouds.</a:t>
+            </a:r>
+            <a:endParaRPr lang="en-US" sz="4000" dirty="0"/>
+          </a:p>
+          <a:p>
+            <a:pPr algn="l" marL="342900" indent="-342900">
+              <a:spcAft>
+                <a:spcPts val="800"/>
+              </a:spcAft>
+              <a:buSzPct val="100000"/>
+              <a:buFont typeface="+mj-lt"/>
+              <a:buAutoNum type="arabicPeriod" startAt="1"/>
+            </a:pPr>
+            <a:r>
+              <a:rPr lang="en-US" sz="4000" dirty="0">
+                <a:solidFill>
+                  <a:srgbClr val="111111"/>
+                </a:solidFill>
+                <a:latin typeface="Times New Roman" pitchFamily="34" charset="0"/>
+                <a:ea typeface="Times New Roman" pitchFamily="34" charset="-122"/>
+                <a:cs typeface="Times New Roman" pitchFamily="34" charset="-120"/>
+              </a:rPr>
+              <a:t>Atlantic tropical cyclones are called ______.</a:t>
+            </a:r>
+            <a:endParaRPr lang="en-US" sz="4000" dirty="0"/>
+          </a:p>
+          <a:p>
+            <a:pPr algn="l" marL="342900" indent="-342900">
+              <a:spcAft>
+                <a:spcPts val="800"/>
+              </a:spcAft>
+              <a:buSzPct val="100000"/>
+              <a:buFont typeface="+mj-lt"/>
+              <a:buAutoNum type="arabicPeriod" startAt="1"/>
+            </a:pPr>
+            <a:r>
+              <a:rPr lang="en-US" sz="4000" dirty="0">
+                <a:solidFill>
+                  <a:srgbClr val="111111"/>
+                </a:solidFill>
+                <a:latin typeface="Times New Roman" pitchFamily="34" charset="0"/>
+                <a:ea typeface="Times New Roman" pitchFamily="34" charset="-122"/>
+                <a:cs typeface="Times New Roman" pitchFamily="34" charset="-120"/>
+              </a:rPr>
+              <a:t>A rise of the sea caused by a storm is a storm ______.</a:t>
+            </a:r>
+            <a:endParaRPr lang="en-US" sz="4000" dirty="0"/>
+          </a:p>
+        </p:txBody>
+      </p:sp>
+      <p:sp>
+        <p:nvSpPr>
+          <p:cNvPr id="25" name="Slide Number Placeholder 0"/>
+          <p:cNvSpPr>
+            <a:spLocks noGrp="1"/>
+          </p:cNvSpPr>
+          <p:nvPr>
+            <p:ph type="sldNum" sz="quarter" idx="4294967295"/>
+          </p:nvPr>
+        </p:nvSpPr>
+        <p:spPr>
+          <a:xfrm>
+            <a:off x="27432" y="91440"/>
+            <a:ext cx="585216" cy="475488"/>
+          </a:xfrm>
+          <a:prstGeom prst="rect">
+            <a:avLst/>
+          </a:prstGeom>
+          <a:extLst>
+            <a:ext uri="{C572A759-6A51-4108-AA02-DFA0A04FC94B}">
+              <ma14:wrappingTextBoxFlag xmlns:ma14="http://schemas.microsoft.com/office/mac/drawingml/2011/main" val="0"/>
+            </a:ext>
+          </a:extLst>
+        </p:spPr>
+        <p:txBody>
+          <a:bodyPr/>
+          <a:lstStyle>
+            <a:lvl1pPr>
+              <a:defRPr sz="2000">
+                <a:solidFill>
+                  <a:srgbClr val="FFFFFF"/>
+                </a:solidFill>
+                <a:latin typeface="Calibri"/>
+                <a:ea typeface="Calibri"/>
+                <a:cs typeface="Calibri"/>
+              </a:defRPr>
+            </a:lvl1pPr>
+          </a:lstStyle>
+          <a:p>
+            <a:pPr algn="ctr"/>
+            <a:fld id="{F7021451-1387-4CA6-816F-3879F97B5CBC}" type="slidenum">
+              <a:rPr b="1" lang="en-US"/>
+              <a:t>55</a:t>
+            </a:fld>
+            <a:endParaRPr lang="en-US"/>
+          </a:p>
+        </p:txBody>
+      </p:sp>
+    </p:spTree>
+  </p:cSld>
+  <p:clrMapOvr>
+    <a:masterClrMapping/>
+  </p:clrMapOvr>
+</p:sld>
+</file>
+
+<file path=ppt/slides/slide56.xml><?xml version="1.0" encoding="utf-8"?>
+<p:sld xmlns:a="http://schemas.openxmlformats.org/drawingml/2006/main" xmlns:r="http://schemas.openxmlformats.org/officeDocument/2006/relationships" xmlns:p="http://schemas.openxmlformats.org/presentationml/2006/main">
+  <p:cSld name="Slide 56">
+    <p:spTree>
+      <p:nvGrpSpPr>
+        <p:cNvPr id="1" name=""/>
+        <p:cNvGrpSpPr/>
+        <p:nvPr/>
+      </p:nvGrpSpPr>
+      <p:grpSpPr>
+        <a:xfrm>
+          <a:off x="0" y="0"/>
+          <a:ext cx="0" cy="0"/>
+          <a:chOff x="0" y="0"/>
+          <a:chExt cx="0" cy="0"/>
+        </a:xfrm>
+      </p:grpSpPr>
+      <p:sp>
+        <p:nvSpPr>
+          <p:cNvPr id="2" name="Text 0"/>
+          <p:cNvSpPr/>
+          <p:nvPr/>
+        </p:nvSpPr>
+        <p:spPr>
+          <a:xfrm>
+            <a:off x="457200" y="713232"/>
+            <a:ext cx="11368735" cy="274320"/>
+          </a:xfrm>
+          <a:prstGeom prst="rect">
+            <a:avLst/>
+          </a:prstGeom>
+          <a:noFill/>
+          <a:ln/>
+        </p:spPr>
+        <p:txBody>
+          <a:bodyPr wrap="square" lIns="0" tIns="0" rIns="0" bIns="0" rtlCol="0" anchor="ctr"/>
+          <a:lstStyle/>
+          <a:p>
+            <a:pPr algn="r" indent="0" marL="0">
+              <a:buNone/>
+            </a:pPr>
+            <a:r>
+              <a:rPr lang="en-US" sz="1400" b="1" dirty="0">
+                <a:solidFill>
+                  <a:srgbClr val="1C3F6E"/>
+                </a:solidFill>
+                <a:latin typeface="Calibri" pitchFamily="34" charset="0"/>
+                <a:ea typeface="Calibri" pitchFamily="34" charset="-122"/>
+                <a:cs typeface="Calibri" pitchFamily="34" charset="-120"/>
+              </a:rPr>
+              <a:t>HOMEWORK</a:t>
+            </a:r>
+            <a:endParaRPr lang="en-US" sz="1400" dirty="0"/>
+          </a:p>
+        </p:txBody>
+      </p:sp>
+      <p:pic>
+        <p:nvPicPr>
+          <p:cNvPr id="3" name="Image 0" descr="/home/claude/f4/img/minesec_sheet.png">    </p:cNvPr>
+          <p:cNvPicPr>
+            <a:picLocks noChangeAspect="1"/>
+          </p:cNvPicPr>
+          <p:nvPr/>
+        </p:nvPicPr>
+        <p:blipFill>
+          <a:blip r:embed="rId1"/>
+          <a:stretch>
+            <a:fillRect/>
+          </a:stretch>
+        </p:blipFill>
+        <p:spPr>
+          <a:xfrm>
+            <a:off x="0" y="658368"/>
+            <a:ext cx="5120640" cy="5833872"/>
+          </a:xfrm>
+          <a:prstGeom prst="rect">
+            <a:avLst/>
+          </a:prstGeom>
+        </p:spPr>
+      </p:pic>
+      <p:sp>
+        <p:nvSpPr>
+          <p:cNvPr id="4" name="Text 1"/>
+          <p:cNvSpPr/>
+          <p:nvPr/>
+        </p:nvSpPr>
+        <p:spPr>
+          <a:xfrm>
+            <a:off x="5349240" y="1005840"/>
+            <a:ext cx="6522415" cy="731520"/>
+          </a:xfrm>
+          <a:prstGeom prst="rect">
+            <a:avLst/>
+          </a:prstGeom>
+          <a:noFill/>
+          <a:ln/>
+        </p:spPr>
+        <p:txBody>
+          <a:bodyPr wrap="square" lIns="0" tIns="0" rIns="0" bIns="0" rtlCol="0" anchor="ctr">
+            <a:normAutofit/>
+          </a:bodyPr>
+          <a:lstStyle/>
+          <a:p>
+            <a:pPr algn="ctr" indent="0" marL="0">
+              <a:buNone/>
+            </a:pPr>
+            <a:r>
+              <a:rPr lang="en-US" sz="3600" b="1" dirty="0">
+                <a:solidFill>
+                  <a:srgbClr val="990011"/>
+                </a:solidFill>
+                <a:latin typeface="Times New Roman" pitchFamily="34" charset="0"/>
+                <a:ea typeface="Times New Roman" pitchFamily="34" charset="-122"/>
+                <a:cs typeface="Times New Roman" pitchFamily="34" charset="-120"/>
+              </a:rPr>
+              <a:t>Homework</a:t>
+            </a:r>
+            <a:endParaRPr lang="en-US" sz="3600" dirty="0"/>
+          </a:p>
+        </p:txBody>
+      </p:sp>
+      <p:sp>
+        <p:nvSpPr>
+          <p:cNvPr id="5" name="Text 2"/>
+          <p:cNvSpPr/>
+          <p:nvPr/>
+        </p:nvSpPr>
+        <p:spPr>
+          <a:xfrm>
+            <a:off x="5349240" y="1783080"/>
+            <a:ext cx="6522415" cy="4663440"/>
+          </a:xfrm>
+          <a:prstGeom prst="rect">
+            <a:avLst/>
+          </a:prstGeom>
+          <a:noFill/>
+          <a:ln/>
+        </p:spPr>
+        <p:txBody>
+          <a:bodyPr wrap="square" lIns="0" tIns="0" rIns="0" bIns="0" rtlCol="0" anchor="t"/>
+          <a:lstStyle/>
+          <a:p>
+            <a:pPr algn="l" indent="0" marL="0">
+              <a:spcAft>
+                <a:spcPts val="800"/>
+              </a:spcAft>
+              <a:buNone/>
+            </a:pPr>
+            <a:r>
+              <a:rPr lang="en-US" sz="4000" dirty="0">
+                <a:solidFill>
+                  <a:srgbClr val="111111"/>
+                </a:solidFill>
+                <a:latin typeface="Times New Roman" pitchFamily="34" charset="0"/>
+                <a:ea typeface="Times New Roman" pitchFamily="34" charset="-122"/>
+                <a:cs typeface="Times New Roman" pitchFamily="34" charset="-120"/>
+              </a:rPr>
+              <a:t>Define a micro-climate.</a:t>
+            </a:r>
+            <a:endParaRPr lang="en-US" sz="4000" dirty="0"/>
+          </a:p>
+        </p:txBody>
+      </p:sp>
+      <p:sp>
+        <p:nvSpPr>
+          <p:cNvPr id="25" name="Slide Number Placeholder 0"/>
+          <p:cNvSpPr>
+            <a:spLocks noGrp="1"/>
+          </p:cNvSpPr>
+          <p:nvPr>
+            <p:ph type="sldNum" sz="quarter" idx="4294967295"/>
+          </p:nvPr>
+        </p:nvSpPr>
+        <p:spPr>
+          <a:xfrm>
+            <a:off x="27432" y="91440"/>
+            <a:ext cx="585216" cy="475488"/>
+          </a:xfrm>
+          <a:prstGeom prst="rect">
+            <a:avLst/>
+          </a:prstGeom>
+          <a:extLst>
+            <a:ext uri="{C572A759-6A51-4108-AA02-DFA0A04FC94B}">
+              <ma14:wrappingTextBoxFlag xmlns:ma14="http://schemas.microsoft.com/office/mac/drawingml/2011/main" val="0"/>
+            </a:ext>
+          </a:extLst>
+        </p:spPr>
+        <p:txBody>
+          <a:bodyPr/>
+          <a:lstStyle>
+            <a:lvl1pPr>
+              <a:defRPr sz="2000">
+                <a:solidFill>
+                  <a:srgbClr val="FFFFFF"/>
+                </a:solidFill>
+                <a:latin typeface="Calibri"/>
+                <a:ea typeface="Calibri"/>
+                <a:cs typeface="Calibri"/>
+              </a:defRPr>
+            </a:lvl1pPr>
+          </a:lstStyle>
+          <a:p>
+            <a:pPr algn="ctr"/>
+            <a:fld id="{F7021451-1387-4CA6-816F-3879F97B5CBC}" type="slidenum">
+              <a:rPr b="1" lang="en-US"/>
+              <a:t>56</a:t>
+            </a:fld>
+            <a:endParaRPr lang="en-US"/>
+          </a:p>
+        </p:txBody>
+      </p:sp>
+    </p:spTree>
+  </p:cSld>
+  <p:clrMapOvr>
+    <a:masterClrMapping/>
+  </p:clrMapOvr>
+</p:sld>
+</file>
+
+<file path=ppt/slides/slide57.xml><?xml version="1.0" encoding="utf-8"?>
+<p:sld xmlns:a="http://schemas.openxmlformats.org/drawingml/2006/main" xmlns:r="http://schemas.openxmlformats.org/officeDocument/2006/relationships" xmlns:p="http://schemas.openxmlformats.org/presentationml/2006/main">
+  <p:cSld name="Slide 57">
+    <p:spTree>
+      <p:nvGrpSpPr>
+        <p:cNvPr id="1" name=""/>
+        <p:cNvGrpSpPr/>
+        <p:nvPr/>
+      </p:nvGrpSpPr>
+      <p:grpSpPr>
+        <a:xfrm>
+          <a:off x="0" y="0"/>
+          <a:ext cx="0" cy="0"/>
+          <a:chOff x="0" y="0"/>
+          <a:chExt cx="0" cy="0"/>
+        </a:xfrm>
+      </p:grpSpPr>
+      <p:sp>
+        <p:nvSpPr>
+          <p:cNvPr id="2" name="Text 0"/>
+          <p:cNvSpPr/>
+          <p:nvPr/>
+        </p:nvSpPr>
+        <p:spPr>
+          <a:xfrm>
+            <a:off x="457200" y="713232"/>
+            <a:ext cx="11368735" cy="274320"/>
+          </a:xfrm>
+          <a:prstGeom prst="rect">
+            <a:avLst/>
+          </a:prstGeom>
+          <a:noFill/>
+          <a:ln/>
+        </p:spPr>
+        <p:txBody>
+          <a:bodyPr wrap="square" lIns="0" tIns="0" rIns="0" bIns="0" rtlCol="0" anchor="ctr"/>
+          <a:lstStyle/>
+          <a:p>
+            <a:pPr algn="r" indent="0" marL="0">
+              <a:buNone/>
+            </a:pPr>
+            <a:r>
+              <a:rPr lang="en-US" sz="1400" b="1" dirty="0">
+                <a:solidFill>
+                  <a:srgbClr val="1C3F6E"/>
+                </a:solidFill>
+                <a:latin typeface="Calibri" pitchFamily="34" charset="0"/>
+                <a:ea typeface="Calibri" pitchFamily="34" charset="-122"/>
+                <a:cs typeface="Calibri" pitchFamily="34" charset="-120"/>
+              </a:rPr>
+              <a:t>NEXT LESSON</a:t>
+            </a:r>
+            <a:endParaRPr lang="en-US" sz="1400" dirty="0"/>
+          </a:p>
+        </p:txBody>
+      </p:sp>
+      <p:pic>
+        <p:nvPicPr>
+          <p:cNvPr id="3" name="Image 0" descr="/home/claude/f4/img/minesec_sheet.png">    </p:cNvPr>
+          <p:cNvPicPr>
+            <a:picLocks noChangeAspect="1"/>
+          </p:cNvPicPr>
+          <p:nvPr/>
+        </p:nvPicPr>
+        <p:blipFill>
+          <a:blip r:embed="rId1"/>
+          <a:stretch>
+            <a:fillRect/>
+          </a:stretch>
+        </p:blipFill>
+        <p:spPr>
+          <a:xfrm>
+            <a:off x="0" y="658368"/>
+            <a:ext cx="5120640" cy="5833872"/>
+          </a:xfrm>
+          <a:prstGeom prst="rect">
+            <a:avLst/>
+          </a:prstGeom>
+        </p:spPr>
+      </p:pic>
+      <p:sp>
+        <p:nvSpPr>
+          <p:cNvPr id="4" name="Text 1"/>
+          <p:cNvSpPr/>
+          <p:nvPr/>
+        </p:nvSpPr>
+        <p:spPr>
+          <a:xfrm>
+            <a:off x="5349240" y="1005840"/>
+            <a:ext cx="6522415" cy="731520"/>
+          </a:xfrm>
+          <a:prstGeom prst="rect">
+            <a:avLst/>
+          </a:prstGeom>
+          <a:noFill/>
+          <a:ln/>
+        </p:spPr>
+        <p:txBody>
+          <a:bodyPr wrap="square" lIns="0" tIns="0" rIns="0" bIns="0" rtlCol="0" anchor="ctr">
+            <a:normAutofit/>
+          </a:bodyPr>
+          <a:lstStyle/>
+          <a:p>
+            <a:pPr algn="ctr" indent="0" marL="0">
+              <a:buNone/>
+            </a:pPr>
+            <a:r>
+              <a:rPr lang="en-US" sz="3600" b="1" dirty="0">
+                <a:solidFill>
+                  <a:srgbClr val="990011"/>
+                </a:solidFill>
+                <a:latin typeface="Times New Roman" pitchFamily="34" charset="0"/>
+                <a:ea typeface="Times New Roman" pitchFamily="34" charset="-122"/>
+                <a:cs typeface="Times New Roman" pitchFamily="34" charset="-120"/>
+              </a:rPr>
+              <a:t>Next Lesson</a:t>
+            </a:r>
+            <a:endParaRPr lang="en-US" sz="3600" dirty="0"/>
+          </a:p>
+        </p:txBody>
+      </p:sp>
+      <p:sp>
+        <p:nvSpPr>
+          <p:cNvPr id="5" name="Text 2"/>
+          <p:cNvSpPr/>
+          <p:nvPr/>
+        </p:nvSpPr>
+        <p:spPr>
+          <a:xfrm>
+            <a:off x="5349240" y="1783080"/>
+            <a:ext cx="6522415" cy="4663440"/>
+          </a:xfrm>
+          <a:prstGeom prst="rect">
+            <a:avLst/>
+          </a:prstGeom>
+          <a:noFill/>
+          <a:ln/>
+        </p:spPr>
+        <p:txBody>
+          <a:bodyPr wrap="square" lIns="0" tIns="0" rIns="0" bIns="0" rtlCol="0" anchor="ctr"/>
+          <a:lstStyle/>
+          <a:p>
+            <a:pPr algn="ctr" indent="0" marL="0">
+              <a:spcAft>
+                <a:spcPts val="800"/>
+              </a:spcAft>
+              <a:buNone/>
+            </a:pPr>
+            <a:r>
+              <a:rPr lang="en-US" sz="4000" b="1" dirty="0">
+                <a:solidFill>
+                  <a:srgbClr val="111111"/>
+                </a:solidFill>
+                <a:latin typeface="Times New Roman" pitchFamily="34" charset="0"/>
+                <a:ea typeface="Times New Roman" pitchFamily="34" charset="-122"/>
+                <a:cs typeface="Times New Roman" pitchFamily="34" charset="-120"/>
+              </a:rPr>
+              <a:t>Our next lesson will be on:</a:t>
+            </a:r>
+            <a:endParaRPr lang="en-US" sz="4000" dirty="0"/>
+          </a:p>
+          <a:p>
+            <a:pPr algn="ctr" indent="0" marL="0">
+              <a:spcAft>
+                <a:spcPts val="800"/>
+              </a:spcAft>
+              <a:buNone/>
+            </a:pPr>
+            <a:r>
+              <a:rPr lang="en-US" sz="4000" b="1" dirty="0">
+                <a:solidFill>
+                  <a:srgbClr val="990011"/>
+                </a:solidFill>
+                <a:latin typeface="Times New Roman" pitchFamily="34" charset="0"/>
+                <a:ea typeface="Times New Roman" pitchFamily="34" charset="-122"/>
+                <a:cs typeface="Times New Roman" pitchFamily="34" charset="-120"/>
+              </a:rPr>
+              <a:t>Lesson 20: Micro-climates</a:t>
+            </a:r>
+            <a:endParaRPr lang="en-US" sz="4000" dirty="0"/>
+          </a:p>
+        </p:txBody>
+      </p:sp>
+      <p:sp>
+        <p:nvSpPr>
+          <p:cNvPr id="25" name="Slide Number Placeholder 0"/>
+          <p:cNvSpPr>
+            <a:spLocks noGrp="1"/>
+          </p:cNvSpPr>
+          <p:nvPr>
+            <p:ph type="sldNum" sz="quarter" idx="4294967295"/>
+          </p:nvPr>
+        </p:nvSpPr>
+        <p:spPr>
+          <a:xfrm>
+            <a:off x="27432" y="91440"/>
+            <a:ext cx="585216" cy="475488"/>
+          </a:xfrm>
+          <a:prstGeom prst="rect">
+            <a:avLst/>
+          </a:prstGeom>
+          <a:extLst>
+            <a:ext uri="{C572A759-6A51-4108-AA02-DFA0A04FC94B}">
+              <ma14:wrappingTextBoxFlag xmlns:ma14="http://schemas.microsoft.com/office/mac/drawingml/2011/main" val="0"/>
+            </a:ext>
+          </a:extLst>
+        </p:spPr>
+        <p:txBody>
+          <a:bodyPr/>
+          <a:lstStyle>
+            <a:lvl1pPr>
+              <a:defRPr sz="2000">
+                <a:solidFill>
+                  <a:srgbClr val="FFFFFF"/>
+                </a:solidFill>
+                <a:latin typeface="Calibri"/>
+                <a:ea typeface="Calibri"/>
+                <a:cs typeface="Calibri"/>
+              </a:defRPr>
+            </a:lvl1pPr>
+          </a:lstStyle>
+          <a:p>
+            <a:pPr algn="ctr"/>
+            <a:fld id="{F7021451-1387-4CA6-816F-3879F97B5CBC}" type="slidenum">
+              <a:rPr b="1" lang="en-US"/>
+              <a:t>57</a:t>
+            </a:fld>
+            <a:endParaRPr lang="en-US"/>
+          </a:p>
+        </p:txBody>
+      </p:sp>
+    </p:spTree>
+  </p:cSld>
+  <p:clrMapOvr>
+    <a:masterClrMapping/>
+  </p:clrMapOvr>
+</p:sld>
+</file>
+
+<file path=ppt/slides/slide58.xml><?xml version="1.0" encoding="utf-8"?>
+<p:sld xmlns:a="http://schemas.openxmlformats.org/drawingml/2006/main" xmlns:r="http://schemas.openxmlformats.org/officeDocument/2006/relationships" xmlns:p="http://schemas.openxmlformats.org/presentationml/2006/main">
+  <p:cSld name="Slide 58">
+    <p:spTree>
+      <p:nvGrpSpPr>
+        <p:cNvPr id="1" name=""/>
+        <p:cNvGrpSpPr/>
+        <p:nvPr/>
+      </p:nvGrpSpPr>
+      <p:grpSpPr>
+        <a:xfrm>
+          <a:off x="0" y="0"/>
+          <a:ext cx="0" cy="0"/>
+          <a:chOff x="0" y="0"/>
+          <a:chExt cx="0" cy="0"/>
+        </a:xfrm>
+      </p:grpSpPr>
+      <p:sp>
+        <p:nvSpPr>
+          <p:cNvPr id="2" name="Text 0"/>
+          <p:cNvSpPr/>
+          <p:nvPr/>
+        </p:nvSpPr>
+        <p:spPr>
+          <a:xfrm>
+            <a:off x="457200" y="713232"/>
+            <a:ext cx="11368735" cy="274320"/>
+          </a:xfrm>
+          <a:prstGeom prst="rect">
+            <a:avLst/>
+          </a:prstGeom>
+          <a:noFill/>
+          <a:ln/>
+        </p:spPr>
+        <p:txBody>
+          <a:bodyPr wrap="square" lIns="0" tIns="0" rIns="0" bIns="0" rtlCol="0" anchor="ctr"/>
+          <a:lstStyle/>
+          <a:p>
+            <a:pPr algn="r" indent="0" marL="0">
+              <a:buNone/>
+            </a:pPr>
+            <a:r>
+              <a:rPr lang="en-US" sz="1400" b="1" dirty="0">
+                <a:solidFill>
+                  <a:srgbClr val="1C3F6E"/>
+                </a:solidFill>
+                <a:latin typeface="Calibri" pitchFamily="34" charset="0"/>
+                <a:ea typeface="Calibri" pitchFamily="34" charset="-122"/>
+                <a:cs typeface="Calibri" pitchFamily="34" charset="-120"/>
+              </a:rPr>
+              <a:t>BILINGUAL GAME</a:t>
+            </a:r>
+            <a:endParaRPr lang="en-US" sz="1400" dirty="0"/>
+          </a:p>
+        </p:txBody>
+      </p:sp>
+      <p:sp>
+        <p:nvSpPr>
+          <p:cNvPr id="3" name="Text 1"/>
+          <p:cNvSpPr/>
+          <p:nvPr/>
+        </p:nvSpPr>
+        <p:spPr>
+          <a:xfrm>
+            <a:off x="457200" y="1005840"/>
+            <a:ext cx="11277295" cy="731520"/>
+          </a:xfrm>
+          <a:prstGeom prst="rect">
+            <a:avLst/>
+          </a:prstGeom>
+          <a:noFill/>
+          <a:ln/>
+        </p:spPr>
+        <p:txBody>
+          <a:bodyPr wrap="square" lIns="0" tIns="0" rIns="0" bIns="0" rtlCol="0" anchor="ctr"/>
+          <a:lstStyle/>
+          <a:p>
+            <a:pPr algn="ctr" indent="0" marL="0">
+              <a:buNone/>
+            </a:pPr>
+            <a:r>
+              <a:rPr lang="en-US" sz="3600" b="1" dirty="0">
+                <a:solidFill>
+                  <a:srgbClr val="990011"/>
+                </a:solidFill>
+                <a:latin typeface="Times New Roman" pitchFamily="34" charset="0"/>
+                <a:ea typeface="Times New Roman" pitchFamily="34" charset="-122"/>
+                <a:cs typeface="Times New Roman" pitchFamily="34" charset="-120"/>
+              </a:rPr>
               <a:t>Bilingual Game (Jeu Bilingue)</a:t>
             </a:r>
             <a:endParaRPr lang="en-US" sz="3600" dirty="0"/>
@@ -19018,7 +20883,7 @@
       </p:sp>
       <p:graphicFrame>
         <p:nvGraphicFramePr>
-          <p:cNvPr id="55" name="Table 0"/>
+          <p:cNvPr id="59" name="Table 0"/>
           <p:cNvGraphicFramePr>
             <a:graphicFrameLocks noGrp="1"/>
           </p:cNvGraphicFramePr>
@@ -19336,7 +21201,7 @@
                           <a:ea typeface="Calibri" pitchFamily="34" charset="-122"/>
                           <a:cs typeface="Calibri" pitchFamily="34" charset="-120"/>
                         </a:rPr>
-                        <a:t>Lightning</a:t>
+                        <a:t>Tornado</a:t>
                       </a:r>
                       <a:endParaRPr lang="en-US" sz="2200" dirty="0">
                         <a:latin typeface="Calibri" charset="0"/>
@@ -19404,7 +21269,7 @@
                           <a:ea typeface="Calibri" pitchFamily="34" charset="-122"/>
                           <a:cs typeface="Calibri" pitchFamily="34" charset="-120"/>
                         </a:rPr>
-                        <a:t>La foudre</a:t>
+                        <a:t>La tornade</a:t>
                       </a:r>
                       <a:endParaRPr lang="en-US" sz="2200" dirty="0">
                         <a:latin typeface="Calibri" charset="0"/>
@@ -19474,7 +21339,7 @@
                           <a:ea typeface="Calibri" pitchFamily="34" charset="-122"/>
                           <a:cs typeface="Calibri" pitchFamily="34" charset="-120"/>
                         </a:rPr>
-                        <a:t>Tornado</a:t>
+                        <a:t>Tropical cyclone</a:t>
                       </a:r>
                       <a:endParaRPr lang="en-US" sz="2200" dirty="0">
                         <a:latin typeface="Calibri" charset="0"/>
@@ -19542,7 +21407,7 @@
                           <a:ea typeface="Calibri" pitchFamily="34" charset="-122"/>
                           <a:cs typeface="Calibri" pitchFamily="34" charset="-120"/>
                         </a:rPr>
-                        <a:t>La tornade</a:t>
+                        <a:t>Le cyclone tropical</a:t>
                       </a:r>
                       <a:endParaRPr lang="en-US" sz="2200" dirty="0">
                         <a:latin typeface="Calibri" charset="0"/>
@@ -19612,7 +21477,7 @@
                           <a:ea typeface="Calibri" pitchFamily="34" charset="-122"/>
                           <a:cs typeface="Calibri" pitchFamily="34" charset="-120"/>
                         </a:rPr>
-                        <a:t>Cyclone</a:t>
+                        <a:t>Lightning</a:t>
                       </a:r>
                       <a:endParaRPr lang="en-US" sz="2200" dirty="0">
                         <a:latin typeface="Calibri" charset="0"/>
@@ -19680,7 +21545,7 @@
                           <a:ea typeface="Calibri" pitchFamily="34" charset="-122"/>
                           <a:cs typeface="Calibri" pitchFamily="34" charset="-120"/>
                         </a:rPr>
-                        <a:t>Le cyclone</a:t>
+                        <a:t>L'éclair, la foudre</a:t>
                       </a:r>
                       <a:endParaRPr lang="en-US" sz="2200" dirty="0">
                         <a:latin typeface="Calibri" charset="0"/>
@@ -19750,7 +21615,7 @@
                           <a:ea typeface="Calibri" pitchFamily="34" charset="-122"/>
                           <a:cs typeface="Calibri" pitchFamily="34" charset="-120"/>
                         </a:rPr>
-                        <a:t>Eye</a:t>
+                        <a:t>Flooding</a:t>
                       </a:r>
                       <a:endParaRPr lang="en-US" sz="2200" dirty="0">
                         <a:latin typeface="Calibri" charset="0"/>
@@ -19818,7 +21683,7 @@
                           <a:ea typeface="Calibri" pitchFamily="34" charset="-122"/>
                           <a:cs typeface="Calibri" pitchFamily="34" charset="-120"/>
                         </a:rPr>
-                        <a:t>L'œil</a:t>
+                        <a:t>L'inondation</a:t>
                       </a:r>
                       <a:endParaRPr lang="en-US" sz="2200" dirty="0">
                         <a:latin typeface="Calibri" charset="0"/>
@@ -19888,7 +21753,7 @@
                           <a:ea typeface="Calibri" pitchFamily="34" charset="-122"/>
                           <a:cs typeface="Calibri" pitchFamily="34" charset="-120"/>
                         </a:rPr>
-                        <a:t>Warning</a:t>
+                        <a:t>Storm surge</a:t>
                       </a:r>
                       <a:endParaRPr lang="en-US" sz="2200" dirty="0">
                         <a:latin typeface="Calibri" charset="0"/>
@@ -19956,7 +21821,7 @@
                           <a:ea typeface="Calibri" pitchFamily="34" charset="-122"/>
                           <a:cs typeface="Calibri" pitchFamily="34" charset="-120"/>
                         </a:rPr>
-                        <a:t>L'alerte</a:t>
+                        <a:t>L'onde de tempête</a:t>
                       </a:r>
                       <a:endParaRPr lang="en-US" sz="2200" dirty="0">
                         <a:latin typeface="Calibri" charset="0"/>
@@ -20054,7 +21919,7 @@
             <a:pPr algn="ctr"/>
             <a:fld id="{F7021451-1387-4CA6-816F-3879F97B5CBC}" type="slidenum">
               <a:rPr b="1" lang="en-US"/>
-              <a:t>54</a:t>
+              <a:t>58</a:t>
             </a:fld>
             <a:endParaRPr lang="en-US"/>
           </a:p>
@@ -20068,9 +21933,9 @@
 </p:sld>
 </file>
 
-<file path=ppt/slides/slide55.xml><?xml version="1.0" encoding="utf-8"?>
+<file path=ppt/slides/slide59.xml><?xml version="1.0" encoding="utf-8"?>
 <p:sld xmlns:a="http://schemas.openxmlformats.org/drawingml/2006/main" xmlns:r="http://schemas.openxmlformats.org/officeDocument/2006/relationships" xmlns:p="http://schemas.openxmlformats.org/presentationml/2006/main">
-  <p:cSld name="Slide 55">
+  <p:cSld name="Slide 59">
     <p:spTree>
       <p:nvGrpSpPr>
         <p:cNvPr id="1" name=""/>
@@ -20165,7 +22030,7 @@
       </p:sp>
       <p:graphicFrame>
         <p:nvGraphicFramePr>
-          <p:cNvPr id="56" name="Table 0"/>
+          <p:cNvPr id="60" name="Table 0"/>
           <p:cNvGraphicFramePr>
             <a:graphicFrameLocks noGrp="1"/>
           </p:cNvGraphicFramePr>
@@ -20551,7 +22416,7 @@
                           <a:ea typeface="Calibri" pitchFamily="34" charset="-122"/>
                           <a:cs typeface="Calibri" pitchFamily="34" charset="-120"/>
                         </a:rPr>
-                        <a:t>Explain the formation and effects of thunderstorms. Explain tornadoes. Explain tropical cyclones and measures against them.</a:t>
+                        <a:t>Define thunderstorms, tornadoes and tropical cyclones. Describe their distribution and causes. Explain their consequences. Propose measures to reduce their hazards.</a:t>
                       </a:r>
                       <a:endParaRPr lang="en-US" sz="1600" dirty="0">
                         <a:latin typeface="Calibri" charset="0"/>
@@ -20689,7 +22554,7 @@
                           <a:ea typeface="Calibri" pitchFamily="34" charset="-122"/>
                           <a:cs typeface="Calibri" pitchFamily="34" charset="-120"/>
                         </a:rPr>
-                        <a:t>Learners are able to explain tropical weather disturbances and suggest measures to reduce their dangers.</a:t>
+                        <a:t>Learners are able to explain the formation and dangers of tropical weather disturbances and the measures to reduce their effects.</a:t>
                       </a:r>
                       <a:endParaRPr lang="en-US" sz="1600" dirty="0">
                         <a:latin typeface="Calibri" charset="0"/>
@@ -20787,7 +22652,7 @@
             <a:pPr algn="ctr"/>
             <a:fld id="{F7021451-1387-4CA6-816F-3879F97B5CBC}" type="slidenum">
               <a:rPr b="1" lang="en-US"/>
-              <a:t>55</a:t>
+              <a:t>59</a:t>
             </a:fld>
             <a:endParaRPr lang="en-US"/>
           </a:p>
@@ -20801,9 +22666,9 @@
 </p:sld>
 </file>
 
-<file path=ppt/slides/slide56.xml><?xml version="1.0" encoding="utf-8"?>
+<file path=ppt/slides/slide6.xml><?xml version="1.0" encoding="utf-8"?>
 <p:sld xmlns:a="http://schemas.openxmlformats.org/drawingml/2006/main" xmlns:r="http://schemas.openxmlformats.org/officeDocument/2006/relationships" xmlns:p="http://schemas.openxmlformats.org/presentationml/2006/main">
-  <p:cSld name="Slide 56">
+  <p:cSld name="Slide 6">
     <p:spTree>
       <p:nvGrpSpPr>
         <p:cNvPr id="1" name=""/>
@@ -20851,22 +22716,46 @@
                 <a:ea typeface="Calibri" pitchFamily="34" charset="-122"/>
                 <a:cs typeface="Calibri" pitchFamily="34" charset="-120"/>
               </a:rPr>
-              <a:t>LOGBOOK</a:t>
+              <a:t>LESSON PLAN</a:t>
             </a:r>
             <a:endParaRPr lang="en-US" sz="1400" dirty="0"/>
           </a:p>
         </p:txBody>
       </p:sp>
-      <p:sp>
-        <p:nvSpPr>
-          <p:cNvPr id="3" name="Text 1"/>
+      <p:pic>
+        <p:nvPicPr>
+          <p:cNvPr id="3" name="Image 0" descr="/home/claude/f4/img/minesec_sheet.png">    </p:cNvPr>
+          <p:cNvPicPr>
+            <a:picLocks noChangeAspect="1"/>
+          </p:cNvPicPr>
+          <p:nvPr/>
+        </p:nvPicPr>
+        <p:blipFill>
+          <a:blip r:embed="rId1"/>
+          <a:stretch>
+            <a:fillRect/>
+          </a:stretch>
+        </p:blipFill>
+        <p:spPr>
+          <a:xfrm>
+            <a:off x="0" y="658368"/>
+            <a:ext cx="2468880" cy="5833872"/>
+          </a:xfrm>
+          <a:prstGeom prst="rect">
+            <a:avLst/>
+          </a:prstGeom>
+        </p:spPr>
+      </p:pic>
+      <p:sp>
+        <p:nvSpPr>
+          <p:cNvPr id="4" name="Text 1"/>
           <p:cNvSpPr/>
           <p:nvPr/>
         </p:nvSpPr>
         <p:spPr>
           <a:xfrm>
-            <a:off x="457200" y="1005840"/>
-            <a:ext cx="11277295" cy="731520"/>
+            <a:off x="2697480" y="1005840"/>
+            <a:ext cx="9174175" cy="731520"/>
           </a:xfrm>
           <a:prstGeom prst="rect">
             <a:avLst/>
@@ -20875,7 +22764,9 @@
           <a:ln/>
         </p:spPr>
         <p:txBody>
-          <a:bodyPr wrap="square" lIns="0" tIns="0" rIns="0" bIns="0" rtlCol="0" anchor="ctr"/>
+          <a:bodyPr wrap="square" lIns="0" tIns="0" rIns="0" bIns="0" rtlCol="0" anchor="ctr">
+            <a:normAutofit/>
+          </a:bodyPr>
           <a:lstStyle/>
           <a:p>
             <a:pPr algn="ctr" indent="0" marL="0">
@@ -20890,6 +22781,311 @@
                 <a:ea typeface="Times New Roman" pitchFamily="34" charset="-122"/>
                 <a:cs typeface="Times New Roman" pitchFamily="34" charset="-120"/>
               </a:rPr>
+              <a:t>Lesson Plan</a:t>
+            </a:r>
+            <a:endParaRPr lang="en-US" sz="3600" dirty="0"/>
+          </a:p>
+        </p:txBody>
+      </p:sp>
+      <p:sp>
+        <p:nvSpPr>
+          <p:cNvPr id="5" name="Text 2"/>
+          <p:cNvSpPr/>
+          <p:nvPr/>
+        </p:nvSpPr>
+        <p:spPr>
+          <a:xfrm>
+            <a:off x="2697480" y="1783080"/>
+            <a:ext cx="9174175" cy="4663440"/>
+          </a:xfrm>
+          <a:prstGeom prst="rect">
+            <a:avLst/>
+          </a:prstGeom>
+          <a:noFill/>
+          <a:ln/>
+        </p:spPr>
+        <p:txBody>
+          <a:bodyPr wrap="square" lIns="0" tIns="0" rIns="0" bIns="0" rtlCol="0" anchor="t"/>
+          <a:lstStyle/>
+          <a:p>
+            <a:pPr algn="l" marL="342900" indent="-342900">
+              <a:spcAft>
+                <a:spcPts val="800"/>
+              </a:spcAft>
+              <a:buSzPct val="100000"/>
+              <a:buFont typeface="+mj-lt"/>
+              <a:buAutoNum type="arabicPeriod" startAt="1"/>
+            </a:pPr>
+            <a:r>
+              <a:rPr lang="en-US" sz="4000" dirty="0">
+                <a:solidFill>
+                  <a:srgbClr val="111111"/>
+                </a:solidFill>
+                <a:latin typeface="Times New Roman" pitchFamily="34" charset="0"/>
+                <a:ea typeface="Times New Roman" pitchFamily="34" charset="-122"/>
+                <a:cs typeface="Times New Roman" pitchFamily="34" charset="-120"/>
+              </a:rPr>
+              <a:t>Correction of the homework</a:t>
+            </a:r>
+            <a:endParaRPr lang="en-US" sz="4000" dirty="0"/>
+          </a:p>
+          <a:p>
+            <a:pPr algn="l" marL="342900" indent="-342900">
+              <a:spcAft>
+                <a:spcPts val="800"/>
+              </a:spcAft>
+              <a:buSzPct val="100000"/>
+              <a:buFont typeface="+mj-lt"/>
+              <a:buAutoNum type="arabicPeriod" startAt="1"/>
+            </a:pPr>
+            <a:r>
+              <a:rPr lang="en-US" sz="4000" dirty="0">
+                <a:solidFill>
+                  <a:srgbClr val="111111"/>
+                </a:solidFill>
+                <a:latin typeface="Times New Roman" pitchFamily="34" charset="0"/>
+                <a:ea typeface="Times New Roman" pitchFamily="34" charset="-122"/>
+                <a:cs typeface="Times New Roman" pitchFamily="34" charset="-120"/>
+              </a:rPr>
+              <a:t>Objectives and recall</a:t>
+            </a:r>
+            <a:endParaRPr lang="en-US" sz="4000" dirty="0"/>
+          </a:p>
+          <a:p>
+            <a:pPr algn="l" marL="342900" indent="-342900">
+              <a:spcAft>
+                <a:spcPts val="800"/>
+              </a:spcAft>
+              <a:buSzPct val="100000"/>
+              <a:buFont typeface="+mj-lt"/>
+              <a:buAutoNum type="arabicPeriod" startAt="1"/>
+            </a:pPr>
+            <a:r>
+              <a:rPr lang="en-US" sz="4000" dirty="0">
+                <a:solidFill>
+                  <a:srgbClr val="111111"/>
+                </a:solidFill>
+                <a:latin typeface="Times New Roman" pitchFamily="34" charset="0"/>
+                <a:ea typeface="Times New Roman" pitchFamily="34" charset="-122"/>
+                <a:cs typeface="Times New Roman" pitchFamily="34" charset="-120"/>
+              </a:rPr>
+              <a:t>Real-life situation and action to take</a:t>
+            </a:r>
+            <a:endParaRPr lang="en-US" sz="4000" dirty="0"/>
+          </a:p>
+          <a:p>
+            <a:pPr algn="l" marL="342900" indent="-342900">
+              <a:spcAft>
+                <a:spcPts val="800"/>
+              </a:spcAft>
+              <a:buSzPct val="100000"/>
+              <a:buFont typeface="+mj-lt"/>
+              <a:buAutoNum type="arabicPeriod" startAt="1"/>
+            </a:pPr>
+            <a:r>
+              <a:rPr lang="en-US" sz="4000" dirty="0">
+                <a:solidFill>
+                  <a:srgbClr val="111111"/>
+                </a:solidFill>
+                <a:latin typeface="Times New Roman" pitchFamily="34" charset="0"/>
+                <a:ea typeface="Times New Roman" pitchFamily="34" charset="-122"/>
+                <a:cs typeface="Times New Roman" pitchFamily="34" charset="-120"/>
+              </a:rPr>
+              <a:t>Learning activities</a:t>
+            </a:r>
+            <a:endParaRPr lang="en-US" sz="4000" dirty="0"/>
+          </a:p>
+          <a:p>
+            <a:pPr algn="l" marL="342900" indent="-342900">
+              <a:spcAft>
+                <a:spcPts val="800"/>
+              </a:spcAft>
+              <a:buSzPct val="100000"/>
+              <a:buFont typeface="+mj-lt"/>
+              <a:buAutoNum type="arabicPeriod" startAt="1"/>
+            </a:pPr>
+            <a:r>
+              <a:rPr lang="en-US" sz="4000" dirty="0">
+                <a:solidFill>
+                  <a:srgbClr val="111111"/>
+                </a:solidFill>
+                <a:latin typeface="Times New Roman" pitchFamily="34" charset="0"/>
+                <a:ea typeface="Times New Roman" pitchFamily="34" charset="-122"/>
+                <a:cs typeface="Times New Roman" pitchFamily="34" charset="-120"/>
+              </a:rPr>
+              <a:t>Board summary</a:t>
+            </a:r>
+            <a:endParaRPr lang="en-US" sz="4000" dirty="0"/>
+          </a:p>
+          <a:p>
+            <a:pPr algn="l" marL="342900" indent="-342900">
+              <a:spcAft>
+                <a:spcPts val="800"/>
+              </a:spcAft>
+              <a:buSzPct val="100000"/>
+              <a:buFont typeface="+mj-lt"/>
+              <a:buAutoNum type="arabicPeriod" startAt="1"/>
+            </a:pPr>
+            <a:r>
+              <a:rPr lang="en-US" sz="4000" dirty="0">
+                <a:solidFill>
+                  <a:srgbClr val="111111"/>
+                </a:solidFill>
+                <a:latin typeface="Times New Roman" pitchFamily="34" charset="0"/>
+                <a:ea typeface="Times New Roman" pitchFamily="34" charset="-122"/>
+                <a:cs typeface="Times New Roman" pitchFamily="34" charset="-120"/>
+              </a:rPr>
+              <a:t>Evaluation, remediation and homework</a:t>
+            </a:r>
+            <a:endParaRPr lang="en-US" sz="4000" dirty="0"/>
+          </a:p>
+        </p:txBody>
+      </p:sp>
+      <p:sp>
+        <p:nvSpPr>
+          <p:cNvPr id="25" name="Slide Number Placeholder 0"/>
+          <p:cNvSpPr>
+            <a:spLocks noGrp="1"/>
+          </p:cNvSpPr>
+          <p:nvPr>
+            <p:ph type="sldNum" sz="quarter" idx="4294967295"/>
+          </p:nvPr>
+        </p:nvSpPr>
+        <p:spPr>
+          <a:xfrm>
+            <a:off x="27432" y="91440"/>
+            <a:ext cx="585216" cy="475488"/>
+          </a:xfrm>
+          <a:prstGeom prst="rect">
+            <a:avLst/>
+          </a:prstGeom>
+          <a:extLst>
+            <a:ext uri="{C572A759-6A51-4108-AA02-DFA0A04FC94B}">
+              <ma14:wrappingTextBoxFlag xmlns:ma14="http://schemas.microsoft.com/office/mac/drawingml/2011/main" val="0"/>
+            </a:ext>
+          </a:extLst>
+        </p:spPr>
+        <p:txBody>
+          <a:bodyPr/>
+          <a:lstStyle>
+            <a:lvl1pPr>
+              <a:defRPr sz="2000">
+                <a:solidFill>
+                  <a:srgbClr val="FFFFFF"/>
+                </a:solidFill>
+                <a:latin typeface="Calibri"/>
+                <a:ea typeface="Calibri"/>
+                <a:cs typeface="Calibri"/>
+              </a:defRPr>
+            </a:lvl1pPr>
+          </a:lstStyle>
+          <a:p>
+            <a:pPr algn="ctr"/>
+            <a:fld id="{F7021451-1387-4CA6-816F-3879F97B5CBC}" type="slidenum">
+              <a:rPr b="1" lang="en-US"/>
+              <a:t>6</a:t>
+            </a:fld>
+            <a:endParaRPr lang="en-US"/>
+          </a:p>
+        </p:txBody>
+      </p:sp>
+    </p:spTree>
+  </p:cSld>
+  <p:clrMapOvr>
+    <a:masterClrMapping/>
+  </p:clrMapOvr>
+</p:sld>
+</file>
+
+<file path=ppt/slides/slide60.xml><?xml version="1.0" encoding="utf-8"?>
+<p:sld xmlns:a="http://schemas.openxmlformats.org/drawingml/2006/main" xmlns:r="http://schemas.openxmlformats.org/officeDocument/2006/relationships" xmlns:p="http://schemas.openxmlformats.org/presentationml/2006/main">
+  <p:cSld name="Slide 60">
+    <p:spTree>
+      <p:nvGrpSpPr>
+        <p:cNvPr id="1" name=""/>
+        <p:cNvGrpSpPr/>
+        <p:nvPr/>
+      </p:nvGrpSpPr>
+      <p:grpSpPr>
+        <a:xfrm>
+          <a:off x="0" y="0"/>
+          <a:ext cx="0" cy="0"/>
+          <a:chOff x="0" y="0"/>
+          <a:chExt cx="0" cy="0"/>
+        </a:xfrm>
+      </p:grpSpPr>
+      <p:sp>
+        <p:nvSpPr>
+          <p:cNvPr id="2" name="Text 0"/>
+          <p:cNvSpPr/>
+          <p:nvPr/>
+        </p:nvSpPr>
+        <p:spPr>
+          <a:xfrm>
+            <a:off x="457200" y="713232"/>
+            <a:ext cx="11368735" cy="274320"/>
+          </a:xfrm>
+          <a:prstGeom prst="rect">
+            <a:avLst/>
+          </a:prstGeom>
+          <a:noFill/>
+          <a:ln/>
+        </p:spPr>
+        <p:txBody>
+          <a:bodyPr wrap="square" lIns="0" tIns="0" rIns="0" bIns="0" rtlCol="0" anchor="ctr"/>
+          <a:lstStyle/>
+          <a:p>
+            <a:pPr algn="r" indent="0" marL="0">
+              <a:buNone/>
+            </a:pPr>
+            <a:r>
+              <a:rPr lang="en-US" sz="1400" b="1" dirty="0">
+                <a:solidFill>
+                  <a:srgbClr val="1C3F6E"/>
+                </a:solidFill>
+                <a:latin typeface="Calibri" pitchFamily="34" charset="0"/>
+                <a:ea typeface="Calibri" pitchFamily="34" charset="-122"/>
+                <a:cs typeface="Calibri" pitchFamily="34" charset="-120"/>
+              </a:rPr>
+              <a:t>LOGBOOK</a:t>
+            </a:r>
+            <a:endParaRPr lang="en-US" sz="1400" dirty="0"/>
+          </a:p>
+        </p:txBody>
+      </p:sp>
+      <p:sp>
+        <p:nvSpPr>
+          <p:cNvPr id="3" name="Text 1"/>
+          <p:cNvSpPr/>
+          <p:nvPr/>
+        </p:nvSpPr>
+        <p:spPr>
+          <a:xfrm>
+            <a:off x="457200" y="1005840"/>
+            <a:ext cx="11277295" cy="731520"/>
+          </a:xfrm>
+          <a:prstGeom prst="rect">
+            <a:avLst/>
+          </a:prstGeom>
+          <a:noFill/>
+          <a:ln/>
+        </p:spPr>
+        <p:txBody>
+          <a:bodyPr wrap="square" lIns="0" tIns="0" rIns="0" bIns="0" rtlCol="0" anchor="ctr"/>
+          <a:lstStyle/>
+          <a:p>
+            <a:pPr algn="ctr" indent="0" marL="0">
+              <a:buNone/>
+            </a:pPr>
+            <a:r>
+              <a:rPr lang="en-US" sz="3600" b="1" dirty="0">
+                <a:solidFill>
+                  <a:srgbClr val="990011"/>
+                </a:solidFill>
+                <a:latin typeface="Times New Roman" pitchFamily="34" charset="0"/>
+                <a:ea typeface="Times New Roman" pitchFamily="34" charset="-122"/>
+                <a:cs typeface="Times New Roman" pitchFamily="34" charset="-120"/>
+              </a:rPr>
               <a:t>Official Logbook (2/2)</a:t>
             </a:r>
             <a:endParaRPr lang="en-US" sz="3600" dirty="0"/>
@@ -20898,7 +23094,7 @@
       </p:sp>
       <p:graphicFrame>
         <p:nvGraphicFramePr>
-          <p:cNvPr id="57" name="Table 0"/>
+          <p:cNvPr id="61" name="Table 0"/>
           <p:cNvGraphicFramePr>
             <a:graphicFrameLocks noGrp="1"/>
           </p:cNvGraphicFramePr>
@@ -21008,7 +23204,7 @@
                           <a:ea typeface="Calibri" pitchFamily="34" charset="-122"/>
                           <a:cs typeface="Calibri" pitchFamily="34" charset="-120"/>
                         </a:rPr>
-                        <a:t>DEFINITIONS; Thunderstorms; Tropical Cyclones; Effects and Control.</a:t>
+                        <a:t>DEFINITIONS; Thunderstorms; Tornadoes; Tropical Cyclones; Hazards and Control Measures.</a:t>
                       </a:r>
                       <a:endParaRPr lang="en-US" sz="1600" dirty="0">
                         <a:latin typeface="Calibri" charset="0"/>
@@ -21284,7 +23480,7 @@
                           <a:ea typeface="Calibri" pitchFamily="34" charset="-122"/>
                           <a:cs typeface="Calibri" pitchFamily="34" charset="-120"/>
                         </a:rPr>
-                        <a:t>Write five safety rules for a thunderstorm in your area.</a:t>
+                        <a:t>Define a micro-climate.</a:t>
                       </a:r>
                       <a:endParaRPr lang="en-US" sz="1600" dirty="0">
                         <a:latin typeface="Calibri" charset="0"/>
@@ -21658,7 +23854,7 @@
             <a:pPr algn="ctr"/>
             <a:fld id="{F7021451-1387-4CA6-816F-3879F97B5CBC}" type="slidenum">
               <a:rPr b="1" lang="en-US"/>
-              <a:t>56</a:t>
+              <a:t>60</a:t>
             </a:fld>
             <a:endParaRPr lang="en-US"/>
           </a:p>
@@ -21672,9 +23868,9 @@
 </p:sld>
 </file>
 
-<file path=ppt/slides/slide57.xml><?xml version="1.0" encoding="utf-8"?>
+<file path=ppt/slides/slide61.xml><?xml version="1.0" encoding="utf-8"?>
 <p:sld xmlns:a="http://schemas.openxmlformats.org/drawingml/2006/main" xmlns:r="http://schemas.openxmlformats.org/officeDocument/2006/relationships" xmlns:p="http://schemas.openxmlformats.org/presentationml/2006/main">
-  <p:cSld name="Slide 57">
+  <p:cSld name="Slide 61">
     <p:spTree>
       <p:nvGrpSpPr>
         <p:cNvPr id="1" name=""/>
@@ -21851,7 +24047,7 @@
                 <a:ea typeface="Calibri" pitchFamily="34" charset="-122"/>
                 <a:cs typeface="Calibri" pitchFamily="34" charset="-120"/>
               </a:rPr>
-              <a:t>Without the projector (Activity 1): draw the three clouds.</a:t>
+              <a:t>Without the projector (Activity 1): draw the three stages.</a:t>
             </a:r>
             <a:endParaRPr lang="en-US" sz="2000" dirty="0"/>
           </a:p>
@@ -21872,7 +24068,7 @@
                 <a:ea typeface="Calibri" pitchFamily="34" charset="-122"/>
                 <a:cs typeface="Calibri" pitchFamily="34" charset="-120"/>
               </a:rPr>
-              <a:t>Without the projector (Activity 2): give safety rules for lightning.</a:t>
+              <a:t>Without the projector (Activity 2): describe the last storm in Garoua.</a:t>
             </a:r>
             <a:endParaRPr lang="en-US" sz="2000" dirty="0"/>
           </a:p>
@@ -21893,7 +24089,7 @@
                 <a:ea typeface="Calibri" pitchFamily="34" charset="-122"/>
                 <a:cs typeface="Calibri" pitchFamily="34" charset="-120"/>
               </a:rPr>
-              <a:t>Without the projector (Activity 3): find the Caribbean and the Bay of Bengal.</a:t>
+              <a:t>Without the projector (Activity 3): compare the sizes of the storms.</a:t>
             </a:r>
             <a:endParaRPr lang="en-US" sz="2000" dirty="0"/>
           </a:p>
@@ -21914,7 +24110,7 @@
                 <a:ea typeface="Calibri" pitchFamily="34" charset="-122"/>
                 <a:cs typeface="Calibri" pitchFamily="34" charset="-120"/>
               </a:rPr>
-              <a:t>Without the projector (Activity 4): draw the spiral.</a:t>
+              <a:t>Without the projector (Activity 4): draw the eye and the spiral bands.</a:t>
             </a:r>
             <a:endParaRPr lang="en-US" sz="2000" dirty="0"/>
           </a:p>
@@ -21935,7 +24131,7 @@
                 <a:ea typeface="Calibri" pitchFamily="34" charset="-122"/>
                 <a:cs typeface="Calibri" pitchFamily="34" charset="-120"/>
               </a:rPr>
-              <a:t>Without the projector (Activity 5): list the measures on the board.</a:t>
+              <a:t>Without the projector (Activity 5): list safety rules for a storm.</a:t>
             </a:r>
             <a:endParaRPr lang="en-US" sz="2000" dirty="0"/>
           </a:p>
@@ -21983,7 +24179,7 @@
             <a:pPr algn="ctr"/>
             <a:fld id="{F7021451-1387-4CA6-816F-3879F97B5CBC}" type="slidenum">
               <a:rPr b="1" lang="en-US"/>
-              <a:t>57</a:t>
+              <a:t>61</a:t>
             </a:fld>
             <a:endParaRPr lang="en-US"/>
           </a:p>
@@ -21997,9 +24193,9 @@
 </p:sld>
 </file>
 
-<file path=ppt/slides/slide58.xml><?xml version="1.0" encoding="utf-8"?>
+<file path=ppt/slides/slide62.xml><?xml version="1.0" encoding="utf-8"?>
 <p:sld xmlns:a="http://schemas.openxmlformats.org/drawingml/2006/main" xmlns:r="http://schemas.openxmlformats.org/officeDocument/2006/relationships" xmlns:p="http://schemas.openxmlformats.org/presentationml/2006/main">
-  <p:cSld name="Slide 58">
+  <p:cSld name="Slide 62">
     <p:spTree>
       <p:nvGrpSpPr>
         <p:cNvPr id="1" name=""/>
@@ -22155,7 +24351,7 @@
                 <a:ea typeface="Calibri" pitchFamily="34" charset="-122"/>
                 <a:cs typeface="Calibri" pitchFamily="34" charset="-120"/>
               </a:rPr>
-              <a:t>National Geography Syllabus, MINESEC/IGE/IP-SS, 2019 — Module 1 (Meteorology, Climatology &amp; Hydrology).</a:t>
+              <a:t>Geography Syllabus for Sixth Forms (Lower and Upper Sixth), MINESEC, 2019 — Module 1 (Meteorology, Climatology &amp; Hydrology).</a:t>
             </a:r>
             <a:endParaRPr lang="en-US" sz="1800" dirty="0"/>
           </a:p>
@@ -22176,7 +24372,7 @@
                 <a:ea typeface="Calibri" pitchFamily="34" charset="-122"/>
                 <a:cs typeface="Calibri" pitchFamily="34" charset="-120"/>
               </a:rPr>
-              <a:t>Photo, Activity 2: “06172012 Sunday evening pulse storms/cumulonimbi” by StormRider93 | Into the Storm, CC BY-NC-ND 2.0, via Flickr (https://www.flickr.com/photos/65232104@N04/7395715628)</a:t>
+              <a:t>Teacher's course notes: Mr KAMDEM E., Meteorology and Climatology (LSA), GBHS Garoua, 2026.</a:t>
             </a:r>
             <a:endParaRPr lang="en-US" sz="1800" dirty="0"/>
           </a:p>
@@ -22197,7 +24393,7 @@
                 <a:ea typeface="Calibri" pitchFamily="34" charset="-122"/>
                 <a:cs typeface="Calibri" pitchFamily="34" charset="-120"/>
               </a:rPr>
-              <a:t>Photo, Activity 3: “NASA's Aqua Satellite Captures Hurricane Danielle” by NASA Goddard Photo and Video, CC BY 2.0, via nasa (https://www.flickr.com/photos/24662369@N07/4931591817)</a:t>
+              <a:t>Photo, Activity 2: “06172012 Sunday evening pulse storms/cumulonimbi” by StormRider93 | Into the Storm, CC BY-NC-ND 2.0, via Flickr (https://www.flickr.com/photos/65232104@N04/7395715628)</a:t>
             </a:r>
             <a:endParaRPr lang="en-US" sz="1800" dirty="0"/>
           </a:p>
@@ -22218,7 +24414,7 @@
                 <a:ea typeface="Calibri" pitchFamily="34" charset="-122"/>
                 <a:cs typeface="Calibri" pitchFamily="34" charset="-120"/>
               </a:rPr>
-              <a:t>Photo, Activity 5: “Nazma Begum” by IRRI Images, CC BY-NC-SA 2.0, via Flickr (https://www.flickr.com/photos/86712369@N00/2247242477)</a:t>
+              <a:t>Photo, board summary (Causes): “NASA's Aqua Satellite Captures Hurricane Danielle” by NASA Goddard Photo and Video, CC BY 2.0, via nasa (https://www.flickr.com/photos/24662369@N07/4931591817)</a:t>
             </a:r>
             <a:endParaRPr lang="en-US" sz="1800" dirty="0"/>
           </a:p>
@@ -22287,338 +24483,7 @@
             <a:pPr algn="ctr"/>
             <a:fld id="{F7021451-1387-4CA6-816F-3879F97B5CBC}" type="slidenum">
               <a:rPr b="1" lang="en-US"/>
-              <a:t>58</a:t>
-            </a:fld>
-            <a:endParaRPr lang="en-US"/>
-          </a:p>
-        </p:txBody>
-      </p:sp>
-    </p:spTree>
-  </p:cSld>
-  <p:clrMapOvr>
-    <a:masterClrMapping/>
-  </p:clrMapOvr>
-</p:sld>
-</file>
-
-<file path=ppt/slides/slide6.xml><?xml version="1.0" encoding="utf-8"?>
-<p:sld xmlns:a="http://schemas.openxmlformats.org/drawingml/2006/main" xmlns:r="http://schemas.openxmlformats.org/officeDocument/2006/relationships" xmlns:p="http://schemas.openxmlformats.org/presentationml/2006/main">
-  <p:cSld name="Slide 6">
-    <p:spTree>
-      <p:nvGrpSpPr>
-        <p:cNvPr id="1" name=""/>
-        <p:cNvGrpSpPr/>
-        <p:nvPr/>
-      </p:nvGrpSpPr>
-      <p:grpSpPr>
-        <a:xfrm>
-          <a:off x="0" y="0"/>
-          <a:ext cx="0" cy="0"/>
-          <a:chOff x="0" y="0"/>
-          <a:chExt cx="0" cy="0"/>
-        </a:xfrm>
-      </p:grpSpPr>
-      <p:sp>
-        <p:nvSpPr>
-          <p:cNvPr id="2" name="Text 0"/>
-          <p:cNvSpPr/>
-          <p:nvPr/>
-        </p:nvSpPr>
-        <p:spPr>
-          <a:xfrm>
-            <a:off x="457200" y="713232"/>
-            <a:ext cx="11368735" cy="274320"/>
-          </a:xfrm>
-          <a:prstGeom prst="rect">
-            <a:avLst/>
-          </a:prstGeom>
-          <a:noFill/>
-          <a:ln/>
-        </p:spPr>
-        <p:txBody>
-          <a:bodyPr wrap="square" lIns="0" tIns="0" rIns="0" bIns="0" rtlCol="0" anchor="ctr"/>
-          <a:lstStyle/>
-          <a:p>
-            <a:pPr algn="r" indent="0" marL="0">
-              <a:buNone/>
-            </a:pPr>
-            <a:r>
-              <a:rPr lang="en-US" sz="1400" b="1" dirty="0">
-                <a:solidFill>
-                  <a:srgbClr val="1C3F6E"/>
-                </a:solidFill>
-                <a:latin typeface="Calibri" pitchFamily="34" charset="0"/>
-                <a:ea typeface="Calibri" pitchFamily="34" charset="-122"/>
-                <a:cs typeface="Calibri" pitchFamily="34" charset="-120"/>
-              </a:rPr>
-              <a:t>LESSON PLAN</a:t>
-            </a:r>
-            <a:endParaRPr lang="en-US" sz="1400" dirty="0"/>
-          </a:p>
-        </p:txBody>
-      </p:sp>
-      <p:pic>
-        <p:nvPicPr>
-          <p:cNvPr id="3" name="Image 0" descr="/home/claude/f4/img/minesec_sheet.png">    </p:cNvPr>
-          <p:cNvPicPr>
-            <a:picLocks noChangeAspect="1"/>
-          </p:cNvPicPr>
-          <p:nvPr/>
-        </p:nvPicPr>
-        <p:blipFill>
-          <a:blip r:embed="rId1"/>
-          <a:stretch>
-            <a:fillRect/>
-          </a:stretch>
-        </p:blipFill>
-        <p:spPr>
-          <a:xfrm>
-            <a:off x="0" y="658368"/>
-            <a:ext cx="2468880" cy="5833872"/>
-          </a:xfrm>
-          <a:prstGeom prst="rect">
-            <a:avLst/>
-          </a:prstGeom>
-        </p:spPr>
-      </p:pic>
-      <p:sp>
-        <p:nvSpPr>
-          <p:cNvPr id="4" name="Text 1"/>
-          <p:cNvSpPr/>
-          <p:nvPr/>
-        </p:nvSpPr>
-        <p:spPr>
-          <a:xfrm>
-            <a:off x="2697480" y="1005840"/>
-            <a:ext cx="9174175" cy="731520"/>
-          </a:xfrm>
-          <a:prstGeom prst="rect">
-            <a:avLst/>
-          </a:prstGeom>
-          <a:noFill/>
-          <a:ln/>
-        </p:spPr>
-        <p:txBody>
-          <a:bodyPr wrap="square" lIns="0" tIns="0" rIns="0" bIns="0" rtlCol="0" anchor="ctr">
-            <a:normAutofit/>
-          </a:bodyPr>
-          <a:lstStyle/>
-          <a:p>
-            <a:pPr algn="ctr" indent="0" marL="0">
-              <a:buNone/>
-            </a:pPr>
-            <a:r>
-              <a:rPr lang="en-US" sz="3600" b="1" dirty="0">
-                <a:solidFill>
-                  <a:srgbClr val="990011"/>
-                </a:solidFill>
-                <a:latin typeface="Times New Roman" pitchFamily="34" charset="0"/>
-                <a:ea typeface="Times New Roman" pitchFamily="34" charset="-122"/>
-                <a:cs typeface="Times New Roman" pitchFamily="34" charset="-120"/>
-              </a:rPr>
-              <a:t>Lesson Plan</a:t>
-            </a:r>
-            <a:endParaRPr lang="en-US" sz="3600" dirty="0"/>
-          </a:p>
-        </p:txBody>
-      </p:sp>
-      <p:sp>
-        <p:nvSpPr>
-          <p:cNvPr id="5" name="Text 2"/>
-          <p:cNvSpPr/>
-          <p:nvPr/>
-        </p:nvSpPr>
-        <p:spPr>
-          <a:xfrm>
-            <a:off x="2697480" y="1783080"/>
-            <a:ext cx="9174175" cy="4663440"/>
-          </a:xfrm>
-          <a:prstGeom prst="rect">
-            <a:avLst/>
-          </a:prstGeom>
-          <a:noFill/>
-          <a:ln/>
-        </p:spPr>
-        <p:txBody>
-          <a:bodyPr wrap="square" lIns="0" tIns="0" rIns="0" bIns="0" rtlCol="0" anchor="t"/>
-          <a:lstStyle/>
-          <a:p>
-            <a:pPr algn="l" marL="342900" indent="-342900">
-              <a:spcAft>
-                <a:spcPts val="800"/>
-              </a:spcAft>
-              <a:buSzPct val="100000"/>
-              <a:buFont typeface="+mj-lt"/>
-              <a:buAutoNum type="arabicPeriod" startAt="1"/>
-            </a:pPr>
-            <a:r>
-              <a:rPr lang="en-US" sz="4000" dirty="0">
-                <a:solidFill>
-                  <a:srgbClr val="111111"/>
-                </a:solidFill>
-                <a:latin typeface="Times New Roman" pitchFamily="34" charset="0"/>
-                <a:ea typeface="Times New Roman" pitchFamily="34" charset="-122"/>
-                <a:cs typeface="Times New Roman" pitchFamily="34" charset="-120"/>
-              </a:rPr>
-              <a:t>Correction of the homework</a:t>
-            </a:r>
-            <a:endParaRPr lang="en-US" sz="4000" dirty="0"/>
-          </a:p>
-          <a:p>
-            <a:pPr algn="l" marL="342900" indent="-342900">
-              <a:spcAft>
-                <a:spcPts val="800"/>
-              </a:spcAft>
-              <a:buSzPct val="100000"/>
-              <a:buFont typeface="+mj-lt"/>
-              <a:buAutoNum type="arabicPeriod" startAt="1"/>
-            </a:pPr>
-            <a:r>
-              <a:rPr lang="en-US" sz="4000" dirty="0">
-                <a:solidFill>
-                  <a:srgbClr val="111111"/>
-                </a:solidFill>
-                <a:latin typeface="Times New Roman" pitchFamily="34" charset="0"/>
-                <a:ea typeface="Times New Roman" pitchFamily="34" charset="-122"/>
-                <a:cs typeface="Times New Roman" pitchFamily="34" charset="-120"/>
-              </a:rPr>
-              <a:t>Objectives and recall</a:t>
-            </a:r>
-            <a:endParaRPr lang="en-US" sz="4000" dirty="0"/>
-          </a:p>
-          <a:p>
-            <a:pPr algn="l" marL="342900" indent="-342900">
-              <a:spcAft>
-                <a:spcPts val="800"/>
-              </a:spcAft>
-              <a:buSzPct val="100000"/>
-              <a:buFont typeface="+mj-lt"/>
-              <a:buAutoNum type="arabicPeriod" startAt="1"/>
-            </a:pPr>
-            <a:r>
-              <a:rPr lang="en-US" sz="4000" dirty="0">
-                <a:solidFill>
-                  <a:srgbClr val="111111"/>
-                </a:solidFill>
-                <a:latin typeface="Times New Roman" pitchFamily="34" charset="0"/>
-                <a:ea typeface="Times New Roman" pitchFamily="34" charset="-122"/>
-                <a:cs typeface="Times New Roman" pitchFamily="34" charset="-120"/>
-              </a:rPr>
-              <a:t>Real-life situation and action to take</a:t>
-            </a:r>
-            <a:endParaRPr lang="en-US" sz="4000" dirty="0"/>
-          </a:p>
-          <a:p>
-            <a:pPr algn="l" marL="342900" indent="-342900">
-              <a:spcAft>
-                <a:spcPts val="800"/>
-              </a:spcAft>
-              <a:buSzPct val="100000"/>
-              <a:buFont typeface="+mj-lt"/>
-              <a:buAutoNum type="arabicPeriod" startAt="1"/>
-            </a:pPr>
-            <a:r>
-              <a:rPr lang="en-US" sz="4000" dirty="0">
-                <a:solidFill>
-                  <a:srgbClr val="111111"/>
-                </a:solidFill>
-                <a:latin typeface="Times New Roman" pitchFamily="34" charset="0"/>
-                <a:ea typeface="Times New Roman" pitchFamily="34" charset="-122"/>
-                <a:cs typeface="Times New Roman" pitchFamily="34" charset="-120"/>
-              </a:rPr>
-              <a:t>Learning activities</a:t>
-            </a:r>
-            <a:endParaRPr lang="en-US" sz="4000" dirty="0"/>
-          </a:p>
-          <a:p>
-            <a:pPr algn="l" marL="342900" indent="-342900">
-              <a:spcAft>
-                <a:spcPts val="800"/>
-              </a:spcAft>
-              <a:buSzPct val="100000"/>
-              <a:buFont typeface="+mj-lt"/>
-              <a:buAutoNum type="arabicPeriod" startAt="1"/>
-            </a:pPr>
-            <a:r>
-              <a:rPr lang="en-US" sz="4000" dirty="0">
-                <a:solidFill>
-                  <a:srgbClr val="111111"/>
-                </a:solidFill>
-                <a:latin typeface="Times New Roman" pitchFamily="34" charset="0"/>
-                <a:ea typeface="Times New Roman" pitchFamily="34" charset="-122"/>
-                <a:cs typeface="Times New Roman" pitchFamily="34" charset="-120"/>
-              </a:rPr>
-              <a:t>Board summary</a:t>
-            </a:r>
-            <a:endParaRPr lang="en-US" sz="4000" dirty="0"/>
-          </a:p>
-          <a:p>
-            <a:pPr algn="l" marL="342900" indent="-342900">
-              <a:spcAft>
-                <a:spcPts val="800"/>
-              </a:spcAft>
-              <a:buSzPct val="100000"/>
-              <a:buFont typeface="+mj-lt"/>
-              <a:buAutoNum type="arabicPeriod" startAt="1"/>
-            </a:pPr>
-            <a:r>
-              <a:rPr lang="en-US" sz="4000" dirty="0">
-                <a:solidFill>
-                  <a:srgbClr val="111111"/>
-                </a:solidFill>
-                <a:latin typeface="Times New Roman" pitchFamily="34" charset="0"/>
-                <a:ea typeface="Times New Roman" pitchFamily="34" charset="-122"/>
-                <a:cs typeface="Times New Roman" pitchFamily="34" charset="-120"/>
-              </a:rPr>
-              <a:t>Evaluation, remediation and homework</a:t>
-            </a:r>
-            <a:endParaRPr lang="en-US" sz="4000" dirty="0"/>
-          </a:p>
-        </p:txBody>
-      </p:sp>
-      <p:sp>
-        <p:nvSpPr>
-          <p:cNvPr id="25" name="Slide Number Placeholder 0"/>
-          <p:cNvSpPr>
-            <a:spLocks noGrp="1"/>
-          </p:cNvSpPr>
-          <p:nvPr>
-            <p:ph type="sldNum" sz="quarter" idx="4294967295"/>
-          </p:nvPr>
-        </p:nvSpPr>
-        <p:spPr>
-          <a:xfrm>
-            <a:off x="27432" y="91440"/>
-            <a:ext cx="585216" cy="475488"/>
-          </a:xfrm>
-          <a:prstGeom prst="rect">
-            <a:avLst/>
-          </a:prstGeom>
-          <a:extLst>
-            <a:ext uri="{C572A759-6A51-4108-AA02-DFA0A04FC94B}">
-              <ma14:wrappingTextBoxFlag xmlns:ma14="http://schemas.microsoft.com/office/mac/drawingml/2011/main" val="0"/>
-            </a:ext>
-          </a:extLst>
-        </p:spPr>
-        <p:txBody>
-          <a:bodyPr/>
-          <a:lstStyle>
-            <a:lvl1pPr>
-              <a:defRPr sz="2000">
-                <a:solidFill>
-                  <a:srgbClr val="FFFFFF"/>
-                </a:solidFill>
-                <a:latin typeface="Calibri"/>
-                <a:ea typeface="Calibri"/>
-                <a:cs typeface="Calibri"/>
-              </a:defRPr>
-            </a:lvl1pPr>
-          </a:lstStyle>
-          <a:p>
-            <a:pPr algn="ctr"/>
-            <a:fld id="{F7021451-1387-4CA6-816F-3879F97B5CBC}" type="slidenum">
-              <a:rPr b="1" lang="en-US"/>
-              <a:t>6</a:t>
+              <a:t>62</a:t>
             </a:fld>
             <a:endParaRPr lang="en-US"/>
           </a:p>
@@ -22705,7 +24570,7 @@
         <p:spPr>
           <a:xfrm>
             <a:off x="0" y="658368"/>
-            <a:ext cx="5120640" cy="5833872"/>
+            <a:ext cx="1463040" cy="5833872"/>
           </a:xfrm>
           <a:prstGeom prst="rect">
             <a:avLst/>
@@ -22720,8 +24585,8 @@
         </p:nvSpPr>
         <p:spPr>
           <a:xfrm>
-            <a:off x="5349240" y="1005840"/>
-            <a:ext cx="6522415" cy="731520"/>
+            <a:off x="1691640" y="1005840"/>
+            <a:ext cx="10180015" cy="731520"/>
           </a:xfrm>
           <a:prstGeom prst="rect">
             <a:avLst/>
@@ -22761,8 +24626,8 @@
         </p:nvSpPr>
         <p:spPr>
           <a:xfrm>
-            <a:off x="5349240" y="1783080"/>
-            <a:ext cx="6522415" cy="4663440"/>
+            <a:off x="1691640" y="1783080"/>
+            <a:ext cx="10180015" cy="4663440"/>
           </a:xfrm>
           <a:prstGeom prst="rect">
             <a:avLst/>
@@ -22811,7 +24676,7 @@
                 <a:ea typeface="Times New Roman" pitchFamily="34" charset="-122"/>
                 <a:cs typeface="Times New Roman" pitchFamily="34" charset="-120"/>
               </a:rPr>
-              <a:t>Explain the formation and effects of thunderstorms.</a:t>
+              <a:t>Define thunderstorms, tornadoes and tropical cyclones.</a:t>
             </a:r>
             <a:endParaRPr lang="en-US" sz="4000" dirty="0"/>
           </a:p>
@@ -22833,7 +24698,29 @@
                 <a:ea typeface="Times New Roman" pitchFamily="34" charset="-122"/>
                 <a:cs typeface="Times New Roman" pitchFamily="34" charset="-120"/>
               </a:rPr>
-              <a:t>Explain tornadoes.</a:t>
+              <a:t>Describe their distribution and causes.</a:t>
+            </a:r>
+            <a:endParaRPr lang="en-US" sz="4000" dirty="0"/>
+          </a:p>
+          <a:p>
+            <a:pPr algn="l" marL="342900" indent="-342900">
+              <a:spcAft>
+                <a:spcPts val="800"/>
+              </a:spcAft>
+              <a:buSzPct val="100000"/>
+              <a:buFont typeface="+mj-lt"/>
+              <a:buAutoNum type="arabicPeriod" startAt="1"/>
+            </a:pPr>
+            <a:r>
+              <a:rPr lang="en-US" sz="4000" dirty="0">
+                <a:solidFill>
+                  <a:srgbClr val="111111"/>
+                </a:solidFill>
+                <a:latin typeface="Times New Roman" pitchFamily="34" charset="0"/>
+                <a:ea typeface="Times New Roman" pitchFamily="34" charset="-122"/>
+                <a:cs typeface="Times New Roman" pitchFamily="34" charset="-120"/>
+              </a:rPr>
+              <a:t>Explain their consequences.</a:t>
             </a:r>
             <a:endParaRPr lang="en-US" sz="4000" dirty="0"/>
           </a:p>
@@ -23054,7 +24941,7 @@
                 <a:ea typeface="Times New Roman" pitchFamily="34" charset="-122"/>
                 <a:cs typeface="Times New Roman" pitchFamily="34" charset="-120"/>
               </a:rPr>
-              <a:t>Explain tropical cyclones and measures against them.</a:t>
+              <a:t>Propose measures to reduce their hazards.</a:t>
             </a:r>
             <a:endParaRPr lang="en-US" sz="4000" dirty="0"/>
           </a:p>
@@ -23274,7 +25161,7 @@
                 <a:ea typeface="Times New Roman" pitchFamily="34" charset="-122"/>
                 <a:cs typeface="Times New Roman" pitchFamily="34" charset="-120"/>
               </a:rPr>
-              <a:t>Unstable air gives cumulonimbus clouds.</a:t>
+              <a:t>Unstable air forms cumulonimbus clouds.</a:t>
             </a:r>
             <a:endParaRPr lang="en-US" sz="4000" dirty="0"/>
           </a:p>
@@ -23295,7 +25182,28 @@
                 <a:ea typeface="Times New Roman" pitchFamily="34" charset="-122"/>
                 <a:cs typeface="Times New Roman" pitchFamily="34" charset="-120"/>
               </a:rPr>
-              <a:t>Warm seas give much water vapour.</a:t>
+              <a:t>The Coriolis effect deflects winds.</a:t>
+            </a:r>
+            <a:endParaRPr lang="en-US" sz="4000" dirty="0"/>
+          </a:p>
+          <a:p>
+            <a:pPr algn="l" marL="342900" indent="-342900">
+              <a:spcAft>
+                <a:spcPts val="800"/>
+              </a:spcAft>
+              <a:buSzPct val="100000"/>
+              <a:buChar char="•"/>
+            </a:pPr>
+            <a:r>
+              <a:rPr lang="en-US" sz="4000" dirty="0">
+                <a:solidFill>
+                  <a:srgbClr val="111111"/>
+                </a:solidFill>
+                <a:latin typeface="Times New Roman" pitchFamily="34" charset="0"/>
+                <a:ea typeface="Times New Roman" pitchFamily="34" charset="-122"/>
+                <a:cs typeface="Times New Roman" pitchFamily="34" charset="-120"/>
+              </a:rPr>
+              <a:t>The ITCZ is a zone of rising air.</a:t>
             </a:r>
             <a:endParaRPr lang="en-US" sz="4000" dirty="0"/>
           </a:p>

--- a/lecons/LSA/Climatology/02_LSA_CLIM_FS01_Tropical_Weather_Disturbances.pptx
+++ b/lecons/LSA/Climatology/02_LSA_CLIM_FS01_Tropical_Weather_Disturbances.pptx
@@ -67,9 +67,13 @@
     <p:sldId id="315" r:id="rId61"/>
     <p:sldId id="316" r:id="rId62"/>
     <p:sldId id="317" r:id="rId63"/>
+    <p:sldId id="318" r:id="rId64"/>
+    <p:sldId id="319" r:id="rId65"/>
+    <p:sldId id="320" r:id="rId66"/>
+    <p:sldId id="321" r:id="rId67"/>
   </p:sldIdLst>
   <p:notesMasterIdLst>
-    <p:notesMasterId r:id="rId64"/>
+    <p:notesMasterId r:id="rId68"/>
   </p:notesMasterIdLst>
   <p:sldSz cx="12192000" cy="6858000"/>
   <p:notesSz cx="6858000" cy="12192000"/>
@@ -3379,7 +3383,7 @@
           <a:p>
             <a:r>
               <a:rPr lang="en-US" dirty="0"/>
-              <a:t>Let us copy Thunderstorms. Thunderstorms are presented as follows. Copy the point on Distribution on the left, then draw the diagram on the right: a cumulonimbus. Give it a title and label it clearly.</a:t>
+              <a:t>Let us copy Thunderstorms. Thunderstorms are explained as follows. Copy the point on Meaning on the left, then draw the diagram on the right: a cumulonimbus cloud. Give it a title and label it clearly.</a:t>
             </a:r>
             <a:endParaRPr lang="en-US" dirty="0"/>
           </a:p>
@@ -3555,7 +3559,7 @@
           <a:p>
             <a:r>
               <a:rPr lang="en-US" dirty="0"/>
-              <a:t>Copy the point on Causes on the left, then draw the diagram on the right: the life of a thunderstorm. Give it a title and label it clearly.</a:t>
+              <a:t>We continue with Thunderstorms. Copy the point on Distribution: write the key term first, then its explanation.</a:t>
             </a:r>
             <a:endParaRPr lang="en-US" dirty="0"/>
           </a:p>
@@ -3643,7 +3647,7 @@
           <a:p>
             <a:r>
               <a:rPr lang="en-US" dirty="0"/>
-              <a:t>We continue with Thunderstorms. On this slide we have Consequences. Write each point on a new line, with the key term first, and explain it in your own words when we revise.</a:t>
+              <a:t>Copy the point on Causes on the left, then draw the diagram on the right: a thunderstorm. Give it a title and label it clearly.</a:t>
             </a:r>
             <a:endParaRPr lang="en-US" dirty="0"/>
           </a:p>
@@ -3731,7 +3735,7 @@
           <a:p>
             <a:r>
               <a:rPr lang="en-US" dirty="0"/>
-              <a:t>Let us copy Tornadoes. Tornadoes are presented as follows. Copy the point on Distribution on the left, then draw the diagram on the right: three storms compared. Give it a title and label it clearly.</a:t>
+              <a:t>We continue with Thunderstorms. Copy the point on Consequences: write the key term first, then its explanation.</a:t>
             </a:r>
             <a:endParaRPr lang="en-US" dirty="0"/>
           </a:p>
@@ -3819,7 +3823,7 @@
           <a:p>
             <a:r>
               <a:rPr lang="en-US" dirty="0"/>
-              <a:t>We continue with Tornadoes. On this slide we have Causes and Consequences. Write each point on a new line, with the key term first, and explain it in your own words when we revise.</a:t>
+              <a:t>Let us copy Tornadoes. Tornadoes are explained as follows. Copy the point on Meaning: write the key term first, then its explanation.</a:t>
             </a:r>
             <a:endParaRPr lang="en-US" dirty="0"/>
           </a:p>
@@ -3907,7 +3911,7 @@
           <a:p>
             <a:r>
               <a:rPr lang="en-US" dirty="0"/>
-              <a:t>Let us copy Tropical Cyclones. Tropical cyclones are presented as follows. Copy the point on Names on the left, then draw the diagram on the right: a tropical cyclone. Give it a title and label it clearly.</a:t>
+              <a:t>Copy the point on Distribution on the left, then draw the diagram on the right: storm hazards. Give it a title and label it clearly.</a:t>
             </a:r>
             <a:endParaRPr lang="en-US" dirty="0"/>
           </a:p>
@@ -3995,7 +3999,7 @@
           <a:p>
             <a:r>
               <a:rPr lang="en-US" dirty="0"/>
-              <a:t>We continue with Tropical Cyclones. On this slide we have Distribution. Write each point on a new line, with the key term first, and explain it in your own words when we revise.</a:t>
+              <a:t>We continue with Tornadoes. Copy the point on Causes: write the key term first, then its explanation.</a:t>
             </a:r>
             <a:endParaRPr lang="en-US" dirty="0"/>
           </a:p>
@@ -4083,7 +4087,7 @@
           <a:p>
             <a:r>
               <a:rPr lang="en-US" dirty="0"/>
-              <a:t>Copy the point on Causes on the left, then draw the diagram on the right: a hurricane from space. Give it a title and label it clearly.</a:t>
+              <a:t>We continue with Tornadoes. Copy the point on Consequences: write the key term first, then its explanation.</a:t>
             </a:r>
             <a:endParaRPr lang="en-US" dirty="0"/>
           </a:p>
@@ -4171,7 +4175,7 @@
           <a:p>
             <a:r>
               <a:rPr lang="en-US" dirty="0"/>
-              <a:t>We continue with Tropical Cyclones. On this slide we have Consequences. Write each point on a new line, with the key term first, and explain it in your own words when we revise.</a:t>
+              <a:t>Let us copy Tropical Cyclones. Tropical cyclones are explained as follows. Copy the point on Meaning on the left, then draw the diagram on the right: a tropical cyclone. Give it a title and label it clearly.</a:t>
             </a:r>
             <a:endParaRPr lang="en-US" dirty="0"/>
           </a:p>
@@ -4259,7 +4263,7 @@
           <a:p>
             <a:r>
               <a:rPr lang="en-US" dirty="0"/>
-              <a:t>Let us copy Hazards and Control Measures. The hazards of storms are reduced by the following measures. Copy the point on Early warning on the left, then draw the diagram on the right: reducing storm hazards. Give it a title and label it clearly.</a:t>
+              <a:t>We continue with Tropical Cyclones. Copy the point on Distribution: write the key term first, then its explanation.</a:t>
             </a:r>
             <a:endParaRPr lang="en-US" dirty="0"/>
           </a:p>
@@ -4347,7 +4351,7 @@
           <a:p>
             <a:r>
               <a:rPr lang="en-US" dirty="0"/>
-              <a:t>We continue with Hazards and Control Measures. On this slide we have Public education and Protection of buildings. Write each point on a new line, with the key term first, and explain it in your own words when we revise. When you finish, we go to the next slide.</a:t>
+              <a:t>Copy the point on Causes on the left, then draw the diagram on the right: a hurricane seen from space. Give it a title and label it clearly.</a:t>
             </a:r>
             <a:endParaRPr lang="en-US" dirty="0"/>
           </a:p>
@@ -4523,7 +4527,7 @@
           <a:p>
             <a:r>
               <a:rPr lang="en-US" dirty="0"/>
-              <a:t>We continue with Hazards and Control Measures. On this slide we have Emergency preparedness. Write each point on a new line, with the key term first, and explain it in your own words when we revise.</a:t>
+              <a:t>We continue with Tropical Cyclones. Copy the point on Consequences: write the key term first, then its explanation.</a:t>
             </a:r>
             <a:endParaRPr lang="en-US" dirty="0"/>
           </a:p>
@@ -4611,7 +4615,7 @@
           <a:p>
             <a:r>
               <a:rPr lang="en-US" dirty="0"/>
-              <a:t>Now let us check what you have understood. Question 1: Compare a thunderstorm and a tropical cyclone by size and place of formation. Answer in your exercise book.</a:t>
+              <a:t>Let us copy Hazards and Control Measures. The hazards of these disturbances are reduced by the following measures. Copy the point on Early warning on the left, then draw the diagram on the right: control measures. Give it a title and label it clearly.</a:t>
             </a:r>
             <a:endParaRPr lang="en-US" dirty="0"/>
           </a:p>
@@ -4699,7 +4703,7 @@
           <a:p>
             <a:r>
               <a:rPr lang="en-US" dirty="0"/>
-              <a:t>The expected answer is: a thunderstorm is small (a few km) and forms over land or sea; a cyclone is hundreds of km wide and forms over warm tropical oceans. If you got it right, well done.</a:t>
+              <a:t>We continue with Hazards and Control Measures. Copy the point on Public education: write the key term first, then its explanation.</a:t>
             </a:r>
             <a:endParaRPr lang="en-US" dirty="0"/>
           </a:p>
@@ -4787,7 +4791,7 @@
           <a:p>
             <a:r>
               <a:rPr lang="en-US" dirty="0"/>
-              <a:t>Now let us check what you have understood. Question 2: Give two measures to reduce the hazards of thunderstorms. Answer in your exercise book.</a:t>
+              <a:t>We continue with Hazards and Control Measures. Copy the point on Protection of buildings: write the key term first, then its explanation.</a:t>
             </a:r>
             <a:endParaRPr lang="en-US" dirty="0"/>
           </a:p>
@@ -4875,7 +4879,7 @@
           <a:p>
             <a:r>
               <a:rPr lang="en-US" dirty="0"/>
-              <a:t>The expected answer is: early warnings, lightning rods, staying indoors, good drainage (any two). If you got it right, well done.</a:t>
+              <a:t>We continue with Hazards and Control Measures. Copy the point on Emergency preparedness: write the key term first, then its explanation.</a:t>
             </a:r>
             <a:endParaRPr lang="en-US" dirty="0"/>
           </a:p>
@@ -4963,7 +4967,7 @@
           <a:p>
             <a:r>
               <a:rPr lang="en-US" dirty="0"/>
-              <a:t>For those who need more practice, fill in the blanks in your exercise book. The answers are: number 1, cumulonimbus; number 2, hurricanes; number 3, surge.</a:t>
+              <a:t>Now let us check what you have understood. Question 1: Compare a thunderstorm and a tropical cyclone by size and place of formation. Answer in your exercise book.</a:t>
             </a:r>
             <a:endParaRPr lang="en-US" dirty="0"/>
           </a:p>
@@ -5051,7 +5055,7 @@
           <a:p>
             <a:r>
               <a:rPr lang="en-US" dirty="0"/>
-              <a:t>For your homework: Define a micro-climate. We shall correct it at the beginning of our next lesson.</a:t>
+              <a:t>The expected answer is: a thunderstorm is small (a few km) and forms over land or sea; a cyclone is hundreds of km wide and forms over warm tropical oceans. If you got it right, well done.</a:t>
             </a:r>
             <a:endParaRPr lang="en-US" dirty="0"/>
           </a:p>
@@ -5139,7 +5143,7 @@
           <a:p>
             <a:r>
               <a:rPr lang="en-US" dirty="0"/>
-              <a:t>Our next lesson will be on Lesson 20: Micro-climates. Thank you for your attention, and see you next time.</a:t>
+              <a:t>Now let us check what you have understood. Question 2: Give two measures to reduce the hazards of thunderstorms. Answer in your exercise book.</a:t>
             </a:r>
             <a:endParaRPr lang="en-US" dirty="0"/>
           </a:p>
@@ -5227,7 +5231,7 @@
           <a:p>
             <a:r>
               <a:rPr lang="en-US" dirty="0"/>
-              <a:t>Let us play the bilingual game. I say a word in English, and you give me the French word. Then we do the reverse.</a:t>
+              <a:t>The expected answer is: early warnings, lightning rods, staying indoors, good drainage (any two). If you got it right, well done.</a:t>
             </a:r>
             <a:endParaRPr lang="en-US" dirty="0"/>
           </a:p>
@@ -5315,7 +5319,7 @@
           <a:p>
             <a:r>
               <a:rPr lang="en-US" dirty="0"/>
-              <a:t>I record this information in the official logbook of the class after the lesson.</a:t>
+              <a:t>For those who need more practice, fill in the blanks in your exercise book. The answers are: number 1, cumulonimbus; number 2, hurricanes; number 3, surge.</a:t>
             </a:r>
             <a:endParaRPr lang="en-US" dirty="0"/>
           </a:p>
@@ -5491,7 +5495,7 @@
           <a:p>
             <a:r>
               <a:rPr lang="en-US" dirty="0"/>
-              <a:t>I complete the second page of the logbook: the matter taught, the evaluation, the homework and the attendance.</a:t>
+              <a:t>For your homework: Define a micro-climate. We shall correct it at the beginning of our next lesson.</a:t>
             </a:r>
             <a:endParaRPr lang="en-US" dirty="0"/>
           </a:p>
@@ -5579,7 +5583,7 @@
           <a:p>
             <a:r>
               <a:rPr lang="en-US" dirty="0"/>
-              <a:t>This slide is for me, the teacher: it gives the timing of the lesson and what to do if the projector is not available.</a:t>
+              <a:t>Our next lesson will be on Lesson 20: Micro-climates. Thank you for your attention, and see you next time.</a:t>
             </a:r>
             <a:endParaRPr lang="en-US" dirty="0"/>
           </a:p>
@@ -5667,7 +5671,7 @@
           <a:p>
             <a:r>
               <a:rPr lang="en-US" dirty="0"/>
-              <a:t>These are the references and picture credits used to prepare this lesson.</a:t>
+              <a:t>Let us play the bilingual game. I say a word in English, and you give me the French word. Then we do the reverse.</a:t>
             </a:r>
             <a:endParaRPr lang="en-US" dirty="0"/>
           </a:p>
@@ -5691,6 +5695,358 @@
             <a:fld id="{F7021451-1387-4CA6-816F-3879F97B5CBC}" type="slidenum">
               <a:rPr lang="en-US"/>
               <a:t>62</a:t>
+            </a:fld>
+            <a:endParaRPr lang="en-US"/>
+          </a:p>
+        </p:txBody>
+      </p:sp>
+    </p:spTree>
+    <p:extLst>
+      <p:ext uri="{BB962C8B-B14F-4D97-AF65-F5344CB8AC3E}">
+        <p14:creationId xmlns:p14="http://schemas.microsoft.com/office/powerpoint/2010/main" val="1024086991"/>
+      </p:ext>
+    </p:extLst>
+  </p:cSld>
+  <p:clrMapOvr>
+    <a:masterClrMapping/>
+  </p:clrMapOvr>
+</p:notes>
+</file>
+
+<file path=ppt/notesSlides/notesSlide63.xml><?xml version="1.0" encoding="utf-8"?>
+<p:notes xmlns:a="http://schemas.openxmlformats.org/drawingml/2006/main" xmlns:r="http://schemas.openxmlformats.org/officeDocument/2006/relationships" xmlns:p="http://schemas.openxmlformats.org/presentationml/2006/main">
+  <p:cSld>
+    <p:spTree>
+      <p:nvGrpSpPr>
+        <p:cNvPr id="1" name=""/>
+        <p:cNvGrpSpPr/>
+        <p:nvPr/>
+      </p:nvGrpSpPr>
+      <p:grpSpPr>
+        <a:xfrm>
+          <a:off x="0" y="0"/>
+          <a:ext cx="0" cy="0"/>
+          <a:chOff x="0" y="0"/>
+          <a:chExt cx="0" cy="0"/>
+        </a:xfrm>
+      </p:grpSpPr>
+      <p:sp>
+        <p:nvSpPr>
+          <p:cNvPr id="2" name="Slide Image Placeholder 1"/>
+          <p:cNvSpPr>
+            <a:spLocks noGrp="1" noRot="1" noChangeAspect="1"/>
+          </p:cNvSpPr>
+          <p:nvPr>
+            <p:ph type="sldImg"/>
+          </p:nvPr>
+        </p:nvSpPr>
+        <p:spPr/>
+      </p:sp>
+      <p:sp>
+        <p:nvSpPr>
+          <p:cNvPr id="3" name="Notes Placeholder 2"/>
+          <p:cNvSpPr>
+            <a:spLocks noGrp="1"/>
+          </p:cNvSpPr>
+          <p:nvPr>
+            <p:ph type="body" idx="1"/>
+          </p:nvPr>
+        </p:nvSpPr>
+        <p:spPr/>
+        <p:txBody>
+          <a:bodyPr/>
+          <a:lstStyle/>
+          <a:p>
+            <a:r>
+              <a:rPr lang="en-US" dirty="0"/>
+              <a:t>I record this information in the official logbook of the class after the lesson.</a:t>
+            </a:r>
+            <a:endParaRPr lang="en-US" dirty="0"/>
+          </a:p>
+        </p:txBody>
+      </p:sp>
+      <p:sp>
+        <p:nvSpPr>
+          <p:cNvPr id="4" name="Slide Number Placeholder 3"/>
+          <p:cNvSpPr>
+            <a:spLocks noGrp="1"/>
+          </p:cNvSpPr>
+          <p:nvPr>
+            <p:ph type="sldNum" sz="quarter" idx="10"/>
+          </p:nvPr>
+        </p:nvSpPr>
+        <p:spPr/>
+        <p:txBody>
+          <a:bodyPr/>
+          <a:lstStyle/>
+          <a:p>
+            <a:fld id="{F7021451-1387-4CA6-816F-3879F97B5CBC}" type="slidenum">
+              <a:rPr lang="en-US"/>
+              <a:t>63</a:t>
+            </a:fld>
+            <a:endParaRPr lang="en-US"/>
+          </a:p>
+        </p:txBody>
+      </p:sp>
+    </p:spTree>
+    <p:extLst>
+      <p:ext uri="{BB962C8B-B14F-4D97-AF65-F5344CB8AC3E}">
+        <p14:creationId xmlns:p14="http://schemas.microsoft.com/office/powerpoint/2010/main" val="1024086991"/>
+      </p:ext>
+    </p:extLst>
+  </p:cSld>
+  <p:clrMapOvr>
+    <a:masterClrMapping/>
+  </p:clrMapOvr>
+</p:notes>
+</file>
+
+<file path=ppt/notesSlides/notesSlide64.xml><?xml version="1.0" encoding="utf-8"?>
+<p:notes xmlns:a="http://schemas.openxmlformats.org/drawingml/2006/main" xmlns:r="http://schemas.openxmlformats.org/officeDocument/2006/relationships" xmlns:p="http://schemas.openxmlformats.org/presentationml/2006/main">
+  <p:cSld>
+    <p:spTree>
+      <p:nvGrpSpPr>
+        <p:cNvPr id="1" name=""/>
+        <p:cNvGrpSpPr/>
+        <p:nvPr/>
+      </p:nvGrpSpPr>
+      <p:grpSpPr>
+        <a:xfrm>
+          <a:off x="0" y="0"/>
+          <a:ext cx="0" cy="0"/>
+          <a:chOff x="0" y="0"/>
+          <a:chExt cx="0" cy="0"/>
+        </a:xfrm>
+      </p:grpSpPr>
+      <p:sp>
+        <p:nvSpPr>
+          <p:cNvPr id="2" name="Slide Image Placeholder 1"/>
+          <p:cNvSpPr>
+            <a:spLocks noGrp="1" noRot="1" noChangeAspect="1"/>
+          </p:cNvSpPr>
+          <p:nvPr>
+            <p:ph type="sldImg"/>
+          </p:nvPr>
+        </p:nvSpPr>
+        <p:spPr/>
+      </p:sp>
+      <p:sp>
+        <p:nvSpPr>
+          <p:cNvPr id="3" name="Notes Placeholder 2"/>
+          <p:cNvSpPr>
+            <a:spLocks noGrp="1"/>
+          </p:cNvSpPr>
+          <p:nvPr>
+            <p:ph type="body" idx="1"/>
+          </p:nvPr>
+        </p:nvSpPr>
+        <p:spPr/>
+        <p:txBody>
+          <a:bodyPr/>
+          <a:lstStyle/>
+          <a:p>
+            <a:r>
+              <a:rPr lang="en-US" dirty="0"/>
+              <a:t>I complete the second page of the logbook: the matter taught, the evaluation, the homework and the attendance.</a:t>
+            </a:r>
+            <a:endParaRPr lang="en-US" dirty="0"/>
+          </a:p>
+        </p:txBody>
+      </p:sp>
+      <p:sp>
+        <p:nvSpPr>
+          <p:cNvPr id="4" name="Slide Number Placeholder 3"/>
+          <p:cNvSpPr>
+            <a:spLocks noGrp="1"/>
+          </p:cNvSpPr>
+          <p:nvPr>
+            <p:ph type="sldNum" sz="quarter" idx="10"/>
+          </p:nvPr>
+        </p:nvSpPr>
+        <p:spPr/>
+        <p:txBody>
+          <a:bodyPr/>
+          <a:lstStyle/>
+          <a:p>
+            <a:fld id="{F7021451-1387-4CA6-816F-3879F97B5CBC}" type="slidenum">
+              <a:rPr lang="en-US"/>
+              <a:t>64</a:t>
+            </a:fld>
+            <a:endParaRPr lang="en-US"/>
+          </a:p>
+        </p:txBody>
+      </p:sp>
+    </p:spTree>
+    <p:extLst>
+      <p:ext uri="{BB962C8B-B14F-4D97-AF65-F5344CB8AC3E}">
+        <p14:creationId xmlns:p14="http://schemas.microsoft.com/office/powerpoint/2010/main" val="1024086991"/>
+      </p:ext>
+    </p:extLst>
+  </p:cSld>
+  <p:clrMapOvr>
+    <a:masterClrMapping/>
+  </p:clrMapOvr>
+</p:notes>
+</file>
+
+<file path=ppt/notesSlides/notesSlide65.xml><?xml version="1.0" encoding="utf-8"?>
+<p:notes xmlns:a="http://schemas.openxmlformats.org/drawingml/2006/main" xmlns:r="http://schemas.openxmlformats.org/officeDocument/2006/relationships" xmlns:p="http://schemas.openxmlformats.org/presentationml/2006/main">
+  <p:cSld>
+    <p:spTree>
+      <p:nvGrpSpPr>
+        <p:cNvPr id="1" name=""/>
+        <p:cNvGrpSpPr/>
+        <p:nvPr/>
+      </p:nvGrpSpPr>
+      <p:grpSpPr>
+        <a:xfrm>
+          <a:off x="0" y="0"/>
+          <a:ext cx="0" cy="0"/>
+          <a:chOff x="0" y="0"/>
+          <a:chExt cx="0" cy="0"/>
+        </a:xfrm>
+      </p:grpSpPr>
+      <p:sp>
+        <p:nvSpPr>
+          <p:cNvPr id="2" name="Slide Image Placeholder 1"/>
+          <p:cNvSpPr>
+            <a:spLocks noGrp="1" noRot="1" noChangeAspect="1"/>
+          </p:cNvSpPr>
+          <p:nvPr>
+            <p:ph type="sldImg"/>
+          </p:nvPr>
+        </p:nvSpPr>
+        <p:spPr/>
+      </p:sp>
+      <p:sp>
+        <p:nvSpPr>
+          <p:cNvPr id="3" name="Notes Placeholder 2"/>
+          <p:cNvSpPr>
+            <a:spLocks noGrp="1"/>
+          </p:cNvSpPr>
+          <p:nvPr>
+            <p:ph type="body" idx="1"/>
+          </p:nvPr>
+        </p:nvSpPr>
+        <p:spPr/>
+        <p:txBody>
+          <a:bodyPr/>
+          <a:lstStyle/>
+          <a:p>
+            <a:r>
+              <a:rPr lang="en-US" dirty="0"/>
+              <a:t>This slide is for me, the teacher: it gives the timing of the lesson and what to do if the projector is not available.</a:t>
+            </a:r>
+            <a:endParaRPr lang="en-US" dirty="0"/>
+          </a:p>
+        </p:txBody>
+      </p:sp>
+      <p:sp>
+        <p:nvSpPr>
+          <p:cNvPr id="4" name="Slide Number Placeholder 3"/>
+          <p:cNvSpPr>
+            <a:spLocks noGrp="1"/>
+          </p:cNvSpPr>
+          <p:nvPr>
+            <p:ph type="sldNum" sz="quarter" idx="10"/>
+          </p:nvPr>
+        </p:nvSpPr>
+        <p:spPr/>
+        <p:txBody>
+          <a:bodyPr/>
+          <a:lstStyle/>
+          <a:p>
+            <a:fld id="{F7021451-1387-4CA6-816F-3879F97B5CBC}" type="slidenum">
+              <a:rPr lang="en-US"/>
+              <a:t>65</a:t>
+            </a:fld>
+            <a:endParaRPr lang="en-US"/>
+          </a:p>
+        </p:txBody>
+      </p:sp>
+    </p:spTree>
+    <p:extLst>
+      <p:ext uri="{BB962C8B-B14F-4D97-AF65-F5344CB8AC3E}">
+        <p14:creationId xmlns:p14="http://schemas.microsoft.com/office/powerpoint/2010/main" val="1024086991"/>
+      </p:ext>
+    </p:extLst>
+  </p:cSld>
+  <p:clrMapOvr>
+    <a:masterClrMapping/>
+  </p:clrMapOvr>
+</p:notes>
+</file>
+
+<file path=ppt/notesSlides/notesSlide66.xml><?xml version="1.0" encoding="utf-8"?>
+<p:notes xmlns:a="http://schemas.openxmlformats.org/drawingml/2006/main" xmlns:r="http://schemas.openxmlformats.org/officeDocument/2006/relationships" xmlns:p="http://schemas.openxmlformats.org/presentationml/2006/main">
+  <p:cSld>
+    <p:spTree>
+      <p:nvGrpSpPr>
+        <p:cNvPr id="1" name=""/>
+        <p:cNvGrpSpPr/>
+        <p:nvPr/>
+      </p:nvGrpSpPr>
+      <p:grpSpPr>
+        <a:xfrm>
+          <a:off x="0" y="0"/>
+          <a:ext cx="0" cy="0"/>
+          <a:chOff x="0" y="0"/>
+          <a:chExt cx="0" cy="0"/>
+        </a:xfrm>
+      </p:grpSpPr>
+      <p:sp>
+        <p:nvSpPr>
+          <p:cNvPr id="2" name="Slide Image Placeholder 1"/>
+          <p:cNvSpPr>
+            <a:spLocks noGrp="1" noRot="1" noChangeAspect="1"/>
+          </p:cNvSpPr>
+          <p:nvPr>
+            <p:ph type="sldImg"/>
+          </p:nvPr>
+        </p:nvSpPr>
+        <p:spPr/>
+      </p:sp>
+      <p:sp>
+        <p:nvSpPr>
+          <p:cNvPr id="3" name="Notes Placeholder 2"/>
+          <p:cNvSpPr>
+            <a:spLocks noGrp="1"/>
+          </p:cNvSpPr>
+          <p:nvPr>
+            <p:ph type="body" idx="1"/>
+          </p:nvPr>
+        </p:nvSpPr>
+        <p:spPr/>
+        <p:txBody>
+          <a:bodyPr/>
+          <a:lstStyle/>
+          <a:p>
+            <a:r>
+              <a:rPr lang="en-US" dirty="0"/>
+              <a:t>These are the references and picture credits used to prepare this lesson.</a:t>
+            </a:r>
+            <a:endParaRPr lang="en-US" dirty="0"/>
+          </a:p>
+        </p:txBody>
+      </p:sp>
+      <p:sp>
+        <p:nvSpPr>
+          <p:cNvPr id="4" name="Slide Number Placeholder 3"/>
+          <p:cNvSpPr>
+            <a:spLocks noGrp="1"/>
+          </p:cNvSpPr>
+          <p:nvPr>
+            <p:ph type="sldNum" sz="quarter" idx="10"/>
+          </p:nvPr>
+        </p:nvSpPr>
+        <p:spPr/>
+        <p:txBody>
+          <a:bodyPr/>
+          <a:lstStyle/>
+          <a:p>
+            <a:fld id="{F7021451-1387-4CA6-816F-3879F97B5CBC}" type="slidenum">
+              <a:rPr lang="en-US"/>
+              <a:t>66</a:t>
             </a:fld>
             <a:endParaRPr lang="en-US"/>
           </a:p>
@@ -15482,7 +15838,7 @@
         <p:spPr>
           <a:xfrm>
             <a:off x="365760" y="1783080"/>
-            <a:ext cx="4846320" cy="4617720"/>
+            <a:ext cx="6035040" cy="4617720"/>
           </a:xfrm>
           <a:prstGeom prst="rect">
             <a:avLst/>
@@ -15501,7 +15857,7 @@
               <a:buNone/>
             </a:pPr>
             <a:r>
-              <a:rPr lang="en-US" sz="3600" i="1" dirty="0">
+              <a:rPr lang="en-US" sz="3200" i="1" dirty="0">
                 <a:solidFill>
                   <a:srgbClr val="111111"/>
                 </a:solidFill>
@@ -15509,9 +15865,9 @@
                 <a:ea typeface="Times New Roman" pitchFamily="34" charset="-122"/>
                 <a:cs typeface="Times New Roman" pitchFamily="34" charset="-120"/>
               </a:rPr>
-              <a:t>Thunderstorms are presented as follows:</a:t>
-            </a:r>
-            <a:endParaRPr lang="en-US" sz="3600" dirty="0"/>
+              <a:t>Thunderstorms are explained as follows:</a:t>
+            </a:r>
+            <a:endParaRPr lang="en-US" sz="3200" dirty="0"/>
           </a:p>
           <a:p>
             <a:pPr algn="l" indent="0" marL="0">
@@ -15521,7 +15877,7 @@
               <a:buNone/>
             </a:pPr>
             <a:r>
-              <a:rPr lang="en-US" sz="3600" b="1" dirty="0">
+              <a:rPr lang="en-US" sz="3200" b="1" dirty="0">
                 <a:solidFill>
                   <a:srgbClr val="111111"/>
                 </a:solidFill>
@@ -15529,7 +15885,7 @@
                 <a:ea typeface="Times New Roman" pitchFamily="34" charset="-122"/>
                 <a:cs typeface="Times New Roman" pitchFamily="34" charset="-120"/>
               </a:rPr>
-              <a:t>Distribution: </a:t>
+              <a:t>Meaning: </a:t>
             </a:r>
             <a:pPr algn="l" indent="0" marL="0">
               <a:spcAft>
@@ -15538,7 +15894,7 @@
               <a:buNone/>
             </a:pPr>
             <a:r>
-              <a:rPr lang="en-US" sz="3600" dirty="0">
+              <a:rPr lang="en-US" sz="3200" dirty="0">
                 <a:solidFill>
                   <a:srgbClr val="111111"/>
                 </a:solidFill>
@@ -15546,9 +15902,9 @@
                 <a:ea typeface="Times New Roman" pitchFamily="34" charset="-122"/>
                 <a:cs typeface="Times New Roman" pitchFamily="34" charset="-120"/>
               </a:rPr>
-              <a:t>They are very common in hot, humid regions, such as Central Africa and Garoua in the rainy season.</a:t>
-            </a:r>
-            <a:endParaRPr lang="en-US" sz="3600" dirty="0"/>
+              <a:t>A thunderstorm is a local storm produced by a cumulonimbus cloud. It brings lightning, thunder, strong gusts of wind and heavy rain or hail, usually for one or two hours.</a:t>
+            </a:r>
+            <a:endParaRPr lang="en-US" sz="3200" dirty="0"/>
           </a:p>
         </p:txBody>
       </p:sp>
@@ -15568,8 +15924,8 @@
         </p:blipFill>
         <p:spPr>
           <a:xfrm>
-            <a:off x="5349240" y="2070172"/>
-            <a:ext cx="6659575" cy="3696064"/>
+            <a:off x="6537960" y="2400042"/>
+            <a:ext cx="5470855" cy="3036325"/>
           </a:xfrm>
           <a:prstGeom prst="rect">
             <a:avLst/>
@@ -15584,8 +15940,8 @@
         </p:nvSpPr>
         <p:spPr>
           <a:xfrm>
-            <a:off x="5349240" y="6089904"/>
-            <a:ext cx="6659575" cy="347472"/>
+            <a:off x="6537960" y="6089904"/>
+            <a:ext cx="5470855" cy="347472"/>
           </a:xfrm>
           <a:prstGeom prst="rect">
             <a:avLst/>
@@ -15609,7 +15965,7 @@
                 <a:ea typeface="Times New Roman" pitchFamily="34" charset="-122"/>
                 <a:cs typeface="Times New Roman" pitchFamily="34" charset="-120"/>
               </a:rPr>
-              <a:t>Illustration: a cumulonimbus</a:t>
+              <a:t>Illustration: a cumulonimbus cloud</a:t>
             </a:r>
             <a:endParaRPr lang="en-US" sz="1600" dirty="0"/>
           </a:p>
@@ -15966,109 +16322,9 @@
           </a:p>
         </p:txBody>
       </p:sp>
-      <p:sp>
-        <p:nvSpPr>
-          <p:cNvPr id="3" name="Text 1"/>
-          <p:cNvSpPr/>
-          <p:nvPr/>
-        </p:nvSpPr>
-        <p:spPr>
-          <a:xfrm>
-            <a:off x="365760" y="1005840"/>
-            <a:ext cx="11460175" cy="731520"/>
-          </a:xfrm>
-          <a:prstGeom prst="rect">
-            <a:avLst/>
-          </a:prstGeom>
-          <a:noFill/>
-          <a:ln/>
-        </p:spPr>
-        <p:txBody>
-          <a:bodyPr wrap="square" lIns="0" tIns="0" rIns="0" bIns="0" rtlCol="0" anchor="ctr">
-            <a:normAutofit/>
-          </a:bodyPr>
-          <a:lstStyle/>
-          <a:p>
-            <a:pPr algn="ctr" indent="0" marL="0">
-              <a:buNone/>
-            </a:pPr>
-            <a:r>
-              <a:rPr lang="en-US" sz="3600" b="1" dirty="0">
-                <a:solidFill>
-                  <a:srgbClr val="990011"/>
-                </a:solidFill>
-                <a:latin typeface="Times New Roman" pitchFamily="34" charset="0"/>
-                <a:ea typeface="Times New Roman" pitchFamily="34" charset="-122"/>
-                <a:cs typeface="Times New Roman" pitchFamily="34" charset="-120"/>
-              </a:rPr>
-              <a:t>1. Thunderstorms</a:t>
-            </a:r>
-            <a:endParaRPr lang="en-US" sz="3600" dirty="0"/>
-          </a:p>
-        </p:txBody>
-      </p:sp>
-      <p:sp>
-        <p:nvSpPr>
-          <p:cNvPr id="4" name="Text 2"/>
-          <p:cNvSpPr/>
-          <p:nvPr/>
-        </p:nvSpPr>
-        <p:spPr>
-          <a:xfrm>
-            <a:off x="365760" y="1783080"/>
-            <a:ext cx="4846320" cy="4617720"/>
-          </a:xfrm>
-          <a:prstGeom prst="rect">
-            <a:avLst/>
-          </a:prstGeom>
-          <a:noFill/>
-          <a:ln/>
-        </p:spPr>
-        <p:txBody>
-          <a:bodyPr wrap="square" lIns="0" tIns="0" rIns="0" bIns="0" rtlCol="0" anchor="t"/>
-          <a:lstStyle/>
-          <a:p>
-            <a:pPr algn="l" indent="0" marL="0">
-              <a:spcAft>
-                <a:spcPts val="800"/>
-              </a:spcAft>
-              <a:buNone/>
-            </a:pPr>
-            <a:r>
-              <a:rPr lang="en-US" sz="3600" b="1" dirty="0">
-                <a:solidFill>
-                  <a:srgbClr val="111111"/>
-                </a:solidFill>
-                <a:latin typeface="Times New Roman" pitchFamily="34" charset="0"/>
-                <a:ea typeface="Times New Roman" pitchFamily="34" charset="-122"/>
-                <a:cs typeface="Times New Roman" pitchFamily="34" charset="-120"/>
-              </a:rPr>
-              <a:t>Causes: </a:t>
-            </a:r>
-            <a:pPr algn="l" indent="0" marL="0">
-              <a:spcAft>
-                <a:spcPts val="800"/>
-              </a:spcAft>
-              <a:buNone/>
-            </a:pPr>
-            <a:r>
-              <a:rPr lang="en-US" sz="3600" dirty="0">
-                <a:solidFill>
-                  <a:srgbClr val="111111"/>
-                </a:solidFill>
-                <a:latin typeface="Times New Roman" pitchFamily="34" charset="0"/>
-                <a:ea typeface="Times New Roman" pitchFamily="34" charset="-122"/>
-                <a:cs typeface="Times New Roman" pitchFamily="34" charset="-120"/>
-              </a:rPr>
-              <a:t>Strong heating makes moist air rise quickly (convection) in unstable air; condensation releases latent heat and builds a tall cumulonimbus with electric charges.</a:t>
-            </a:r>
-            <a:endParaRPr lang="en-US" sz="3600" dirty="0"/>
-          </a:p>
-        </p:txBody>
-      </p:sp>
       <p:pic>
         <p:nvPicPr>
-          <p:cNvPr id="5" name="Image 0" descr="/home/claude/f4/img/v2/thunderstorm_big.png">    </p:cNvPr>
+          <p:cNvPr id="3" name="Image 0" descr="/home/claude/f4/img/minesec_sheet.png">    </p:cNvPr>
           <p:cNvPicPr>
             <a:picLocks noChangeAspect="1"/>
           </p:cNvPicPr>
@@ -16082,8 +16338,8 @@
         </p:blipFill>
         <p:spPr>
           <a:xfrm>
-            <a:off x="5349240" y="2617506"/>
-            <a:ext cx="6659575" cy="2601397"/>
+            <a:off x="0" y="658368"/>
+            <a:ext cx="2468880" cy="5833872"/>
           </a:xfrm>
           <a:prstGeom prst="rect">
             <a:avLst/>
@@ -16092,14 +16348,14 @@
       </p:pic>
       <p:sp>
         <p:nvSpPr>
-          <p:cNvPr id="6" name="Text 3"/>
+          <p:cNvPr id="4" name="Text 1"/>
           <p:cNvSpPr/>
           <p:nvPr/>
         </p:nvSpPr>
         <p:spPr>
           <a:xfrm>
-            <a:off x="5349240" y="6089904"/>
-            <a:ext cx="6659575" cy="347472"/>
+            <a:off x="2697480" y="1005840"/>
+            <a:ext cx="9174175" cy="731520"/>
           </a:xfrm>
           <a:prstGeom prst="rect">
             <a:avLst/>
@@ -16108,24 +16364,85 @@
           <a:ln/>
         </p:spPr>
         <p:txBody>
-          <a:bodyPr wrap="square" lIns="0" tIns="0" rIns="0" bIns="0" rtlCol="0" anchor="ctr"/>
+          <a:bodyPr wrap="square" lIns="0" tIns="0" rIns="0" bIns="0" rtlCol="0" anchor="ctr">
+            <a:normAutofit/>
+          </a:bodyPr>
           <a:lstStyle/>
           <a:p>
             <a:pPr algn="ctr" indent="0" marL="0">
               <a:buNone/>
             </a:pPr>
             <a:r>
-              <a:rPr lang="en-US" sz="1600" i="1" dirty="0">
-                <a:solidFill>
-                  <a:srgbClr val="555555"/>
+              <a:rPr lang="en-US" sz="3600" b="1" dirty="0">
+                <a:solidFill>
+                  <a:srgbClr val="990011"/>
                 </a:solidFill>
                 <a:latin typeface="Times New Roman" pitchFamily="34" charset="0"/>
                 <a:ea typeface="Times New Roman" pitchFamily="34" charset="-122"/>
                 <a:cs typeface="Times New Roman" pitchFamily="34" charset="-120"/>
               </a:rPr>
-              <a:t>Illustration: the life of a thunderstorm</a:t>
-            </a:r>
-            <a:endParaRPr lang="en-US" sz="1600" dirty="0"/>
+              <a:t>1. Thunderstorms</a:t>
+            </a:r>
+            <a:endParaRPr lang="en-US" sz="3600" dirty="0"/>
+          </a:p>
+        </p:txBody>
+      </p:sp>
+      <p:sp>
+        <p:nvSpPr>
+          <p:cNvPr id="5" name="Text 2"/>
+          <p:cNvSpPr/>
+          <p:nvPr/>
+        </p:nvSpPr>
+        <p:spPr>
+          <a:xfrm>
+            <a:off x="2697480" y="1783080"/>
+            <a:ext cx="9174175" cy="4663440"/>
+          </a:xfrm>
+          <a:prstGeom prst="rect">
+            <a:avLst/>
+          </a:prstGeom>
+          <a:noFill/>
+          <a:ln/>
+        </p:spPr>
+        <p:txBody>
+          <a:bodyPr wrap="square" lIns="0" tIns="0" rIns="0" bIns="0" rtlCol="0" anchor="t"/>
+          <a:lstStyle/>
+          <a:p>
+            <a:pPr algn="l" indent="0" marL="0">
+              <a:spcAft>
+                <a:spcPts val="800"/>
+              </a:spcAft>
+              <a:buNone/>
+            </a:pPr>
+            <a:r>
+              <a:rPr lang="en-US" sz="4000" b="1" dirty="0">
+                <a:solidFill>
+                  <a:srgbClr val="111111"/>
+                </a:solidFill>
+                <a:latin typeface="Times New Roman" pitchFamily="34" charset="0"/>
+                <a:ea typeface="Times New Roman" pitchFamily="34" charset="-122"/>
+                <a:cs typeface="Times New Roman" pitchFamily="34" charset="-120"/>
+              </a:rPr>
+              <a:t>Distribution: </a:t>
+            </a:r>
+            <a:pPr algn="l" indent="0" marL="0">
+              <a:spcAft>
+                <a:spcPts val="800"/>
+              </a:spcAft>
+              <a:buNone/>
+            </a:pPr>
+            <a:r>
+              <a:rPr lang="en-US" sz="4000" dirty="0">
+                <a:solidFill>
+                  <a:srgbClr val="111111"/>
+                </a:solidFill>
+                <a:latin typeface="Times New Roman" pitchFamily="34" charset="0"/>
+                <a:ea typeface="Times New Roman" pitchFamily="34" charset="-122"/>
+                <a:cs typeface="Times New Roman" pitchFamily="34" charset="-120"/>
+              </a:rPr>
+              <a:t>Thunderstorms are most frequent in hot, humid regions near the Equator, such as the Congo Basin, where they occur on more than 100 days a year. In Garoua, they are common in the rainy season, especially at its start and end.</a:t>
+            </a:r>
+            <a:endParaRPr lang="en-US" sz="4000" dirty="0"/>
           </a:p>
         </p:txBody>
       </p:sp>
@@ -16241,9 +16558,109 @@
           </a:p>
         </p:txBody>
       </p:sp>
+      <p:sp>
+        <p:nvSpPr>
+          <p:cNvPr id="3" name="Text 1"/>
+          <p:cNvSpPr/>
+          <p:nvPr/>
+        </p:nvSpPr>
+        <p:spPr>
+          <a:xfrm>
+            <a:off x="365760" y="1005840"/>
+            <a:ext cx="11460175" cy="731520"/>
+          </a:xfrm>
+          <a:prstGeom prst="rect">
+            <a:avLst/>
+          </a:prstGeom>
+          <a:noFill/>
+          <a:ln/>
+        </p:spPr>
+        <p:txBody>
+          <a:bodyPr wrap="square" lIns="0" tIns="0" rIns="0" bIns="0" rtlCol="0" anchor="ctr">
+            <a:normAutofit/>
+          </a:bodyPr>
+          <a:lstStyle/>
+          <a:p>
+            <a:pPr algn="ctr" indent="0" marL="0">
+              <a:buNone/>
+            </a:pPr>
+            <a:r>
+              <a:rPr lang="en-US" sz="3600" b="1" dirty="0">
+                <a:solidFill>
+                  <a:srgbClr val="990011"/>
+                </a:solidFill>
+                <a:latin typeface="Times New Roman" pitchFamily="34" charset="0"/>
+                <a:ea typeface="Times New Roman" pitchFamily="34" charset="-122"/>
+                <a:cs typeface="Times New Roman" pitchFamily="34" charset="-120"/>
+              </a:rPr>
+              <a:t>1. Thunderstorms</a:t>
+            </a:r>
+            <a:endParaRPr lang="en-US" sz="3600" dirty="0"/>
+          </a:p>
+        </p:txBody>
+      </p:sp>
+      <p:sp>
+        <p:nvSpPr>
+          <p:cNvPr id="4" name="Text 2"/>
+          <p:cNvSpPr/>
+          <p:nvPr/>
+        </p:nvSpPr>
+        <p:spPr>
+          <a:xfrm>
+            <a:off x="365760" y="1783080"/>
+            <a:ext cx="6035040" cy="4617720"/>
+          </a:xfrm>
+          <a:prstGeom prst="rect">
+            <a:avLst/>
+          </a:prstGeom>
+          <a:noFill/>
+          <a:ln/>
+        </p:spPr>
+        <p:txBody>
+          <a:bodyPr wrap="square" lIns="0" tIns="0" rIns="0" bIns="0" rtlCol="0" anchor="t"/>
+          <a:lstStyle/>
+          <a:p>
+            <a:pPr algn="l" indent="0" marL="0">
+              <a:spcAft>
+                <a:spcPts val="800"/>
+              </a:spcAft>
+              <a:buNone/>
+            </a:pPr>
+            <a:r>
+              <a:rPr lang="en-US" sz="3200" b="1" dirty="0">
+                <a:solidFill>
+                  <a:srgbClr val="111111"/>
+                </a:solidFill>
+                <a:latin typeface="Times New Roman" pitchFamily="34" charset="0"/>
+                <a:ea typeface="Times New Roman" pitchFamily="34" charset="-122"/>
+                <a:cs typeface="Times New Roman" pitchFamily="34" charset="-120"/>
+              </a:rPr>
+              <a:t>Causes: </a:t>
+            </a:r>
+            <a:pPr algn="l" indent="0" marL="0">
+              <a:spcAft>
+                <a:spcPts val="800"/>
+              </a:spcAft>
+              <a:buNone/>
+            </a:pPr>
+            <a:r>
+              <a:rPr lang="en-US" sz="3200" dirty="0">
+                <a:solidFill>
+                  <a:srgbClr val="111111"/>
+                </a:solidFill>
+                <a:latin typeface="Times New Roman" pitchFamily="34" charset="0"/>
+                <a:ea typeface="Times New Roman" pitchFamily="34" charset="-122"/>
+                <a:cs typeface="Times New Roman" pitchFamily="34" charset="-120"/>
+              </a:rPr>
+              <a:t>Strong heating of the ground makes moist, unstable air rise quickly by convection, and fronts or mountains can also lift it. As the vapour condenses, it releases latent heat that makes the cloud grow up to the tropopause and separates electric charges, which produce lightning.</a:t>
+            </a:r>
+            <a:endParaRPr lang="en-US" sz="3200" dirty="0"/>
+          </a:p>
+        </p:txBody>
+      </p:sp>
       <p:pic>
         <p:nvPicPr>
-          <p:cNvPr id="3" name="Image 0" descr="/home/claude/f4/img/minesec_sheet.png">    </p:cNvPr>
+          <p:cNvPr id="5" name="Image 0" descr="/home/claude/f4/img/v2/thunderstorm_big.png">    </p:cNvPr>
           <p:cNvPicPr>
             <a:picLocks noChangeAspect="1"/>
           </p:cNvPicPr>
@@ -16257,8 +16674,8 @@
         </p:blipFill>
         <p:spPr>
           <a:xfrm>
-            <a:off x="0" y="658368"/>
-            <a:ext cx="1463040" cy="5833872"/>
+            <a:off x="6537960" y="2849678"/>
+            <a:ext cx="5470855" cy="2137053"/>
           </a:xfrm>
           <a:prstGeom prst="rect">
             <a:avLst/>
@@ -16267,14 +16684,14 @@
       </p:pic>
       <p:sp>
         <p:nvSpPr>
-          <p:cNvPr id="4" name="Text 1"/>
+          <p:cNvPr id="6" name="Text 3"/>
           <p:cNvSpPr/>
           <p:nvPr/>
         </p:nvSpPr>
         <p:spPr>
           <a:xfrm>
-            <a:off x="1691640" y="1005840"/>
-            <a:ext cx="10180015" cy="731520"/>
+            <a:off x="6537960" y="6089904"/>
+            <a:ext cx="5470855" cy="347472"/>
           </a:xfrm>
           <a:prstGeom prst="rect">
             <a:avLst/>
@@ -16283,152 +16700,24 @@
           <a:ln/>
         </p:spPr>
         <p:txBody>
-          <a:bodyPr wrap="square" lIns="0" tIns="0" rIns="0" bIns="0" rtlCol="0" anchor="ctr">
-            <a:normAutofit/>
-          </a:bodyPr>
+          <a:bodyPr wrap="square" lIns="0" tIns="0" rIns="0" bIns="0" rtlCol="0" anchor="ctr"/>
           <a:lstStyle/>
           <a:p>
             <a:pPr algn="ctr" indent="0" marL="0">
               <a:buNone/>
             </a:pPr>
             <a:r>
-              <a:rPr lang="en-US" sz="3600" b="1" dirty="0">
-                <a:solidFill>
-                  <a:srgbClr val="990011"/>
+              <a:rPr lang="en-US" sz="1600" i="1" dirty="0">
+                <a:solidFill>
+                  <a:srgbClr val="555555"/>
                 </a:solidFill>
                 <a:latin typeface="Times New Roman" pitchFamily="34" charset="0"/>
                 <a:ea typeface="Times New Roman" pitchFamily="34" charset="-122"/>
                 <a:cs typeface="Times New Roman" pitchFamily="34" charset="-120"/>
               </a:rPr>
-              <a:t>1. Thunderstorms</a:t>
-            </a:r>
-            <a:endParaRPr lang="en-US" sz="3600" dirty="0"/>
-          </a:p>
-        </p:txBody>
-      </p:sp>
-      <p:sp>
-        <p:nvSpPr>
-          <p:cNvPr id="5" name="Text 2"/>
-          <p:cNvSpPr/>
-          <p:nvPr/>
-        </p:nvSpPr>
-        <p:spPr>
-          <a:xfrm>
-            <a:off x="1691640" y="1783080"/>
-            <a:ext cx="10180015" cy="4663440"/>
-          </a:xfrm>
-          <a:prstGeom prst="rect">
-            <a:avLst/>
-          </a:prstGeom>
-          <a:noFill/>
-          <a:ln/>
-        </p:spPr>
-        <p:txBody>
-          <a:bodyPr wrap="square" lIns="0" tIns="0" rIns="0" bIns="0" rtlCol="0" anchor="t"/>
-          <a:lstStyle/>
-          <a:p>
-            <a:pPr algn="l" indent="0" marL="0">
-              <a:spcAft>
-                <a:spcPts val="800"/>
-              </a:spcAft>
-              <a:buNone/>
-            </a:pPr>
-            <a:r>
-              <a:rPr lang="en-US" sz="4000" b="1" dirty="0">
-                <a:solidFill>
-                  <a:srgbClr val="111111"/>
-                </a:solidFill>
-                <a:latin typeface="Times New Roman" pitchFamily="34" charset="0"/>
-                <a:ea typeface="Times New Roman" pitchFamily="34" charset="-122"/>
-                <a:cs typeface="Times New Roman" pitchFamily="34" charset="-120"/>
-              </a:rPr>
-              <a:t>Consequences:</a:t>
-            </a:r>
-            <a:endParaRPr lang="en-US" sz="4000" dirty="0"/>
-          </a:p>
-          <a:p>
-            <a:pPr algn="l" marL="342900" indent="-342900">
-              <a:spcAft>
-                <a:spcPts val="800"/>
-              </a:spcAft>
-              <a:buSzPct val="100000"/>
-              <a:buChar char="•"/>
-            </a:pPr>
-            <a:r>
-              <a:rPr lang="en-US" sz="4000" dirty="0">
-                <a:solidFill>
-                  <a:srgbClr val="111111"/>
-                </a:solidFill>
-                <a:latin typeface="Times New Roman" pitchFamily="34" charset="0"/>
-                <a:ea typeface="Times New Roman" pitchFamily="34" charset="-122"/>
-                <a:cs typeface="Times New Roman" pitchFamily="34" charset="-120"/>
-              </a:rPr>
-              <a:t>Flash floods from intense rain.</a:t>
-            </a:r>
-            <a:endParaRPr lang="en-US" sz="4000" dirty="0"/>
-          </a:p>
-          <a:p>
-            <a:pPr algn="l" marL="342900" indent="-342900">
-              <a:spcAft>
-                <a:spcPts val="800"/>
-              </a:spcAft>
-              <a:buSzPct val="100000"/>
-              <a:buChar char="•"/>
-            </a:pPr>
-            <a:r>
-              <a:rPr lang="en-US" sz="4000" dirty="0">
-                <a:solidFill>
-                  <a:srgbClr val="111111"/>
-                </a:solidFill>
-                <a:latin typeface="Times New Roman" pitchFamily="34" charset="0"/>
-                <a:ea typeface="Times New Roman" pitchFamily="34" charset="-122"/>
-                <a:cs typeface="Times New Roman" pitchFamily="34" charset="-120"/>
-              </a:rPr>
-              <a:t>Lightning that kills people and animals and starts fires.</a:t>
-            </a:r>
-            <a:endParaRPr lang="en-US" sz="4000" dirty="0"/>
-          </a:p>
-          <a:p>
-            <a:pPr algn="l" marL="342900" indent="-342900">
-              <a:spcAft>
-                <a:spcPts val="800"/>
-              </a:spcAft>
-              <a:buSzPct val="100000"/>
-              <a:buChar char="•"/>
-            </a:pPr>
-            <a:r>
-              <a:rPr lang="en-US" sz="4000" dirty="0">
-                <a:solidFill>
-                  <a:srgbClr val="111111"/>
-                </a:solidFill>
-                <a:latin typeface="Times New Roman" pitchFamily="34" charset="0"/>
-                <a:ea typeface="Times New Roman" pitchFamily="34" charset="-122"/>
-                <a:cs typeface="Times New Roman" pitchFamily="34" charset="-120"/>
-              </a:rPr>
-              <a:t>Strong winds that damage roofs and trees.</a:t>
-            </a:r>
-            <a:endParaRPr lang="en-US" sz="4000" dirty="0"/>
-          </a:p>
-          <a:p>
-            <a:pPr algn="l" marL="342900" indent="-342900">
-              <a:spcAft>
-                <a:spcPts val="800"/>
-              </a:spcAft>
-              <a:buSzPct val="100000"/>
-              <a:buChar char="•"/>
-            </a:pPr>
-            <a:r>
-              <a:rPr lang="en-US" sz="4000" dirty="0">
-                <a:solidFill>
-                  <a:srgbClr val="111111"/>
-                </a:solidFill>
-                <a:latin typeface="Times New Roman" pitchFamily="34" charset="0"/>
-                <a:ea typeface="Times New Roman" pitchFamily="34" charset="-122"/>
-                <a:cs typeface="Times New Roman" pitchFamily="34" charset="-120"/>
-              </a:rPr>
-              <a:t>Hail that destroys crops.</a:t>
-            </a:r>
-            <a:endParaRPr lang="en-US" sz="4000" dirty="0"/>
+              <a:t>Illustration: a thunderstorm</a:t>
+            </a:r>
+            <a:endParaRPr lang="en-US" sz="1600" dirty="0"/>
           </a:p>
         </p:txBody>
       </p:sp>
@@ -16544,129 +16833,9 @@
           </a:p>
         </p:txBody>
       </p:sp>
-      <p:sp>
-        <p:nvSpPr>
-          <p:cNvPr id="3" name="Text 1"/>
-          <p:cNvSpPr/>
-          <p:nvPr/>
-        </p:nvSpPr>
-        <p:spPr>
-          <a:xfrm>
-            <a:off x="365760" y="1005840"/>
-            <a:ext cx="11460175" cy="731520"/>
-          </a:xfrm>
-          <a:prstGeom prst="rect">
-            <a:avLst/>
-          </a:prstGeom>
-          <a:noFill/>
-          <a:ln/>
-        </p:spPr>
-        <p:txBody>
-          <a:bodyPr wrap="square" lIns="0" tIns="0" rIns="0" bIns="0" rtlCol="0" anchor="ctr">
-            <a:normAutofit/>
-          </a:bodyPr>
-          <a:lstStyle/>
-          <a:p>
-            <a:pPr algn="ctr" indent="0" marL="0">
-              <a:buNone/>
-            </a:pPr>
-            <a:r>
-              <a:rPr lang="en-US" sz="3600" b="1" dirty="0">
-                <a:solidFill>
-                  <a:srgbClr val="990011"/>
-                </a:solidFill>
-                <a:latin typeface="Times New Roman" pitchFamily="34" charset="0"/>
-                <a:ea typeface="Times New Roman" pitchFamily="34" charset="-122"/>
-                <a:cs typeface="Times New Roman" pitchFamily="34" charset="-120"/>
-              </a:rPr>
-              <a:t>2. Tornadoes</a:t>
-            </a:r>
-            <a:endParaRPr lang="en-US" sz="3600" dirty="0"/>
-          </a:p>
-        </p:txBody>
-      </p:sp>
-      <p:sp>
-        <p:nvSpPr>
-          <p:cNvPr id="4" name="Text 2"/>
-          <p:cNvSpPr/>
-          <p:nvPr/>
-        </p:nvSpPr>
-        <p:spPr>
-          <a:xfrm>
-            <a:off x="365760" y="1783080"/>
-            <a:ext cx="4846320" cy="4617720"/>
-          </a:xfrm>
-          <a:prstGeom prst="rect">
-            <a:avLst/>
-          </a:prstGeom>
-          <a:noFill/>
-          <a:ln/>
-        </p:spPr>
-        <p:txBody>
-          <a:bodyPr wrap="square" lIns="0" tIns="0" rIns="0" bIns="0" rtlCol="0" anchor="t"/>
-          <a:lstStyle/>
-          <a:p>
-            <a:pPr algn="l" indent="0" marL="0">
-              <a:spcAft>
-                <a:spcPts val="800"/>
-              </a:spcAft>
-              <a:buNone/>
-            </a:pPr>
-            <a:r>
-              <a:rPr lang="en-US" sz="3600" i="1" dirty="0">
-                <a:solidFill>
-                  <a:srgbClr val="111111"/>
-                </a:solidFill>
-                <a:latin typeface="Times New Roman" pitchFamily="34" charset="0"/>
-                <a:ea typeface="Times New Roman" pitchFamily="34" charset="-122"/>
-                <a:cs typeface="Times New Roman" pitchFamily="34" charset="-120"/>
-              </a:rPr>
-              <a:t>Tornadoes are presented as follows:</a:t>
-            </a:r>
-            <a:endParaRPr lang="en-US" sz="3600" dirty="0"/>
-          </a:p>
-          <a:p>
-            <a:pPr algn="l" indent="0" marL="0">
-              <a:spcAft>
-                <a:spcPts val="800"/>
-              </a:spcAft>
-              <a:buNone/>
-            </a:pPr>
-            <a:r>
-              <a:rPr lang="en-US" sz="3600" b="1" dirty="0">
-                <a:solidFill>
-                  <a:srgbClr val="111111"/>
-                </a:solidFill>
-                <a:latin typeface="Times New Roman" pitchFamily="34" charset="0"/>
-                <a:ea typeface="Times New Roman" pitchFamily="34" charset="-122"/>
-                <a:cs typeface="Times New Roman" pitchFamily="34" charset="-120"/>
-              </a:rPr>
-              <a:t>Distribution: </a:t>
-            </a:r>
-            <a:pPr algn="l" indent="0" marL="0">
-              <a:spcAft>
-                <a:spcPts val="800"/>
-              </a:spcAft>
-              <a:buNone/>
-            </a:pPr>
-            <a:r>
-              <a:rPr lang="en-US" sz="3600" dirty="0">
-                <a:solidFill>
-                  <a:srgbClr val="111111"/>
-                </a:solidFill>
-                <a:latin typeface="Times New Roman" pitchFamily="34" charset="0"/>
-                <a:ea typeface="Times New Roman" pitchFamily="34" charset="-122"/>
-                <a:cs typeface="Times New Roman" pitchFamily="34" charset="-120"/>
-              </a:rPr>
-              <a:t>They occur in many regions but are most frequent and violent in the central USA ("Tornado Alley").</a:t>
-            </a:r>
-            <a:endParaRPr lang="en-US" sz="3600" dirty="0"/>
-          </a:p>
-        </p:txBody>
-      </p:sp>
       <p:pic>
         <p:nvPicPr>
-          <p:cNvPr id="5" name="Image 0" descr="/home/claude/f4/img/v2/clim2_storms.png">    </p:cNvPr>
+          <p:cNvPr id="3" name="Image 0" descr="/home/claude/f4/img/minesec_sheet.png">    </p:cNvPr>
           <p:cNvPicPr>
             <a:picLocks noChangeAspect="1"/>
           </p:cNvPicPr>
@@ -16680,8 +16849,8 @@
         </p:blipFill>
         <p:spPr>
           <a:xfrm>
-            <a:off x="5349240" y="2617506"/>
-            <a:ext cx="6659575" cy="2601397"/>
+            <a:off x="0" y="658368"/>
+            <a:ext cx="5120640" cy="5833872"/>
           </a:xfrm>
           <a:prstGeom prst="rect">
             <a:avLst/>
@@ -16690,14 +16859,14 @@
       </p:pic>
       <p:sp>
         <p:nvSpPr>
-          <p:cNvPr id="6" name="Text 3"/>
+          <p:cNvPr id="4" name="Text 1"/>
           <p:cNvSpPr/>
           <p:nvPr/>
         </p:nvSpPr>
         <p:spPr>
           <a:xfrm>
-            <a:off x="5349240" y="6089904"/>
-            <a:ext cx="6659575" cy="347472"/>
+            <a:off x="5349240" y="1005840"/>
+            <a:ext cx="6522415" cy="731520"/>
           </a:xfrm>
           <a:prstGeom prst="rect">
             <a:avLst/>
@@ -16706,24 +16875,85 @@
           <a:ln/>
         </p:spPr>
         <p:txBody>
-          <a:bodyPr wrap="square" lIns="0" tIns="0" rIns="0" bIns="0" rtlCol="0" anchor="ctr"/>
+          <a:bodyPr wrap="square" lIns="0" tIns="0" rIns="0" bIns="0" rtlCol="0" anchor="ctr">
+            <a:normAutofit/>
+          </a:bodyPr>
           <a:lstStyle/>
           <a:p>
             <a:pPr algn="ctr" indent="0" marL="0">
               <a:buNone/>
             </a:pPr>
             <a:r>
-              <a:rPr lang="en-US" sz="1600" i="1" dirty="0">
-                <a:solidFill>
-                  <a:srgbClr val="555555"/>
+              <a:rPr lang="en-US" sz="3600" b="1" dirty="0">
+                <a:solidFill>
+                  <a:srgbClr val="990011"/>
                 </a:solidFill>
                 <a:latin typeface="Times New Roman" pitchFamily="34" charset="0"/>
                 <a:ea typeface="Times New Roman" pitchFamily="34" charset="-122"/>
                 <a:cs typeface="Times New Roman" pitchFamily="34" charset="-120"/>
               </a:rPr>
-              <a:t>Illustration: three storms compared</a:t>
-            </a:r>
-            <a:endParaRPr lang="en-US" sz="1600" dirty="0"/>
+              <a:t>1. Thunderstorms</a:t>
+            </a:r>
+            <a:endParaRPr lang="en-US" sz="3600" dirty="0"/>
+          </a:p>
+        </p:txBody>
+      </p:sp>
+      <p:sp>
+        <p:nvSpPr>
+          <p:cNvPr id="5" name="Text 2"/>
+          <p:cNvSpPr/>
+          <p:nvPr/>
+        </p:nvSpPr>
+        <p:spPr>
+          <a:xfrm>
+            <a:off x="5349240" y="1783080"/>
+            <a:ext cx="6522415" cy="4663440"/>
+          </a:xfrm>
+          <a:prstGeom prst="rect">
+            <a:avLst/>
+          </a:prstGeom>
+          <a:noFill/>
+          <a:ln/>
+        </p:spPr>
+        <p:txBody>
+          <a:bodyPr wrap="square" lIns="0" tIns="0" rIns="0" bIns="0" rtlCol="0" anchor="t"/>
+          <a:lstStyle/>
+          <a:p>
+            <a:pPr algn="l" indent="0" marL="0">
+              <a:spcAft>
+                <a:spcPts val="800"/>
+              </a:spcAft>
+              <a:buNone/>
+            </a:pPr>
+            <a:r>
+              <a:rPr lang="en-US" sz="4000" b="1" dirty="0">
+                <a:solidFill>
+                  <a:srgbClr val="111111"/>
+                </a:solidFill>
+                <a:latin typeface="Times New Roman" pitchFamily="34" charset="0"/>
+                <a:ea typeface="Times New Roman" pitchFamily="34" charset="-122"/>
+                <a:cs typeface="Times New Roman" pitchFamily="34" charset="-120"/>
+              </a:rPr>
+              <a:t>Consequences: </a:t>
+            </a:r>
+            <a:pPr algn="l" indent="0" marL="0">
+              <a:spcAft>
+                <a:spcPts val="800"/>
+              </a:spcAft>
+              <a:buNone/>
+            </a:pPr>
+            <a:r>
+              <a:rPr lang="en-US" sz="4000" dirty="0">
+                <a:solidFill>
+                  <a:srgbClr val="111111"/>
+                </a:solidFill>
+                <a:latin typeface="Times New Roman" pitchFamily="34" charset="0"/>
+                <a:ea typeface="Times New Roman" pitchFamily="34" charset="-122"/>
+                <a:cs typeface="Times New Roman" pitchFamily="34" charset="-120"/>
+              </a:rPr>
+              <a:t>Lightning kills people and animals and starts fires, and strong winds tear off roofs and break trees. Intense rain causes flash floods, and hail destroys crops.</a:t>
+            </a:r>
+            <a:endParaRPr lang="en-US" sz="4000" dirty="0"/>
           </a:p>
         </p:txBody>
       </p:sp>
@@ -16856,7 +17086,7 @@
         <p:spPr>
           <a:xfrm>
             <a:off x="0" y="658368"/>
-            <a:ext cx="1463040" cy="5833872"/>
+            <a:ext cx="2468880" cy="5833872"/>
           </a:xfrm>
           <a:prstGeom prst="rect">
             <a:avLst/>
@@ -16871,8 +17101,8 @@
         </p:nvSpPr>
         <p:spPr>
           <a:xfrm>
-            <a:off x="1691640" y="1005840"/>
-            <a:ext cx="10180015" cy="731520"/>
+            <a:off x="2697480" y="1005840"/>
+            <a:ext cx="9174175" cy="731520"/>
           </a:xfrm>
           <a:prstGeom prst="rect">
             <a:avLst/>
@@ -16912,8 +17142,8 @@
         </p:nvSpPr>
         <p:spPr>
           <a:xfrm>
-            <a:off x="1691640" y="1783080"/>
-            <a:ext cx="10180015" cy="4663440"/>
+            <a:off x="2697480" y="1783080"/>
+            <a:ext cx="9174175" cy="4663440"/>
           </a:xfrm>
           <a:prstGeom prst="rect">
             <a:avLst/>
@@ -16932,7 +17162,7 @@
               <a:buNone/>
             </a:pPr>
             <a:r>
-              <a:rPr lang="en-US" sz="4000" b="1" dirty="0">
+              <a:rPr lang="en-US" sz="4000" i="1" dirty="0">
                 <a:solidFill>
                   <a:srgbClr val="111111"/>
                 </a:solidFill>
@@ -16940,8 +17170,11 @@
                 <a:ea typeface="Times New Roman" pitchFamily="34" charset="-122"/>
                 <a:cs typeface="Times New Roman" pitchFamily="34" charset="-120"/>
               </a:rPr>
-              <a:t>Causes: </a:t>
-            </a:r>
+              <a:t>Tornadoes are explained as follows:</a:t>
+            </a:r>
+            <a:endParaRPr lang="en-US" sz="4000" dirty="0"/>
+          </a:p>
+          <a:p>
             <a:pPr algn="l" indent="0" marL="0">
               <a:spcAft>
                 <a:spcPts val="800"/>
@@ -16949,7 +17182,7 @@
               <a:buNone/>
             </a:pPr>
             <a:r>
-              <a:rPr lang="en-US" sz="4000" dirty="0">
+              <a:rPr lang="en-US" sz="4000" b="1" dirty="0">
                 <a:solidFill>
                   <a:srgbClr val="111111"/>
                 </a:solidFill>
@@ -16957,11 +17190,8 @@
                 <a:ea typeface="Times New Roman" pitchFamily="34" charset="-122"/>
                 <a:cs typeface="Times New Roman" pitchFamily="34" charset="-120"/>
               </a:rPr>
-              <a:t>They form in the most severe thunderstorms (supercells), where changes of wind speed and direction with height (wind shear) make the air rotate.</a:t>
-            </a:r>
-            <a:endParaRPr lang="en-US" sz="4000" dirty="0"/>
-          </a:p>
-          <a:p>
+              <a:t>Meaning: </a:t>
+            </a:r>
             <a:pPr algn="l" indent="0" marL="0">
               <a:spcAft>
                 <a:spcPts val="800"/>
@@ -16969,7 +17199,7 @@
               <a:buNone/>
             </a:pPr>
             <a:r>
-              <a:rPr lang="en-US" sz="4000" b="1" dirty="0">
+              <a:rPr lang="en-US" sz="4000" dirty="0">
                 <a:solidFill>
                   <a:srgbClr val="111111"/>
                 </a:solidFill>
@@ -16977,24 +17207,7 @@
                 <a:ea typeface="Times New Roman" pitchFamily="34" charset="-122"/>
                 <a:cs typeface="Times New Roman" pitchFamily="34" charset="-120"/>
               </a:rPr>
-              <a:t>Consequences: </a:t>
-            </a:r>
-            <a:pPr algn="l" indent="0" marL="0">
-              <a:spcAft>
-                <a:spcPts val="800"/>
-              </a:spcAft>
-              <a:buNone/>
-            </a:pPr>
-            <a:r>
-              <a:rPr lang="en-US" sz="4000" dirty="0">
-                <a:solidFill>
-                  <a:srgbClr val="111111"/>
-                </a:solidFill>
-                <a:latin typeface="Times New Roman" pitchFamily="34" charset="0"/>
-                <a:ea typeface="Times New Roman" pitchFamily="34" charset="-122"/>
-                <a:cs typeface="Times New Roman" pitchFamily="34" charset="-120"/>
-              </a:rPr>
-              <a:t>Winds can exceed 400 km/h and turn debris into missiles, but the path is narrow (usually less than 1–2 km).</a:t>
+              <a:t>A tornado is a narrow column of air that rotates violently and hangs from the base of a thunderstorm down to the ground. It looks like a dark funnel and usually lasts only a few minutes.</a:t>
             </a:r>
             <a:endParaRPr lang="en-US" sz="4000" dirty="0"/>
           </a:p>
@@ -17147,7 +17360,7 @@
                 <a:ea typeface="Times New Roman" pitchFamily="34" charset="-122"/>
                 <a:cs typeface="Times New Roman" pitchFamily="34" charset="-120"/>
               </a:rPr>
-              <a:t>3. Tropical Cyclones</a:t>
+              <a:t>2. Tornadoes</a:t>
             </a:r>
             <a:endParaRPr lang="en-US" sz="3600" dirty="0"/>
           </a:p>
@@ -17162,7 +17375,7 @@
         <p:spPr>
           <a:xfrm>
             <a:off x="365760" y="1783080"/>
-            <a:ext cx="4846320" cy="4617720"/>
+            <a:ext cx="6035040" cy="4617720"/>
           </a:xfrm>
           <a:prstGeom prst="rect">
             <a:avLst/>
@@ -17181,7 +17394,7 @@
               <a:buNone/>
             </a:pPr>
             <a:r>
-              <a:rPr lang="en-US" sz="3600" i="1" dirty="0">
+              <a:rPr lang="en-US" sz="3400" b="1" dirty="0">
                 <a:solidFill>
                   <a:srgbClr val="111111"/>
                 </a:solidFill>
@@ -17189,11 +17402,8 @@
                 <a:ea typeface="Times New Roman" pitchFamily="34" charset="-122"/>
                 <a:cs typeface="Times New Roman" pitchFamily="34" charset="-120"/>
               </a:rPr>
-              <a:t>Tropical cyclones are presented as follows:</a:t>
-            </a:r>
-            <a:endParaRPr lang="en-US" sz="3600" dirty="0"/>
-          </a:p>
-          <a:p>
+              <a:t>Distribution: </a:t>
+            </a:r>
             <a:pPr algn="l" indent="0" marL="0">
               <a:spcAft>
                 <a:spcPts val="800"/>
@@ -17201,7 +17411,7 @@
               <a:buNone/>
             </a:pPr>
             <a:r>
-              <a:rPr lang="en-US" sz="3600" b="1" dirty="0">
+              <a:rPr lang="en-US" sz="3400" dirty="0">
                 <a:solidFill>
                   <a:srgbClr val="111111"/>
                 </a:solidFill>
@@ -17209,32 +17419,15 @@
                 <a:ea typeface="Times New Roman" pitchFamily="34" charset="-122"/>
                 <a:cs typeface="Times New Roman" pitchFamily="34" charset="-120"/>
               </a:rPr>
-              <a:t>Names: </a:t>
-            </a:r>
-            <a:pPr algn="l" indent="0" marL="0">
-              <a:spcAft>
-                <a:spcPts val="800"/>
-              </a:spcAft>
-              <a:buNone/>
-            </a:pPr>
-            <a:r>
-              <a:rPr lang="en-US" sz="3600" dirty="0">
-                <a:solidFill>
-                  <a:srgbClr val="111111"/>
-                </a:solidFill>
-                <a:latin typeface="Times New Roman" pitchFamily="34" charset="0"/>
-                <a:ea typeface="Times New Roman" pitchFamily="34" charset="-122"/>
-                <a:cs typeface="Times New Roman" pitchFamily="34" charset="-120"/>
-              </a:rPr>
-              <a:t>They are hurricanes in the Atlantic, typhoons in the north-west Pacific and cyclones in the Indian Ocean.</a:t>
-            </a:r>
-            <a:endParaRPr lang="en-US" sz="3600" dirty="0"/>
+              <a:t>Tornadoes occur in many parts of the world but are most frequent and violent in the central United States, called Tornado Alley, with more than 1,000 a year. They also occur in Bangladesh, Argentina and sometimes in West Africa.</a:t>
+            </a:r>
+            <a:endParaRPr lang="en-US" sz="3400" dirty="0"/>
           </a:p>
         </p:txBody>
       </p:sp>
       <p:pic>
         <p:nvPicPr>
-          <p:cNvPr id="5" name="Image 0" descr="/home/claude/f4/img/v2/cyclone_big.png">    </p:cNvPr>
+          <p:cNvPr id="5" name="Image 0" descr="/home/claude/f4/img/v2/clim2_storms.png">    </p:cNvPr>
           <p:cNvPicPr>
             <a:picLocks noChangeAspect="1"/>
           </p:cNvPicPr>
@@ -17248,8 +17441,8 @@
         </p:blipFill>
         <p:spPr>
           <a:xfrm>
-            <a:off x="5349240" y="2617506"/>
-            <a:ext cx="6659575" cy="2601397"/>
+            <a:off x="6537960" y="2849678"/>
+            <a:ext cx="5470855" cy="2137053"/>
           </a:xfrm>
           <a:prstGeom prst="rect">
             <a:avLst/>
@@ -17264,8 +17457,8 @@
         </p:nvSpPr>
         <p:spPr>
           <a:xfrm>
-            <a:off x="5349240" y="6089904"/>
-            <a:ext cx="6659575" cy="347472"/>
+            <a:off x="6537960" y="6089904"/>
+            <a:ext cx="5470855" cy="347472"/>
           </a:xfrm>
           <a:prstGeom prst="rect">
             <a:avLst/>
@@ -17289,7 +17482,7 @@
                 <a:ea typeface="Times New Roman" pitchFamily="34" charset="-122"/>
                 <a:cs typeface="Times New Roman" pitchFamily="34" charset="-120"/>
               </a:rPr>
-              <a:t>Illustration: a tropical cyclone</a:t>
+              <a:t>Illustration: storm hazards</a:t>
             </a:r>
             <a:endParaRPr lang="en-US" sz="1600" dirty="0"/>
           </a:p>
@@ -17424,7 +17617,7 @@
         <p:spPr>
           <a:xfrm>
             <a:off x="0" y="658368"/>
-            <a:ext cx="5120640" cy="5833872"/>
+            <a:ext cx="2468880" cy="5833872"/>
           </a:xfrm>
           <a:prstGeom prst="rect">
             <a:avLst/>
@@ -17439,8 +17632,8 @@
         </p:nvSpPr>
         <p:spPr>
           <a:xfrm>
-            <a:off x="5349240" y="1005840"/>
-            <a:ext cx="6522415" cy="731520"/>
+            <a:off x="2697480" y="1005840"/>
+            <a:ext cx="9174175" cy="731520"/>
           </a:xfrm>
           <a:prstGeom prst="rect">
             <a:avLst/>
@@ -17466,7 +17659,7 @@
                 <a:ea typeface="Times New Roman" pitchFamily="34" charset="-122"/>
                 <a:cs typeface="Times New Roman" pitchFamily="34" charset="-120"/>
               </a:rPr>
-              <a:t>3. Tropical Cyclones</a:t>
+              <a:t>2. Tornadoes</a:t>
             </a:r>
             <a:endParaRPr lang="en-US" sz="3600" dirty="0"/>
           </a:p>
@@ -17480,8 +17673,8 @@
         </p:nvSpPr>
         <p:spPr>
           <a:xfrm>
-            <a:off x="5349240" y="1783080"/>
-            <a:ext cx="6522415" cy="4663440"/>
+            <a:off x="2697480" y="1783080"/>
+            <a:ext cx="9174175" cy="4663440"/>
           </a:xfrm>
           <a:prstGeom prst="rect">
             <a:avLst/>
@@ -17508,7 +17701,7 @@
                 <a:ea typeface="Times New Roman" pitchFamily="34" charset="-122"/>
                 <a:cs typeface="Times New Roman" pitchFamily="34" charset="-120"/>
               </a:rPr>
-              <a:t>Distribution: </a:t>
+              <a:t>Causes: </a:t>
             </a:r>
             <a:pPr algn="l" indent="0" marL="0">
               <a:spcAft>
@@ -17525,7 +17718,7 @@
                 <a:ea typeface="Times New Roman" pitchFamily="34" charset="-122"/>
                 <a:cs typeface="Times New Roman" pitchFamily="34" charset="-120"/>
               </a:rPr>
-              <a:t>They form over warm oceans between about 5° and 20° N and S; they are almost absent from the South Atlantic, so the coast of Cameroon is rarely hit.</a:t>
+              <a:t>They form in the most severe thunderstorms, called supercells, where warm, moist air meets cold, dry air. Changes of wind speed and direction with height (wind shear) make the rising air rotate, and the rotation tightens into a funnel.</a:t>
             </a:r>
             <a:endParaRPr lang="en-US" sz="4000" dirty="0"/>
           </a:p>
@@ -17643,109 +17836,9 @@
           </a:p>
         </p:txBody>
       </p:sp>
-      <p:sp>
-        <p:nvSpPr>
-          <p:cNvPr id="3" name="Text 1"/>
-          <p:cNvSpPr/>
-          <p:nvPr/>
-        </p:nvSpPr>
-        <p:spPr>
-          <a:xfrm>
-            <a:off x="365760" y="1005840"/>
-            <a:ext cx="11460175" cy="731520"/>
-          </a:xfrm>
-          <a:prstGeom prst="rect">
-            <a:avLst/>
-          </a:prstGeom>
-          <a:noFill/>
-          <a:ln/>
-        </p:spPr>
-        <p:txBody>
-          <a:bodyPr wrap="square" lIns="0" tIns="0" rIns="0" bIns="0" rtlCol="0" anchor="ctr">
-            <a:normAutofit/>
-          </a:bodyPr>
-          <a:lstStyle/>
-          <a:p>
-            <a:pPr algn="ctr" indent="0" marL="0">
-              <a:buNone/>
-            </a:pPr>
-            <a:r>
-              <a:rPr lang="en-US" sz="3600" b="1" dirty="0">
-                <a:solidFill>
-                  <a:srgbClr val="990011"/>
-                </a:solidFill>
-                <a:latin typeface="Times New Roman" pitchFamily="34" charset="0"/>
-                <a:ea typeface="Times New Roman" pitchFamily="34" charset="-122"/>
-                <a:cs typeface="Times New Roman" pitchFamily="34" charset="-120"/>
-              </a:rPr>
-              <a:t>3. Tropical Cyclones</a:t>
-            </a:r>
-            <a:endParaRPr lang="en-US" sz="3600" dirty="0"/>
-          </a:p>
-        </p:txBody>
-      </p:sp>
-      <p:sp>
-        <p:nvSpPr>
-          <p:cNvPr id="4" name="Text 2"/>
-          <p:cNvSpPr/>
-          <p:nvPr/>
-        </p:nvSpPr>
-        <p:spPr>
-          <a:xfrm>
-            <a:off x="365760" y="1783080"/>
-            <a:ext cx="4846320" cy="4617720"/>
-          </a:xfrm>
-          <a:prstGeom prst="rect">
-            <a:avLst/>
-          </a:prstGeom>
-          <a:noFill/>
-          <a:ln/>
-        </p:spPr>
-        <p:txBody>
-          <a:bodyPr wrap="square" lIns="0" tIns="0" rIns="0" bIns="0" rtlCol="0" anchor="t"/>
-          <a:lstStyle/>
-          <a:p>
-            <a:pPr algn="l" indent="0" marL="0">
-              <a:spcAft>
-                <a:spcPts val="800"/>
-              </a:spcAft>
-              <a:buNone/>
-            </a:pPr>
-            <a:r>
-              <a:rPr lang="en-US" sz="3600" b="1" dirty="0">
-                <a:solidFill>
-                  <a:srgbClr val="111111"/>
-                </a:solidFill>
-                <a:latin typeface="Times New Roman" pitchFamily="34" charset="0"/>
-                <a:ea typeface="Times New Roman" pitchFamily="34" charset="-122"/>
-                <a:cs typeface="Times New Roman" pitchFamily="34" charset="-120"/>
-              </a:rPr>
-              <a:t>Causes: </a:t>
-            </a:r>
-            <a:pPr algn="l" indent="0" marL="0">
-              <a:spcAft>
-                <a:spcPts val="800"/>
-              </a:spcAft>
-              <a:buNone/>
-            </a:pPr>
-            <a:r>
-              <a:rPr lang="en-US" sz="3600" dirty="0">
-                <a:solidFill>
-                  <a:srgbClr val="111111"/>
-                </a:solidFill>
-                <a:latin typeface="Times New Roman" pitchFamily="34" charset="0"/>
-                <a:ea typeface="Times New Roman" pitchFamily="34" charset="-122"/>
-                <a:cs typeface="Times New Roman" pitchFamily="34" charset="-120"/>
-              </a:rPr>
-              <a:t>Sea water above 26.5 °C supplies heat and moisture, rising air forms deep low pressure, and the Coriolis effect makes it spin.</a:t>
-            </a:r>
-            <a:endParaRPr lang="en-US" sz="3600" dirty="0"/>
-          </a:p>
-        </p:txBody>
-      </p:sp>
       <p:pic>
         <p:nvPicPr>
-          <p:cNvPr id="5" name="Image 0" descr="/home/claude/f4/img/v2/f4_hurricane.jpg">    </p:cNvPr>
+          <p:cNvPr id="3" name="Image 0" descr="/home/claude/f4/img/minesec_sheet.png">    </p:cNvPr>
           <p:cNvPicPr>
             <a:picLocks noChangeAspect="1"/>
           </p:cNvPicPr>
@@ -17759,8 +17852,8 @@
         </p:blipFill>
         <p:spPr>
           <a:xfrm>
-            <a:off x="5349240" y="2071212"/>
-            <a:ext cx="6659575" cy="3693983"/>
+            <a:off x="0" y="658368"/>
+            <a:ext cx="3840480" cy="5833872"/>
           </a:xfrm>
           <a:prstGeom prst="rect">
             <a:avLst/>
@@ -17769,14 +17862,14 @@
       </p:pic>
       <p:sp>
         <p:nvSpPr>
-          <p:cNvPr id="6" name="Text 3"/>
+          <p:cNvPr id="4" name="Text 1"/>
           <p:cNvSpPr/>
           <p:nvPr/>
         </p:nvSpPr>
         <p:spPr>
           <a:xfrm>
-            <a:off x="5349240" y="6089904"/>
-            <a:ext cx="6659575" cy="347472"/>
+            <a:off x="4069080" y="1005840"/>
+            <a:ext cx="7802575" cy="731520"/>
           </a:xfrm>
           <a:prstGeom prst="rect">
             <a:avLst/>
@@ -17785,24 +17878,85 @@
           <a:ln/>
         </p:spPr>
         <p:txBody>
-          <a:bodyPr wrap="square" lIns="0" tIns="0" rIns="0" bIns="0" rtlCol="0" anchor="ctr"/>
+          <a:bodyPr wrap="square" lIns="0" tIns="0" rIns="0" bIns="0" rtlCol="0" anchor="ctr">
+            <a:normAutofit/>
+          </a:bodyPr>
           <a:lstStyle/>
           <a:p>
             <a:pPr algn="ctr" indent="0" marL="0">
               <a:buNone/>
             </a:pPr>
             <a:r>
-              <a:rPr lang="en-US" sz="1600" i="1" dirty="0">
-                <a:solidFill>
-                  <a:srgbClr val="555555"/>
+              <a:rPr lang="en-US" sz="3600" b="1" dirty="0">
+                <a:solidFill>
+                  <a:srgbClr val="990011"/>
                 </a:solidFill>
                 <a:latin typeface="Times New Roman" pitchFamily="34" charset="0"/>
                 <a:ea typeface="Times New Roman" pitchFamily="34" charset="-122"/>
                 <a:cs typeface="Times New Roman" pitchFamily="34" charset="-120"/>
               </a:rPr>
-              <a:t>Illustration: a hurricane from space</a:t>
-            </a:r>
-            <a:endParaRPr lang="en-US" sz="1600" dirty="0"/>
+              <a:t>2. Tornadoes</a:t>
+            </a:r>
+            <a:endParaRPr lang="en-US" sz="3600" dirty="0"/>
+          </a:p>
+        </p:txBody>
+      </p:sp>
+      <p:sp>
+        <p:nvSpPr>
+          <p:cNvPr id="5" name="Text 2"/>
+          <p:cNvSpPr/>
+          <p:nvPr/>
+        </p:nvSpPr>
+        <p:spPr>
+          <a:xfrm>
+            <a:off x="4069080" y="1783080"/>
+            <a:ext cx="7802575" cy="4663440"/>
+          </a:xfrm>
+          <a:prstGeom prst="rect">
+            <a:avLst/>
+          </a:prstGeom>
+          <a:noFill/>
+          <a:ln/>
+        </p:spPr>
+        <p:txBody>
+          <a:bodyPr wrap="square" lIns="0" tIns="0" rIns="0" bIns="0" rtlCol="0" anchor="t"/>
+          <a:lstStyle/>
+          <a:p>
+            <a:pPr algn="l" indent="0" marL="0">
+              <a:spcAft>
+                <a:spcPts val="800"/>
+              </a:spcAft>
+              <a:buNone/>
+            </a:pPr>
+            <a:r>
+              <a:rPr lang="en-US" sz="4000" b="1" dirty="0">
+                <a:solidFill>
+                  <a:srgbClr val="111111"/>
+                </a:solidFill>
+                <a:latin typeface="Times New Roman" pitchFamily="34" charset="0"/>
+                <a:ea typeface="Times New Roman" pitchFamily="34" charset="-122"/>
+                <a:cs typeface="Times New Roman" pitchFamily="34" charset="-120"/>
+              </a:rPr>
+              <a:t>Consequences: </a:t>
+            </a:r>
+            <a:pPr algn="l" indent="0" marL="0">
+              <a:spcAft>
+                <a:spcPts val="800"/>
+              </a:spcAft>
+              <a:buNone/>
+            </a:pPr>
+            <a:r>
+              <a:rPr lang="en-US" sz="4000" dirty="0">
+                <a:solidFill>
+                  <a:srgbClr val="111111"/>
+                </a:solidFill>
+                <a:latin typeface="Times New Roman" pitchFamily="34" charset="0"/>
+                <a:ea typeface="Times New Roman" pitchFamily="34" charset="-122"/>
+                <a:cs typeface="Times New Roman" pitchFamily="34" charset="-120"/>
+              </a:rPr>
+              <a:t>Winds can exceed 400 km/h and turn debris into dangerous missiles that destroy houses and vehicles. The damage is very severe but limited to a narrow path, usually less than 1 to 2 km wide.</a:t>
+            </a:r>
+            <a:endParaRPr lang="en-US" sz="4000" dirty="0"/>
           </a:p>
         </p:txBody>
       </p:sp>
@@ -17918,9 +18072,129 @@
           </a:p>
         </p:txBody>
       </p:sp>
+      <p:sp>
+        <p:nvSpPr>
+          <p:cNvPr id="3" name="Text 1"/>
+          <p:cNvSpPr/>
+          <p:nvPr/>
+        </p:nvSpPr>
+        <p:spPr>
+          <a:xfrm>
+            <a:off x="365760" y="1005840"/>
+            <a:ext cx="11460175" cy="731520"/>
+          </a:xfrm>
+          <a:prstGeom prst="rect">
+            <a:avLst/>
+          </a:prstGeom>
+          <a:noFill/>
+          <a:ln/>
+        </p:spPr>
+        <p:txBody>
+          <a:bodyPr wrap="square" lIns="0" tIns="0" rIns="0" bIns="0" rtlCol="0" anchor="ctr">
+            <a:normAutofit/>
+          </a:bodyPr>
+          <a:lstStyle/>
+          <a:p>
+            <a:pPr algn="ctr" indent="0" marL="0">
+              <a:buNone/>
+            </a:pPr>
+            <a:r>
+              <a:rPr lang="en-US" sz="3600" b="1" dirty="0">
+                <a:solidFill>
+                  <a:srgbClr val="990011"/>
+                </a:solidFill>
+                <a:latin typeface="Times New Roman" pitchFamily="34" charset="0"/>
+                <a:ea typeface="Times New Roman" pitchFamily="34" charset="-122"/>
+                <a:cs typeface="Times New Roman" pitchFamily="34" charset="-120"/>
+              </a:rPr>
+              <a:t>3. Tropical Cyclones</a:t>
+            </a:r>
+            <a:endParaRPr lang="en-US" sz="3600" dirty="0"/>
+          </a:p>
+        </p:txBody>
+      </p:sp>
+      <p:sp>
+        <p:nvSpPr>
+          <p:cNvPr id="4" name="Text 2"/>
+          <p:cNvSpPr/>
+          <p:nvPr/>
+        </p:nvSpPr>
+        <p:spPr>
+          <a:xfrm>
+            <a:off x="365760" y="1783080"/>
+            <a:ext cx="6035040" cy="4617720"/>
+          </a:xfrm>
+          <a:prstGeom prst="rect">
+            <a:avLst/>
+          </a:prstGeom>
+          <a:noFill/>
+          <a:ln/>
+        </p:spPr>
+        <p:txBody>
+          <a:bodyPr wrap="square" lIns="0" tIns="0" rIns="0" bIns="0" rtlCol="0" anchor="t"/>
+          <a:lstStyle/>
+          <a:p>
+            <a:pPr algn="l" indent="0" marL="0">
+              <a:spcAft>
+                <a:spcPts val="800"/>
+              </a:spcAft>
+              <a:buNone/>
+            </a:pPr>
+            <a:r>
+              <a:rPr lang="en-US" sz="2800" i="1" dirty="0">
+                <a:solidFill>
+                  <a:srgbClr val="111111"/>
+                </a:solidFill>
+                <a:latin typeface="Times New Roman" pitchFamily="34" charset="0"/>
+                <a:ea typeface="Times New Roman" pitchFamily="34" charset="-122"/>
+                <a:cs typeface="Times New Roman" pitchFamily="34" charset="-120"/>
+              </a:rPr>
+              <a:t>Tropical cyclones are explained as follows:</a:t>
+            </a:r>
+            <a:endParaRPr lang="en-US" sz="2800" dirty="0"/>
+          </a:p>
+          <a:p>
+            <a:pPr algn="l" indent="0" marL="0">
+              <a:spcAft>
+                <a:spcPts val="800"/>
+              </a:spcAft>
+              <a:buNone/>
+            </a:pPr>
+            <a:r>
+              <a:rPr lang="en-US" sz="2800" b="1" dirty="0">
+                <a:solidFill>
+                  <a:srgbClr val="111111"/>
+                </a:solidFill>
+                <a:latin typeface="Times New Roman" pitchFamily="34" charset="0"/>
+                <a:ea typeface="Times New Roman" pitchFamily="34" charset="-122"/>
+                <a:cs typeface="Times New Roman" pitchFamily="34" charset="-120"/>
+              </a:rPr>
+              <a:t>Meaning: </a:t>
+            </a:r>
+            <a:pPr algn="l" indent="0" marL="0">
+              <a:spcAft>
+                <a:spcPts val="800"/>
+              </a:spcAft>
+              <a:buNone/>
+            </a:pPr>
+            <a:r>
+              <a:rPr lang="en-US" sz="2800" dirty="0">
+                <a:solidFill>
+                  <a:srgbClr val="111111"/>
+                </a:solidFill>
+                <a:latin typeface="Times New Roman" pitchFamily="34" charset="0"/>
+                <a:ea typeface="Times New Roman" pitchFamily="34" charset="-122"/>
+                <a:cs typeface="Times New Roman" pitchFamily="34" charset="-120"/>
+              </a:rPr>
+              <a:t>A tropical cyclone is a huge rotating storm, 500 to 1,000 km wide, around a calm centre called the eye, with winds above 119 km/h. It is called a hurricane in the Atlantic, a typhoon in the north-west Pacific and a cyclone in the Indian Ocean.</a:t>
+            </a:r>
+            <a:endParaRPr lang="en-US" sz="2800" dirty="0"/>
+          </a:p>
+        </p:txBody>
+      </p:sp>
       <p:pic>
         <p:nvPicPr>
-          <p:cNvPr id="3" name="Image 0" descr="/home/claude/f4/img/minesec_sheet.png">    </p:cNvPr>
+          <p:cNvPr id="5" name="Image 0" descr="/home/claude/f4/img/v2/cyclone_big.png">    </p:cNvPr>
           <p:cNvPicPr>
             <a:picLocks noChangeAspect="1"/>
           </p:cNvPicPr>
@@ -17934,8 +18208,8 @@
         </p:blipFill>
         <p:spPr>
           <a:xfrm>
-            <a:off x="0" y="658368"/>
-            <a:ext cx="2468880" cy="5833872"/>
+            <a:off x="6537960" y="2849678"/>
+            <a:ext cx="5470855" cy="2137053"/>
           </a:xfrm>
           <a:prstGeom prst="rect">
             <a:avLst/>
@@ -17944,14 +18218,14 @@
       </p:pic>
       <p:sp>
         <p:nvSpPr>
-          <p:cNvPr id="4" name="Text 1"/>
+          <p:cNvPr id="6" name="Text 3"/>
           <p:cNvSpPr/>
           <p:nvPr/>
         </p:nvSpPr>
         <p:spPr>
           <a:xfrm>
-            <a:off x="2697480" y="1005840"/>
-            <a:ext cx="9174175" cy="731520"/>
+            <a:off x="6537960" y="6089904"/>
+            <a:ext cx="5470855" cy="347472"/>
           </a:xfrm>
           <a:prstGeom prst="rect">
             <a:avLst/>
@@ -17960,131 +18234,24 @@
           <a:ln/>
         </p:spPr>
         <p:txBody>
-          <a:bodyPr wrap="square" lIns="0" tIns="0" rIns="0" bIns="0" rtlCol="0" anchor="ctr">
-            <a:normAutofit/>
-          </a:bodyPr>
+          <a:bodyPr wrap="square" lIns="0" tIns="0" rIns="0" bIns="0" rtlCol="0" anchor="ctr"/>
           <a:lstStyle/>
           <a:p>
             <a:pPr algn="ctr" indent="0" marL="0">
               <a:buNone/>
             </a:pPr>
             <a:r>
-              <a:rPr lang="en-US" sz="3600" b="1" dirty="0">
-                <a:solidFill>
-                  <a:srgbClr val="990011"/>
+              <a:rPr lang="en-US" sz="1600" i="1" dirty="0">
+                <a:solidFill>
+                  <a:srgbClr val="555555"/>
                 </a:solidFill>
                 <a:latin typeface="Times New Roman" pitchFamily="34" charset="0"/>
                 <a:ea typeface="Times New Roman" pitchFamily="34" charset="-122"/>
                 <a:cs typeface="Times New Roman" pitchFamily="34" charset="-120"/>
               </a:rPr>
-              <a:t>3. Tropical Cyclones</a:t>
-            </a:r>
-            <a:endParaRPr lang="en-US" sz="3600" dirty="0"/>
-          </a:p>
-        </p:txBody>
-      </p:sp>
-      <p:sp>
-        <p:nvSpPr>
-          <p:cNvPr id="5" name="Text 2"/>
-          <p:cNvSpPr/>
-          <p:nvPr/>
-        </p:nvSpPr>
-        <p:spPr>
-          <a:xfrm>
-            <a:off x="2697480" y="1783080"/>
-            <a:ext cx="9174175" cy="4663440"/>
-          </a:xfrm>
-          <a:prstGeom prst="rect">
-            <a:avLst/>
-          </a:prstGeom>
-          <a:noFill/>
-          <a:ln/>
-        </p:spPr>
-        <p:txBody>
-          <a:bodyPr wrap="square" lIns="0" tIns="0" rIns="0" bIns="0" rtlCol="0" anchor="t"/>
-          <a:lstStyle/>
-          <a:p>
-            <a:pPr algn="l" indent="0" marL="0">
-              <a:spcAft>
-                <a:spcPts val="800"/>
-              </a:spcAft>
-              <a:buNone/>
-            </a:pPr>
-            <a:r>
-              <a:rPr lang="en-US" sz="4000" b="1" dirty="0">
-                <a:solidFill>
-                  <a:srgbClr val="111111"/>
-                </a:solidFill>
-                <a:latin typeface="Times New Roman" pitchFamily="34" charset="0"/>
-                <a:ea typeface="Times New Roman" pitchFamily="34" charset="-122"/>
-                <a:cs typeface="Times New Roman" pitchFamily="34" charset="-120"/>
-              </a:rPr>
-              <a:t>Consequences:</a:t>
-            </a:r>
-            <a:endParaRPr lang="en-US" sz="4000" dirty="0"/>
-          </a:p>
-          <a:p>
-            <a:pPr algn="l" marL="342900" indent="-342900">
-              <a:spcAft>
-                <a:spcPts val="800"/>
-              </a:spcAft>
-              <a:buSzPct val="100000"/>
-              <a:buChar char="•"/>
-            </a:pPr>
-            <a:r>
-              <a:rPr lang="en-US" sz="4000" dirty="0">
-                <a:solidFill>
-                  <a:srgbClr val="111111"/>
-                </a:solidFill>
-                <a:latin typeface="Times New Roman" pitchFamily="34" charset="0"/>
-                <a:ea typeface="Times New Roman" pitchFamily="34" charset="-122"/>
-                <a:cs typeface="Times New Roman" pitchFamily="34" charset="-120"/>
-              </a:rPr>
-              <a:t>Violent winds over hundreds of kilometres.</a:t>
-            </a:r>
-            <a:endParaRPr lang="en-US" sz="4000" dirty="0"/>
-          </a:p>
-          <a:p>
-            <a:pPr algn="l" marL="342900" indent="-342900">
-              <a:spcAft>
-                <a:spcPts val="800"/>
-              </a:spcAft>
-              <a:buSzPct val="100000"/>
-              <a:buChar char="•"/>
-            </a:pPr>
-            <a:r>
-              <a:rPr lang="en-US" sz="4000" dirty="0">
-                <a:solidFill>
-                  <a:srgbClr val="111111"/>
-                </a:solidFill>
-                <a:latin typeface="Times New Roman" pitchFamily="34" charset="0"/>
-                <a:ea typeface="Times New Roman" pitchFamily="34" charset="-122"/>
-                <a:cs typeface="Times New Roman" pitchFamily="34" charset="-120"/>
-              </a:rPr>
-              <a:t>Storm surges that flood coasts and cause most deaths.</a:t>
-            </a:r>
-            <a:endParaRPr lang="en-US" sz="4000" dirty="0"/>
-          </a:p>
-          <a:p>
-            <a:pPr algn="l" marL="342900" indent="-342900">
-              <a:spcAft>
-                <a:spcPts val="800"/>
-              </a:spcAft>
-              <a:buSzPct val="100000"/>
-              <a:buChar char="•"/>
-            </a:pPr>
-            <a:r>
-              <a:rPr lang="en-US" sz="4000" dirty="0">
-                <a:solidFill>
-                  <a:srgbClr val="111111"/>
-                </a:solidFill>
-                <a:latin typeface="Times New Roman" pitchFamily="34" charset="0"/>
-                <a:ea typeface="Times New Roman" pitchFamily="34" charset="-122"/>
-                <a:cs typeface="Times New Roman" pitchFamily="34" charset="-120"/>
-              </a:rPr>
-              <a:t>Days of torrential rain and floods.</a:t>
-            </a:r>
-            <a:endParaRPr lang="en-US" sz="4000" dirty="0"/>
+              <a:t>Illustration: a tropical cyclone</a:t>
+            </a:r>
+            <a:endParaRPr lang="en-US" sz="1600" dirty="0"/>
           </a:p>
         </p:txBody>
       </p:sp>
@@ -18200,129 +18367,9 @@
           </a:p>
         </p:txBody>
       </p:sp>
-      <p:sp>
-        <p:nvSpPr>
-          <p:cNvPr id="3" name="Text 1"/>
-          <p:cNvSpPr/>
-          <p:nvPr/>
-        </p:nvSpPr>
-        <p:spPr>
-          <a:xfrm>
-            <a:off x="365760" y="1005840"/>
-            <a:ext cx="11460175" cy="731520"/>
-          </a:xfrm>
-          <a:prstGeom prst="rect">
-            <a:avLst/>
-          </a:prstGeom>
-          <a:noFill/>
-          <a:ln/>
-        </p:spPr>
-        <p:txBody>
-          <a:bodyPr wrap="square" lIns="0" tIns="0" rIns="0" bIns="0" rtlCol="0" anchor="ctr">
-            <a:normAutofit/>
-          </a:bodyPr>
-          <a:lstStyle/>
-          <a:p>
-            <a:pPr algn="ctr" indent="0" marL="0">
-              <a:buNone/>
-            </a:pPr>
-            <a:r>
-              <a:rPr lang="en-US" sz="3600" b="1" dirty="0">
-                <a:solidFill>
-                  <a:srgbClr val="990011"/>
-                </a:solidFill>
-                <a:latin typeface="Times New Roman" pitchFamily="34" charset="0"/>
-                <a:ea typeface="Times New Roman" pitchFamily="34" charset="-122"/>
-                <a:cs typeface="Times New Roman" pitchFamily="34" charset="-120"/>
-              </a:rPr>
-              <a:t>4. Hazards and Control Measures</a:t>
-            </a:r>
-            <a:endParaRPr lang="en-US" sz="3600" dirty="0"/>
-          </a:p>
-        </p:txBody>
-      </p:sp>
-      <p:sp>
-        <p:nvSpPr>
-          <p:cNvPr id="4" name="Text 2"/>
-          <p:cNvSpPr/>
-          <p:nvPr/>
-        </p:nvSpPr>
-        <p:spPr>
-          <a:xfrm>
-            <a:off x="365760" y="1783080"/>
-            <a:ext cx="4846320" cy="4617720"/>
-          </a:xfrm>
-          <a:prstGeom prst="rect">
-            <a:avLst/>
-          </a:prstGeom>
-          <a:noFill/>
-          <a:ln/>
-        </p:spPr>
-        <p:txBody>
-          <a:bodyPr wrap="square" lIns="0" tIns="0" rIns="0" bIns="0" rtlCol="0" anchor="t"/>
-          <a:lstStyle/>
-          <a:p>
-            <a:pPr algn="l" indent="0" marL="0">
-              <a:spcAft>
-                <a:spcPts val="800"/>
-              </a:spcAft>
-              <a:buNone/>
-            </a:pPr>
-            <a:r>
-              <a:rPr lang="en-US" sz="3600" i="1" dirty="0">
-                <a:solidFill>
-                  <a:srgbClr val="111111"/>
-                </a:solidFill>
-                <a:latin typeface="Times New Roman" pitchFamily="34" charset="0"/>
-                <a:ea typeface="Times New Roman" pitchFamily="34" charset="-122"/>
-                <a:cs typeface="Times New Roman" pitchFamily="34" charset="-120"/>
-              </a:rPr>
-              <a:t>The hazards of storms are reduced by the following measures:</a:t>
-            </a:r>
-            <a:endParaRPr lang="en-US" sz="3600" dirty="0"/>
-          </a:p>
-          <a:p>
-            <a:pPr algn="l" indent="0" marL="0">
-              <a:spcAft>
-                <a:spcPts val="800"/>
-              </a:spcAft>
-              <a:buNone/>
-            </a:pPr>
-            <a:r>
-              <a:rPr lang="en-US" sz="3600" b="1" dirty="0">
-                <a:solidFill>
-                  <a:srgbClr val="111111"/>
-                </a:solidFill>
-                <a:latin typeface="Times New Roman" pitchFamily="34" charset="0"/>
-                <a:ea typeface="Times New Roman" pitchFamily="34" charset="-122"/>
-                <a:cs typeface="Times New Roman" pitchFamily="34" charset="-120"/>
-              </a:rPr>
-              <a:t>Early warning: </a:t>
-            </a:r>
-            <a:pPr algn="l" indent="0" marL="0">
-              <a:spcAft>
-                <a:spcPts val="800"/>
-              </a:spcAft>
-              <a:buNone/>
-            </a:pPr>
-            <a:r>
-              <a:rPr lang="en-US" sz="3600" dirty="0">
-                <a:solidFill>
-                  <a:srgbClr val="111111"/>
-                </a:solidFill>
-                <a:latin typeface="Times New Roman" pitchFamily="34" charset="0"/>
-                <a:ea typeface="Times New Roman" pitchFamily="34" charset="-122"/>
-                <a:cs typeface="Times New Roman" pitchFamily="34" charset="-120"/>
-              </a:rPr>
-              <a:t>Radars, satellites and weather services give alerts by radio and telephone.</a:t>
-            </a:r>
-            <a:endParaRPr lang="en-US" sz="3600" dirty="0"/>
-          </a:p>
-        </p:txBody>
-      </p:sp>
       <p:pic>
         <p:nvPicPr>
-          <p:cNvPr id="5" name="Image 0" descr="/home/claude/f4/img/v2/clim2_storm_measures.png">    </p:cNvPr>
+          <p:cNvPr id="3" name="Image 0" descr="/home/claude/f4/img/minesec_sheet.png">    </p:cNvPr>
           <p:cNvPicPr>
             <a:picLocks noChangeAspect="1"/>
           </p:cNvPicPr>
@@ -18336,8 +18383,8 @@
         </p:blipFill>
         <p:spPr>
           <a:xfrm>
-            <a:off x="5349240" y="2617506"/>
-            <a:ext cx="6659575" cy="2601397"/>
+            <a:off x="0" y="658368"/>
+            <a:ext cx="3840480" cy="5833872"/>
           </a:xfrm>
           <a:prstGeom prst="rect">
             <a:avLst/>
@@ -18346,14 +18393,14 @@
       </p:pic>
       <p:sp>
         <p:nvSpPr>
-          <p:cNvPr id="6" name="Text 3"/>
+          <p:cNvPr id="4" name="Text 1"/>
           <p:cNvSpPr/>
           <p:nvPr/>
         </p:nvSpPr>
         <p:spPr>
           <a:xfrm>
-            <a:off x="5349240" y="6089904"/>
-            <a:ext cx="6659575" cy="347472"/>
+            <a:off x="4069080" y="1005840"/>
+            <a:ext cx="7802575" cy="731520"/>
           </a:xfrm>
           <a:prstGeom prst="rect">
             <a:avLst/>
@@ -18362,24 +18409,85 @@
           <a:ln/>
         </p:spPr>
         <p:txBody>
-          <a:bodyPr wrap="square" lIns="0" tIns="0" rIns="0" bIns="0" rtlCol="0" anchor="ctr"/>
+          <a:bodyPr wrap="square" lIns="0" tIns="0" rIns="0" bIns="0" rtlCol="0" anchor="ctr">
+            <a:normAutofit/>
+          </a:bodyPr>
           <a:lstStyle/>
           <a:p>
             <a:pPr algn="ctr" indent="0" marL="0">
               <a:buNone/>
             </a:pPr>
             <a:r>
-              <a:rPr lang="en-US" sz="1600" i="1" dirty="0">
-                <a:solidFill>
-                  <a:srgbClr val="555555"/>
+              <a:rPr lang="en-US" sz="3600" b="1" dirty="0">
+                <a:solidFill>
+                  <a:srgbClr val="990011"/>
                 </a:solidFill>
                 <a:latin typeface="Times New Roman" pitchFamily="34" charset="0"/>
                 <a:ea typeface="Times New Roman" pitchFamily="34" charset="-122"/>
                 <a:cs typeface="Times New Roman" pitchFamily="34" charset="-120"/>
               </a:rPr>
-              <a:t>Illustration: reducing storm hazards</a:t>
-            </a:r>
-            <a:endParaRPr lang="en-US" sz="1600" dirty="0"/>
+              <a:t>3. Tropical Cyclones</a:t>
+            </a:r>
+            <a:endParaRPr lang="en-US" sz="3600" dirty="0"/>
+          </a:p>
+        </p:txBody>
+      </p:sp>
+      <p:sp>
+        <p:nvSpPr>
+          <p:cNvPr id="5" name="Text 2"/>
+          <p:cNvSpPr/>
+          <p:nvPr/>
+        </p:nvSpPr>
+        <p:spPr>
+          <a:xfrm>
+            <a:off x="4069080" y="1783080"/>
+            <a:ext cx="7802575" cy="4663440"/>
+          </a:xfrm>
+          <a:prstGeom prst="rect">
+            <a:avLst/>
+          </a:prstGeom>
+          <a:noFill/>
+          <a:ln/>
+        </p:spPr>
+        <p:txBody>
+          <a:bodyPr wrap="square" lIns="0" tIns="0" rIns="0" bIns="0" rtlCol="0" anchor="t"/>
+          <a:lstStyle/>
+          <a:p>
+            <a:pPr algn="l" indent="0" marL="0">
+              <a:spcAft>
+                <a:spcPts val="800"/>
+              </a:spcAft>
+              <a:buNone/>
+            </a:pPr>
+            <a:r>
+              <a:rPr lang="en-US" sz="4000" b="1" dirty="0">
+                <a:solidFill>
+                  <a:srgbClr val="111111"/>
+                </a:solidFill>
+                <a:latin typeface="Times New Roman" pitchFamily="34" charset="0"/>
+                <a:ea typeface="Times New Roman" pitchFamily="34" charset="-122"/>
+                <a:cs typeface="Times New Roman" pitchFamily="34" charset="-120"/>
+              </a:rPr>
+              <a:t>Distribution: </a:t>
+            </a:r>
+            <a:pPr algn="l" indent="0" marL="0">
+              <a:spcAft>
+                <a:spcPts val="800"/>
+              </a:spcAft>
+              <a:buNone/>
+            </a:pPr>
+            <a:r>
+              <a:rPr lang="en-US" sz="4000" dirty="0">
+                <a:solidFill>
+                  <a:srgbClr val="111111"/>
+                </a:solidFill>
+                <a:latin typeface="Times New Roman" pitchFamily="34" charset="0"/>
+                <a:ea typeface="Times New Roman" pitchFamily="34" charset="-122"/>
+                <a:cs typeface="Times New Roman" pitchFamily="34" charset="-120"/>
+              </a:rPr>
+              <a:t>Tropical cyclones form over warm oceans between about 5° and 20° N and S, and then move westwards and towards the poles. They are almost absent from the South Atlantic, so the coast of Cameroon is rarely affected.</a:t>
+            </a:r>
+            <a:endParaRPr lang="en-US" sz="4000" dirty="0"/>
           </a:p>
         </p:txBody>
       </p:sp>
@@ -18495,9 +18603,109 @@
           </a:p>
         </p:txBody>
       </p:sp>
+      <p:sp>
+        <p:nvSpPr>
+          <p:cNvPr id="3" name="Text 1"/>
+          <p:cNvSpPr/>
+          <p:nvPr/>
+        </p:nvSpPr>
+        <p:spPr>
+          <a:xfrm>
+            <a:off x="365760" y="1005840"/>
+            <a:ext cx="11460175" cy="731520"/>
+          </a:xfrm>
+          <a:prstGeom prst="rect">
+            <a:avLst/>
+          </a:prstGeom>
+          <a:noFill/>
+          <a:ln/>
+        </p:spPr>
+        <p:txBody>
+          <a:bodyPr wrap="square" lIns="0" tIns="0" rIns="0" bIns="0" rtlCol="0" anchor="ctr">
+            <a:normAutofit/>
+          </a:bodyPr>
+          <a:lstStyle/>
+          <a:p>
+            <a:pPr algn="ctr" indent="0" marL="0">
+              <a:buNone/>
+            </a:pPr>
+            <a:r>
+              <a:rPr lang="en-US" sz="3600" b="1" dirty="0">
+                <a:solidFill>
+                  <a:srgbClr val="990011"/>
+                </a:solidFill>
+                <a:latin typeface="Times New Roman" pitchFamily="34" charset="0"/>
+                <a:ea typeface="Times New Roman" pitchFamily="34" charset="-122"/>
+                <a:cs typeface="Times New Roman" pitchFamily="34" charset="-120"/>
+              </a:rPr>
+              <a:t>3. Tropical Cyclones</a:t>
+            </a:r>
+            <a:endParaRPr lang="en-US" sz="3600" dirty="0"/>
+          </a:p>
+        </p:txBody>
+      </p:sp>
+      <p:sp>
+        <p:nvSpPr>
+          <p:cNvPr id="4" name="Text 2"/>
+          <p:cNvSpPr/>
+          <p:nvPr/>
+        </p:nvSpPr>
+        <p:spPr>
+          <a:xfrm>
+            <a:off x="365760" y="1783080"/>
+            <a:ext cx="6035040" cy="4617720"/>
+          </a:xfrm>
+          <a:prstGeom prst="rect">
+            <a:avLst/>
+          </a:prstGeom>
+          <a:noFill/>
+          <a:ln/>
+        </p:spPr>
+        <p:txBody>
+          <a:bodyPr wrap="square" lIns="0" tIns="0" rIns="0" bIns="0" rtlCol="0" anchor="t"/>
+          <a:lstStyle/>
+          <a:p>
+            <a:pPr algn="l" indent="0" marL="0">
+              <a:spcAft>
+                <a:spcPts val="800"/>
+              </a:spcAft>
+              <a:buNone/>
+            </a:pPr>
+            <a:r>
+              <a:rPr lang="en-US" sz="3200" b="1" dirty="0">
+                <a:solidFill>
+                  <a:srgbClr val="111111"/>
+                </a:solidFill>
+                <a:latin typeface="Times New Roman" pitchFamily="34" charset="0"/>
+                <a:ea typeface="Times New Roman" pitchFamily="34" charset="-122"/>
+                <a:cs typeface="Times New Roman" pitchFamily="34" charset="-120"/>
+              </a:rPr>
+              <a:t>Causes: </a:t>
+            </a:r>
+            <a:pPr algn="l" indent="0" marL="0">
+              <a:spcAft>
+                <a:spcPts val="800"/>
+              </a:spcAft>
+              <a:buNone/>
+            </a:pPr>
+            <a:r>
+              <a:rPr lang="en-US" sz="3200" dirty="0">
+                <a:solidFill>
+                  <a:srgbClr val="111111"/>
+                </a:solidFill>
+                <a:latin typeface="Times New Roman" pitchFamily="34" charset="0"/>
+                <a:ea typeface="Times New Roman" pitchFamily="34" charset="-122"/>
+                <a:cs typeface="Times New Roman" pitchFamily="34" charset="-120"/>
+              </a:rPr>
+              <a:t>Sea water warmer than 26.5 °C supplies heat and moisture, and the rising air forms a deep low pressure. The Coriolis effect, which is absent at the Equator, makes the air spin, and the latent heat released in the clouds feeds the storm.</a:t>
+            </a:r>
+            <a:endParaRPr lang="en-US" sz="3200" dirty="0"/>
+          </a:p>
+        </p:txBody>
+      </p:sp>
       <p:pic>
         <p:nvPicPr>
-          <p:cNvPr id="3" name="Image 0" descr="/home/claude/f4/img/minesec_sheet.png">    </p:cNvPr>
+          <p:cNvPr id="5" name="Image 0" descr="/home/claude/f4/img/v2/f4_hurricane.jpg">    </p:cNvPr>
           <p:cNvPicPr>
             <a:picLocks noChangeAspect="1"/>
           </p:cNvPicPr>
@@ -18511,8 +18719,8 @@
         </p:blipFill>
         <p:spPr>
           <a:xfrm>
-            <a:off x="0" y="658368"/>
-            <a:ext cx="2468880" cy="5833872"/>
+            <a:off x="6537960" y="2400897"/>
+            <a:ext cx="5470855" cy="3034615"/>
           </a:xfrm>
           <a:prstGeom prst="rect">
             <a:avLst/>
@@ -18521,14 +18729,14 @@
       </p:pic>
       <p:sp>
         <p:nvSpPr>
-          <p:cNvPr id="4" name="Text 1"/>
+          <p:cNvPr id="6" name="Text 3"/>
           <p:cNvSpPr/>
           <p:nvPr/>
         </p:nvSpPr>
         <p:spPr>
           <a:xfrm>
-            <a:off x="2697480" y="1005840"/>
-            <a:ext cx="9174175" cy="731520"/>
+            <a:off x="6537960" y="6089904"/>
+            <a:ext cx="5470855" cy="347472"/>
           </a:xfrm>
           <a:prstGeom prst="rect">
             <a:avLst/>
@@ -18537,122 +18745,24 @@
           <a:ln/>
         </p:spPr>
         <p:txBody>
-          <a:bodyPr wrap="square" lIns="0" tIns="0" rIns="0" bIns="0" rtlCol="0" anchor="ctr">
-            <a:normAutofit/>
-          </a:bodyPr>
+          <a:bodyPr wrap="square" lIns="0" tIns="0" rIns="0" bIns="0" rtlCol="0" anchor="ctr"/>
           <a:lstStyle/>
           <a:p>
             <a:pPr algn="ctr" indent="0" marL="0">
               <a:buNone/>
             </a:pPr>
             <a:r>
-              <a:rPr lang="en-US" sz="3600" b="1" dirty="0">
-                <a:solidFill>
-                  <a:srgbClr val="990011"/>
+              <a:rPr lang="en-US" sz="1600" i="1" dirty="0">
+                <a:solidFill>
+                  <a:srgbClr val="555555"/>
                 </a:solidFill>
                 <a:latin typeface="Times New Roman" pitchFamily="34" charset="0"/>
                 <a:ea typeface="Times New Roman" pitchFamily="34" charset="-122"/>
                 <a:cs typeface="Times New Roman" pitchFamily="34" charset="-120"/>
               </a:rPr>
-              <a:t>4. Hazards and Control Measures</a:t>
-            </a:r>
-            <a:endParaRPr lang="en-US" sz="3600" dirty="0"/>
-          </a:p>
-        </p:txBody>
-      </p:sp>
-      <p:sp>
-        <p:nvSpPr>
-          <p:cNvPr id="5" name="Text 2"/>
-          <p:cNvSpPr/>
-          <p:nvPr/>
-        </p:nvSpPr>
-        <p:spPr>
-          <a:xfrm>
-            <a:off x="2697480" y="1783080"/>
-            <a:ext cx="9174175" cy="4663440"/>
-          </a:xfrm>
-          <a:prstGeom prst="rect">
-            <a:avLst/>
-          </a:prstGeom>
-          <a:noFill/>
-          <a:ln/>
-        </p:spPr>
-        <p:txBody>
-          <a:bodyPr wrap="square" lIns="0" tIns="0" rIns="0" bIns="0" rtlCol="0" anchor="t"/>
-          <a:lstStyle/>
-          <a:p>
-            <a:pPr algn="l" indent="0" marL="0">
-              <a:spcAft>
-                <a:spcPts val="800"/>
-              </a:spcAft>
-              <a:buNone/>
-            </a:pPr>
-            <a:r>
-              <a:rPr lang="en-US" sz="4000" b="1" dirty="0">
-                <a:solidFill>
-                  <a:srgbClr val="111111"/>
-                </a:solidFill>
-                <a:latin typeface="Times New Roman" pitchFamily="34" charset="0"/>
-                <a:ea typeface="Times New Roman" pitchFamily="34" charset="-122"/>
-                <a:cs typeface="Times New Roman" pitchFamily="34" charset="-120"/>
-              </a:rPr>
-              <a:t>Public education: </a:t>
-            </a:r>
-            <a:pPr algn="l" indent="0" marL="0">
-              <a:spcAft>
-                <a:spcPts val="800"/>
-              </a:spcAft>
-              <a:buNone/>
-            </a:pPr>
-            <a:r>
-              <a:rPr lang="en-US" sz="4000" dirty="0">
-                <a:solidFill>
-                  <a:srgbClr val="111111"/>
-                </a:solidFill>
-                <a:latin typeface="Times New Roman" pitchFamily="34" charset="0"/>
-                <a:ea typeface="Times New Roman" pitchFamily="34" charset="-122"/>
-                <a:cs typeface="Times New Roman" pitchFamily="34" charset="-120"/>
-              </a:rPr>
-              <a:t>People learn to shelter indoors and to avoid trees, water and metal during storms.</a:t>
-            </a:r>
-            <a:endParaRPr lang="en-US" sz="4000" dirty="0"/>
-          </a:p>
-          <a:p>
-            <a:pPr algn="l" indent="0" marL="0">
-              <a:spcAft>
-                <a:spcPts val="800"/>
-              </a:spcAft>
-              <a:buNone/>
-            </a:pPr>
-            <a:r>
-              <a:rPr lang="en-US" sz="4000" b="1" dirty="0">
-                <a:solidFill>
-                  <a:srgbClr val="111111"/>
-                </a:solidFill>
-                <a:latin typeface="Times New Roman" pitchFamily="34" charset="0"/>
-                <a:ea typeface="Times New Roman" pitchFamily="34" charset="-122"/>
-                <a:cs typeface="Times New Roman" pitchFamily="34" charset="-120"/>
-              </a:rPr>
-              <a:t>Protection of buildings: </a:t>
-            </a:r>
-            <a:pPr algn="l" indent="0" marL="0">
-              <a:spcAft>
-                <a:spcPts val="800"/>
-              </a:spcAft>
-              <a:buNone/>
-            </a:pPr>
-            <a:r>
-              <a:rPr lang="en-US" sz="4000" dirty="0">
-                <a:solidFill>
-                  <a:srgbClr val="111111"/>
-                </a:solidFill>
-                <a:latin typeface="Times New Roman" pitchFamily="34" charset="0"/>
-                <a:ea typeface="Times New Roman" pitchFamily="34" charset="-122"/>
-                <a:cs typeface="Times New Roman" pitchFamily="34" charset="-120"/>
-              </a:rPr>
-              <a:t>Lightning rods, strong roofs, wind-resistant building codes and good drains reduce damage.</a:t>
-            </a:r>
-            <a:endParaRPr lang="en-US" sz="4000" dirty="0"/>
+              <a:t>Illustration: a hurricane seen from space</a:t>
+            </a:r>
+            <a:endParaRPr lang="en-US" sz="1600" dirty="0"/>
           </a:p>
         </p:txBody>
       </p:sp>
@@ -19004,7 +19114,7 @@
         <p:spPr>
           <a:xfrm>
             <a:off x="0" y="658368"/>
-            <a:ext cx="5120640" cy="5833872"/>
+            <a:ext cx="3840480" cy="5833872"/>
           </a:xfrm>
           <a:prstGeom prst="rect">
             <a:avLst/>
@@ -19019,8 +19129,8 @@
         </p:nvSpPr>
         <p:spPr>
           <a:xfrm>
-            <a:off x="5349240" y="1005840"/>
-            <a:ext cx="6522415" cy="731520"/>
+            <a:off x="4069080" y="1005840"/>
+            <a:ext cx="7802575" cy="731520"/>
           </a:xfrm>
           <a:prstGeom prst="rect">
             <a:avLst/>
@@ -19046,7 +19156,7 @@
                 <a:ea typeface="Times New Roman" pitchFamily="34" charset="-122"/>
                 <a:cs typeface="Times New Roman" pitchFamily="34" charset="-120"/>
               </a:rPr>
-              <a:t>4. Hazards and Control Measures (continued)</a:t>
+              <a:t>3. Tropical Cyclones</a:t>
             </a:r>
             <a:endParaRPr lang="en-US" sz="3600" dirty="0"/>
           </a:p>
@@ -19060,8 +19170,8 @@
         </p:nvSpPr>
         <p:spPr>
           <a:xfrm>
-            <a:off x="5349240" y="1783080"/>
-            <a:ext cx="6522415" cy="4663440"/>
+            <a:off x="4069080" y="1783080"/>
+            <a:ext cx="7802575" cy="4663440"/>
           </a:xfrm>
           <a:prstGeom prst="rect">
             <a:avLst/>
@@ -19088,7 +19198,7 @@
                 <a:ea typeface="Times New Roman" pitchFamily="34" charset="-122"/>
                 <a:cs typeface="Times New Roman" pitchFamily="34" charset="-120"/>
               </a:rPr>
-              <a:t>Emergency preparedness: </a:t>
+              <a:t>Consequences: </a:t>
             </a:r>
             <a:pPr algn="l" indent="0" marL="0">
               <a:spcAft>
@@ -19105,7 +19215,7 @@
                 <a:ea typeface="Times New Roman" pitchFamily="34" charset="-122"/>
                 <a:cs typeface="Times New Roman" pitchFamily="34" charset="-120"/>
               </a:rPr>
-              <a:t>Shelters, drills and rescue services save lives.</a:t>
+              <a:t>Violent winds destroy buildings, crops and power lines over hundreds of kilometres. Storm surges flood the coasts and cause most of the deaths, and days of torrential rain cause floods and landslides.</a:t>
             </a:r>
             <a:endParaRPr lang="en-US" sz="4000" dirty="0"/>
           </a:p>
@@ -19217,15 +19327,135 @@
                 <a:ea typeface="Calibri" pitchFamily="34" charset="-122"/>
                 <a:cs typeface="Calibri" pitchFamily="34" charset="-120"/>
               </a:rPr>
-              <a:t>FORMATIVE EVALUATION</a:t>
+              <a:t>BOARD SUMMARY</a:t>
             </a:r>
             <a:endParaRPr lang="en-US" sz="1400" dirty="0"/>
+          </a:p>
+        </p:txBody>
+      </p:sp>
+      <p:sp>
+        <p:nvSpPr>
+          <p:cNvPr id="3" name="Text 1"/>
+          <p:cNvSpPr/>
+          <p:nvPr/>
+        </p:nvSpPr>
+        <p:spPr>
+          <a:xfrm>
+            <a:off x="365760" y="1005840"/>
+            <a:ext cx="11460175" cy="731520"/>
+          </a:xfrm>
+          <a:prstGeom prst="rect">
+            <a:avLst/>
+          </a:prstGeom>
+          <a:noFill/>
+          <a:ln/>
+        </p:spPr>
+        <p:txBody>
+          <a:bodyPr wrap="square" lIns="0" tIns="0" rIns="0" bIns="0" rtlCol="0" anchor="ctr">
+            <a:normAutofit/>
+          </a:bodyPr>
+          <a:lstStyle/>
+          <a:p>
+            <a:pPr algn="ctr" indent="0" marL="0">
+              <a:buNone/>
+            </a:pPr>
+            <a:r>
+              <a:rPr lang="en-US" sz="3600" b="1" dirty="0">
+                <a:solidFill>
+                  <a:srgbClr val="990011"/>
+                </a:solidFill>
+                <a:latin typeface="Times New Roman" pitchFamily="34" charset="0"/>
+                <a:ea typeface="Times New Roman" pitchFamily="34" charset="-122"/>
+                <a:cs typeface="Times New Roman" pitchFamily="34" charset="-120"/>
+              </a:rPr>
+              <a:t>4. Hazards and Control Measures</a:t>
+            </a:r>
+            <a:endParaRPr lang="en-US" sz="3600" dirty="0"/>
+          </a:p>
+        </p:txBody>
+      </p:sp>
+      <p:sp>
+        <p:nvSpPr>
+          <p:cNvPr id="4" name="Text 2"/>
+          <p:cNvSpPr/>
+          <p:nvPr/>
+        </p:nvSpPr>
+        <p:spPr>
+          <a:xfrm>
+            <a:off x="365760" y="1783080"/>
+            <a:ext cx="6035040" cy="4617720"/>
+          </a:xfrm>
+          <a:prstGeom prst="rect">
+            <a:avLst/>
+          </a:prstGeom>
+          <a:noFill/>
+          <a:ln/>
+        </p:spPr>
+        <p:txBody>
+          <a:bodyPr wrap="square" lIns="0" tIns="0" rIns="0" bIns="0" rtlCol="0" anchor="t"/>
+          <a:lstStyle/>
+          <a:p>
+            <a:pPr algn="l" indent="0" marL="0">
+              <a:spcAft>
+                <a:spcPts val="800"/>
+              </a:spcAft>
+              <a:buNone/>
+            </a:pPr>
+            <a:r>
+              <a:rPr lang="en-US" sz="2800" i="1" dirty="0">
+                <a:solidFill>
+                  <a:srgbClr val="111111"/>
+                </a:solidFill>
+                <a:latin typeface="Times New Roman" pitchFamily="34" charset="0"/>
+                <a:ea typeface="Times New Roman" pitchFamily="34" charset="-122"/>
+                <a:cs typeface="Times New Roman" pitchFamily="34" charset="-120"/>
+              </a:rPr>
+              <a:t>The hazards of these disturbances are reduced by the following measures:</a:t>
+            </a:r>
+            <a:endParaRPr lang="en-US" sz="2800" dirty="0"/>
+          </a:p>
+          <a:p>
+            <a:pPr algn="l" indent="0" marL="0">
+              <a:spcAft>
+                <a:spcPts val="800"/>
+              </a:spcAft>
+              <a:buNone/>
+            </a:pPr>
+            <a:r>
+              <a:rPr lang="en-US" sz="2800" b="1" dirty="0">
+                <a:solidFill>
+                  <a:srgbClr val="111111"/>
+                </a:solidFill>
+                <a:latin typeface="Times New Roman" pitchFamily="34" charset="0"/>
+                <a:ea typeface="Times New Roman" pitchFamily="34" charset="-122"/>
+                <a:cs typeface="Times New Roman" pitchFamily="34" charset="-120"/>
+              </a:rPr>
+              <a:t>Early warning: </a:t>
+            </a:r>
+            <a:pPr algn="l" indent="0" marL="0">
+              <a:spcAft>
+                <a:spcPts val="800"/>
+              </a:spcAft>
+              <a:buNone/>
+            </a:pPr>
+            <a:r>
+              <a:rPr lang="en-US" sz="2800" dirty="0">
+                <a:solidFill>
+                  <a:srgbClr val="111111"/>
+                </a:solidFill>
+                <a:latin typeface="Times New Roman" pitchFamily="34" charset="0"/>
+                <a:ea typeface="Times New Roman" pitchFamily="34" charset="-122"/>
+                <a:cs typeface="Times New Roman" pitchFamily="34" charset="-120"/>
+              </a:rPr>
+              <a:t>Radars and satellites follow storms, and weather services send alerts by radio, television and telephone. People then have time to take shelter or to leave threatened areas.</a:t>
+            </a:r>
+            <a:endParaRPr lang="en-US" sz="2800" dirty="0"/>
           </a:p>
         </p:txBody>
       </p:sp>
       <p:pic>
         <p:nvPicPr>
-          <p:cNvPr id="3" name="Image 0" descr="/home/claude/f4/img/minesec_sheet.png">    </p:cNvPr>
+          <p:cNvPr id="5" name="Image 0" descr="/home/claude/f4/img/v2/clim2_storm_measures.png">    </p:cNvPr>
           <p:cNvPicPr>
             <a:picLocks noChangeAspect="1"/>
           </p:cNvPicPr>
@@ -19239,8 +19469,8 @@
         </p:blipFill>
         <p:spPr>
           <a:xfrm>
-            <a:off x="0" y="658368"/>
-            <a:ext cx="5120640" cy="5833872"/>
+            <a:off x="6537960" y="2849678"/>
+            <a:ext cx="5470855" cy="2137053"/>
           </a:xfrm>
           <a:prstGeom prst="rect">
             <a:avLst/>
@@ -19249,14 +19479,14 @@
       </p:pic>
       <p:sp>
         <p:nvSpPr>
-          <p:cNvPr id="4" name="Text 1"/>
+          <p:cNvPr id="6" name="Text 3"/>
           <p:cNvSpPr/>
           <p:nvPr/>
         </p:nvSpPr>
         <p:spPr>
           <a:xfrm>
-            <a:off x="5349240" y="1005840"/>
-            <a:ext cx="6522415" cy="731520"/>
+            <a:off x="6537960" y="6089904"/>
+            <a:ext cx="5470855" cy="347472"/>
           </a:xfrm>
           <a:prstGeom prst="rect">
             <a:avLst/>
@@ -19265,68 +19495,24 @@
           <a:ln/>
         </p:spPr>
         <p:txBody>
-          <a:bodyPr wrap="square" lIns="0" tIns="0" rIns="0" bIns="0" rtlCol="0" anchor="ctr">
-            <a:normAutofit/>
-          </a:bodyPr>
+          <a:bodyPr wrap="square" lIns="0" tIns="0" rIns="0" bIns="0" rtlCol="0" anchor="ctr"/>
           <a:lstStyle/>
           <a:p>
             <a:pPr algn="ctr" indent="0" marL="0">
               <a:buNone/>
             </a:pPr>
             <a:r>
-              <a:rPr lang="en-US" sz="3600" b="1" dirty="0">
-                <a:solidFill>
-                  <a:srgbClr val="990011"/>
+              <a:rPr lang="en-US" sz="1600" i="1" dirty="0">
+                <a:solidFill>
+                  <a:srgbClr val="555555"/>
                 </a:solidFill>
                 <a:latin typeface="Times New Roman" pitchFamily="34" charset="0"/>
                 <a:ea typeface="Times New Roman" pitchFamily="34" charset="-122"/>
                 <a:cs typeface="Times New Roman" pitchFamily="34" charset="-120"/>
               </a:rPr>
-              <a:t>Evaluation 1</a:t>
-            </a:r>
-            <a:endParaRPr lang="en-US" sz="3600" dirty="0"/>
-          </a:p>
-        </p:txBody>
-      </p:sp>
-      <p:sp>
-        <p:nvSpPr>
-          <p:cNvPr id="5" name="Text 2"/>
-          <p:cNvSpPr/>
-          <p:nvPr/>
-        </p:nvSpPr>
-        <p:spPr>
-          <a:xfrm>
-            <a:off x="5349240" y="1783080"/>
-            <a:ext cx="6522415" cy="4663440"/>
-          </a:xfrm>
-          <a:prstGeom prst="rect">
-            <a:avLst/>
-          </a:prstGeom>
-          <a:noFill/>
-          <a:ln/>
-        </p:spPr>
-        <p:txBody>
-          <a:bodyPr wrap="square" lIns="0" tIns="0" rIns="0" bIns="0" rtlCol="0" anchor="t"/>
-          <a:lstStyle/>
-          <a:p>
-            <a:pPr algn="l" indent="0" marL="0">
-              <a:spcAft>
-                <a:spcPts val="800"/>
-              </a:spcAft>
-              <a:buNone/>
-            </a:pPr>
-            <a:r>
-              <a:rPr lang="en-US" sz="4000" dirty="0">
-                <a:solidFill>
-                  <a:srgbClr val="111111"/>
-                </a:solidFill>
-                <a:latin typeface="Times New Roman" pitchFamily="34" charset="0"/>
-                <a:ea typeface="Times New Roman" pitchFamily="34" charset="-122"/>
-                <a:cs typeface="Times New Roman" pitchFamily="34" charset="-120"/>
-              </a:rPr>
-              <a:t>Compare a thunderstorm and a tropical cyclone by size and place of formation.</a:t>
-            </a:r>
-            <a:endParaRPr lang="en-US" sz="4000" dirty="0"/>
+              <a:t>Illustration: control measures</a:t>
+            </a:r>
+            <a:endParaRPr lang="en-US" sz="1600" dirty="0"/>
           </a:p>
         </p:txBody>
       </p:sp>
@@ -19436,7 +19622,7 @@
                 <a:ea typeface="Calibri" pitchFamily="34" charset="-122"/>
                 <a:cs typeface="Calibri" pitchFamily="34" charset="-120"/>
               </a:rPr>
-              <a:t>FORMATIVE EVALUATION</a:t>
+              <a:t>BOARD SUMMARY</a:t>
             </a:r>
             <a:endParaRPr lang="en-US" sz="1400" dirty="0"/>
           </a:p>
@@ -19459,7 +19645,7 @@
         <p:spPr>
           <a:xfrm>
             <a:off x="0" y="658368"/>
-            <a:ext cx="5120640" cy="5833872"/>
+            <a:ext cx="3840480" cy="5833872"/>
           </a:xfrm>
           <a:prstGeom prst="rect">
             <a:avLst/>
@@ -19474,8 +19660,8 @@
         </p:nvSpPr>
         <p:spPr>
           <a:xfrm>
-            <a:off x="5349240" y="1005840"/>
-            <a:ext cx="6522415" cy="731520"/>
+            <a:off x="4069080" y="1005840"/>
+            <a:ext cx="7802575" cy="731520"/>
           </a:xfrm>
           <a:prstGeom prst="rect">
             <a:avLst/>
@@ -19501,7 +19687,7 @@
                 <a:ea typeface="Times New Roman" pitchFamily="34" charset="-122"/>
                 <a:cs typeface="Times New Roman" pitchFamily="34" charset="-120"/>
               </a:rPr>
-              <a:t>Expected Answer</a:t>
+              <a:t>4. Hazards and Control Measures</a:t>
             </a:r>
             <a:endParaRPr lang="en-US" sz="3600" dirty="0"/>
           </a:p>
@@ -19515,8 +19701,8 @@
         </p:nvSpPr>
         <p:spPr>
           <a:xfrm>
-            <a:off x="5349240" y="1783080"/>
-            <a:ext cx="6522415" cy="4663440"/>
+            <a:off x="4069080" y="1783080"/>
+            <a:ext cx="7802575" cy="4663440"/>
           </a:xfrm>
           <a:prstGeom prst="rect">
             <a:avLst/>
@@ -19535,7 +19721,7 @@
               <a:buNone/>
             </a:pPr>
             <a:r>
-              <a:rPr lang="en-US" sz="4000" dirty="0">
+              <a:rPr lang="en-US" sz="4000" b="1" dirty="0">
                 <a:solidFill>
                   <a:srgbClr val="111111"/>
                 </a:solidFill>
@@ -19543,7 +19729,24 @@
                 <a:ea typeface="Times New Roman" pitchFamily="34" charset="-122"/>
                 <a:cs typeface="Times New Roman" pitchFamily="34" charset="-120"/>
               </a:rPr>
-              <a:t>A thunderstorm is small (a few km) and forms over land or sea; a cyclone is hundreds of km wide and forms over warm tropical oceans.</a:t>
+              <a:t>Public education: </a:t>
+            </a:r>
+            <a:pPr algn="l" indent="0" marL="0">
+              <a:spcAft>
+                <a:spcPts val="800"/>
+              </a:spcAft>
+              <a:buNone/>
+            </a:pPr>
+            <a:r>
+              <a:rPr lang="en-US" sz="4000" dirty="0">
+                <a:solidFill>
+                  <a:srgbClr val="111111"/>
+                </a:solidFill>
+                <a:latin typeface="Times New Roman" pitchFamily="34" charset="0"/>
+                <a:ea typeface="Times New Roman" pitchFamily="34" charset="-122"/>
+                <a:cs typeface="Times New Roman" pitchFamily="34" charset="-120"/>
+              </a:rPr>
+              <a:t>People learn to shelter indoors during storms and to avoid trees, open fields, water and metal objects when there is lightning. Drills teach them what to do when a warning is given.</a:t>
             </a:r>
             <a:endParaRPr lang="en-US" sz="4000" dirty="0"/>
           </a:p>
@@ -19655,7 +19858,7 @@
                 <a:ea typeface="Calibri" pitchFamily="34" charset="-122"/>
                 <a:cs typeface="Calibri" pitchFamily="34" charset="-120"/>
               </a:rPr>
-              <a:t>FORMATIVE EVALUATION</a:t>
+              <a:t>BOARD SUMMARY</a:t>
             </a:r>
             <a:endParaRPr lang="en-US" sz="1400" dirty="0"/>
           </a:p>
@@ -19720,7 +19923,7 @@
                 <a:ea typeface="Times New Roman" pitchFamily="34" charset="-122"/>
                 <a:cs typeface="Times New Roman" pitchFamily="34" charset="-120"/>
               </a:rPr>
-              <a:t>Evaluation 2</a:t>
+              <a:t>4. Hazards and Control Measures</a:t>
             </a:r>
             <a:endParaRPr lang="en-US" sz="3600" dirty="0"/>
           </a:p>
@@ -19754,7 +19957,7 @@
               <a:buNone/>
             </a:pPr>
             <a:r>
-              <a:rPr lang="en-US" sz="4000" dirty="0">
+              <a:rPr lang="en-US" sz="4000" b="1" dirty="0">
                 <a:solidFill>
                   <a:srgbClr val="111111"/>
                 </a:solidFill>
@@ -19762,7 +19965,24 @@
                 <a:ea typeface="Times New Roman" pitchFamily="34" charset="-122"/>
                 <a:cs typeface="Times New Roman" pitchFamily="34" charset="-120"/>
               </a:rPr>
-              <a:t>Give two measures to reduce the hazards of thunderstorms.</a:t>
+              <a:t>Protection of buildings: </a:t>
+            </a:r>
+            <a:pPr algn="l" indent="0" marL="0">
+              <a:spcAft>
+                <a:spcPts val="800"/>
+              </a:spcAft>
+              <a:buNone/>
+            </a:pPr>
+            <a:r>
+              <a:rPr lang="en-US" sz="4000" dirty="0">
+                <a:solidFill>
+                  <a:srgbClr val="111111"/>
+                </a:solidFill>
+                <a:latin typeface="Times New Roman" pitchFamily="34" charset="0"/>
+                <a:ea typeface="Times New Roman" pitchFamily="34" charset="-122"/>
+                <a:cs typeface="Times New Roman" pitchFamily="34" charset="-120"/>
+              </a:rPr>
+              <a:t>Lightning rods, strong roofs and building codes that resist wind reduce damage. Good drains reduce the floods caused by heavy rain.</a:t>
             </a:r>
             <a:endParaRPr lang="en-US" sz="4000" dirty="0"/>
           </a:p>
@@ -19874,7 +20094,7 @@
                 <a:ea typeface="Calibri" pitchFamily="34" charset="-122"/>
                 <a:cs typeface="Calibri" pitchFamily="34" charset="-120"/>
               </a:rPr>
-              <a:t>FORMATIVE EVALUATION</a:t>
+              <a:t>BOARD SUMMARY</a:t>
             </a:r>
             <a:endParaRPr lang="en-US" sz="1400" dirty="0"/>
           </a:p>
@@ -19939,7 +20159,7 @@
                 <a:ea typeface="Times New Roman" pitchFamily="34" charset="-122"/>
                 <a:cs typeface="Times New Roman" pitchFamily="34" charset="-120"/>
               </a:rPr>
-              <a:t>Expected Answer</a:t>
+              <a:t>4. Hazards and Control Measures</a:t>
             </a:r>
             <a:endParaRPr lang="en-US" sz="3600" dirty="0"/>
           </a:p>
@@ -19973,7 +20193,7 @@
               <a:buNone/>
             </a:pPr>
             <a:r>
-              <a:rPr lang="en-US" sz="4000" dirty="0">
+              <a:rPr lang="en-US" sz="4000" b="1" dirty="0">
                 <a:solidFill>
                   <a:srgbClr val="111111"/>
                 </a:solidFill>
@@ -19981,7 +20201,24 @@
                 <a:ea typeface="Times New Roman" pitchFamily="34" charset="-122"/>
                 <a:cs typeface="Times New Roman" pitchFamily="34" charset="-120"/>
               </a:rPr>
-              <a:t>Early warnings, lightning rods, staying indoors, good drainage (any two).</a:t>
+              <a:t>Emergency preparedness: </a:t>
+            </a:r>
+            <a:pPr algn="l" indent="0" marL="0">
+              <a:spcAft>
+                <a:spcPts val="800"/>
+              </a:spcAft>
+              <a:buNone/>
+            </a:pPr>
+            <a:r>
+              <a:rPr lang="en-US" sz="4000" dirty="0">
+                <a:solidFill>
+                  <a:srgbClr val="111111"/>
+                </a:solidFill>
+                <a:latin typeface="Times New Roman" pitchFamily="34" charset="0"/>
+                <a:ea typeface="Times New Roman" pitchFamily="34" charset="-122"/>
+                <a:cs typeface="Times New Roman" pitchFamily="34" charset="-120"/>
+              </a:rPr>
+              <a:t>Governments build storm shelters, plan evacuation routes and train rescue services. After a disaster, they provide water, food, shelter and medical care.</a:t>
             </a:r>
             <a:endParaRPr lang="en-US" sz="4000" dirty="0"/>
           </a:p>
@@ -20093,7 +20330,7 @@
                 <a:ea typeface="Calibri" pitchFamily="34" charset="-122"/>
                 <a:cs typeface="Calibri" pitchFamily="34" charset="-120"/>
               </a:rPr>
-              <a:t>REMEDIATION</a:t>
+              <a:t>FORMATIVE EVALUATION</a:t>
             </a:r>
             <a:endParaRPr lang="en-US" sz="1400" dirty="0"/>
           </a:p>
@@ -20116,7 +20353,7 @@
         <p:spPr>
           <a:xfrm>
             <a:off x="0" y="658368"/>
-            <a:ext cx="2468880" cy="5833872"/>
+            <a:ext cx="5120640" cy="5833872"/>
           </a:xfrm>
           <a:prstGeom prst="rect">
             <a:avLst/>
@@ -20131,8 +20368,8 @@
         </p:nvSpPr>
         <p:spPr>
           <a:xfrm>
-            <a:off x="2697480" y="1005840"/>
-            <a:ext cx="9174175" cy="731520"/>
+            <a:off x="5349240" y="1005840"/>
+            <a:ext cx="6522415" cy="731520"/>
           </a:xfrm>
           <a:prstGeom prst="rect">
             <a:avLst/>
@@ -20158,7 +20395,7 @@
                 <a:ea typeface="Times New Roman" pitchFamily="34" charset="-122"/>
                 <a:cs typeface="Times New Roman" pitchFamily="34" charset="-120"/>
               </a:rPr>
-              <a:t>Remediation</a:t>
+              <a:t>Evaluation 1</a:t>
             </a:r>
             <a:endParaRPr lang="en-US" sz="3600" dirty="0"/>
           </a:p>
@@ -20172,8 +20409,8 @@
         </p:nvSpPr>
         <p:spPr>
           <a:xfrm>
-            <a:off x="2697480" y="1783080"/>
-            <a:ext cx="9174175" cy="4663440"/>
+            <a:off x="5349240" y="1783080"/>
+            <a:ext cx="6522415" cy="4663440"/>
           </a:xfrm>
           <a:prstGeom prst="rect">
             <a:avLst/>
@@ -20192,7 +20429,7 @@
               <a:buNone/>
             </a:pPr>
             <a:r>
-              <a:rPr lang="en-US" sz="4000" b="1" dirty="0">
+              <a:rPr lang="en-US" sz="4000" dirty="0">
                 <a:solidFill>
                   <a:srgbClr val="111111"/>
                 </a:solidFill>
@@ -20200,73 +20437,7 @@
                 <a:ea typeface="Times New Roman" pitchFamily="34" charset="-122"/>
                 <a:cs typeface="Times New Roman" pitchFamily="34" charset="-120"/>
               </a:rPr>
-              <a:t>Fill in the blanks:</a:t>
-            </a:r>
-            <a:endParaRPr lang="en-US" sz="4000" dirty="0"/>
-          </a:p>
-          <a:p>
-            <a:pPr algn="l" marL="342900" indent="-342900">
-              <a:spcAft>
-                <a:spcPts val="800"/>
-              </a:spcAft>
-              <a:buSzPct val="100000"/>
-              <a:buFont typeface="+mj-lt"/>
-              <a:buAutoNum type="arabicPeriod" startAt="1"/>
-            </a:pPr>
-            <a:r>
-              <a:rPr lang="en-US" sz="4000" dirty="0">
-                <a:solidFill>
-                  <a:srgbClr val="111111"/>
-                </a:solidFill>
-                <a:latin typeface="Times New Roman" pitchFamily="34" charset="0"/>
-                <a:ea typeface="Times New Roman" pitchFamily="34" charset="-122"/>
-                <a:cs typeface="Times New Roman" pitchFamily="34" charset="-120"/>
-              </a:rPr>
-              <a:t>Thunderstorms form from ______ clouds.</a:t>
-            </a:r>
-            <a:endParaRPr lang="en-US" sz="4000" dirty="0"/>
-          </a:p>
-          <a:p>
-            <a:pPr algn="l" marL="342900" indent="-342900">
-              <a:spcAft>
-                <a:spcPts val="800"/>
-              </a:spcAft>
-              <a:buSzPct val="100000"/>
-              <a:buFont typeface="+mj-lt"/>
-              <a:buAutoNum type="arabicPeriod" startAt="1"/>
-            </a:pPr>
-            <a:r>
-              <a:rPr lang="en-US" sz="4000" dirty="0">
-                <a:solidFill>
-                  <a:srgbClr val="111111"/>
-                </a:solidFill>
-                <a:latin typeface="Times New Roman" pitchFamily="34" charset="0"/>
-                <a:ea typeface="Times New Roman" pitchFamily="34" charset="-122"/>
-                <a:cs typeface="Times New Roman" pitchFamily="34" charset="-120"/>
-              </a:rPr>
-              <a:t>Atlantic tropical cyclones are called ______.</a:t>
-            </a:r>
-            <a:endParaRPr lang="en-US" sz="4000" dirty="0"/>
-          </a:p>
-          <a:p>
-            <a:pPr algn="l" marL="342900" indent="-342900">
-              <a:spcAft>
-                <a:spcPts val="800"/>
-              </a:spcAft>
-              <a:buSzPct val="100000"/>
-              <a:buFont typeface="+mj-lt"/>
-              <a:buAutoNum type="arabicPeriod" startAt="1"/>
-            </a:pPr>
-            <a:r>
-              <a:rPr lang="en-US" sz="4000" dirty="0">
-                <a:solidFill>
-                  <a:srgbClr val="111111"/>
-                </a:solidFill>
-                <a:latin typeface="Times New Roman" pitchFamily="34" charset="0"/>
-                <a:ea typeface="Times New Roman" pitchFamily="34" charset="-122"/>
-                <a:cs typeface="Times New Roman" pitchFamily="34" charset="-120"/>
-              </a:rPr>
-              <a:t>A rise of the sea caused by a storm is a storm ______.</a:t>
+              <a:t>Compare a thunderstorm and a tropical cyclone by size and place of formation.</a:t>
             </a:r>
             <a:endParaRPr lang="en-US" sz="4000" dirty="0"/>
           </a:p>
@@ -20378,7 +20549,7 @@
                 <a:ea typeface="Calibri" pitchFamily="34" charset="-122"/>
                 <a:cs typeface="Calibri" pitchFamily="34" charset="-120"/>
               </a:rPr>
-              <a:t>HOMEWORK</a:t>
+              <a:t>FORMATIVE EVALUATION</a:t>
             </a:r>
             <a:endParaRPr lang="en-US" sz="1400" dirty="0"/>
           </a:p>
@@ -20443,7 +20614,7 @@
                 <a:ea typeface="Times New Roman" pitchFamily="34" charset="-122"/>
                 <a:cs typeface="Times New Roman" pitchFamily="34" charset="-120"/>
               </a:rPr>
-              <a:t>Homework</a:t>
+              <a:t>Expected Answer</a:t>
             </a:r>
             <a:endParaRPr lang="en-US" sz="3600" dirty="0"/>
           </a:p>
@@ -20485,7 +20656,7 @@
                 <a:ea typeface="Times New Roman" pitchFamily="34" charset="-122"/>
                 <a:cs typeface="Times New Roman" pitchFamily="34" charset="-120"/>
               </a:rPr>
-              <a:t>Define a micro-climate.</a:t>
+              <a:t>A thunderstorm is small (a few km) and forms over land or sea; a cyclone is hundreds of km wide and forms over warm tropical oceans.</a:t>
             </a:r>
             <a:endParaRPr lang="en-US" sz="4000" dirty="0"/>
           </a:p>
@@ -20597,7 +20768,7 @@
                 <a:ea typeface="Calibri" pitchFamily="34" charset="-122"/>
                 <a:cs typeface="Calibri" pitchFamily="34" charset="-120"/>
               </a:rPr>
-              <a:t>NEXT LESSON</a:t>
+              <a:t>FORMATIVE EVALUATION</a:t>
             </a:r>
             <a:endParaRPr lang="en-US" sz="1400" dirty="0"/>
           </a:p>
@@ -20662,7 +20833,7 @@
                 <a:ea typeface="Times New Roman" pitchFamily="34" charset="-122"/>
                 <a:cs typeface="Times New Roman" pitchFamily="34" charset="-120"/>
               </a:rPr>
-              <a:t>Next Lesson</a:t>
+              <a:t>Evaluation 2</a:t>
             </a:r>
             <a:endParaRPr lang="en-US" sz="3600" dirty="0"/>
           </a:p>
@@ -20686,17 +20857,17 @@
           <a:ln/>
         </p:spPr>
         <p:txBody>
-          <a:bodyPr wrap="square" lIns="0" tIns="0" rIns="0" bIns="0" rtlCol="0" anchor="ctr"/>
-          <a:lstStyle/>
-          <a:p>
-            <a:pPr algn="ctr" indent="0" marL="0">
+          <a:bodyPr wrap="square" lIns="0" tIns="0" rIns="0" bIns="0" rtlCol="0" anchor="t"/>
+          <a:lstStyle/>
+          <a:p>
+            <a:pPr algn="l" indent="0" marL="0">
               <a:spcAft>
                 <a:spcPts val="800"/>
               </a:spcAft>
               <a:buNone/>
             </a:pPr>
             <a:r>
-              <a:rPr lang="en-US" sz="4000" b="1" dirty="0">
+              <a:rPr lang="en-US" sz="4000" dirty="0">
                 <a:solidFill>
                   <a:srgbClr val="111111"/>
                 </a:solidFill>
@@ -20704,27 +20875,7 @@
                 <a:ea typeface="Times New Roman" pitchFamily="34" charset="-122"/>
                 <a:cs typeface="Times New Roman" pitchFamily="34" charset="-120"/>
               </a:rPr>
-              <a:t>Our next lesson will be on:</a:t>
-            </a:r>
-            <a:endParaRPr lang="en-US" sz="4000" dirty="0"/>
-          </a:p>
-          <a:p>
-            <a:pPr algn="ctr" indent="0" marL="0">
-              <a:spcAft>
-                <a:spcPts val="800"/>
-              </a:spcAft>
-              <a:buNone/>
-            </a:pPr>
-            <a:r>
-              <a:rPr lang="en-US" sz="4000" b="1" dirty="0">
-                <a:solidFill>
-                  <a:srgbClr val="990011"/>
-                </a:solidFill>
-                <a:latin typeface="Times New Roman" pitchFamily="34" charset="0"/>
-                <a:ea typeface="Times New Roman" pitchFamily="34" charset="-122"/>
-                <a:cs typeface="Times New Roman" pitchFamily="34" charset="-120"/>
-              </a:rPr>
-              <a:t>Lesson 20: Micro-climates</a:t>
+              <a:t>Give two measures to reduce the hazards of thunderstorms.</a:t>
             </a:r>
             <a:endParaRPr lang="en-US" sz="4000" dirty="0"/>
           </a:p>
@@ -20836,6 +20987,1299 @@
                 <a:ea typeface="Calibri" pitchFamily="34" charset="-122"/>
                 <a:cs typeface="Calibri" pitchFamily="34" charset="-120"/>
               </a:rPr>
+              <a:t>FORMATIVE EVALUATION</a:t>
+            </a:r>
+            <a:endParaRPr lang="en-US" sz="1400" dirty="0"/>
+          </a:p>
+        </p:txBody>
+      </p:sp>
+      <p:pic>
+        <p:nvPicPr>
+          <p:cNvPr id="3" name="Image 0" descr="/home/claude/f4/img/minesec_sheet.png">    </p:cNvPr>
+          <p:cNvPicPr>
+            <a:picLocks noChangeAspect="1"/>
+          </p:cNvPicPr>
+          <p:nvPr/>
+        </p:nvPicPr>
+        <p:blipFill>
+          <a:blip r:embed="rId1"/>
+          <a:stretch>
+            <a:fillRect/>
+          </a:stretch>
+        </p:blipFill>
+        <p:spPr>
+          <a:xfrm>
+            <a:off x="0" y="658368"/>
+            <a:ext cx="5120640" cy="5833872"/>
+          </a:xfrm>
+          <a:prstGeom prst="rect">
+            <a:avLst/>
+          </a:prstGeom>
+        </p:spPr>
+      </p:pic>
+      <p:sp>
+        <p:nvSpPr>
+          <p:cNvPr id="4" name="Text 1"/>
+          <p:cNvSpPr/>
+          <p:nvPr/>
+        </p:nvSpPr>
+        <p:spPr>
+          <a:xfrm>
+            <a:off x="5349240" y="1005840"/>
+            <a:ext cx="6522415" cy="731520"/>
+          </a:xfrm>
+          <a:prstGeom prst="rect">
+            <a:avLst/>
+          </a:prstGeom>
+          <a:noFill/>
+          <a:ln/>
+        </p:spPr>
+        <p:txBody>
+          <a:bodyPr wrap="square" lIns="0" tIns="0" rIns="0" bIns="0" rtlCol="0" anchor="ctr">
+            <a:normAutofit/>
+          </a:bodyPr>
+          <a:lstStyle/>
+          <a:p>
+            <a:pPr algn="ctr" indent="0" marL="0">
+              <a:buNone/>
+            </a:pPr>
+            <a:r>
+              <a:rPr lang="en-US" sz="3600" b="1" dirty="0">
+                <a:solidFill>
+                  <a:srgbClr val="990011"/>
+                </a:solidFill>
+                <a:latin typeface="Times New Roman" pitchFamily="34" charset="0"/>
+                <a:ea typeface="Times New Roman" pitchFamily="34" charset="-122"/>
+                <a:cs typeface="Times New Roman" pitchFamily="34" charset="-120"/>
+              </a:rPr>
+              <a:t>Expected Answer</a:t>
+            </a:r>
+            <a:endParaRPr lang="en-US" sz="3600" dirty="0"/>
+          </a:p>
+        </p:txBody>
+      </p:sp>
+      <p:sp>
+        <p:nvSpPr>
+          <p:cNvPr id="5" name="Text 2"/>
+          <p:cNvSpPr/>
+          <p:nvPr/>
+        </p:nvSpPr>
+        <p:spPr>
+          <a:xfrm>
+            <a:off x="5349240" y="1783080"/>
+            <a:ext cx="6522415" cy="4663440"/>
+          </a:xfrm>
+          <a:prstGeom prst="rect">
+            <a:avLst/>
+          </a:prstGeom>
+          <a:noFill/>
+          <a:ln/>
+        </p:spPr>
+        <p:txBody>
+          <a:bodyPr wrap="square" lIns="0" tIns="0" rIns="0" bIns="0" rtlCol="0" anchor="t"/>
+          <a:lstStyle/>
+          <a:p>
+            <a:pPr algn="l" indent="0" marL="0">
+              <a:spcAft>
+                <a:spcPts val="800"/>
+              </a:spcAft>
+              <a:buNone/>
+            </a:pPr>
+            <a:r>
+              <a:rPr lang="en-US" sz="4000" dirty="0">
+                <a:solidFill>
+                  <a:srgbClr val="111111"/>
+                </a:solidFill>
+                <a:latin typeface="Times New Roman" pitchFamily="34" charset="0"/>
+                <a:ea typeface="Times New Roman" pitchFamily="34" charset="-122"/>
+                <a:cs typeface="Times New Roman" pitchFamily="34" charset="-120"/>
+              </a:rPr>
+              <a:t>Early warnings, lightning rods, staying indoors, good drainage (any two).</a:t>
+            </a:r>
+            <a:endParaRPr lang="en-US" sz="4000" dirty="0"/>
+          </a:p>
+        </p:txBody>
+      </p:sp>
+      <p:sp>
+        <p:nvSpPr>
+          <p:cNvPr id="25" name="Slide Number Placeholder 0"/>
+          <p:cNvSpPr>
+            <a:spLocks noGrp="1"/>
+          </p:cNvSpPr>
+          <p:nvPr>
+            <p:ph type="sldNum" sz="quarter" idx="4294967295"/>
+          </p:nvPr>
+        </p:nvSpPr>
+        <p:spPr>
+          <a:xfrm>
+            <a:off x="27432" y="91440"/>
+            <a:ext cx="585216" cy="475488"/>
+          </a:xfrm>
+          <a:prstGeom prst="rect">
+            <a:avLst/>
+          </a:prstGeom>
+          <a:extLst>
+            <a:ext uri="{C572A759-6A51-4108-AA02-DFA0A04FC94B}">
+              <ma14:wrappingTextBoxFlag xmlns:ma14="http://schemas.microsoft.com/office/mac/drawingml/2011/main" val="0"/>
+            </a:ext>
+          </a:extLst>
+        </p:spPr>
+        <p:txBody>
+          <a:bodyPr/>
+          <a:lstStyle>
+            <a:lvl1pPr>
+              <a:defRPr sz="2000">
+                <a:solidFill>
+                  <a:srgbClr val="FFFFFF"/>
+                </a:solidFill>
+                <a:latin typeface="Calibri"/>
+                <a:ea typeface="Calibri"/>
+                <a:cs typeface="Calibri"/>
+              </a:defRPr>
+            </a:lvl1pPr>
+          </a:lstStyle>
+          <a:p>
+            <a:pPr algn="ctr"/>
+            <a:fld id="{F7021451-1387-4CA6-816F-3879F97B5CBC}" type="slidenum">
+              <a:rPr b="1" lang="en-US"/>
+              <a:t>58</a:t>
+            </a:fld>
+            <a:endParaRPr lang="en-US"/>
+          </a:p>
+        </p:txBody>
+      </p:sp>
+    </p:spTree>
+  </p:cSld>
+  <p:clrMapOvr>
+    <a:masterClrMapping/>
+  </p:clrMapOvr>
+</p:sld>
+</file>
+
+<file path=ppt/slides/slide59.xml><?xml version="1.0" encoding="utf-8"?>
+<p:sld xmlns:a="http://schemas.openxmlformats.org/drawingml/2006/main" xmlns:r="http://schemas.openxmlformats.org/officeDocument/2006/relationships" xmlns:p="http://schemas.openxmlformats.org/presentationml/2006/main">
+  <p:cSld name="Slide 59">
+    <p:spTree>
+      <p:nvGrpSpPr>
+        <p:cNvPr id="1" name=""/>
+        <p:cNvGrpSpPr/>
+        <p:nvPr/>
+      </p:nvGrpSpPr>
+      <p:grpSpPr>
+        <a:xfrm>
+          <a:off x="0" y="0"/>
+          <a:ext cx="0" cy="0"/>
+          <a:chOff x="0" y="0"/>
+          <a:chExt cx="0" cy="0"/>
+        </a:xfrm>
+      </p:grpSpPr>
+      <p:sp>
+        <p:nvSpPr>
+          <p:cNvPr id="2" name="Text 0"/>
+          <p:cNvSpPr/>
+          <p:nvPr/>
+        </p:nvSpPr>
+        <p:spPr>
+          <a:xfrm>
+            <a:off x="457200" y="713232"/>
+            <a:ext cx="11368735" cy="274320"/>
+          </a:xfrm>
+          <a:prstGeom prst="rect">
+            <a:avLst/>
+          </a:prstGeom>
+          <a:noFill/>
+          <a:ln/>
+        </p:spPr>
+        <p:txBody>
+          <a:bodyPr wrap="square" lIns="0" tIns="0" rIns="0" bIns="0" rtlCol="0" anchor="ctr"/>
+          <a:lstStyle/>
+          <a:p>
+            <a:pPr algn="r" indent="0" marL="0">
+              <a:buNone/>
+            </a:pPr>
+            <a:r>
+              <a:rPr lang="en-US" sz="1400" b="1" dirty="0">
+                <a:solidFill>
+                  <a:srgbClr val="1C3F6E"/>
+                </a:solidFill>
+                <a:latin typeface="Calibri" pitchFamily="34" charset="0"/>
+                <a:ea typeface="Calibri" pitchFamily="34" charset="-122"/>
+                <a:cs typeface="Calibri" pitchFamily="34" charset="-120"/>
+              </a:rPr>
+              <a:t>REMEDIATION</a:t>
+            </a:r>
+            <a:endParaRPr lang="en-US" sz="1400" dirty="0"/>
+          </a:p>
+        </p:txBody>
+      </p:sp>
+      <p:pic>
+        <p:nvPicPr>
+          <p:cNvPr id="3" name="Image 0" descr="/home/claude/f4/img/minesec_sheet.png">    </p:cNvPr>
+          <p:cNvPicPr>
+            <a:picLocks noChangeAspect="1"/>
+          </p:cNvPicPr>
+          <p:nvPr/>
+        </p:nvPicPr>
+        <p:blipFill>
+          <a:blip r:embed="rId1"/>
+          <a:stretch>
+            <a:fillRect/>
+          </a:stretch>
+        </p:blipFill>
+        <p:spPr>
+          <a:xfrm>
+            <a:off x="0" y="658368"/>
+            <a:ext cx="2468880" cy="5833872"/>
+          </a:xfrm>
+          <a:prstGeom prst="rect">
+            <a:avLst/>
+          </a:prstGeom>
+        </p:spPr>
+      </p:pic>
+      <p:sp>
+        <p:nvSpPr>
+          <p:cNvPr id="4" name="Text 1"/>
+          <p:cNvSpPr/>
+          <p:nvPr/>
+        </p:nvSpPr>
+        <p:spPr>
+          <a:xfrm>
+            <a:off x="2697480" y="1005840"/>
+            <a:ext cx="9174175" cy="731520"/>
+          </a:xfrm>
+          <a:prstGeom prst="rect">
+            <a:avLst/>
+          </a:prstGeom>
+          <a:noFill/>
+          <a:ln/>
+        </p:spPr>
+        <p:txBody>
+          <a:bodyPr wrap="square" lIns="0" tIns="0" rIns="0" bIns="0" rtlCol="0" anchor="ctr">
+            <a:normAutofit/>
+          </a:bodyPr>
+          <a:lstStyle/>
+          <a:p>
+            <a:pPr algn="ctr" indent="0" marL="0">
+              <a:buNone/>
+            </a:pPr>
+            <a:r>
+              <a:rPr lang="en-US" sz="3600" b="1" dirty="0">
+                <a:solidFill>
+                  <a:srgbClr val="990011"/>
+                </a:solidFill>
+                <a:latin typeface="Times New Roman" pitchFamily="34" charset="0"/>
+                <a:ea typeface="Times New Roman" pitchFamily="34" charset="-122"/>
+                <a:cs typeface="Times New Roman" pitchFamily="34" charset="-120"/>
+              </a:rPr>
+              <a:t>Remediation</a:t>
+            </a:r>
+            <a:endParaRPr lang="en-US" sz="3600" dirty="0"/>
+          </a:p>
+        </p:txBody>
+      </p:sp>
+      <p:sp>
+        <p:nvSpPr>
+          <p:cNvPr id="5" name="Text 2"/>
+          <p:cNvSpPr/>
+          <p:nvPr/>
+        </p:nvSpPr>
+        <p:spPr>
+          <a:xfrm>
+            <a:off x="2697480" y="1783080"/>
+            <a:ext cx="9174175" cy="4663440"/>
+          </a:xfrm>
+          <a:prstGeom prst="rect">
+            <a:avLst/>
+          </a:prstGeom>
+          <a:noFill/>
+          <a:ln/>
+        </p:spPr>
+        <p:txBody>
+          <a:bodyPr wrap="square" lIns="0" tIns="0" rIns="0" bIns="0" rtlCol="0" anchor="t"/>
+          <a:lstStyle/>
+          <a:p>
+            <a:pPr algn="l" indent="0" marL="0">
+              <a:spcAft>
+                <a:spcPts val="800"/>
+              </a:spcAft>
+              <a:buNone/>
+            </a:pPr>
+            <a:r>
+              <a:rPr lang="en-US" sz="4000" b="1" dirty="0">
+                <a:solidFill>
+                  <a:srgbClr val="111111"/>
+                </a:solidFill>
+                <a:latin typeface="Times New Roman" pitchFamily="34" charset="0"/>
+                <a:ea typeface="Times New Roman" pitchFamily="34" charset="-122"/>
+                <a:cs typeface="Times New Roman" pitchFamily="34" charset="-120"/>
+              </a:rPr>
+              <a:t>Fill in the blanks:</a:t>
+            </a:r>
+            <a:endParaRPr lang="en-US" sz="4000" dirty="0"/>
+          </a:p>
+          <a:p>
+            <a:pPr algn="l" marL="342900" indent="-342900">
+              <a:spcAft>
+                <a:spcPts val="800"/>
+              </a:spcAft>
+              <a:buSzPct val="100000"/>
+              <a:buFont typeface="+mj-lt"/>
+              <a:buAutoNum type="arabicPeriod" startAt="1"/>
+            </a:pPr>
+            <a:r>
+              <a:rPr lang="en-US" sz="4000" dirty="0">
+                <a:solidFill>
+                  <a:srgbClr val="111111"/>
+                </a:solidFill>
+                <a:latin typeface="Times New Roman" pitchFamily="34" charset="0"/>
+                <a:ea typeface="Times New Roman" pitchFamily="34" charset="-122"/>
+                <a:cs typeface="Times New Roman" pitchFamily="34" charset="-120"/>
+              </a:rPr>
+              <a:t>Thunderstorms form from ______ clouds.</a:t>
+            </a:r>
+            <a:endParaRPr lang="en-US" sz="4000" dirty="0"/>
+          </a:p>
+          <a:p>
+            <a:pPr algn="l" marL="342900" indent="-342900">
+              <a:spcAft>
+                <a:spcPts val="800"/>
+              </a:spcAft>
+              <a:buSzPct val="100000"/>
+              <a:buFont typeface="+mj-lt"/>
+              <a:buAutoNum type="arabicPeriod" startAt="1"/>
+            </a:pPr>
+            <a:r>
+              <a:rPr lang="en-US" sz="4000" dirty="0">
+                <a:solidFill>
+                  <a:srgbClr val="111111"/>
+                </a:solidFill>
+                <a:latin typeface="Times New Roman" pitchFamily="34" charset="0"/>
+                <a:ea typeface="Times New Roman" pitchFamily="34" charset="-122"/>
+                <a:cs typeface="Times New Roman" pitchFamily="34" charset="-120"/>
+              </a:rPr>
+              <a:t>Atlantic tropical cyclones are called ______.</a:t>
+            </a:r>
+            <a:endParaRPr lang="en-US" sz="4000" dirty="0"/>
+          </a:p>
+          <a:p>
+            <a:pPr algn="l" marL="342900" indent="-342900">
+              <a:spcAft>
+                <a:spcPts val="800"/>
+              </a:spcAft>
+              <a:buSzPct val="100000"/>
+              <a:buFont typeface="+mj-lt"/>
+              <a:buAutoNum type="arabicPeriod" startAt="1"/>
+            </a:pPr>
+            <a:r>
+              <a:rPr lang="en-US" sz="4000" dirty="0">
+                <a:solidFill>
+                  <a:srgbClr val="111111"/>
+                </a:solidFill>
+                <a:latin typeface="Times New Roman" pitchFamily="34" charset="0"/>
+                <a:ea typeface="Times New Roman" pitchFamily="34" charset="-122"/>
+                <a:cs typeface="Times New Roman" pitchFamily="34" charset="-120"/>
+              </a:rPr>
+              <a:t>A rise of the sea caused by a storm is a storm ______.</a:t>
+            </a:r>
+            <a:endParaRPr lang="en-US" sz="4000" dirty="0"/>
+          </a:p>
+        </p:txBody>
+      </p:sp>
+      <p:sp>
+        <p:nvSpPr>
+          <p:cNvPr id="25" name="Slide Number Placeholder 0"/>
+          <p:cNvSpPr>
+            <a:spLocks noGrp="1"/>
+          </p:cNvSpPr>
+          <p:nvPr>
+            <p:ph type="sldNum" sz="quarter" idx="4294967295"/>
+          </p:nvPr>
+        </p:nvSpPr>
+        <p:spPr>
+          <a:xfrm>
+            <a:off x="27432" y="91440"/>
+            <a:ext cx="585216" cy="475488"/>
+          </a:xfrm>
+          <a:prstGeom prst="rect">
+            <a:avLst/>
+          </a:prstGeom>
+          <a:extLst>
+            <a:ext uri="{C572A759-6A51-4108-AA02-DFA0A04FC94B}">
+              <ma14:wrappingTextBoxFlag xmlns:ma14="http://schemas.microsoft.com/office/mac/drawingml/2011/main" val="0"/>
+            </a:ext>
+          </a:extLst>
+        </p:spPr>
+        <p:txBody>
+          <a:bodyPr/>
+          <a:lstStyle>
+            <a:lvl1pPr>
+              <a:defRPr sz="2000">
+                <a:solidFill>
+                  <a:srgbClr val="FFFFFF"/>
+                </a:solidFill>
+                <a:latin typeface="Calibri"/>
+                <a:ea typeface="Calibri"/>
+                <a:cs typeface="Calibri"/>
+              </a:defRPr>
+            </a:lvl1pPr>
+          </a:lstStyle>
+          <a:p>
+            <a:pPr algn="ctr"/>
+            <a:fld id="{F7021451-1387-4CA6-816F-3879F97B5CBC}" type="slidenum">
+              <a:rPr b="1" lang="en-US"/>
+              <a:t>59</a:t>
+            </a:fld>
+            <a:endParaRPr lang="en-US"/>
+          </a:p>
+        </p:txBody>
+      </p:sp>
+    </p:spTree>
+  </p:cSld>
+  <p:clrMapOvr>
+    <a:masterClrMapping/>
+  </p:clrMapOvr>
+</p:sld>
+</file>
+
+<file path=ppt/slides/slide6.xml><?xml version="1.0" encoding="utf-8"?>
+<p:sld xmlns:a="http://schemas.openxmlformats.org/drawingml/2006/main" xmlns:r="http://schemas.openxmlformats.org/officeDocument/2006/relationships" xmlns:p="http://schemas.openxmlformats.org/presentationml/2006/main">
+  <p:cSld name="Slide 6">
+    <p:spTree>
+      <p:nvGrpSpPr>
+        <p:cNvPr id="1" name=""/>
+        <p:cNvGrpSpPr/>
+        <p:nvPr/>
+      </p:nvGrpSpPr>
+      <p:grpSpPr>
+        <a:xfrm>
+          <a:off x="0" y="0"/>
+          <a:ext cx="0" cy="0"/>
+          <a:chOff x="0" y="0"/>
+          <a:chExt cx="0" cy="0"/>
+        </a:xfrm>
+      </p:grpSpPr>
+      <p:sp>
+        <p:nvSpPr>
+          <p:cNvPr id="2" name="Text 0"/>
+          <p:cNvSpPr/>
+          <p:nvPr/>
+        </p:nvSpPr>
+        <p:spPr>
+          <a:xfrm>
+            <a:off x="457200" y="713232"/>
+            <a:ext cx="11368735" cy="274320"/>
+          </a:xfrm>
+          <a:prstGeom prst="rect">
+            <a:avLst/>
+          </a:prstGeom>
+          <a:noFill/>
+          <a:ln/>
+        </p:spPr>
+        <p:txBody>
+          <a:bodyPr wrap="square" lIns="0" tIns="0" rIns="0" bIns="0" rtlCol="0" anchor="ctr"/>
+          <a:lstStyle/>
+          <a:p>
+            <a:pPr algn="r" indent="0" marL="0">
+              <a:buNone/>
+            </a:pPr>
+            <a:r>
+              <a:rPr lang="en-US" sz="1400" b="1" dirty="0">
+                <a:solidFill>
+                  <a:srgbClr val="1C3F6E"/>
+                </a:solidFill>
+                <a:latin typeface="Calibri" pitchFamily="34" charset="0"/>
+                <a:ea typeface="Calibri" pitchFamily="34" charset="-122"/>
+                <a:cs typeface="Calibri" pitchFamily="34" charset="-120"/>
+              </a:rPr>
+              <a:t>LESSON PLAN</a:t>
+            </a:r>
+            <a:endParaRPr lang="en-US" sz="1400" dirty="0"/>
+          </a:p>
+        </p:txBody>
+      </p:sp>
+      <p:pic>
+        <p:nvPicPr>
+          <p:cNvPr id="3" name="Image 0" descr="/home/claude/f4/img/minesec_sheet.png">    </p:cNvPr>
+          <p:cNvPicPr>
+            <a:picLocks noChangeAspect="1"/>
+          </p:cNvPicPr>
+          <p:nvPr/>
+        </p:nvPicPr>
+        <p:blipFill>
+          <a:blip r:embed="rId1"/>
+          <a:stretch>
+            <a:fillRect/>
+          </a:stretch>
+        </p:blipFill>
+        <p:spPr>
+          <a:xfrm>
+            <a:off x="0" y="658368"/>
+            <a:ext cx="2468880" cy="5833872"/>
+          </a:xfrm>
+          <a:prstGeom prst="rect">
+            <a:avLst/>
+          </a:prstGeom>
+        </p:spPr>
+      </p:pic>
+      <p:sp>
+        <p:nvSpPr>
+          <p:cNvPr id="4" name="Text 1"/>
+          <p:cNvSpPr/>
+          <p:nvPr/>
+        </p:nvSpPr>
+        <p:spPr>
+          <a:xfrm>
+            <a:off x="2697480" y="1005840"/>
+            <a:ext cx="9174175" cy="731520"/>
+          </a:xfrm>
+          <a:prstGeom prst="rect">
+            <a:avLst/>
+          </a:prstGeom>
+          <a:noFill/>
+          <a:ln/>
+        </p:spPr>
+        <p:txBody>
+          <a:bodyPr wrap="square" lIns="0" tIns="0" rIns="0" bIns="0" rtlCol="0" anchor="ctr">
+            <a:normAutofit/>
+          </a:bodyPr>
+          <a:lstStyle/>
+          <a:p>
+            <a:pPr algn="ctr" indent="0" marL="0">
+              <a:buNone/>
+            </a:pPr>
+            <a:r>
+              <a:rPr lang="en-US" sz="3600" b="1" dirty="0">
+                <a:solidFill>
+                  <a:srgbClr val="990011"/>
+                </a:solidFill>
+                <a:latin typeface="Times New Roman" pitchFamily="34" charset="0"/>
+                <a:ea typeface="Times New Roman" pitchFamily="34" charset="-122"/>
+                <a:cs typeface="Times New Roman" pitchFamily="34" charset="-120"/>
+              </a:rPr>
+              <a:t>Lesson Plan</a:t>
+            </a:r>
+            <a:endParaRPr lang="en-US" sz="3600" dirty="0"/>
+          </a:p>
+        </p:txBody>
+      </p:sp>
+      <p:sp>
+        <p:nvSpPr>
+          <p:cNvPr id="5" name="Text 2"/>
+          <p:cNvSpPr/>
+          <p:nvPr/>
+        </p:nvSpPr>
+        <p:spPr>
+          <a:xfrm>
+            <a:off x="2697480" y="1783080"/>
+            <a:ext cx="9174175" cy="4663440"/>
+          </a:xfrm>
+          <a:prstGeom prst="rect">
+            <a:avLst/>
+          </a:prstGeom>
+          <a:noFill/>
+          <a:ln/>
+        </p:spPr>
+        <p:txBody>
+          <a:bodyPr wrap="square" lIns="0" tIns="0" rIns="0" bIns="0" rtlCol="0" anchor="t"/>
+          <a:lstStyle/>
+          <a:p>
+            <a:pPr algn="l" marL="342900" indent="-342900">
+              <a:spcAft>
+                <a:spcPts val="800"/>
+              </a:spcAft>
+              <a:buSzPct val="100000"/>
+              <a:buFont typeface="+mj-lt"/>
+              <a:buAutoNum type="arabicPeriod" startAt="1"/>
+            </a:pPr>
+            <a:r>
+              <a:rPr lang="en-US" sz="4000" dirty="0">
+                <a:solidFill>
+                  <a:srgbClr val="111111"/>
+                </a:solidFill>
+                <a:latin typeface="Times New Roman" pitchFamily="34" charset="0"/>
+                <a:ea typeface="Times New Roman" pitchFamily="34" charset="-122"/>
+                <a:cs typeface="Times New Roman" pitchFamily="34" charset="-120"/>
+              </a:rPr>
+              <a:t>Correction of the homework</a:t>
+            </a:r>
+            <a:endParaRPr lang="en-US" sz="4000" dirty="0"/>
+          </a:p>
+          <a:p>
+            <a:pPr algn="l" marL="342900" indent="-342900">
+              <a:spcAft>
+                <a:spcPts val="800"/>
+              </a:spcAft>
+              <a:buSzPct val="100000"/>
+              <a:buFont typeface="+mj-lt"/>
+              <a:buAutoNum type="arabicPeriod" startAt="1"/>
+            </a:pPr>
+            <a:r>
+              <a:rPr lang="en-US" sz="4000" dirty="0">
+                <a:solidFill>
+                  <a:srgbClr val="111111"/>
+                </a:solidFill>
+                <a:latin typeface="Times New Roman" pitchFamily="34" charset="0"/>
+                <a:ea typeface="Times New Roman" pitchFamily="34" charset="-122"/>
+                <a:cs typeface="Times New Roman" pitchFamily="34" charset="-120"/>
+              </a:rPr>
+              <a:t>Objectives and recall</a:t>
+            </a:r>
+            <a:endParaRPr lang="en-US" sz="4000" dirty="0"/>
+          </a:p>
+          <a:p>
+            <a:pPr algn="l" marL="342900" indent="-342900">
+              <a:spcAft>
+                <a:spcPts val="800"/>
+              </a:spcAft>
+              <a:buSzPct val="100000"/>
+              <a:buFont typeface="+mj-lt"/>
+              <a:buAutoNum type="arabicPeriod" startAt="1"/>
+            </a:pPr>
+            <a:r>
+              <a:rPr lang="en-US" sz="4000" dirty="0">
+                <a:solidFill>
+                  <a:srgbClr val="111111"/>
+                </a:solidFill>
+                <a:latin typeface="Times New Roman" pitchFamily="34" charset="0"/>
+                <a:ea typeface="Times New Roman" pitchFamily="34" charset="-122"/>
+                <a:cs typeface="Times New Roman" pitchFamily="34" charset="-120"/>
+              </a:rPr>
+              <a:t>Real-life situation and action to take</a:t>
+            </a:r>
+            <a:endParaRPr lang="en-US" sz="4000" dirty="0"/>
+          </a:p>
+          <a:p>
+            <a:pPr algn="l" marL="342900" indent="-342900">
+              <a:spcAft>
+                <a:spcPts val="800"/>
+              </a:spcAft>
+              <a:buSzPct val="100000"/>
+              <a:buFont typeface="+mj-lt"/>
+              <a:buAutoNum type="arabicPeriod" startAt="1"/>
+            </a:pPr>
+            <a:r>
+              <a:rPr lang="en-US" sz="4000" dirty="0">
+                <a:solidFill>
+                  <a:srgbClr val="111111"/>
+                </a:solidFill>
+                <a:latin typeface="Times New Roman" pitchFamily="34" charset="0"/>
+                <a:ea typeface="Times New Roman" pitchFamily="34" charset="-122"/>
+                <a:cs typeface="Times New Roman" pitchFamily="34" charset="-120"/>
+              </a:rPr>
+              <a:t>Learning activities</a:t>
+            </a:r>
+            <a:endParaRPr lang="en-US" sz="4000" dirty="0"/>
+          </a:p>
+          <a:p>
+            <a:pPr algn="l" marL="342900" indent="-342900">
+              <a:spcAft>
+                <a:spcPts val="800"/>
+              </a:spcAft>
+              <a:buSzPct val="100000"/>
+              <a:buFont typeface="+mj-lt"/>
+              <a:buAutoNum type="arabicPeriod" startAt="1"/>
+            </a:pPr>
+            <a:r>
+              <a:rPr lang="en-US" sz="4000" dirty="0">
+                <a:solidFill>
+                  <a:srgbClr val="111111"/>
+                </a:solidFill>
+                <a:latin typeface="Times New Roman" pitchFamily="34" charset="0"/>
+                <a:ea typeface="Times New Roman" pitchFamily="34" charset="-122"/>
+                <a:cs typeface="Times New Roman" pitchFamily="34" charset="-120"/>
+              </a:rPr>
+              <a:t>Board summary</a:t>
+            </a:r>
+            <a:endParaRPr lang="en-US" sz="4000" dirty="0"/>
+          </a:p>
+          <a:p>
+            <a:pPr algn="l" marL="342900" indent="-342900">
+              <a:spcAft>
+                <a:spcPts val="800"/>
+              </a:spcAft>
+              <a:buSzPct val="100000"/>
+              <a:buFont typeface="+mj-lt"/>
+              <a:buAutoNum type="arabicPeriod" startAt="1"/>
+            </a:pPr>
+            <a:r>
+              <a:rPr lang="en-US" sz="4000" dirty="0">
+                <a:solidFill>
+                  <a:srgbClr val="111111"/>
+                </a:solidFill>
+                <a:latin typeface="Times New Roman" pitchFamily="34" charset="0"/>
+                <a:ea typeface="Times New Roman" pitchFamily="34" charset="-122"/>
+                <a:cs typeface="Times New Roman" pitchFamily="34" charset="-120"/>
+              </a:rPr>
+              <a:t>Evaluation, remediation and homework</a:t>
+            </a:r>
+            <a:endParaRPr lang="en-US" sz="4000" dirty="0"/>
+          </a:p>
+        </p:txBody>
+      </p:sp>
+      <p:sp>
+        <p:nvSpPr>
+          <p:cNvPr id="25" name="Slide Number Placeholder 0"/>
+          <p:cNvSpPr>
+            <a:spLocks noGrp="1"/>
+          </p:cNvSpPr>
+          <p:nvPr>
+            <p:ph type="sldNum" sz="quarter" idx="4294967295"/>
+          </p:nvPr>
+        </p:nvSpPr>
+        <p:spPr>
+          <a:xfrm>
+            <a:off x="27432" y="91440"/>
+            <a:ext cx="585216" cy="475488"/>
+          </a:xfrm>
+          <a:prstGeom prst="rect">
+            <a:avLst/>
+          </a:prstGeom>
+          <a:extLst>
+            <a:ext uri="{C572A759-6A51-4108-AA02-DFA0A04FC94B}">
+              <ma14:wrappingTextBoxFlag xmlns:ma14="http://schemas.microsoft.com/office/mac/drawingml/2011/main" val="0"/>
+            </a:ext>
+          </a:extLst>
+        </p:spPr>
+        <p:txBody>
+          <a:bodyPr/>
+          <a:lstStyle>
+            <a:lvl1pPr>
+              <a:defRPr sz="2000">
+                <a:solidFill>
+                  <a:srgbClr val="FFFFFF"/>
+                </a:solidFill>
+                <a:latin typeface="Calibri"/>
+                <a:ea typeface="Calibri"/>
+                <a:cs typeface="Calibri"/>
+              </a:defRPr>
+            </a:lvl1pPr>
+          </a:lstStyle>
+          <a:p>
+            <a:pPr algn="ctr"/>
+            <a:fld id="{F7021451-1387-4CA6-816F-3879F97B5CBC}" type="slidenum">
+              <a:rPr b="1" lang="en-US"/>
+              <a:t>6</a:t>
+            </a:fld>
+            <a:endParaRPr lang="en-US"/>
+          </a:p>
+        </p:txBody>
+      </p:sp>
+    </p:spTree>
+  </p:cSld>
+  <p:clrMapOvr>
+    <a:masterClrMapping/>
+  </p:clrMapOvr>
+</p:sld>
+</file>
+
+<file path=ppt/slides/slide60.xml><?xml version="1.0" encoding="utf-8"?>
+<p:sld xmlns:a="http://schemas.openxmlformats.org/drawingml/2006/main" xmlns:r="http://schemas.openxmlformats.org/officeDocument/2006/relationships" xmlns:p="http://schemas.openxmlformats.org/presentationml/2006/main">
+  <p:cSld name="Slide 60">
+    <p:spTree>
+      <p:nvGrpSpPr>
+        <p:cNvPr id="1" name=""/>
+        <p:cNvGrpSpPr/>
+        <p:nvPr/>
+      </p:nvGrpSpPr>
+      <p:grpSpPr>
+        <a:xfrm>
+          <a:off x="0" y="0"/>
+          <a:ext cx="0" cy="0"/>
+          <a:chOff x="0" y="0"/>
+          <a:chExt cx="0" cy="0"/>
+        </a:xfrm>
+      </p:grpSpPr>
+      <p:sp>
+        <p:nvSpPr>
+          <p:cNvPr id="2" name="Text 0"/>
+          <p:cNvSpPr/>
+          <p:nvPr/>
+        </p:nvSpPr>
+        <p:spPr>
+          <a:xfrm>
+            <a:off x="457200" y="713232"/>
+            <a:ext cx="11368735" cy="274320"/>
+          </a:xfrm>
+          <a:prstGeom prst="rect">
+            <a:avLst/>
+          </a:prstGeom>
+          <a:noFill/>
+          <a:ln/>
+        </p:spPr>
+        <p:txBody>
+          <a:bodyPr wrap="square" lIns="0" tIns="0" rIns="0" bIns="0" rtlCol="0" anchor="ctr"/>
+          <a:lstStyle/>
+          <a:p>
+            <a:pPr algn="r" indent="0" marL="0">
+              <a:buNone/>
+            </a:pPr>
+            <a:r>
+              <a:rPr lang="en-US" sz="1400" b="1" dirty="0">
+                <a:solidFill>
+                  <a:srgbClr val="1C3F6E"/>
+                </a:solidFill>
+                <a:latin typeface="Calibri" pitchFamily="34" charset="0"/>
+                <a:ea typeface="Calibri" pitchFamily="34" charset="-122"/>
+                <a:cs typeface="Calibri" pitchFamily="34" charset="-120"/>
+              </a:rPr>
+              <a:t>HOMEWORK</a:t>
+            </a:r>
+            <a:endParaRPr lang="en-US" sz="1400" dirty="0"/>
+          </a:p>
+        </p:txBody>
+      </p:sp>
+      <p:pic>
+        <p:nvPicPr>
+          <p:cNvPr id="3" name="Image 0" descr="/home/claude/f4/img/minesec_sheet.png">    </p:cNvPr>
+          <p:cNvPicPr>
+            <a:picLocks noChangeAspect="1"/>
+          </p:cNvPicPr>
+          <p:nvPr/>
+        </p:nvPicPr>
+        <p:blipFill>
+          <a:blip r:embed="rId1"/>
+          <a:stretch>
+            <a:fillRect/>
+          </a:stretch>
+        </p:blipFill>
+        <p:spPr>
+          <a:xfrm>
+            <a:off x="0" y="658368"/>
+            <a:ext cx="5120640" cy="5833872"/>
+          </a:xfrm>
+          <a:prstGeom prst="rect">
+            <a:avLst/>
+          </a:prstGeom>
+        </p:spPr>
+      </p:pic>
+      <p:sp>
+        <p:nvSpPr>
+          <p:cNvPr id="4" name="Text 1"/>
+          <p:cNvSpPr/>
+          <p:nvPr/>
+        </p:nvSpPr>
+        <p:spPr>
+          <a:xfrm>
+            <a:off x="5349240" y="1005840"/>
+            <a:ext cx="6522415" cy="731520"/>
+          </a:xfrm>
+          <a:prstGeom prst="rect">
+            <a:avLst/>
+          </a:prstGeom>
+          <a:noFill/>
+          <a:ln/>
+        </p:spPr>
+        <p:txBody>
+          <a:bodyPr wrap="square" lIns="0" tIns="0" rIns="0" bIns="0" rtlCol="0" anchor="ctr">
+            <a:normAutofit/>
+          </a:bodyPr>
+          <a:lstStyle/>
+          <a:p>
+            <a:pPr algn="ctr" indent="0" marL="0">
+              <a:buNone/>
+            </a:pPr>
+            <a:r>
+              <a:rPr lang="en-US" sz="3600" b="1" dirty="0">
+                <a:solidFill>
+                  <a:srgbClr val="990011"/>
+                </a:solidFill>
+                <a:latin typeface="Times New Roman" pitchFamily="34" charset="0"/>
+                <a:ea typeface="Times New Roman" pitchFamily="34" charset="-122"/>
+                <a:cs typeface="Times New Roman" pitchFamily="34" charset="-120"/>
+              </a:rPr>
+              <a:t>Homework</a:t>
+            </a:r>
+            <a:endParaRPr lang="en-US" sz="3600" dirty="0"/>
+          </a:p>
+        </p:txBody>
+      </p:sp>
+      <p:sp>
+        <p:nvSpPr>
+          <p:cNvPr id="5" name="Text 2"/>
+          <p:cNvSpPr/>
+          <p:nvPr/>
+        </p:nvSpPr>
+        <p:spPr>
+          <a:xfrm>
+            <a:off x="5349240" y="1783080"/>
+            <a:ext cx="6522415" cy="4663440"/>
+          </a:xfrm>
+          <a:prstGeom prst="rect">
+            <a:avLst/>
+          </a:prstGeom>
+          <a:noFill/>
+          <a:ln/>
+        </p:spPr>
+        <p:txBody>
+          <a:bodyPr wrap="square" lIns="0" tIns="0" rIns="0" bIns="0" rtlCol="0" anchor="t"/>
+          <a:lstStyle/>
+          <a:p>
+            <a:pPr algn="l" indent="0" marL="0">
+              <a:spcAft>
+                <a:spcPts val="800"/>
+              </a:spcAft>
+              <a:buNone/>
+            </a:pPr>
+            <a:r>
+              <a:rPr lang="en-US" sz="4000" dirty="0">
+                <a:solidFill>
+                  <a:srgbClr val="111111"/>
+                </a:solidFill>
+                <a:latin typeface="Times New Roman" pitchFamily="34" charset="0"/>
+                <a:ea typeface="Times New Roman" pitchFamily="34" charset="-122"/>
+                <a:cs typeface="Times New Roman" pitchFamily="34" charset="-120"/>
+              </a:rPr>
+              <a:t>Define a micro-climate.</a:t>
+            </a:r>
+            <a:endParaRPr lang="en-US" sz="4000" dirty="0"/>
+          </a:p>
+        </p:txBody>
+      </p:sp>
+      <p:sp>
+        <p:nvSpPr>
+          <p:cNvPr id="25" name="Slide Number Placeholder 0"/>
+          <p:cNvSpPr>
+            <a:spLocks noGrp="1"/>
+          </p:cNvSpPr>
+          <p:nvPr>
+            <p:ph type="sldNum" sz="quarter" idx="4294967295"/>
+          </p:nvPr>
+        </p:nvSpPr>
+        <p:spPr>
+          <a:xfrm>
+            <a:off x="27432" y="91440"/>
+            <a:ext cx="585216" cy="475488"/>
+          </a:xfrm>
+          <a:prstGeom prst="rect">
+            <a:avLst/>
+          </a:prstGeom>
+          <a:extLst>
+            <a:ext uri="{C572A759-6A51-4108-AA02-DFA0A04FC94B}">
+              <ma14:wrappingTextBoxFlag xmlns:ma14="http://schemas.microsoft.com/office/mac/drawingml/2011/main" val="0"/>
+            </a:ext>
+          </a:extLst>
+        </p:spPr>
+        <p:txBody>
+          <a:bodyPr/>
+          <a:lstStyle>
+            <a:lvl1pPr>
+              <a:defRPr sz="2000">
+                <a:solidFill>
+                  <a:srgbClr val="FFFFFF"/>
+                </a:solidFill>
+                <a:latin typeface="Calibri"/>
+                <a:ea typeface="Calibri"/>
+                <a:cs typeface="Calibri"/>
+              </a:defRPr>
+            </a:lvl1pPr>
+          </a:lstStyle>
+          <a:p>
+            <a:pPr algn="ctr"/>
+            <a:fld id="{F7021451-1387-4CA6-816F-3879F97B5CBC}" type="slidenum">
+              <a:rPr b="1" lang="en-US"/>
+              <a:t>60</a:t>
+            </a:fld>
+            <a:endParaRPr lang="en-US"/>
+          </a:p>
+        </p:txBody>
+      </p:sp>
+    </p:spTree>
+  </p:cSld>
+  <p:clrMapOvr>
+    <a:masterClrMapping/>
+  </p:clrMapOvr>
+</p:sld>
+</file>
+
+<file path=ppt/slides/slide61.xml><?xml version="1.0" encoding="utf-8"?>
+<p:sld xmlns:a="http://schemas.openxmlformats.org/drawingml/2006/main" xmlns:r="http://schemas.openxmlformats.org/officeDocument/2006/relationships" xmlns:p="http://schemas.openxmlformats.org/presentationml/2006/main">
+  <p:cSld name="Slide 61">
+    <p:spTree>
+      <p:nvGrpSpPr>
+        <p:cNvPr id="1" name=""/>
+        <p:cNvGrpSpPr/>
+        <p:nvPr/>
+      </p:nvGrpSpPr>
+      <p:grpSpPr>
+        <a:xfrm>
+          <a:off x="0" y="0"/>
+          <a:ext cx="0" cy="0"/>
+          <a:chOff x="0" y="0"/>
+          <a:chExt cx="0" cy="0"/>
+        </a:xfrm>
+      </p:grpSpPr>
+      <p:sp>
+        <p:nvSpPr>
+          <p:cNvPr id="2" name="Text 0"/>
+          <p:cNvSpPr/>
+          <p:nvPr/>
+        </p:nvSpPr>
+        <p:spPr>
+          <a:xfrm>
+            <a:off x="457200" y="713232"/>
+            <a:ext cx="11368735" cy="274320"/>
+          </a:xfrm>
+          <a:prstGeom prst="rect">
+            <a:avLst/>
+          </a:prstGeom>
+          <a:noFill/>
+          <a:ln/>
+        </p:spPr>
+        <p:txBody>
+          <a:bodyPr wrap="square" lIns="0" tIns="0" rIns="0" bIns="0" rtlCol="0" anchor="ctr"/>
+          <a:lstStyle/>
+          <a:p>
+            <a:pPr algn="r" indent="0" marL="0">
+              <a:buNone/>
+            </a:pPr>
+            <a:r>
+              <a:rPr lang="en-US" sz="1400" b="1" dirty="0">
+                <a:solidFill>
+                  <a:srgbClr val="1C3F6E"/>
+                </a:solidFill>
+                <a:latin typeface="Calibri" pitchFamily="34" charset="0"/>
+                <a:ea typeface="Calibri" pitchFamily="34" charset="-122"/>
+                <a:cs typeface="Calibri" pitchFamily="34" charset="-120"/>
+              </a:rPr>
+              <a:t>NEXT LESSON</a:t>
+            </a:r>
+            <a:endParaRPr lang="en-US" sz="1400" dirty="0"/>
+          </a:p>
+        </p:txBody>
+      </p:sp>
+      <p:pic>
+        <p:nvPicPr>
+          <p:cNvPr id="3" name="Image 0" descr="/home/claude/f4/img/minesec_sheet.png">    </p:cNvPr>
+          <p:cNvPicPr>
+            <a:picLocks noChangeAspect="1"/>
+          </p:cNvPicPr>
+          <p:nvPr/>
+        </p:nvPicPr>
+        <p:blipFill>
+          <a:blip r:embed="rId1"/>
+          <a:stretch>
+            <a:fillRect/>
+          </a:stretch>
+        </p:blipFill>
+        <p:spPr>
+          <a:xfrm>
+            <a:off x="0" y="658368"/>
+            <a:ext cx="5120640" cy="5833872"/>
+          </a:xfrm>
+          <a:prstGeom prst="rect">
+            <a:avLst/>
+          </a:prstGeom>
+        </p:spPr>
+      </p:pic>
+      <p:sp>
+        <p:nvSpPr>
+          <p:cNvPr id="4" name="Text 1"/>
+          <p:cNvSpPr/>
+          <p:nvPr/>
+        </p:nvSpPr>
+        <p:spPr>
+          <a:xfrm>
+            <a:off x="5349240" y="1005840"/>
+            <a:ext cx="6522415" cy="731520"/>
+          </a:xfrm>
+          <a:prstGeom prst="rect">
+            <a:avLst/>
+          </a:prstGeom>
+          <a:noFill/>
+          <a:ln/>
+        </p:spPr>
+        <p:txBody>
+          <a:bodyPr wrap="square" lIns="0" tIns="0" rIns="0" bIns="0" rtlCol="0" anchor="ctr">
+            <a:normAutofit/>
+          </a:bodyPr>
+          <a:lstStyle/>
+          <a:p>
+            <a:pPr algn="ctr" indent="0" marL="0">
+              <a:buNone/>
+            </a:pPr>
+            <a:r>
+              <a:rPr lang="en-US" sz="3600" b="1" dirty="0">
+                <a:solidFill>
+                  <a:srgbClr val="990011"/>
+                </a:solidFill>
+                <a:latin typeface="Times New Roman" pitchFamily="34" charset="0"/>
+                <a:ea typeface="Times New Roman" pitchFamily="34" charset="-122"/>
+                <a:cs typeface="Times New Roman" pitchFamily="34" charset="-120"/>
+              </a:rPr>
+              <a:t>Next Lesson</a:t>
+            </a:r>
+            <a:endParaRPr lang="en-US" sz="3600" dirty="0"/>
+          </a:p>
+        </p:txBody>
+      </p:sp>
+      <p:sp>
+        <p:nvSpPr>
+          <p:cNvPr id="5" name="Text 2"/>
+          <p:cNvSpPr/>
+          <p:nvPr/>
+        </p:nvSpPr>
+        <p:spPr>
+          <a:xfrm>
+            <a:off x="5349240" y="1783080"/>
+            <a:ext cx="6522415" cy="4663440"/>
+          </a:xfrm>
+          <a:prstGeom prst="rect">
+            <a:avLst/>
+          </a:prstGeom>
+          <a:noFill/>
+          <a:ln/>
+        </p:spPr>
+        <p:txBody>
+          <a:bodyPr wrap="square" lIns="0" tIns="0" rIns="0" bIns="0" rtlCol="0" anchor="ctr"/>
+          <a:lstStyle/>
+          <a:p>
+            <a:pPr algn="ctr" indent="0" marL="0">
+              <a:spcAft>
+                <a:spcPts val="800"/>
+              </a:spcAft>
+              <a:buNone/>
+            </a:pPr>
+            <a:r>
+              <a:rPr lang="en-US" sz="4000" b="1" dirty="0">
+                <a:solidFill>
+                  <a:srgbClr val="111111"/>
+                </a:solidFill>
+                <a:latin typeface="Times New Roman" pitchFamily="34" charset="0"/>
+                <a:ea typeface="Times New Roman" pitchFamily="34" charset="-122"/>
+                <a:cs typeface="Times New Roman" pitchFamily="34" charset="-120"/>
+              </a:rPr>
+              <a:t>Our next lesson will be on:</a:t>
+            </a:r>
+            <a:endParaRPr lang="en-US" sz="4000" dirty="0"/>
+          </a:p>
+          <a:p>
+            <a:pPr algn="ctr" indent="0" marL="0">
+              <a:spcAft>
+                <a:spcPts val="800"/>
+              </a:spcAft>
+              <a:buNone/>
+            </a:pPr>
+            <a:r>
+              <a:rPr lang="en-US" sz="4000" b="1" dirty="0">
+                <a:solidFill>
+                  <a:srgbClr val="990011"/>
+                </a:solidFill>
+                <a:latin typeface="Times New Roman" pitchFamily="34" charset="0"/>
+                <a:ea typeface="Times New Roman" pitchFamily="34" charset="-122"/>
+                <a:cs typeface="Times New Roman" pitchFamily="34" charset="-120"/>
+              </a:rPr>
+              <a:t>Lesson 20: Micro-climates</a:t>
+            </a:r>
+            <a:endParaRPr lang="en-US" sz="4000" dirty="0"/>
+          </a:p>
+        </p:txBody>
+      </p:sp>
+      <p:sp>
+        <p:nvSpPr>
+          <p:cNvPr id="25" name="Slide Number Placeholder 0"/>
+          <p:cNvSpPr>
+            <a:spLocks noGrp="1"/>
+          </p:cNvSpPr>
+          <p:nvPr>
+            <p:ph type="sldNum" sz="quarter" idx="4294967295"/>
+          </p:nvPr>
+        </p:nvSpPr>
+        <p:spPr>
+          <a:xfrm>
+            <a:off x="27432" y="91440"/>
+            <a:ext cx="585216" cy="475488"/>
+          </a:xfrm>
+          <a:prstGeom prst="rect">
+            <a:avLst/>
+          </a:prstGeom>
+          <a:extLst>
+            <a:ext uri="{C572A759-6A51-4108-AA02-DFA0A04FC94B}">
+              <ma14:wrappingTextBoxFlag xmlns:ma14="http://schemas.microsoft.com/office/mac/drawingml/2011/main" val="0"/>
+            </a:ext>
+          </a:extLst>
+        </p:spPr>
+        <p:txBody>
+          <a:bodyPr/>
+          <a:lstStyle>
+            <a:lvl1pPr>
+              <a:defRPr sz="2000">
+                <a:solidFill>
+                  <a:srgbClr val="FFFFFF"/>
+                </a:solidFill>
+                <a:latin typeface="Calibri"/>
+                <a:ea typeface="Calibri"/>
+                <a:cs typeface="Calibri"/>
+              </a:defRPr>
+            </a:lvl1pPr>
+          </a:lstStyle>
+          <a:p>
+            <a:pPr algn="ctr"/>
+            <a:fld id="{F7021451-1387-4CA6-816F-3879F97B5CBC}" type="slidenum">
+              <a:rPr b="1" lang="en-US"/>
+              <a:t>61</a:t>
+            </a:fld>
+            <a:endParaRPr lang="en-US"/>
+          </a:p>
+        </p:txBody>
+      </p:sp>
+    </p:spTree>
+  </p:cSld>
+  <p:clrMapOvr>
+    <a:masterClrMapping/>
+  </p:clrMapOvr>
+</p:sld>
+</file>
+
+<file path=ppt/slides/slide62.xml><?xml version="1.0" encoding="utf-8"?>
+<p:sld xmlns:a="http://schemas.openxmlformats.org/drawingml/2006/main" xmlns:r="http://schemas.openxmlformats.org/officeDocument/2006/relationships" xmlns:p="http://schemas.openxmlformats.org/presentationml/2006/main">
+  <p:cSld name="Slide 62">
+    <p:spTree>
+      <p:nvGrpSpPr>
+        <p:cNvPr id="1" name=""/>
+        <p:cNvGrpSpPr/>
+        <p:nvPr/>
+      </p:nvGrpSpPr>
+      <p:grpSpPr>
+        <a:xfrm>
+          <a:off x="0" y="0"/>
+          <a:ext cx="0" cy="0"/>
+          <a:chOff x="0" y="0"/>
+          <a:chExt cx="0" cy="0"/>
+        </a:xfrm>
+      </p:grpSpPr>
+      <p:sp>
+        <p:nvSpPr>
+          <p:cNvPr id="2" name="Text 0"/>
+          <p:cNvSpPr/>
+          <p:nvPr/>
+        </p:nvSpPr>
+        <p:spPr>
+          <a:xfrm>
+            <a:off x="457200" y="713232"/>
+            <a:ext cx="11368735" cy="274320"/>
+          </a:xfrm>
+          <a:prstGeom prst="rect">
+            <a:avLst/>
+          </a:prstGeom>
+          <a:noFill/>
+          <a:ln/>
+        </p:spPr>
+        <p:txBody>
+          <a:bodyPr wrap="square" lIns="0" tIns="0" rIns="0" bIns="0" rtlCol="0" anchor="ctr"/>
+          <a:lstStyle/>
+          <a:p>
+            <a:pPr algn="r" indent="0" marL="0">
+              <a:buNone/>
+            </a:pPr>
+            <a:r>
+              <a:rPr lang="en-US" sz="1400" b="1" dirty="0">
+                <a:solidFill>
+                  <a:srgbClr val="1C3F6E"/>
+                </a:solidFill>
+                <a:latin typeface="Calibri" pitchFamily="34" charset="0"/>
+                <a:ea typeface="Calibri" pitchFamily="34" charset="-122"/>
+                <a:cs typeface="Calibri" pitchFamily="34" charset="-120"/>
+              </a:rPr>
               <a:t>BILINGUAL GAME</a:t>
             </a:r>
             <a:endParaRPr lang="en-US" sz="1400" dirty="0"/>
@@ -20883,7 +22327,7 @@
       </p:sp>
       <p:graphicFrame>
         <p:nvGraphicFramePr>
-          <p:cNvPr id="59" name="Table 0"/>
+          <p:cNvPr id="63" name="Table 0"/>
           <p:cNvGraphicFramePr>
             <a:graphicFrameLocks noGrp="1"/>
           </p:cNvGraphicFramePr>
@@ -21919,7 +23363,7 @@
             <a:pPr algn="ctr"/>
             <a:fld id="{F7021451-1387-4CA6-816F-3879F97B5CBC}" type="slidenum">
               <a:rPr b="1" lang="en-US"/>
-              <a:t>58</a:t>
+              <a:t>62</a:t>
             </a:fld>
             <a:endParaRPr lang="en-US"/>
           </a:p>
@@ -21933,9 +23377,9 @@
 </p:sld>
 </file>
 
-<file path=ppt/slides/slide59.xml><?xml version="1.0" encoding="utf-8"?>
+<file path=ppt/slides/slide63.xml><?xml version="1.0" encoding="utf-8"?>
 <p:sld xmlns:a="http://schemas.openxmlformats.org/drawingml/2006/main" xmlns:r="http://schemas.openxmlformats.org/officeDocument/2006/relationships" xmlns:p="http://schemas.openxmlformats.org/presentationml/2006/main">
-  <p:cSld name="Slide 59">
+  <p:cSld name="Slide 63">
     <p:spTree>
       <p:nvGrpSpPr>
         <p:cNvPr id="1" name=""/>
@@ -22030,7 +23474,7 @@
       </p:sp>
       <p:graphicFrame>
         <p:nvGraphicFramePr>
-          <p:cNvPr id="60" name="Table 0"/>
+          <p:cNvPr id="64" name="Table 0"/>
           <p:cNvGraphicFramePr>
             <a:graphicFrameLocks noGrp="1"/>
           </p:cNvGraphicFramePr>
@@ -22652,7 +24096,7 @@
             <a:pPr algn="ctr"/>
             <a:fld id="{F7021451-1387-4CA6-816F-3879F97B5CBC}" type="slidenum">
               <a:rPr b="1" lang="en-US"/>
-              <a:t>59</a:t>
+              <a:t>63</a:t>
             </a:fld>
             <a:endParaRPr lang="en-US"/>
           </a:p>
@@ -22666,9 +24110,9 @@
 </p:sld>
 </file>
 
-<file path=ppt/slides/slide6.xml><?xml version="1.0" encoding="utf-8"?>
+<file path=ppt/slides/slide64.xml><?xml version="1.0" encoding="utf-8"?>
 <p:sld xmlns:a="http://schemas.openxmlformats.org/drawingml/2006/main" xmlns:r="http://schemas.openxmlformats.org/officeDocument/2006/relationships" xmlns:p="http://schemas.openxmlformats.org/presentationml/2006/main">
-  <p:cSld name="Slide 6">
+  <p:cSld name="Slide 64">
     <p:spTree>
       <p:nvGrpSpPr>
         <p:cNvPr id="1" name=""/>
@@ -22716,337 +24160,6 @@
                 <a:ea typeface="Calibri" pitchFamily="34" charset="-122"/>
                 <a:cs typeface="Calibri" pitchFamily="34" charset="-120"/>
               </a:rPr>
-              <a:t>LESSON PLAN</a:t>
-            </a:r>
-            <a:endParaRPr lang="en-US" sz="1400" dirty="0"/>
-          </a:p>
-        </p:txBody>
-      </p:sp>
-      <p:pic>
-        <p:nvPicPr>
-          <p:cNvPr id="3" name="Image 0" descr="/home/claude/f4/img/minesec_sheet.png">    </p:cNvPr>
-          <p:cNvPicPr>
-            <a:picLocks noChangeAspect="1"/>
-          </p:cNvPicPr>
-          <p:nvPr/>
-        </p:nvPicPr>
-        <p:blipFill>
-          <a:blip r:embed="rId1"/>
-          <a:stretch>
-            <a:fillRect/>
-          </a:stretch>
-        </p:blipFill>
-        <p:spPr>
-          <a:xfrm>
-            <a:off x="0" y="658368"/>
-            <a:ext cx="2468880" cy="5833872"/>
-          </a:xfrm>
-          <a:prstGeom prst="rect">
-            <a:avLst/>
-          </a:prstGeom>
-        </p:spPr>
-      </p:pic>
-      <p:sp>
-        <p:nvSpPr>
-          <p:cNvPr id="4" name="Text 1"/>
-          <p:cNvSpPr/>
-          <p:nvPr/>
-        </p:nvSpPr>
-        <p:spPr>
-          <a:xfrm>
-            <a:off x="2697480" y="1005840"/>
-            <a:ext cx="9174175" cy="731520"/>
-          </a:xfrm>
-          <a:prstGeom prst="rect">
-            <a:avLst/>
-          </a:prstGeom>
-          <a:noFill/>
-          <a:ln/>
-        </p:spPr>
-        <p:txBody>
-          <a:bodyPr wrap="square" lIns="0" tIns="0" rIns="0" bIns="0" rtlCol="0" anchor="ctr">
-            <a:normAutofit/>
-          </a:bodyPr>
-          <a:lstStyle/>
-          <a:p>
-            <a:pPr algn="ctr" indent="0" marL="0">
-              <a:buNone/>
-            </a:pPr>
-            <a:r>
-              <a:rPr lang="en-US" sz="3600" b="1" dirty="0">
-                <a:solidFill>
-                  <a:srgbClr val="990011"/>
-                </a:solidFill>
-                <a:latin typeface="Times New Roman" pitchFamily="34" charset="0"/>
-                <a:ea typeface="Times New Roman" pitchFamily="34" charset="-122"/>
-                <a:cs typeface="Times New Roman" pitchFamily="34" charset="-120"/>
-              </a:rPr>
-              <a:t>Lesson Plan</a:t>
-            </a:r>
-            <a:endParaRPr lang="en-US" sz="3600" dirty="0"/>
-          </a:p>
-        </p:txBody>
-      </p:sp>
-      <p:sp>
-        <p:nvSpPr>
-          <p:cNvPr id="5" name="Text 2"/>
-          <p:cNvSpPr/>
-          <p:nvPr/>
-        </p:nvSpPr>
-        <p:spPr>
-          <a:xfrm>
-            <a:off x="2697480" y="1783080"/>
-            <a:ext cx="9174175" cy="4663440"/>
-          </a:xfrm>
-          <a:prstGeom prst="rect">
-            <a:avLst/>
-          </a:prstGeom>
-          <a:noFill/>
-          <a:ln/>
-        </p:spPr>
-        <p:txBody>
-          <a:bodyPr wrap="square" lIns="0" tIns="0" rIns="0" bIns="0" rtlCol="0" anchor="t"/>
-          <a:lstStyle/>
-          <a:p>
-            <a:pPr algn="l" marL="342900" indent="-342900">
-              <a:spcAft>
-                <a:spcPts val="800"/>
-              </a:spcAft>
-              <a:buSzPct val="100000"/>
-              <a:buFont typeface="+mj-lt"/>
-              <a:buAutoNum type="arabicPeriod" startAt="1"/>
-            </a:pPr>
-            <a:r>
-              <a:rPr lang="en-US" sz="4000" dirty="0">
-                <a:solidFill>
-                  <a:srgbClr val="111111"/>
-                </a:solidFill>
-                <a:latin typeface="Times New Roman" pitchFamily="34" charset="0"/>
-                <a:ea typeface="Times New Roman" pitchFamily="34" charset="-122"/>
-                <a:cs typeface="Times New Roman" pitchFamily="34" charset="-120"/>
-              </a:rPr>
-              <a:t>Correction of the homework</a:t>
-            </a:r>
-            <a:endParaRPr lang="en-US" sz="4000" dirty="0"/>
-          </a:p>
-          <a:p>
-            <a:pPr algn="l" marL="342900" indent="-342900">
-              <a:spcAft>
-                <a:spcPts val="800"/>
-              </a:spcAft>
-              <a:buSzPct val="100000"/>
-              <a:buFont typeface="+mj-lt"/>
-              <a:buAutoNum type="arabicPeriod" startAt="1"/>
-            </a:pPr>
-            <a:r>
-              <a:rPr lang="en-US" sz="4000" dirty="0">
-                <a:solidFill>
-                  <a:srgbClr val="111111"/>
-                </a:solidFill>
-                <a:latin typeface="Times New Roman" pitchFamily="34" charset="0"/>
-                <a:ea typeface="Times New Roman" pitchFamily="34" charset="-122"/>
-                <a:cs typeface="Times New Roman" pitchFamily="34" charset="-120"/>
-              </a:rPr>
-              <a:t>Objectives and recall</a:t>
-            </a:r>
-            <a:endParaRPr lang="en-US" sz="4000" dirty="0"/>
-          </a:p>
-          <a:p>
-            <a:pPr algn="l" marL="342900" indent="-342900">
-              <a:spcAft>
-                <a:spcPts val="800"/>
-              </a:spcAft>
-              <a:buSzPct val="100000"/>
-              <a:buFont typeface="+mj-lt"/>
-              <a:buAutoNum type="arabicPeriod" startAt="1"/>
-            </a:pPr>
-            <a:r>
-              <a:rPr lang="en-US" sz="4000" dirty="0">
-                <a:solidFill>
-                  <a:srgbClr val="111111"/>
-                </a:solidFill>
-                <a:latin typeface="Times New Roman" pitchFamily="34" charset="0"/>
-                <a:ea typeface="Times New Roman" pitchFamily="34" charset="-122"/>
-                <a:cs typeface="Times New Roman" pitchFamily="34" charset="-120"/>
-              </a:rPr>
-              <a:t>Real-life situation and action to take</a:t>
-            </a:r>
-            <a:endParaRPr lang="en-US" sz="4000" dirty="0"/>
-          </a:p>
-          <a:p>
-            <a:pPr algn="l" marL="342900" indent="-342900">
-              <a:spcAft>
-                <a:spcPts val="800"/>
-              </a:spcAft>
-              <a:buSzPct val="100000"/>
-              <a:buFont typeface="+mj-lt"/>
-              <a:buAutoNum type="arabicPeriod" startAt="1"/>
-            </a:pPr>
-            <a:r>
-              <a:rPr lang="en-US" sz="4000" dirty="0">
-                <a:solidFill>
-                  <a:srgbClr val="111111"/>
-                </a:solidFill>
-                <a:latin typeface="Times New Roman" pitchFamily="34" charset="0"/>
-                <a:ea typeface="Times New Roman" pitchFamily="34" charset="-122"/>
-                <a:cs typeface="Times New Roman" pitchFamily="34" charset="-120"/>
-              </a:rPr>
-              <a:t>Learning activities</a:t>
-            </a:r>
-            <a:endParaRPr lang="en-US" sz="4000" dirty="0"/>
-          </a:p>
-          <a:p>
-            <a:pPr algn="l" marL="342900" indent="-342900">
-              <a:spcAft>
-                <a:spcPts val="800"/>
-              </a:spcAft>
-              <a:buSzPct val="100000"/>
-              <a:buFont typeface="+mj-lt"/>
-              <a:buAutoNum type="arabicPeriod" startAt="1"/>
-            </a:pPr>
-            <a:r>
-              <a:rPr lang="en-US" sz="4000" dirty="0">
-                <a:solidFill>
-                  <a:srgbClr val="111111"/>
-                </a:solidFill>
-                <a:latin typeface="Times New Roman" pitchFamily="34" charset="0"/>
-                <a:ea typeface="Times New Roman" pitchFamily="34" charset="-122"/>
-                <a:cs typeface="Times New Roman" pitchFamily="34" charset="-120"/>
-              </a:rPr>
-              <a:t>Board summary</a:t>
-            </a:r>
-            <a:endParaRPr lang="en-US" sz="4000" dirty="0"/>
-          </a:p>
-          <a:p>
-            <a:pPr algn="l" marL="342900" indent="-342900">
-              <a:spcAft>
-                <a:spcPts val="800"/>
-              </a:spcAft>
-              <a:buSzPct val="100000"/>
-              <a:buFont typeface="+mj-lt"/>
-              <a:buAutoNum type="arabicPeriod" startAt="1"/>
-            </a:pPr>
-            <a:r>
-              <a:rPr lang="en-US" sz="4000" dirty="0">
-                <a:solidFill>
-                  <a:srgbClr val="111111"/>
-                </a:solidFill>
-                <a:latin typeface="Times New Roman" pitchFamily="34" charset="0"/>
-                <a:ea typeface="Times New Roman" pitchFamily="34" charset="-122"/>
-                <a:cs typeface="Times New Roman" pitchFamily="34" charset="-120"/>
-              </a:rPr>
-              <a:t>Evaluation, remediation and homework</a:t>
-            </a:r>
-            <a:endParaRPr lang="en-US" sz="4000" dirty="0"/>
-          </a:p>
-        </p:txBody>
-      </p:sp>
-      <p:sp>
-        <p:nvSpPr>
-          <p:cNvPr id="25" name="Slide Number Placeholder 0"/>
-          <p:cNvSpPr>
-            <a:spLocks noGrp="1"/>
-          </p:cNvSpPr>
-          <p:nvPr>
-            <p:ph type="sldNum" sz="quarter" idx="4294967295"/>
-          </p:nvPr>
-        </p:nvSpPr>
-        <p:spPr>
-          <a:xfrm>
-            <a:off x="27432" y="91440"/>
-            <a:ext cx="585216" cy="475488"/>
-          </a:xfrm>
-          <a:prstGeom prst="rect">
-            <a:avLst/>
-          </a:prstGeom>
-          <a:extLst>
-            <a:ext uri="{C572A759-6A51-4108-AA02-DFA0A04FC94B}">
-              <ma14:wrappingTextBoxFlag xmlns:ma14="http://schemas.microsoft.com/office/mac/drawingml/2011/main" val="0"/>
-            </a:ext>
-          </a:extLst>
-        </p:spPr>
-        <p:txBody>
-          <a:bodyPr/>
-          <a:lstStyle>
-            <a:lvl1pPr>
-              <a:defRPr sz="2000">
-                <a:solidFill>
-                  <a:srgbClr val="FFFFFF"/>
-                </a:solidFill>
-                <a:latin typeface="Calibri"/>
-                <a:ea typeface="Calibri"/>
-                <a:cs typeface="Calibri"/>
-              </a:defRPr>
-            </a:lvl1pPr>
-          </a:lstStyle>
-          <a:p>
-            <a:pPr algn="ctr"/>
-            <a:fld id="{F7021451-1387-4CA6-816F-3879F97B5CBC}" type="slidenum">
-              <a:rPr b="1" lang="en-US"/>
-              <a:t>6</a:t>
-            </a:fld>
-            <a:endParaRPr lang="en-US"/>
-          </a:p>
-        </p:txBody>
-      </p:sp>
-    </p:spTree>
-  </p:cSld>
-  <p:clrMapOvr>
-    <a:masterClrMapping/>
-  </p:clrMapOvr>
-</p:sld>
-</file>
-
-<file path=ppt/slides/slide60.xml><?xml version="1.0" encoding="utf-8"?>
-<p:sld xmlns:a="http://schemas.openxmlformats.org/drawingml/2006/main" xmlns:r="http://schemas.openxmlformats.org/officeDocument/2006/relationships" xmlns:p="http://schemas.openxmlformats.org/presentationml/2006/main">
-  <p:cSld name="Slide 60">
-    <p:spTree>
-      <p:nvGrpSpPr>
-        <p:cNvPr id="1" name=""/>
-        <p:cNvGrpSpPr/>
-        <p:nvPr/>
-      </p:nvGrpSpPr>
-      <p:grpSpPr>
-        <a:xfrm>
-          <a:off x="0" y="0"/>
-          <a:ext cx="0" cy="0"/>
-          <a:chOff x="0" y="0"/>
-          <a:chExt cx="0" cy="0"/>
-        </a:xfrm>
-      </p:grpSpPr>
-      <p:sp>
-        <p:nvSpPr>
-          <p:cNvPr id="2" name="Text 0"/>
-          <p:cNvSpPr/>
-          <p:nvPr/>
-        </p:nvSpPr>
-        <p:spPr>
-          <a:xfrm>
-            <a:off x="457200" y="713232"/>
-            <a:ext cx="11368735" cy="274320"/>
-          </a:xfrm>
-          <a:prstGeom prst="rect">
-            <a:avLst/>
-          </a:prstGeom>
-          <a:noFill/>
-          <a:ln/>
-        </p:spPr>
-        <p:txBody>
-          <a:bodyPr wrap="square" lIns="0" tIns="0" rIns="0" bIns="0" rtlCol="0" anchor="ctr"/>
-          <a:lstStyle/>
-          <a:p>
-            <a:pPr algn="r" indent="0" marL="0">
-              <a:buNone/>
-            </a:pPr>
-            <a:r>
-              <a:rPr lang="en-US" sz="1400" b="1" dirty="0">
-                <a:solidFill>
-                  <a:srgbClr val="1C3F6E"/>
-                </a:solidFill>
-                <a:latin typeface="Calibri" pitchFamily="34" charset="0"/>
-                <a:ea typeface="Calibri" pitchFamily="34" charset="-122"/>
-                <a:cs typeface="Calibri" pitchFamily="34" charset="-120"/>
-              </a:rPr>
               <a:t>LOGBOOK</a:t>
             </a:r>
             <a:endParaRPr lang="en-US" sz="1400" dirty="0"/>
@@ -23094,7 +24207,7 @@
       </p:sp>
       <p:graphicFrame>
         <p:nvGraphicFramePr>
-          <p:cNvPr id="61" name="Table 0"/>
+          <p:cNvPr id="65" name="Table 0"/>
           <p:cNvGraphicFramePr>
             <a:graphicFrameLocks noGrp="1"/>
           </p:cNvGraphicFramePr>
@@ -23854,7 +24967,7 @@
             <a:pPr algn="ctr"/>
             <a:fld id="{F7021451-1387-4CA6-816F-3879F97B5CBC}" type="slidenum">
               <a:rPr b="1" lang="en-US"/>
-              <a:t>60</a:t>
+              <a:t>64</a:t>
             </a:fld>
             <a:endParaRPr lang="en-US"/>
           </a:p>
@@ -23868,9 +24981,9 @@
 </p:sld>
 </file>
 
-<file path=ppt/slides/slide61.xml><?xml version="1.0" encoding="utf-8"?>
+<file path=ppt/slides/slide65.xml><?xml version="1.0" encoding="utf-8"?>
 <p:sld xmlns:a="http://schemas.openxmlformats.org/drawingml/2006/main" xmlns:r="http://schemas.openxmlformats.org/officeDocument/2006/relationships" xmlns:p="http://schemas.openxmlformats.org/presentationml/2006/main">
-  <p:cSld name="Slide 61">
+  <p:cSld name="Slide 65">
     <p:spTree>
       <p:nvGrpSpPr>
         <p:cNvPr id="1" name=""/>
@@ -24179,7 +25292,7 @@
             <a:pPr algn="ctr"/>
             <a:fld id="{F7021451-1387-4CA6-816F-3879F97B5CBC}" type="slidenum">
               <a:rPr b="1" lang="en-US"/>
-              <a:t>61</a:t>
+              <a:t>65</a:t>
             </a:fld>
             <a:endParaRPr lang="en-US"/>
           </a:p>
@@ -24193,9 +25306,9 @@
 </p:sld>
 </file>
 
-<file path=ppt/slides/slide62.xml><?xml version="1.0" encoding="utf-8"?>
+<file path=ppt/slides/slide66.xml><?xml version="1.0" encoding="utf-8"?>
 <p:sld xmlns:a="http://schemas.openxmlformats.org/drawingml/2006/main" xmlns:r="http://schemas.openxmlformats.org/officeDocument/2006/relationships" xmlns:p="http://schemas.openxmlformats.org/presentationml/2006/main">
-  <p:cSld name="Slide 62">
+  <p:cSld name="Slide 66">
     <p:spTree>
       <p:nvGrpSpPr>
         <p:cNvPr id="1" name=""/>
@@ -24483,7 +25596,7 @@
             <a:pPr algn="ctr"/>
             <a:fld id="{F7021451-1387-4CA6-816F-3879F97B5CBC}" type="slidenum">
               <a:rPr b="1" lang="en-US"/>
-              <a:t>62</a:t>
+              <a:t>66</a:t>
             </a:fld>
             <a:endParaRPr lang="en-US"/>
           </a:p>
